--- a/docs/Project_Presentation.pptx
+++ b/docs/Project_Presentation.pptx
@@ -3100,6 +3100,14 @@
 <file path=ppt/slides/slide1.xml><?xml version="1.0" encoding="utf-8"?>
 <p:sld xmlns:a="http://schemas.openxmlformats.org/drawingml/2006/main" xmlns:p="http://schemas.openxmlformats.org/presentationml/2006/main" xmlns:r="http://schemas.openxmlformats.org/officeDocument/2006/relationships">
   <p:cSld>
+    <p:bg>
+      <p:bgPr>
+        <a:solidFill>
+          <a:srgbClr val="1E2A38"/>
+        </a:solidFill>
+        <a:effectLst/>
+      </p:bgPr>
+    </p:bg>
     <p:spTree>
       <p:nvGrpSpPr>
         <p:cNvPr id="1" name=""/>
@@ -3115,14 +3123,14 @@
         </p:nvSpPr>
         <p:spPr>
           <a:xfrm>
-            <a:off x="0" y="2103120"/>
-            <a:ext cx="12191695" cy="1280160"/>
+            <a:off x="0" y="0"/>
+            <a:ext cx="320040" cy="6858000"/>
           </a:xfrm>
           <a:prstGeom prst="rect">
             <a:avLst/>
           </a:prstGeom>
           <a:solidFill>
-            <a:srgbClr val="2980B9"/>
+            <a:srgbClr val="FF6B35"/>
           </a:solidFill>
           <a:ln>
             <a:noFill/>
@@ -3152,14 +3160,57 @@
       </p:sp>
       <p:sp>
         <p:nvSpPr>
-          <p:cNvPr id="3" name="TextBox 2"/>
+          <p:cNvPr id="3" name="Oval 2"/>
+          <p:cNvSpPr/>
+          <p:nvPr/>
+        </p:nvSpPr>
+        <p:spPr>
+          <a:xfrm>
+            <a:off x="9509760" y="3931920"/>
+            <a:ext cx="2926080" cy="2926080"/>
+          </a:xfrm>
+          <a:prstGeom prst="ellipse">
+            <a:avLst/>
+          </a:prstGeom>
+          <a:noFill/>
+          <a:ln w="31750">
+            <a:solidFill>
+              <a:srgbClr val="FF6B35"/>
+            </a:solidFill>
+          </a:ln>
+        </p:spPr>
+        <p:style>
+          <a:lnRef idx="1">
+            <a:schemeClr val="accent1"/>
+          </a:lnRef>
+          <a:fillRef idx="3">
+            <a:schemeClr val="accent1"/>
+          </a:fillRef>
+          <a:effectRef idx="2">
+            <a:schemeClr val="accent1"/>
+          </a:effectRef>
+          <a:fontRef idx="minor">
+            <a:schemeClr val="lt1"/>
+          </a:fontRef>
+        </p:style>
+        <p:txBody>
+          <a:bodyPr rtlCol="0" anchor="ctr"/>
+          <a:lstStyle/>
+          <a:p>
+            <a:pPr algn="ctr"/>
+          </a:p>
+        </p:txBody>
+      </p:sp>
+      <p:sp>
+        <p:nvSpPr>
+          <p:cNvPr id="4" name="TextBox 3"/>
           <p:cNvSpPr txBox="1"/>
           <p:nvPr/>
         </p:nvSpPr>
         <p:spPr>
           <a:xfrm>
-            <a:off x="731520" y="2240280"/>
-            <a:ext cx="10698480" cy="1005840"/>
+            <a:off x="822960" y="1371600"/>
+            <a:ext cx="2743200" cy="1097280"/>
           </a:xfrm>
           <a:prstGeom prst="rect">
             <a:avLst/>
@@ -3172,28 +3223,28 @@
           </a:bodyPr>
           <a:lstStyle/>
           <a:p>
-            <a:pPr algn="ctr"/>
-            <a:r>
-              <a:rPr sz="4400" b="1">
+            <a:r>
+              <a:rPr sz="6000" b="0" i="0">
                 <a:solidFill>
                   <a:srgbClr val="FFFFFF"/>
                 </a:solidFill>
-              </a:rPr>
-              <a:t>BistroSaaS</a:t>
-            </a:r>
-          </a:p>
-        </p:txBody>
-      </p:sp>
-      <p:sp>
-        <p:nvSpPr>
-          <p:cNvPr id="4" name="TextBox 3"/>
+                <a:latin typeface="Segoe UI"/>
+              </a:rPr>
+              <a:t>🍽</a:t>
+            </a:r>
+          </a:p>
+        </p:txBody>
+      </p:sp>
+      <p:sp>
+        <p:nvSpPr>
+          <p:cNvPr id="5" name="TextBox 4"/>
           <p:cNvSpPr txBox="1"/>
           <p:nvPr/>
         </p:nvSpPr>
         <p:spPr>
           <a:xfrm>
-            <a:off x="731520" y="3566160"/>
-            <a:ext cx="10698480" cy="1097280"/>
+            <a:off x="822960" y="2468880"/>
+            <a:ext cx="10058400" cy="1828800"/>
           </a:xfrm>
           <a:prstGeom prst="rect">
             <a:avLst/>
@@ -3206,14 +3257,143 @@
           </a:bodyPr>
           <a:lstStyle/>
           <a:p>
+            <a:r>
+              <a:rPr sz="5400" b="1" i="0">
+                <a:solidFill>
+                  <a:srgbClr val="FFFFFF"/>
+                </a:solidFill>
+                <a:latin typeface="Segoe UI"/>
+              </a:rPr>
+              <a:t>BistroSaaS</a:t>
+            </a:r>
+          </a:p>
+        </p:txBody>
+      </p:sp>
+      <p:sp>
+        <p:nvSpPr>
+          <p:cNvPr id="6" name="Rounded Rectangle 5"/>
+          <p:cNvSpPr/>
+          <p:nvPr/>
+        </p:nvSpPr>
+        <p:spPr>
+          <a:xfrm>
+            <a:off x="868680" y="4160520"/>
+            <a:ext cx="2743200" cy="91440"/>
+          </a:xfrm>
+          <a:prstGeom prst="roundRect">
+            <a:avLst/>
+          </a:prstGeom>
+          <a:solidFill>
+            <a:srgbClr val="FF6B35"/>
+          </a:solidFill>
+          <a:ln>
+            <a:noFill/>
+          </a:ln>
+        </p:spPr>
+        <p:style>
+          <a:lnRef idx="1">
+            <a:schemeClr val="accent1"/>
+          </a:lnRef>
+          <a:fillRef idx="3">
+            <a:schemeClr val="accent1"/>
+          </a:fillRef>
+          <a:effectRef idx="2">
+            <a:schemeClr val="accent1"/>
+          </a:effectRef>
+          <a:fontRef idx="minor">
+            <a:schemeClr val="lt1"/>
+          </a:fontRef>
+        </p:style>
+        <p:txBody>
+          <a:bodyPr rtlCol="0" anchor="ctr"/>
+          <a:lstStyle/>
+          <a:p>
             <a:pPr algn="ctr"/>
-            <a:r>
-              <a:rPr sz="2200">
-                <a:solidFill>
-                  <a:srgbClr val="2C3E50"/>
-                </a:solidFill>
+          </a:p>
+        </p:txBody>
+      </p:sp>
+      <p:sp>
+        <p:nvSpPr>
+          <p:cNvPr id="7" name="TextBox 6"/>
+          <p:cNvSpPr txBox="1"/>
+          <p:nvPr/>
+        </p:nvSpPr>
+        <p:spPr>
+          <a:xfrm>
+            <a:off x="822960" y="4389120"/>
+            <a:ext cx="9601200" cy="731520"/>
+          </a:xfrm>
+          <a:prstGeom prst="rect">
+            <a:avLst/>
+          </a:prstGeom>
+          <a:noFill/>
+        </p:spPr>
+        <p:txBody>
+          <a:bodyPr wrap="none">
+            <a:spAutoFit/>
+          </a:bodyPr>
+          <a:lstStyle/>
+          <a:p>
+            <a:r>
+              <a:rPr sz="2200" b="0" i="0">
+                <a:solidFill>
+                  <a:srgbClr val="D7DEE5"/>
+                </a:solidFill>
+                <a:latin typeface="Segoe UI"/>
               </a:rPr>
               <a:t>Restaurant Management &amp; Online Ordering System</a:t>
+            </a:r>
+          </a:p>
+        </p:txBody>
+      </p:sp>
+      <p:sp>
+        <p:nvSpPr>
+          <p:cNvPr id="8" name="Rounded Rectangle 7"/>
+          <p:cNvSpPr/>
+          <p:nvPr/>
+        </p:nvSpPr>
+        <p:spPr>
+          <a:xfrm>
+            <a:off x="868680" y="5212080"/>
+            <a:ext cx="3200400" cy="502920"/>
+          </a:xfrm>
+          <a:prstGeom prst="roundRect">
+            <a:avLst/>
+          </a:prstGeom>
+          <a:solidFill>
+            <a:srgbClr val="FF6B35"/>
+          </a:solidFill>
+          <a:ln>
+            <a:noFill/>
+          </a:ln>
+        </p:spPr>
+        <p:style>
+          <a:lnRef idx="1">
+            <a:schemeClr val="accent1"/>
+          </a:lnRef>
+          <a:fillRef idx="3">
+            <a:schemeClr val="accent1"/>
+          </a:fillRef>
+          <a:effectRef idx="2">
+            <a:schemeClr val="accent1"/>
+          </a:effectRef>
+          <a:fontRef idx="minor">
+            <a:schemeClr val="lt1"/>
+          </a:fontRef>
+        </p:style>
+        <p:txBody>
+          <a:bodyPr rtlCol="0" anchor="ctr" wrap="square"/>
+          <a:lstStyle/>
+          <a:p>
+            <a:pPr algn="ctr"/>
+            <a:r>
+              <a:rPr sz="1600" b="1" i="0">
+                <a:solidFill>
+                  <a:srgbClr val="FFFFFF"/>
+                </a:solidFill>
+                <a:latin typeface="Segoe UI"/>
+              </a:rPr>
+              <a:t>PROJECT PRESENTATION</a:t>
             </a:r>
           </a:p>
         </p:txBody>
@@ -3229,6 +3409,14 @@
 <file path=ppt/slides/slide10.xml><?xml version="1.0" encoding="utf-8"?>
 <p:sld xmlns:a="http://schemas.openxmlformats.org/drawingml/2006/main" xmlns:p="http://schemas.openxmlformats.org/presentationml/2006/main" xmlns:r="http://schemas.openxmlformats.org/officeDocument/2006/relationships">
   <p:cSld>
+    <p:bg>
+      <p:bgPr>
+        <a:solidFill>
+          <a:srgbClr val="F5F7FA"/>
+        </a:solidFill>
+        <a:effectLst/>
+      </p:bgPr>
+    </p:bg>
     <p:spTree>
       <p:nvGrpSpPr>
         <p:cNvPr id="1" name=""/>
@@ -3245,13 +3433,13 @@
         <p:spPr>
           <a:xfrm>
             <a:off x="0" y="0"/>
-            <a:ext cx="12191695" cy="1005840"/>
+            <a:ext cx="164592" cy="6858000"/>
           </a:xfrm>
           <a:prstGeom prst="rect">
             <a:avLst/>
           </a:prstGeom>
           <a:solidFill>
-            <a:srgbClr val="2980B9"/>
+            <a:srgbClr val="FF6B35"/>
           </a:solidFill>
           <a:ln>
             <a:noFill/>
@@ -3281,14 +3469,57 @@
       </p:sp>
       <p:sp>
         <p:nvSpPr>
-          <p:cNvPr id="3" name="TextBox 2"/>
+          <p:cNvPr id="3" name="Oval 2"/>
+          <p:cNvSpPr/>
+          <p:nvPr/>
+        </p:nvSpPr>
+        <p:spPr>
+          <a:xfrm>
+            <a:off x="10561320" y="411480"/>
+            <a:ext cx="1143000" cy="1143000"/>
+          </a:xfrm>
+          <a:prstGeom prst="ellipse">
+            <a:avLst/>
+          </a:prstGeom>
+          <a:solidFill>
+            <a:srgbClr val="FDE8DF"/>
+          </a:solidFill>
+          <a:ln>
+            <a:noFill/>
+          </a:ln>
+        </p:spPr>
+        <p:style>
+          <a:lnRef idx="1">
+            <a:schemeClr val="accent1"/>
+          </a:lnRef>
+          <a:fillRef idx="3">
+            <a:schemeClr val="accent1"/>
+          </a:fillRef>
+          <a:effectRef idx="2">
+            <a:schemeClr val="accent1"/>
+          </a:effectRef>
+          <a:fontRef idx="minor">
+            <a:schemeClr val="lt1"/>
+          </a:fontRef>
+        </p:style>
+        <p:txBody>
+          <a:bodyPr rtlCol="0" anchor="ctr"/>
+          <a:lstStyle/>
+          <a:p>
+            <a:pPr algn="ctr"/>
+          </a:p>
+        </p:txBody>
+      </p:sp>
+      <p:sp>
+        <p:nvSpPr>
+          <p:cNvPr id="4" name="TextBox 3"/>
           <p:cNvSpPr txBox="1"/>
           <p:nvPr/>
         </p:nvSpPr>
         <p:spPr>
           <a:xfrm>
-            <a:off x="457200" y="164592"/>
-            <a:ext cx="11247120" cy="731520"/>
+            <a:off x="10561320" y="457200"/>
+            <a:ext cx="1143000" cy="1051560"/>
           </a:xfrm>
           <a:prstGeom prst="rect">
             <a:avLst/>
@@ -3301,11 +3532,47 @@
           </a:bodyPr>
           <a:lstStyle/>
           <a:p>
-            <a:r>
-              <a:rPr sz="3000" b="1">
-                <a:solidFill>
-                  <a:srgbClr val="FFFFFF"/>
-                </a:solidFill>
+            <a:pPr algn="ctr"/>
+            <a:r>
+              <a:rPr sz="3600" b="0" i="0">
+                <a:solidFill>
+                  <a:srgbClr val="243140"/>
+                </a:solidFill>
+                <a:latin typeface="Segoe UI"/>
+              </a:rPr>
+              <a:t>⭐</a:t>
+            </a:r>
+          </a:p>
+        </p:txBody>
+      </p:sp>
+      <p:sp>
+        <p:nvSpPr>
+          <p:cNvPr id="5" name="TextBox 4"/>
+          <p:cNvSpPr txBox="1"/>
+          <p:nvPr/>
+        </p:nvSpPr>
+        <p:spPr>
+          <a:xfrm>
+            <a:off x="502920" y="411480"/>
+            <a:ext cx="9692640" cy="777240"/>
+          </a:xfrm>
+          <a:prstGeom prst="rect">
+            <a:avLst/>
+          </a:prstGeom>
+          <a:noFill/>
+        </p:spPr>
+        <p:txBody>
+          <a:bodyPr wrap="none">
+            <a:spAutoFit/>
+          </a:bodyPr>
+          <a:lstStyle/>
+          <a:p>
+            <a:r>
+              <a:rPr sz="3200" b="1" i="0">
+                <a:solidFill>
+                  <a:srgbClr val="1E2A38"/>
+                </a:solidFill>
+                <a:latin typeface="Segoe UI"/>
               </a:rPr>
               <a:t>Features Overview</a:t>
             </a:r>
@@ -3314,14 +3581,57 @@
       </p:sp>
       <p:sp>
         <p:nvSpPr>
-          <p:cNvPr id="4" name="TextBox 3"/>
+          <p:cNvPr id="6" name="Rounded Rectangle 5"/>
+          <p:cNvSpPr/>
+          <p:nvPr/>
+        </p:nvSpPr>
+        <p:spPr>
+          <a:xfrm>
+            <a:off x="548640" y="1170432"/>
+            <a:ext cx="2286000" cy="82296"/>
+          </a:xfrm>
+          <a:prstGeom prst="roundRect">
+            <a:avLst/>
+          </a:prstGeom>
+          <a:solidFill>
+            <a:srgbClr val="FF6B35"/>
+          </a:solidFill>
+          <a:ln>
+            <a:noFill/>
+          </a:ln>
+        </p:spPr>
+        <p:style>
+          <a:lnRef idx="1">
+            <a:schemeClr val="accent1"/>
+          </a:lnRef>
+          <a:fillRef idx="3">
+            <a:schemeClr val="accent1"/>
+          </a:fillRef>
+          <a:effectRef idx="2">
+            <a:schemeClr val="accent1"/>
+          </a:effectRef>
+          <a:fontRef idx="minor">
+            <a:schemeClr val="lt1"/>
+          </a:fontRef>
+        </p:style>
+        <p:txBody>
+          <a:bodyPr rtlCol="0" anchor="ctr"/>
+          <a:lstStyle/>
+          <a:p>
+            <a:pPr algn="ctr"/>
+          </a:p>
+        </p:txBody>
+      </p:sp>
+      <p:sp>
+        <p:nvSpPr>
+          <p:cNvPr id="7" name="TextBox 6"/>
           <p:cNvSpPr txBox="1"/>
           <p:nvPr/>
         </p:nvSpPr>
         <p:spPr>
           <a:xfrm>
-            <a:off x="548640" y="1280160"/>
-            <a:ext cx="11247120" cy="5120640"/>
+            <a:off x="640080" y="1554480"/>
+            <a:ext cx="10789920" cy="4572000"/>
           </a:xfrm>
           <a:prstGeom prst="rect">
             <a:avLst/>
@@ -3336,14 +3646,24 @@
           <a:p>
             <a:pPr>
               <a:spcAft>
-                <a:spcPts val="1000"/>
+                <a:spcPts val="1300"/>
               </a:spcAft>
             </a:pPr>
             <a:r>
-              <a:rPr sz="2000">
-                <a:solidFill>
-                  <a:srgbClr val="2C3E50"/>
-                </a:solidFill>
+              <a:rPr sz="2000" b="1" i="0">
+                <a:solidFill>
+                  <a:srgbClr val="FF6B35"/>
+                </a:solidFill>
+                <a:latin typeface="Segoe UI"/>
+              </a:rPr>
+              <a:t>▸  </a:t>
+            </a:r>
+            <a:r>
+              <a:rPr sz="2000" b="0" i="0">
+                <a:solidFill>
+                  <a:srgbClr val="243140"/>
+                </a:solidFill>
+                <a:latin typeface="Segoe UI"/>
               </a:rPr>
               <a:t>Authentication with two roles.</a:t>
             </a:r>
@@ -3351,14 +3671,24 @@
           <a:p>
             <a:pPr>
               <a:spcAft>
-                <a:spcPts val="1000"/>
+                <a:spcPts val="1300"/>
               </a:spcAft>
             </a:pPr>
             <a:r>
-              <a:rPr sz="2000">
-                <a:solidFill>
-                  <a:srgbClr val="2C3E50"/>
-                </a:solidFill>
+              <a:rPr sz="2000" b="1" i="0">
+                <a:solidFill>
+                  <a:srgbClr val="FF6B35"/>
+                </a:solidFill>
+                <a:latin typeface="Segoe UI"/>
+              </a:rPr>
+              <a:t>▸  </a:t>
+            </a:r>
+            <a:r>
+              <a:rPr sz="2000" b="0" i="0">
+                <a:solidFill>
+                  <a:srgbClr val="243140"/>
+                </a:solidFill>
+                <a:latin typeface="Segoe UI"/>
               </a:rPr>
               <a:t>Menu browsing: search, filter, pagination.</a:t>
             </a:r>
@@ -3366,14 +3696,24 @@
           <a:p>
             <a:pPr>
               <a:spcAft>
-                <a:spcPts val="1000"/>
+                <a:spcPts val="1300"/>
               </a:spcAft>
             </a:pPr>
             <a:r>
-              <a:rPr sz="2000">
-                <a:solidFill>
-                  <a:srgbClr val="2C3E50"/>
-                </a:solidFill>
+              <a:rPr sz="2000" b="1" i="0">
+                <a:solidFill>
+                  <a:srgbClr val="FF6B35"/>
+                </a:solidFill>
+                <a:latin typeface="Segoe UI"/>
+              </a:rPr>
+              <a:t>▸  </a:t>
+            </a:r>
+            <a:r>
+              <a:rPr sz="2000" b="0" i="0">
+                <a:solidFill>
+                  <a:srgbClr val="243140"/>
+                </a:solidFill>
+                <a:latin typeface="Segoe UI"/>
               </a:rPr>
               <a:t>Menu CRUD with image uploads (admin).</a:t>
             </a:r>
@@ -3381,14 +3721,24 @@
           <a:p>
             <a:pPr>
               <a:spcAft>
-                <a:spcPts val="1000"/>
+                <a:spcPts val="1300"/>
               </a:spcAft>
             </a:pPr>
             <a:r>
-              <a:rPr sz="2000">
-                <a:solidFill>
-                  <a:srgbClr val="2C3E50"/>
-                </a:solidFill>
+              <a:rPr sz="2000" b="1" i="0">
+                <a:solidFill>
+                  <a:srgbClr val="FF6B35"/>
+                </a:solidFill>
+                <a:latin typeface="Segoe UI"/>
+              </a:rPr>
+              <a:t>▸  </a:t>
+            </a:r>
+            <a:r>
+              <a:rPr sz="2000" b="0" i="0">
+                <a:solidFill>
+                  <a:srgbClr val="243140"/>
+                </a:solidFill>
+                <a:latin typeface="Segoe UI"/>
               </a:rPr>
               <a:t>Online ordering with live total.</a:t>
             </a:r>
@@ -3396,14 +3746,24 @@
           <a:p>
             <a:pPr>
               <a:spcAft>
-                <a:spcPts val="1000"/>
+                <a:spcPts val="1300"/>
               </a:spcAft>
             </a:pPr>
             <a:r>
-              <a:rPr sz="2000">
-                <a:solidFill>
-                  <a:srgbClr val="2C3E50"/>
-                </a:solidFill>
+              <a:rPr sz="2000" b="1" i="0">
+                <a:solidFill>
+                  <a:srgbClr val="FF6B35"/>
+                </a:solidFill>
+                <a:latin typeface="Segoe UI"/>
+              </a:rPr>
+              <a:t>▸  </a:t>
+            </a:r>
+            <a:r>
+              <a:rPr sz="2000" b="0" i="0">
+                <a:solidFill>
+                  <a:srgbClr val="243140"/>
+                </a:solidFill>
+                <a:latin typeface="Segoe UI"/>
               </a:rPr>
               <a:t>Order confirmation &amp; notifications.</a:t>
             </a:r>
@@ -3411,16 +3771,138 @@
           <a:p>
             <a:pPr>
               <a:spcAft>
-                <a:spcPts val="1000"/>
+                <a:spcPts val="1300"/>
               </a:spcAft>
             </a:pPr>
             <a:r>
-              <a:rPr sz="2000">
-                <a:solidFill>
-                  <a:srgbClr val="2C3E50"/>
-                </a:solidFill>
+              <a:rPr sz="2000" b="1" i="0">
+                <a:solidFill>
+                  <a:srgbClr val="FF6B35"/>
+                </a:solidFill>
+                <a:latin typeface="Segoe UI"/>
+              </a:rPr>
+              <a:t>▸  </a:t>
+            </a:r>
+            <a:r>
+              <a:rPr sz="2000" b="0" i="0">
+                <a:solidFill>
+                  <a:srgbClr val="243140"/>
+                </a:solidFill>
+                <a:latin typeface="Segoe UI"/>
               </a:rPr>
               <a:t>User profiles + REST API.</a:t>
+            </a:r>
+          </a:p>
+        </p:txBody>
+      </p:sp>
+      <p:sp>
+        <p:nvSpPr>
+          <p:cNvPr id="8" name="Rectangle 7"/>
+          <p:cNvSpPr/>
+          <p:nvPr/>
+        </p:nvSpPr>
+        <p:spPr>
+          <a:xfrm>
+            <a:off x="502920" y="6400800"/>
+            <a:ext cx="11201400" cy="17780"/>
+          </a:xfrm>
+          <a:prstGeom prst="rect">
+            <a:avLst/>
+          </a:prstGeom>
+          <a:solidFill>
+            <a:srgbClr val="DDE3E9"/>
+          </a:solidFill>
+          <a:ln>
+            <a:noFill/>
+          </a:ln>
+        </p:spPr>
+        <p:style>
+          <a:lnRef idx="1">
+            <a:schemeClr val="accent1"/>
+          </a:lnRef>
+          <a:fillRef idx="3">
+            <a:schemeClr val="accent1"/>
+          </a:fillRef>
+          <a:effectRef idx="2">
+            <a:schemeClr val="accent1"/>
+          </a:effectRef>
+          <a:fontRef idx="minor">
+            <a:schemeClr val="lt1"/>
+          </a:fontRef>
+        </p:style>
+        <p:txBody>
+          <a:bodyPr rtlCol="0" anchor="ctr"/>
+          <a:lstStyle/>
+          <a:p>
+            <a:pPr algn="ctr"/>
+          </a:p>
+        </p:txBody>
+      </p:sp>
+      <p:sp>
+        <p:nvSpPr>
+          <p:cNvPr id="9" name="TextBox 8"/>
+          <p:cNvSpPr txBox="1"/>
+          <p:nvPr/>
+        </p:nvSpPr>
+        <p:spPr>
+          <a:xfrm>
+            <a:off x="502920" y="6446520"/>
+            <a:ext cx="8229600" cy="320040"/>
+          </a:xfrm>
+          <a:prstGeom prst="rect">
+            <a:avLst/>
+          </a:prstGeom>
+          <a:noFill/>
+        </p:spPr>
+        <p:txBody>
+          <a:bodyPr wrap="none">
+            <a:spAutoFit/>
+          </a:bodyPr>
+          <a:lstStyle/>
+          <a:p>
+            <a:r>
+              <a:rPr sz="1000" b="0" i="0">
+                <a:solidFill>
+                  <a:srgbClr val="8A97A5"/>
+                </a:solidFill>
+                <a:latin typeface="Segoe UI"/>
+              </a:rPr>
+              <a:t>BistroSaaS  |  Restaurant Management System</a:t>
+            </a:r>
+          </a:p>
+        </p:txBody>
+      </p:sp>
+      <p:sp>
+        <p:nvSpPr>
+          <p:cNvPr id="10" name="TextBox 9"/>
+          <p:cNvSpPr txBox="1"/>
+          <p:nvPr/>
+        </p:nvSpPr>
+        <p:spPr>
+          <a:xfrm>
+            <a:off x="10607040" y="6446520"/>
+            <a:ext cx="1097280" cy="320040"/>
+          </a:xfrm>
+          <a:prstGeom prst="rect">
+            <a:avLst/>
+          </a:prstGeom>
+          <a:noFill/>
+        </p:spPr>
+        <p:txBody>
+          <a:bodyPr wrap="none">
+            <a:spAutoFit/>
+          </a:bodyPr>
+          <a:lstStyle/>
+          <a:p>
+            <a:pPr algn="r"/>
+            <a:r>
+              <a:rPr sz="1000" b="1" i="0">
+                <a:solidFill>
+                  <a:srgbClr val="8A97A5"/>
+                </a:solidFill>
+                <a:latin typeface="Segoe UI"/>
+              </a:rPr>
+              <a:t>10</a:t>
             </a:r>
           </a:p>
         </p:txBody>
@@ -3436,6 +3918,14 @@
 <file path=ppt/slides/slide11.xml><?xml version="1.0" encoding="utf-8"?>
 <p:sld xmlns:a="http://schemas.openxmlformats.org/drawingml/2006/main" xmlns:p="http://schemas.openxmlformats.org/presentationml/2006/main" xmlns:r="http://schemas.openxmlformats.org/officeDocument/2006/relationships">
   <p:cSld>
+    <p:bg>
+      <p:bgPr>
+        <a:solidFill>
+          <a:srgbClr val="F5F7FA"/>
+        </a:solidFill>
+        <a:effectLst/>
+      </p:bgPr>
+    </p:bg>
     <p:spTree>
       <p:nvGrpSpPr>
         <p:cNvPr id="1" name=""/>
@@ -3452,13 +3942,13 @@
         <p:spPr>
           <a:xfrm>
             <a:off x="0" y="0"/>
-            <a:ext cx="12191695" cy="1005840"/>
+            <a:ext cx="164592" cy="6858000"/>
           </a:xfrm>
           <a:prstGeom prst="rect">
             <a:avLst/>
           </a:prstGeom>
           <a:solidFill>
-            <a:srgbClr val="2980B9"/>
+            <a:srgbClr val="FF6B35"/>
           </a:solidFill>
           <a:ln>
             <a:noFill/>
@@ -3488,14 +3978,57 @@
       </p:sp>
       <p:sp>
         <p:nvSpPr>
-          <p:cNvPr id="3" name="TextBox 2"/>
+          <p:cNvPr id="3" name="Oval 2"/>
+          <p:cNvSpPr/>
+          <p:nvPr/>
+        </p:nvSpPr>
+        <p:spPr>
+          <a:xfrm>
+            <a:off x="10561320" y="411480"/>
+            <a:ext cx="1143000" cy="1143000"/>
+          </a:xfrm>
+          <a:prstGeom prst="ellipse">
+            <a:avLst/>
+          </a:prstGeom>
+          <a:solidFill>
+            <a:srgbClr val="FDE8DF"/>
+          </a:solidFill>
+          <a:ln>
+            <a:noFill/>
+          </a:ln>
+        </p:spPr>
+        <p:style>
+          <a:lnRef idx="1">
+            <a:schemeClr val="accent1"/>
+          </a:lnRef>
+          <a:fillRef idx="3">
+            <a:schemeClr val="accent1"/>
+          </a:fillRef>
+          <a:effectRef idx="2">
+            <a:schemeClr val="accent1"/>
+          </a:effectRef>
+          <a:fontRef idx="minor">
+            <a:schemeClr val="lt1"/>
+          </a:fontRef>
+        </p:style>
+        <p:txBody>
+          <a:bodyPr rtlCol="0" anchor="ctr"/>
+          <a:lstStyle/>
+          <a:p>
+            <a:pPr algn="ctr"/>
+          </a:p>
+        </p:txBody>
+      </p:sp>
+      <p:sp>
+        <p:nvSpPr>
+          <p:cNvPr id="4" name="TextBox 3"/>
           <p:cNvSpPr txBox="1"/>
           <p:nvPr/>
         </p:nvSpPr>
         <p:spPr>
           <a:xfrm>
-            <a:off x="457200" y="164592"/>
-            <a:ext cx="11247120" cy="731520"/>
+            <a:off x="10561320" y="457200"/>
+            <a:ext cx="1143000" cy="1051560"/>
           </a:xfrm>
           <a:prstGeom prst="rect">
             <a:avLst/>
@@ -3508,11 +4041,47 @@
           </a:bodyPr>
           <a:lstStyle/>
           <a:p>
-            <a:r>
-              <a:rPr sz="3000" b="1">
-                <a:solidFill>
-                  <a:srgbClr val="FFFFFF"/>
-                </a:solidFill>
+            <a:pPr algn="ctr"/>
+            <a:r>
+              <a:rPr sz="3600" b="0" i="0">
+                <a:solidFill>
+                  <a:srgbClr val="243140"/>
+                </a:solidFill>
+                <a:latin typeface="Segoe UI"/>
+              </a:rPr>
+              <a:t>🔐</a:t>
+            </a:r>
+          </a:p>
+        </p:txBody>
+      </p:sp>
+      <p:sp>
+        <p:nvSpPr>
+          <p:cNvPr id="5" name="TextBox 4"/>
+          <p:cNvSpPr txBox="1"/>
+          <p:nvPr/>
+        </p:nvSpPr>
+        <p:spPr>
+          <a:xfrm>
+            <a:off x="502920" y="411480"/>
+            <a:ext cx="9692640" cy="777240"/>
+          </a:xfrm>
+          <a:prstGeom prst="rect">
+            <a:avLst/>
+          </a:prstGeom>
+          <a:noFill/>
+        </p:spPr>
+        <p:txBody>
+          <a:bodyPr wrap="none">
+            <a:spAutoFit/>
+          </a:bodyPr>
+          <a:lstStyle/>
+          <a:p>
+            <a:r>
+              <a:rPr sz="3200" b="1" i="0">
+                <a:solidFill>
+                  <a:srgbClr val="1E2A38"/>
+                </a:solidFill>
+                <a:latin typeface="Segoe UI"/>
               </a:rPr>
               <a:t>Authentication &amp; Roles</a:t>
             </a:r>
@@ -3521,14 +4090,57 @@
       </p:sp>
       <p:sp>
         <p:nvSpPr>
-          <p:cNvPr id="4" name="TextBox 3"/>
+          <p:cNvPr id="6" name="Rounded Rectangle 5"/>
+          <p:cNvSpPr/>
+          <p:nvPr/>
+        </p:nvSpPr>
+        <p:spPr>
+          <a:xfrm>
+            <a:off x="548640" y="1170432"/>
+            <a:ext cx="2286000" cy="82296"/>
+          </a:xfrm>
+          <a:prstGeom prst="roundRect">
+            <a:avLst/>
+          </a:prstGeom>
+          <a:solidFill>
+            <a:srgbClr val="FF6B35"/>
+          </a:solidFill>
+          <a:ln>
+            <a:noFill/>
+          </a:ln>
+        </p:spPr>
+        <p:style>
+          <a:lnRef idx="1">
+            <a:schemeClr val="accent1"/>
+          </a:lnRef>
+          <a:fillRef idx="3">
+            <a:schemeClr val="accent1"/>
+          </a:fillRef>
+          <a:effectRef idx="2">
+            <a:schemeClr val="accent1"/>
+          </a:effectRef>
+          <a:fontRef idx="minor">
+            <a:schemeClr val="lt1"/>
+          </a:fontRef>
+        </p:style>
+        <p:txBody>
+          <a:bodyPr rtlCol="0" anchor="ctr"/>
+          <a:lstStyle/>
+          <a:p>
+            <a:pPr algn="ctr"/>
+          </a:p>
+        </p:txBody>
+      </p:sp>
+      <p:sp>
+        <p:nvSpPr>
+          <p:cNvPr id="7" name="TextBox 6"/>
           <p:cNvSpPr txBox="1"/>
           <p:nvPr/>
         </p:nvSpPr>
         <p:spPr>
           <a:xfrm>
-            <a:off x="548640" y="1280160"/>
-            <a:ext cx="11247120" cy="5120640"/>
+            <a:off x="640080" y="1554480"/>
+            <a:ext cx="10789920" cy="4572000"/>
           </a:xfrm>
           <a:prstGeom prst="rect">
             <a:avLst/>
@@ -3543,14 +4155,24 @@
           <a:p>
             <a:pPr>
               <a:spcAft>
-                <a:spcPts val="1000"/>
+                <a:spcPts val="1300"/>
               </a:spcAft>
             </a:pPr>
             <a:r>
-              <a:rPr sz="2000">
-                <a:solidFill>
-                  <a:srgbClr val="2C3E50"/>
-                </a:solidFill>
+              <a:rPr sz="2000" b="1" i="0">
+                <a:solidFill>
+                  <a:srgbClr val="FF6B35"/>
+                </a:solidFill>
+                <a:latin typeface="Segoe UI"/>
+              </a:rPr>
+              <a:t>▸  </a:t>
+            </a:r>
+            <a:r>
+              <a:rPr sz="2000" b="0" i="0">
+                <a:solidFill>
+                  <a:srgbClr val="243140"/>
+                </a:solidFill>
+                <a:latin typeface="Segoe UI"/>
               </a:rPr>
               <a:t>Register, Login, Logout (Django auth).</a:t>
             </a:r>
@@ -3558,14 +4180,24 @@
           <a:p>
             <a:pPr>
               <a:spcAft>
-                <a:spcPts val="1000"/>
+                <a:spcPts val="1300"/>
               </a:spcAft>
             </a:pPr>
             <a:r>
-              <a:rPr sz="2000">
-                <a:solidFill>
-                  <a:srgbClr val="2C3E50"/>
-                </a:solidFill>
+              <a:rPr sz="2000" b="1" i="0">
+                <a:solidFill>
+                  <a:srgbClr val="FF6B35"/>
+                </a:solidFill>
+                <a:latin typeface="Segoe UI"/>
+              </a:rPr>
+              <a:t>▸  </a:t>
+            </a:r>
+            <a:r>
+              <a:rPr sz="2000" b="0" i="0">
+                <a:solidFill>
+                  <a:srgbClr val="243140"/>
+                </a:solidFill>
+                <a:latin typeface="Segoe UI"/>
               </a:rPr>
               <a:t>Role dropdown: Customer (default) or Admin.</a:t>
             </a:r>
@@ -3573,14 +4205,24 @@
           <a:p>
             <a:pPr>
               <a:spcAft>
-                <a:spcPts val="1000"/>
+                <a:spcPts val="1300"/>
               </a:spcAft>
             </a:pPr>
             <a:r>
-              <a:rPr sz="2000">
-                <a:solidFill>
-                  <a:srgbClr val="2C3E50"/>
-                </a:solidFill>
+              <a:rPr sz="2000" b="1" i="0">
+                <a:solidFill>
+                  <a:srgbClr val="FF6B35"/>
+                </a:solidFill>
+                <a:latin typeface="Segoe UI"/>
+              </a:rPr>
+              <a:t>▸  </a:t>
+            </a:r>
+            <a:r>
+              <a:rPr sz="2000" b="0" i="0">
+                <a:solidFill>
+                  <a:srgbClr val="243140"/>
+                </a:solidFill>
+                <a:latin typeface="Segoe UI"/>
               </a:rPr>
               <a:t>Admin requires Secret Key (admin123).</a:t>
             </a:r>
@@ -3588,16 +4230,138 @@
           <a:p>
             <a:pPr>
               <a:spcAft>
-                <a:spcPts val="1000"/>
+                <a:spcPts val="1300"/>
               </a:spcAft>
             </a:pPr>
             <a:r>
-              <a:rPr sz="2000">
-                <a:solidFill>
-                  <a:srgbClr val="2C3E50"/>
-                </a:solidFill>
+              <a:rPr sz="2000" b="1" i="0">
+                <a:solidFill>
+                  <a:srgbClr val="FF6B35"/>
+                </a:solidFill>
+                <a:latin typeface="Segoe UI"/>
+              </a:rPr>
+              <a:t>▸  </a:t>
+            </a:r>
+            <a:r>
+              <a:rPr sz="2000" b="0" i="0">
+                <a:solidFill>
+                  <a:srgbClr val="243140"/>
+                </a:solidFill>
+                <a:latin typeface="Segoe UI"/>
               </a:rPr>
               <a:t>Profile auto-created for every user (signal).</a:t>
+            </a:r>
+          </a:p>
+        </p:txBody>
+      </p:sp>
+      <p:sp>
+        <p:nvSpPr>
+          <p:cNvPr id="8" name="Rectangle 7"/>
+          <p:cNvSpPr/>
+          <p:nvPr/>
+        </p:nvSpPr>
+        <p:spPr>
+          <a:xfrm>
+            <a:off x="502920" y="6400800"/>
+            <a:ext cx="11201400" cy="17780"/>
+          </a:xfrm>
+          <a:prstGeom prst="rect">
+            <a:avLst/>
+          </a:prstGeom>
+          <a:solidFill>
+            <a:srgbClr val="DDE3E9"/>
+          </a:solidFill>
+          <a:ln>
+            <a:noFill/>
+          </a:ln>
+        </p:spPr>
+        <p:style>
+          <a:lnRef idx="1">
+            <a:schemeClr val="accent1"/>
+          </a:lnRef>
+          <a:fillRef idx="3">
+            <a:schemeClr val="accent1"/>
+          </a:fillRef>
+          <a:effectRef idx="2">
+            <a:schemeClr val="accent1"/>
+          </a:effectRef>
+          <a:fontRef idx="minor">
+            <a:schemeClr val="lt1"/>
+          </a:fontRef>
+        </p:style>
+        <p:txBody>
+          <a:bodyPr rtlCol="0" anchor="ctr"/>
+          <a:lstStyle/>
+          <a:p>
+            <a:pPr algn="ctr"/>
+          </a:p>
+        </p:txBody>
+      </p:sp>
+      <p:sp>
+        <p:nvSpPr>
+          <p:cNvPr id="9" name="TextBox 8"/>
+          <p:cNvSpPr txBox="1"/>
+          <p:nvPr/>
+        </p:nvSpPr>
+        <p:spPr>
+          <a:xfrm>
+            <a:off x="502920" y="6446520"/>
+            <a:ext cx="8229600" cy="320040"/>
+          </a:xfrm>
+          <a:prstGeom prst="rect">
+            <a:avLst/>
+          </a:prstGeom>
+          <a:noFill/>
+        </p:spPr>
+        <p:txBody>
+          <a:bodyPr wrap="none">
+            <a:spAutoFit/>
+          </a:bodyPr>
+          <a:lstStyle/>
+          <a:p>
+            <a:r>
+              <a:rPr sz="1000" b="0" i="0">
+                <a:solidFill>
+                  <a:srgbClr val="8A97A5"/>
+                </a:solidFill>
+                <a:latin typeface="Segoe UI"/>
+              </a:rPr>
+              <a:t>BistroSaaS  |  Restaurant Management System</a:t>
+            </a:r>
+          </a:p>
+        </p:txBody>
+      </p:sp>
+      <p:sp>
+        <p:nvSpPr>
+          <p:cNvPr id="10" name="TextBox 9"/>
+          <p:cNvSpPr txBox="1"/>
+          <p:nvPr/>
+        </p:nvSpPr>
+        <p:spPr>
+          <a:xfrm>
+            <a:off x="10607040" y="6446520"/>
+            <a:ext cx="1097280" cy="320040"/>
+          </a:xfrm>
+          <a:prstGeom prst="rect">
+            <a:avLst/>
+          </a:prstGeom>
+          <a:noFill/>
+        </p:spPr>
+        <p:txBody>
+          <a:bodyPr wrap="none">
+            <a:spAutoFit/>
+          </a:bodyPr>
+          <a:lstStyle/>
+          <a:p>
+            <a:pPr algn="r"/>
+            <a:r>
+              <a:rPr sz="1000" b="1" i="0">
+                <a:solidFill>
+                  <a:srgbClr val="8A97A5"/>
+                </a:solidFill>
+                <a:latin typeface="Segoe UI"/>
+              </a:rPr>
+              <a:t>11</a:t>
             </a:r>
           </a:p>
         </p:txBody>
@@ -3613,6 +4377,14 @@
 <file path=ppt/slides/slide12.xml><?xml version="1.0" encoding="utf-8"?>
 <p:sld xmlns:a="http://schemas.openxmlformats.org/drawingml/2006/main" xmlns:p="http://schemas.openxmlformats.org/presentationml/2006/main" xmlns:r="http://schemas.openxmlformats.org/officeDocument/2006/relationships">
   <p:cSld>
+    <p:bg>
+      <p:bgPr>
+        <a:solidFill>
+          <a:srgbClr val="F5F7FA"/>
+        </a:solidFill>
+        <a:effectLst/>
+      </p:bgPr>
+    </p:bg>
     <p:spTree>
       <p:nvGrpSpPr>
         <p:cNvPr id="1" name=""/>
@@ -3629,13 +4401,13 @@
         <p:spPr>
           <a:xfrm>
             <a:off x="0" y="0"/>
-            <a:ext cx="12191695" cy="1005840"/>
+            <a:ext cx="164592" cy="6858000"/>
           </a:xfrm>
           <a:prstGeom prst="rect">
             <a:avLst/>
           </a:prstGeom>
           <a:solidFill>
-            <a:srgbClr val="2980B9"/>
+            <a:srgbClr val="FF6B35"/>
           </a:solidFill>
           <a:ln>
             <a:noFill/>
@@ -3665,14 +4437,57 @@
       </p:sp>
       <p:sp>
         <p:nvSpPr>
-          <p:cNvPr id="3" name="TextBox 2"/>
+          <p:cNvPr id="3" name="Oval 2"/>
+          <p:cNvSpPr/>
+          <p:nvPr/>
+        </p:nvSpPr>
+        <p:spPr>
+          <a:xfrm>
+            <a:off x="10561320" y="411480"/>
+            <a:ext cx="1143000" cy="1143000"/>
+          </a:xfrm>
+          <a:prstGeom prst="ellipse">
+            <a:avLst/>
+          </a:prstGeom>
+          <a:solidFill>
+            <a:srgbClr val="FDE8DF"/>
+          </a:solidFill>
+          <a:ln>
+            <a:noFill/>
+          </a:ln>
+        </p:spPr>
+        <p:style>
+          <a:lnRef idx="1">
+            <a:schemeClr val="accent1"/>
+          </a:lnRef>
+          <a:fillRef idx="3">
+            <a:schemeClr val="accent1"/>
+          </a:fillRef>
+          <a:effectRef idx="2">
+            <a:schemeClr val="accent1"/>
+          </a:effectRef>
+          <a:fontRef idx="minor">
+            <a:schemeClr val="lt1"/>
+          </a:fontRef>
+        </p:style>
+        <p:txBody>
+          <a:bodyPr rtlCol="0" anchor="ctr"/>
+          <a:lstStyle/>
+          <a:p>
+            <a:pPr algn="ctr"/>
+          </a:p>
+        </p:txBody>
+      </p:sp>
+      <p:sp>
+        <p:nvSpPr>
+          <p:cNvPr id="4" name="TextBox 3"/>
           <p:cNvSpPr txBox="1"/>
           <p:nvPr/>
         </p:nvSpPr>
         <p:spPr>
           <a:xfrm>
-            <a:off x="457200" y="164592"/>
-            <a:ext cx="11247120" cy="731520"/>
+            <a:off x="10561320" y="457200"/>
+            <a:ext cx="1143000" cy="1051560"/>
           </a:xfrm>
           <a:prstGeom prst="rect">
             <a:avLst/>
@@ -3685,11 +4500,47 @@
           </a:bodyPr>
           <a:lstStyle/>
           <a:p>
-            <a:r>
-              <a:rPr sz="3000" b="1">
-                <a:solidFill>
-                  <a:srgbClr val="FFFFFF"/>
-                </a:solidFill>
+            <a:pPr algn="ctr"/>
+            <a:r>
+              <a:rPr sz="3600" b="0" i="0">
+                <a:solidFill>
+                  <a:srgbClr val="243140"/>
+                </a:solidFill>
+                <a:latin typeface="Segoe UI"/>
+              </a:rPr>
+              <a:t>🍔</a:t>
+            </a:r>
+          </a:p>
+        </p:txBody>
+      </p:sp>
+      <p:sp>
+        <p:nvSpPr>
+          <p:cNvPr id="5" name="TextBox 4"/>
+          <p:cNvSpPr txBox="1"/>
+          <p:nvPr/>
+        </p:nvSpPr>
+        <p:spPr>
+          <a:xfrm>
+            <a:off x="502920" y="411480"/>
+            <a:ext cx="9692640" cy="777240"/>
+          </a:xfrm>
+          <a:prstGeom prst="rect">
+            <a:avLst/>
+          </a:prstGeom>
+          <a:noFill/>
+        </p:spPr>
+        <p:txBody>
+          <a:bodyPr wrap="none">
+            <a:spAutoFit/>
+          </a:bodyPr>
+          <a:lstStyle/>
+          <a:p>
+            <a:r>
+              <a:rPr sz="3200" b="1" i="0">
+                <a:solidFill>
+                  <a:srgbClr val="1E2A38"/>
+                </a:solidFill>
+                <a:latin typeface="Segoe UI"/>
               </a:rPr>
               <a:t>Menu Management (CRUD)</a:t>
             </a:r>
@@ -3698,14 +4549,57 @@
       </p:sp>
       <p:sp>
         <p:nvSpPr>
-          <p:cNvPr id="4" name="TextBox 3"/>
+          <p:cNvPr id="6" name="Rounded Rectangle 5"/>
+          <p:cNvSpPr/>
+          <p:nvPr/>
+        </p:nvSpPr>
+        <p:spPr>
+          <a:xfrm>
+            <a:off x="548640" y="1170432"/>
+            <a:ext cx="2286000" cy="82296"/>
+          </a:xfrm>
+          <a:prstGeom prst="roundRect">
+            <a:avLst/>
+          </a:prstGeom>
+          <a:solidFill>
+            <a:srgbClr val="FF6B35"/>
+          </a:solidFill>
+          <a:ln>
+            <a:noFill/>
+          </a:ln>
+        </p:spPr>
+        <p:style>
+          <a:lnRef idx="1">
+            <a:schemeClr val="accent1"/>
+          </a:lnRef>
+          <a:fillRef idx="3">
+            <a:schemeClr val="accent1"/>
+          </a:fillRef>
+          <a:effectRef idx="2">
+            <a:schemeClr val="accent1"/>
+          </a:effectRef>
+          <a:fontRef idx="minor">
+            <a:schemeClr val="lt1"/>
+          </a:fontRef>
+        </p:style>
+        <p:txBody>
+          <a:bodyPr rtlCol="0" anchor="ctr"/>
+          <a:lstStyle/>
+          <a:p>
+            <a:pPr algn="ctr"/>
+          </a:p>
+        </p:txBody>
+      </p:sp>
+      <p:sp>
+        <p:nvSpPr>
+          <p:cNvPr id="7" name="TextBox 6"/>
           <p:cNvSpPr txBox="1"/>
           <p:nvPr/>
         </p:nvSpPr>
         <p:spPr>
           <a:xfrm>
-            <a:off x="548640" y="1280160"/>
-            <a:ext cx="11247120" cy="5120640"/>
+            <a:off x="640080" y="1554480"/>
+            <a:ext cx="10789920" cy="4572000"/>
           </a:xfrm>
           <a:prstGeom prst="rect">
             <a:avLst/>
@@ -3720,14 +4614,24 @@
           <a:p>
             <a:pPr>
               <a:spcAft>
-                <a:spcPts val="1000"/>
+                <a:spcPts val="1300"/>
               </a:spcAft>
             </a:pPr>
             <a:r>
-              <a:rPr sz="2000">
-                <a:solidFill>
-                  <a:srgbClr val="2C3E50"/>
-                </a:solidFill>
+              <a:rPr sz="2000" b="1" i="0">
+                <a:solidFill>
+                  <a:srgbClr val="FF6B35"/>
+                </a:solidFill>
+                <a:latin typeface="Segoe UI"/>
+              </a:rPr>
+              <a:t>▸  </a:t>
+            </a:r>
+            <a:r>
+              <a:rPr sz="2000" b="0" i="0">
+                <a:solidFill>
+                  <a:srgbClr val="243140"/>
+                </a:solidFill>
+                <a:latin typeface="Segoe UI"/>
               </a:rPr>
               <a:t>Admins add / edit / delete menu items.</a:t>
             </a:r>
@@ -3735,14 +4639,24 @@
           <a:p>
             <a:pPr>
               <a:spcAft>
-                <a:spcPts val="1000"/>
+                <a:spcPts val="1300"/>
               </a:spcAft>
             </a:pPr>
             <a:r>
-              <a:rPr sz="2000">
-                <a:solidFill>
-                  <a:srgbClr val="2C3E50"/>
-                </a:solidFill>
+              <a:rPr sz="2000" b="1" i="0">
+                <a:solidFill>
+                  <a:srgbClr val="FF6B35"/>
+                </a:solidFill>
+                <a:latin typeface="Segoe UI"/>
+              </a:rPr>
+              <a:t>▸  </a:t>
+            </a:r>
+            <a:r>
+              <a:rPr sz="2000" b="0" i="0">
+                <a:solidFill>
+                  <a:srgbClr val="243140"/>
+                </a:solidFill>
+                <a:latin typeface="Segoe UI"/>
               </a:rPr>
               <a:t>Image upload for each dish (Pillow).</a:t>
             </a:r>
@@ -3750,14 +4664,24 @@
           <a:p>
             <a:pPr>
               <a:spcAft>
-                <a:spcPts val="1000"/>
+                <a:spcPts val="1300"/>
               </a:spcAft>
             </a:pPr>
             <a:r>
-              <a:rPr sz="2000">
-                <a:solidFill>
-                  <a:srgbClr val="2C3E50"/>
-                </a:solidFill>
+              <a:rPr sz="2000" b="1" i="0">
+                <a:solidFill>
+                  <a:srgbClr val="FF6B35"/>
+                </a:solidFill>
+                <a:latin typeface="Segoe UI"/>
+              </a:rPr>
+              <a:t>▸  </a:t>
+            </a:r>
+            <a:r>
+              <a:rPr sz="2000" b="0" i="0">
+                <a:solidFill>
+                  <a:srgbClr val="243140"/>
+                </a:solidFill>
+                <a:latin typeface="Segoe UI"/>
               </a:rPr>
               <a:t>Items grouped by category.</a:t>
             </a:r>
@@ -3765,16 +4689,138 @@
           <a:p>
             <a:pPr>
               <a:spcAft>
-                <a:spcPts val="1000"/>
+                <a:spcPts val="1300"/>
               </a:spcAft>
             </a:pPr>
             <a:r>
-              <a:rPr sz="2000">
-                <a:solidFill>
-                  <a:srgbClr val="2C3E50"/>
-                </a:solidFill>
+              <a:rPr sz="2000" b="1" i="0">
+                <a:solidFill>
+                  <a:srgbClr val="FF6B35"/>
+                </a:solidFill>
+                <a:latin typeface="Segoe UI"/>
+              </a:rPr>
+              <a:t>▸  </a:t>
+            </a:r>
+            <a:r>
+              <a:rPr sz="2000" b="0" i="0">
+                <a:solidFill>
+                  <a:srgbClr val="243140"/>
+                </a:solidFill>
+                <a:latin typeface="Segoe UI"/>
               </a:rPr>
               <a:t>Class-Based Views + access control (admin only).</a:t>
+            </a:r>
+          </a:p>
+        </p:txBody>
+      </p:sp>
+      <p:sp>
+        <p:nvSpPr>
+          <p:cNvPr id="8" name="Rectangle 7"/>
+          <p:cNvSpPr/>
+          <p:nvPr/>
+        </p:nvSpPr>
+        <p:spPr>
+          <a:xfrm>
+            <a:off x="502920" y="6400800"/>
+            <a:ext cx="11201400" cy="17780"/>
+          </a:xfrm>
+          <a:prstGeom prst="rect">
+            <a:avLst/>
+          </a:prstGeom>
+          <a:solidFill>
+            <a:srgbClr val="DDE3E9"/>
+          </a:solidFill>
+          <a:ln>
+            <a:noFill/>
+          </a:ln>
+        </p:spPr>
+        <p:style>
+          <a:lnRef idx="1">
+            <a:schemeClr val="accent1"/>
+          </a:lnRef>
+          <a:fillRef idx="3">
+            <a:schemeClr val="accent1"/>
+          </a:fillRef>
+          <a:effectRef idx="2">
+            <a:schemeClr val="accent1"/>
+          </a:effectRef>
+          <a:fontRef idx="minor">
+            <a:schemeClr val="lt1"/>
+          </a:fontRef>
+        </p:style>
+        <p:txBody>
+          <a:bodyPr rtlCol="0" anchor="ctr"/>
+          <a:lstStyle/>
+          <a:p>
+            <a:pPr algn="ctr"/>
+          </a:p>
+        </p:txBody>
+      </p:sp>
+      <p:sp>
+        <p:nvSpPr>
+          <p:cNvPr id="9" name="TextBox 8"/>
+          <p:cNvSpPr txBox="1"/>
+          <p:nvPr/>
+        </p:nvSpPr>
+        <p:spPr>
+          <a:xfrm>
+            <a:off x="502920" y="6446520"/>
+            <a:ext cx="8229600" cy="320040"/>
+          </a:xfrm>
+          <a:prstGeom prst="rect">
+            <a:avLst/>
+          </a:prstGeom>
+          <a:noFill/>
+        </p:spPr>
+        <p:txBody>
+          <a:bodyPr wrap="none">
+            <a:spAutoFit/>
+          </a:bodyPr>
+          <a:lstStyle/>
+          <a:p>
+            <a:r>
+              <a:rPr sz="1000" b="0" i="0">
+                <a:solidFill>
+                  <a:srgbClr val="8A97A5"/>
+                </a:solidFill>
+                <a:latin typeface="Segoe UI"/>
+              </a:rPr>
+              <a:t>BistroSaaS  |  Restaurant Management System</a:t>
+            </a:r>
+          </a:p>
+        </p:txBody>
+      </p:sp>
+      <p:sp>
+        <p:nvSpPr>
+          <p:cNvPr id="10" name="TextBox 9"/>
+          <p:cNvSpPr txBox="1"/>
+          <p:nvPr/>
+        </p:nvSpPr>
+        <p:spPr>
+          <a:xfrm>
+            <a:off x="10607040" y="6446520"/>
+            <a:ext cx="1097280" cy="320040"/>
+          </a:xfrm>
+          <a:prstGeom prst="rect">
+            <a:avLst/>
+          </a:prstGeom>
+          <a:noFill/>
+        </p:spPr>
+        <p:txBody>
+          <a:bodyPr wrap="none">
+            <a:spAutoFit/>
+          </a:bodyPr>
+          <a:lstStyle/>
+          <a:p>
+            <a:pPr algn="r"/>
+            <a:r>
+              <a:rPr sz="1000" b="1" i="0">
+                <a:solidFill>
+                  <a:srgbClr val="8A97A5"/>
+                </a:solidFill>
+                <a:latin typeface="Segoe UI"/>
+              </a:rPr>
+              <a:t>12</a:t>
             </a:r>
           </a:p>
         </p:txBody>
@@ -3790,6 +4836,14 @@
 <file path=ppt/slides/slide13.xml><?xml version="1.0" encoding="utf-8"?>
 <p:sld xmlns:a="http://schemas.openxmlformats.org/drawingml/2006/main" xmlns:p="http://schemas.openxmlformats.org/presentationml/2006/main" xmlns:r="http://schemas.openxmlformats.org/officeDocument/2006/relationships">
   <p:cSld>
+    <p:bg>
+      <p:bgPr>
+        <a:solidFill>
+          <a:srgbClr val="F5F7FA"/>
+        </a:solidFill>
+        <a:effectLst/>
+      </p:bgPr>
+    </p:bg>
     <p:spTree>
       <p:nvGrpSpPr>
         <p:cNvPr id="1" name=""/>
@@ -3806,13 +4860,13 @@
         <p:spPr>
           <a:xfrm>
             <a:off x="0" y="0"/>
-            <a:ext cx="12191695" cy="1005840"/>
+            <a:ext cx="164592" cy="6858000"/>
           </a:xfrm>
           <a:prstGeom prst="rect">
             <a:avLst/>
           </a:prstGeom>
           <a:solidFill>
-            <a:srgbClr val="2980B9"/>
+            <a:srgbClr val="FF6B35"/>
           </a:solidFill>
           <a:ln>
             <a:noFill/>
@@ -3842,14 +4896,57 @@
       </p:sp>
       <p:sp>
         <p:nvSpPr>
-          <p:cNvPr id="3" name="TextBox 2"/>
+          <p:cNvPr id="3" name="Oval 2"/>
+          <p:cNvSpPr/>
+          <p:nvPr/>
+        </p:nvSpPr>
+        <p:spPr>
+          <a:xfrm>
+            <a:off x="10561320" y="411480"/>
+            <a:ext cx="1143000" cy="1143000"/>
+          </a:xfrm>
+          <a:prstGeom prst="ellipse">
+            <a:avLst/>
+          </a:prstGeom>
+          <a:solidFill>
+            <a:srgbClr val="FDE8DF"/>
+          </a:solidFill>
+          <a:ln>
+            <a:noFill/>
+          </a:ln>
+        </p:spPr>
+        <p:style>
+          <a:lnRef idx="1">
+            <a:schemeClr val="accent1"/>
+          </a:lnRef>
+          <a:fillRef idx="3">
+            <a:schemeClr val="accent1"/>
+          </a:fillRef>
+          <a:effectRef idx="2">
+            <a:schemeClr val="accent1"/>
+          </a:effectRef>
+          <a:fontRef idx="minor">
+            <a:schemeClr val="lt1"/>
+          </a:fontRef>
+        </p:style>
+        <p:txBody>
+          <a:bodyPr rtlCol="0" anchor="ctr"/>
+          <a:lstStyle/>
+          <a:p>
+            <a:pPr algn="ctr"/>
+          </a:p>
+        </p:txBody>
+      </p:sp>
+      <p:sp>
+        <p:nvSpPr>
+          <p:cNvPr id="4" name="TextBox 3"/>
           <p:cNvSpPr txBox="1"/>
           <p:nvPr/>
         </p:nvSpPr>
         <p:spPr>
           <a:xfrm>
-            <a:off x="457200" y="164592"/>
-            <a:ext cx="11247120" cy="731520"/>
+            <a:off x="10561320" y="457200"/>
+            <a:ext cx="1143000" cy="1051560"/>
           </a:xfrm>
           <a:prstGeom prst="rect">
             <a:avLst/>
@@ -3862,11 +4959,47 @@
           </a:bodyPr>
           <a:lstStyle/>
           <a:p>
-            <a:r>
-              <a:rPr sz="3000" b="1">
-                <a:solidFill>
-                  <a:srgbClr val="FFFFFF"/>
-                </a:solidFill>
+            <a:pPr algn="ctr"/>
+            <a:r>
+              <a:rPr sz="3600" b="0" i="0">
+                <a:solidFill>
+                  <a:srgbClr val="243140"/>
+                </a:solidFill>
+                <a:latin typeface="Segoe UI"/>
+              </a:rPr>
+              <a:t>🔍</a:t>
+            </a:r>
+          </a:p>
+        </p:txBody>
+      </p:sp>
+      <p:sp>
+        <p:nvSpPr>
+          <p:cNvPr id="5" name="TextBox 4"/>
+          <p:cNvSpPr txBox="1"/>
+          <p:nvPr/>
+        </p:nvSpPr>
+        <p:spPr>
+          <a:xfrm>
+            <a:off x="502920" y="411480"/>
+            <a:ext cx="9692640" cy="777240"/>
+          </a:xfrm>
+          <a:prstGeom prst="rect">
+            <a:avLst/>
+          </a:prstGeom>
+          <a:noFill/>
+        </p:spPr>
+        <p:txBody>
+          <a:bodyPr wrap="none">
+            <a:spAutoFit/>
+          </a:bodyPr>
+          <a:lstStyle/>
+          <a:p>
+            <a:r>
+              <a:rPr sz="3200" b="1" i="0">
+                <a:solidFill>
+                  <a:srgbClr val="1E2A38"/>
+                </a:solidFill>
+                <a:latin typeface="Segoe UI"/>
               </a:rPr>
               <a:t>Search, Filter &amp; Pagination</a:t>
             </a:r>
@@ -3875,14 +5008,57 @@
       </p:sp>
       <p:sp>
         <p:nvSpPr>
-          <p:cNvPr id="4" name="TextBox 3"/>
+          <p:cNvPr id="6" name="Rounded Rectangle 5"/>
+          <p:cNvSpPr/>
+          <p:nvPr/>
+        </p:nvSpPr>
+        <p:spPr>
+          <a:xfrm>
+            <a:off x="548640" y="1170432"/>
+            <a:ext cx="2286000" cy="82296"/>
+          </a:xfrm>
+          <a:prstGeom prst="roundRect">
+            <a:avLst/>
+          </a:prstGeom>
+          <a:solidFill>
+            <a:srgbClr val="FF6B35"/>
+          </a:solidFill>
+          <a:ln>
+            <a:noFill/>
+          </a:ln>
+        </p:spPr>
+        <p:style>
+          <a:lnRef idx="1">
+            <a:schemeClr val="accent1"/>
+          </a:lnRef>
+          <a:fillRef idx="3">
+            <a:schemeClr val="accent1"/>
+          </a:fillRef>
+          <a:effectRef idx="2">
+            <a:schemeClr val="accent1"/>
+          </a:effectRef>
+          <a:fontRef idx="minor">
+            <a:schemeClr val="lt1"/>
+          </a:fontRef>
+        </p:style>
+        <p:txBody>
+          <a:bodyPr rtlCol="0" anchor="ctr"/>
+          <a:lstStyle/>
+          <a:p>
+            <a:pPr algn="ctr"/>
+          </a:p>
+        </p:txBody>
+      </p:sp>
+      <p:sp>
+        <p:nvSpPr>
+          <p:cNvPr id="7" name="TextBox 6"/>
           <p:cNvSpPr txBox="1"/>
           <p:nvPr/>
         </p:nvSpPr>
         <p:spPr>
           <a:xfrm>
-            <a:off x="548640" y="1280160"/>
-            <a:ext cx="11247120" cy="5120640"/>
+            <a:off x="640080" y="1554480"/>
+            <a:ext cx="10789920" cy="4572000"/>
           </a:xfrm>
           <a:prstGeom prst="rect">
             <a:avLst/>
@@ -3897,14 +5073,24 @@
           <a:p>
             <a:pPr>
               <a:spcAft>
-                <a:spcPts val="1000"/>
+                <a:spcPts val="1300"/>
               </a:spcAft>
             </a:pPr>
             <a:r>
-              <a:rPr sz="2000">
-                <a:solidFill>
-                  <a:srgbClr val="2C3E50"/>
-                </a:solidFill>
+              <a:rPr sz="2000" b="1" i="0">
+                <a:solidFill>
+                  <a:srgbClr val="FF6B35"/>
+                </a:solidFill>
+                <a:latin typeface="Segoe UI"/>
+              </a:rPr>
+              <a:t>▸  </a:t>
+            </a:r>
+            <a:r>
+              <a:rPr sz="2000" b="0" i="0">
+                <a:solidFill>
+                  <a:srgbClr val="243140"/>
+                </a:solidFill>
+                <a:latin typeface="Segoe UI"/>
               </a:rPr>
               <a:t>Search dishes by name or description (?q=).</a:t>
             </a:r>
@@ -3912,14 +5098,24 @@
           <a:p>
             <a:pPr>
               <a:spcAft>
-                <a:spcPts val="1000"/>
+                <a:spcPts val="1300"/>
               </a:spcAft>
             </a:pPr>
             <a:r>
-              <a:rPr sz="2000">
-                <a:solidFill>
-                  <a:srgbClr val="2C3E50"/>
-                </a:solidFill>
+              <a:rPr sz="2000" b="1" i="0">
+                <a:solidFill>
+                  <a:srgbClr val="FF6B35"/>
+                </a:solidFill>
+                <a:latin typeface="Segoe UI"/>
+              </a:rPr>
+              <a:t>▸  </a:t>
+            </a:r>
+            <a:r>
+              <a:rPr sz="2000" b="0" i="0">
+                <a:solidFill>
+                  <a:srgbClr val="243140"/>
+                </a:solidFill>
+                <a:latin typeface="Segoe UI"/>
               </a:rPr>
               <a:t>Filter by category buttons (?category=).</a:t>
             </a:r>
@@ -3927,31 +5123,163 @@
           <a:p>
             <a:pPr>
               <a:spcAft>
-                <a:spcPts val="1000"/>
+                <a:spcPts val="1300"/>
               </a:spcAft>
             </a:pPr>
             <a:r>
-              <a:rPr sz="2000">
-                <a:solidFill>
-                  <a:srgbClr val="2C3E50"/>
-                </a:solidFill>
-              </a:rPr>
-              <a:t>6 items per page with Previous/Next controls.</a:t>
+              <a:rPr sz="2000" b="1" i="0">
+                <a:solidFill>
+                  <a:srgbClr val="FF6B35"/>
+                </a:solidFill>
+                <a:latin typeface="Segoe UI"/>
+              </a:rPr>
+              <a:t>▸  </a:t>
+            </a:r>
+            <a:r>
+              <a:rPr sz="2000" b="0" i="0">
+                <a:solidFill>
+                  <a:srgbClr val="243140"/>
+                </a:solidFill>
+                <a:latin typeface="Segoe UI"/>
+              </a:rPr>
+              <a:t>6 items per page with Previous / Next controls.</a:t>
             </a:r>
           </a:p>
           <a:p>
             <a:pPr>
               <a:spcAft>
-                <a:spcPts val="1000"/>
+                <a:spcPts val="1300"/>
               </a:spcAft>
             </a:pPr>
             <a:r>
-              <a:rPr sz="2000">
-                <a:solidFill>
-                  <a:srgbClr val="2C3E50"/>
-                </a:solidFill>
+              <a:rPr sz="2000" b="1" i="0">
+                <a:solidFill>
+                  <a:srgbClr val="FF6B35"/>
+                </a:solidFill>
+                <a:latin typeface="Segoe UI"/>
+              </a:rPr>
+              <a:t>▸  </a:t>
+            </a:r>
+            <a:r>
+              <a:rPr sz="2000" b="0" i="0">
+                <a:solidFill>
+                  <a:srgbClr val="243140"/>
+                </a:solidFill>
+                <a:latin typeface="Segoe UI"/>
               </a:rPr>
               <a:t>Implemented in MenuListView.</a:t>
+            </a:r>
+          </a:p>
+        </p:txBody>
+      </p:sp>
+      <p:sp>
+        <p:nvSpPr>
+          <p:cNvPr id="8" name="Rectangle 7"/>
+          <p:cNvSpPr/>
+          <p:nvPr/>
+        </p:nvSpPr>
+        <p:spPr>
+          <a:xfrm>
+            <a:off x="502920" y="6400800"/>
+            <a:ext cx="11201400" cy="17780"/>
+          </a:xfrm>
+          <a:prstGeom prst="rect">
+            <a:avLst/>
+          </a:prstGeom>
+          <a:solidFill>
+            <a:srgbClr val="DDE3E9"/>
+          </a:solidFill>
+          <a:ln>
+            <a:noFill/>
+          </a:ln>
+        </p:spPr>
+        <p:style>
+          <a:lnRef idx="1">
+            <a:schemeClr val="accent1"/>
+          </a:lnRef>
+          <a:fillRef idx="3">
+            <a:schemeClr val="accent1"/>
+          </a:fillRef>
+          <a:effectRef idx="2">
+            <a:schemeClr val="accent1"/>
+          </a:effectRef>
+          <a:fontRef idx="minor">
+            <a:schemeClr val="lt1"/>
+          </a:fontRef>
+        </p:style>
+        <p:txBody>
+          <a:bodyPr rtlCol="0" anchor="ctr"/>
+          <a:lstStyle/>
+          <a:p>
+            <a:pPr algn="ctr"/>
+          </a:p>
+        </p:txBody>
+      </p:sp>
+      <p:sp>
+        <p:nvSpPr>
+          <p:cNvPr id="9" name="TextBox 8"/>
+          <p:cNvSpPr txBox="1"/>
+          <p:nvPr/>
+        </p:nvSpPr>
+        <p:spPr>
+          <a:xfrm>
+            <a:off x="502920" y="6446520"/>
+            <a:ext cx="8229600" cy="320040"/>
+          </a:xfrm>
+          <a:prstGeom prst="rect">
+            <a:avLst/>
+          </a:prstGeom>
+          <a:noFill/>
+        </p:spPr>
+        <p:txBody>
+          <a:bodyPr wrap="none">
+            <a:spAutoFit/>
+          </a:bodyPr>
+          <a:lstStyle/>
+          <a:p>
+            <a:r>
+              <a:rPr sz="1000" b="0" i="0">
+                <a:solidFill>
+                  <a:srgbClr val="8A97A5"/>
+                </a:solidFill>
+                <a:latin typeface="Segoe UI"/>
+              </a:rPr>
+              <a:t>BistroSaaS  |  Restaurant Management System</a:t>
+            </a:r>
+          </a:p>
+        </p:txBody>
+      </p:sp>
+      <p:sp>
+        <p:nvSpPr>
+          <p:cNvPr id="10" name="TextBox 9"/>
+          <p:cNvSpPr txBox="1"/>
+          <p:nvPr/>
+        </p:nvSpPr>
+        <p:spPr>
+          <a:xfrm>
+            <a:off x="10607040" y="6446520"/>
+            <a:ext cx="1097280" cy="320040"/>
+          </a:xfrm>
+          <a:prstGeom prst="rect">
+            <a:avLst/>
+          </a:prstGeom>
+          <a:noFill/>
+        </p:spPr>
+        <p:txBody>
+          <a:bodyPr wrap="none">
+            <a:spAutoFit/>
+          </a:bodyPr>
+          <a:lstStyle/>
+          <a:p>
+            <a:pPr algn="r"/>
+            <a:r>
+              <a:rPr sz="1000" b="1" i="0">
+                <a:solidFill>
+                  <a:srgbClr val="8A97A5"/>
+                </a:solidFill>
+                <a:latin typeface="Segoe UI"/>
+              </a:rPr>
+              <a:t>13</a:t>
             </a:r>
           </a:p>
         </p:txBody>
@@ -3967,6 +5295,14 @@
 <file path=ppt/slides/slide14.xml><?xml version="1.0" encoding="utf-8"?>
 <p:sld xmlns:a="http://schemas.openxmlformats.org/drawingml/2006/main" xmlns:p="http://schemas.openxmlformats.org/presentationml/2006/main" xmlns:r="http://schemas.openxmlformats.org/officeDocument/2006/relationships">
   <p:cSld>
+    <p:bg>
+      <p:bgPr>
+        <a:solidFill>
+          <a:srgbClr val="F5F7FA"/>
+        </a:solidFill>
+        <a:effectLst/>
+      </p:bgPr>
+    </p:bg>
     <p:spTree>
       <p:nvGrpSpPr>
         <p:cNvPr id="1" name=""/>
@@ -3983,13 +5319,13 @@
         <p:spPr>
           <a:xfrm>
             <a:off x="0" y="0"/>
-            <a:ext cx="12191695" cy="1005840"/>
+            <a:ext cx="164592" cy="6858000"/>
           </a:xfrm>
           <a:prstGeom prst="rect">
             <a:avLst/>
           </a:prstGeom>
           <a:solidFill>
-            <a:srgbClr val="2980B9"/>
+            <a:srgbClr val="FF6B35"/>
           </a:solidFill>
           <a:ln>
             <a:noFill/>
@@ -4019,14 +5355,57 @@
       </p:sp>
       <p:sp>
         <p:nvSpPr>
-          <p:cNvPr id="3" name="TextBox 2"/>
+          <p:cNvPr id="3" name="Oval 2"/>
+          <p:cNvSpPr/>
+          <p:nvPr/>
+        </p:nvSpPr>
+        <p:spPr>
+          <a:xfrm>
+            <a:off x="10561320" y="411480"/>
+            <a:ext cx="1143000" cy="1143000"/>
+          </a:xfrm>
+          <a:prstGeom prst="ellipse">
+            <a:avLst/>
+          </a:prstGeom>
+          <a:solidFill>
+            <a:srgbClr val="FDE8DF"/>
+          </a:solidFill>
+          <a:ln>
+            <a:noFill/>
+          </a:ln>
+        </p:spPr>
+        <p:style>
+          <a:lnRef idx="1">
+            <a:schemeClr val="accent1"/>
+          </a:lnRef>
+          <a:fillRef idx="3">
+            <a:schemeClr val="accent1"/>
+          </a:fillRef>
+          <a:effectRef idx="2">
+            <a:schemeClr val="accent1"/>
+          </a:effectRef>
+          <a:fontRef idx="minor">
+            <a:schemeClr val="lt1"/>
+          </a:fontRef>
+        </p:style>
+        <p:txBody>
+          <a:bodyPr rtlCol="0" anchor="ctr"/>
+          <a:lstStyle/>
+          <a:p>
+            <a:pPr algn="ctr"/>
+          </a:p>
+        </p:txBody>
+      </p:sp>
+      <p:sp>
+        <p:nvSpPr>
+          <p:cNvPr id="4" name="TextBox 3"/>
           <p:cNvSpPr txBox="1"/>
           <p:nvPr/>
         </p:nvSpPr>
         <p:spPr>
           <a:xfrm>
-            <a:off x="457200" y="164592"/>
-            <a:ext cx="11247120" cy="731520"/>
+            <a:off x="10561320" y="457200"/>
+            <a:ext cx="1143000" cy="1051560"/>
           </a:xfrm>
           <a:prstGeom prst="rect">
             <a:avLst/>
@@ -4039,11 +5418,47 @@
           </a:bodyPr>
           <a:lstStyle/>
           <a:p>
-            <a:r>
-              <a:rPr sz="3000" b="1">
-                <a:solidFill>
-                  <a:srgbClr val="FFFFFF"/>
-                </a:solidFill>
+            <a:pPr algn="ctr"/>
+            <a:r>
+              <a:rPr sz="3600" b="0" i="0">
+                <a:solidFill>
+                  <a:srgbClr val="243140"/>
+                </a:solidFill>
+                <a:latin typeface="Segoe UI"/>
+              </a:rPr>
+              <a:t>🛒</a:t>
+            </a:r>
+          </a:p>
+        </p:txBody>
+      </p:sp>
+      <p:sp>
+        <p:nvSpPr>
+          <p:cNvPr id="5" name="TextBox 4"/>
+          <p:cNvSpPr txBox="1"/>
+          <p:nvPr/>
+        </p:nvSpPr>
+        <p:spPr>
+          <a:xfrm>
+            <a:off x="502920" y="411480"/>
+            <a:ext cx="9692640" cy="777240"/>
+          </a:xfrm>
+          <a:prstGeom prst="rect">
+            <a:avLst/>
+          </a:prstGeom>
+          <a:noFill/>
+        </p:spPr>
+        <p:txBody>
+          <a:bodyPr wrap="none">
+            <a:spAutoFit/>
+          </a:bodyPr>
+          <a:lstStyle/>
+          <a:p>
+            <a:r>
+              <a:rPr sz="3200" b="1" i="0">
+                <a:solidFill>
+                  <a:srgbClr val="1E2A38"/>
+                </a:solidFill>
+                <a:latin typeface="Segoe UI"/>
               </a:rPr>
               <a:t>Order Placement Flow</a:t>
             </a:r>
@@ -4052,14 +5467,57 @@
       </p:sp>
       <p:sp>
         <p:nvSpPr>
-          <p:cNvPr id="4" name="TextBox 3"/>
+          <p:cNvPr id="6" name="Rounded Rectangle 5"/>
+          <p:cNvSpPr/>
+          <p:nvPr/>
+        </p:nvSpPr>
+        <p:spPr>
+          <a:xfrm>
+            <a:off x="548640" y="1170432"/>
+            <a:ext cx="2286000" cy="82296"/>
+          </a:xfrm>
+          <a:prstGeom prst="roundRect">
+            <a:avLst/>
+          </a:prstGeom>
+          <a:solidFill>
+            <a:srgbClr val="FF6B35"/>
+          </a:solidFill>
+          <a:ln>
+            <a:noFill/>
+          </a:ln>
+        </p:spPr>
+        <p:style>
+          <a:lnRef idx="1">
+            <a:schemeClr val="accent1"/>
+          </a:lnRef>
+          <a:fillRef idx="3">
+            <a:schemeClr val="accent1"/>
+          </a:fillRef>
+          <a:effectRef idx="2">
+            <a:schemeClr val="accent1"/>
+          </a:effectRef>
+          <a:fontRef idx="minor">
+            <a:schemeClr val="lt1"/>
+          </a:fontRef>
+        </p:style>
+        <p:txBody>
+          <a:bodyPr rtlCol="0" anchor="ctr"/>
+          <a:lstStyle/>
+          <a:p>
+            <a:pPr algn="ctr"/>
+          </a:p>
+        </p:txBody>
+      </p:sp>
+      <p:sp>
+        <p:nvSpPr>
+          <p:cNvPr id="7" name="TextBox 6"/>
           <p:cNvSpPr txBox="1"/>
           <p:nvPr/>
         </p:nvSpPr>
         <p:spPr>
           <a:xfrm>
-            <a:off x="548640" y="1280160"/>
-            <a:ext cx="11247120" cy="5120640"/>
+            <a:off x="640080" y="1554480"/>
+            <a:ext cx="10789920" cy="4572000"/>
           </a:xfrm>
           <a:prstGeom prst="rect">
             <a:avLst/>
@@ -4074,14 +5532,24 @@
           <a:p>
             <a:pPr>
               <a:spcAft>
-                <a:spcPts val="1000"/>
+                <a:spcPts val="1300"/>
               </a:spcAft>
             </a:pPr>
             <a:r>
-              <a:rPr sz="2000">
-                <a:solidFill>
-                  <a:srgbClr val="2C3E50"/>
-                </a:solidFill>
+              <a:rPr sz="2000" b="1" i="0">
+                <a:solidFill>
+                  <a:srgbClr val="FF6B35"/>
+                </a:solidFill>
+                <a:latin typeface="Segoe UI"/>
+              </a:rPr>
+              <a:t>▸  </a:t>
+            </a:r>
+            <a:r>
+              <a:rPr sz="2000" b="0" i="0">
+                <a:solidFill>
+                  <a:srgbClr val="243140"/>
+                </a:solidFill>
+                <a:latin typeface="Segoe UI"/>
               </a:rPr>
               <a:t>Customer selects items with checkboxes.</a:t>
             </a:r>
@@ -4089,14 +5557,24 @@
           <a:p>
             <a:pPr>
               <a:spcAft>
-                <a:spcPts val="1000"/>
+                <a:spcPts val="1300"/>
               </a:spcAft>
             </a:pPr>
             <a:r>
-              <a:rPr sz="2000">
-                <a:solidFill>
-                  <a:srgbClr val="2C3E50"/>
-                </a:solidFill>
+              <a:rPr sz="2000" b="1" i="0">
+                <a:solidFill>
+                  <a:srgbClr val="FF6B35"/>
+                </a:solidFill>
+                <a:latin typeface="Segoe UI"/>
+              </a:rPr>
+              <a:t>▸  </a:t>
+            </a:r>
+            <a:r>
+              <a:rPr sz="2000" b="0" i="0">
+                <a:solidFill>
+                  <a:srgbClr val="243140"/>
+                </a:solidFill>
+                <a:latin typeface="Segoe UI"/>
               </a:rPr>
               <a:t>Live JavaScript total updates instantly.</a:t>
             </a:r>
@@ -4104,14 +5582,24 @@
           <a:p>
             <a:pPr>
               <a:spcAft>
-                <a:spcPts val="1000"/>
+                <a:spcPts val="1300"/>
               </a:spcAft>
             </a:pPr>
             <a:r>
-              <a:rPr sz="2000">
-                <a:solidFill>
-                  <a:srgbClr val="2C3E50"/>
-                </a:solidFill>
+              <a:rPr sz="2000" b="1" i="0">
+                <a:solidFill>
+                  <a:srgbClr val="FF6B35"/>
+                </a:solidFill>
+                <a:latin typeface="Segoe UI"/>
+              </a:rPr>
+              <a:t>▸  </a:t>
+            </a:r>
+            <a:r>
+              <a:rPr sz="2000" b="0" i="0">
+                <a:solidFill>
+                  <a:srgbClr val="243140"/>
+                </a:solidFill>
+                <a:latin typeface="Segoe UI"/>
               </a:rPr>
               <a:t>Server recomputes the real total on submit.</a:t>
             </a:r>
@@ -4119,16 +5607,138 @@
           <a:p>
             <a:pPr>
               <a:spcAft>
-                <a:spcPts val="1000"/>
+                <a:spcPts val="1300"/>
               </a:spcAft>
             </a:pPr>
             <a:r>
-              <a:rPr sz="2000">
-                <a:solidFill>
-                  <a:srgbClr val="2C3E50"/>
-                </a:solidFill>
+              <a:rPr sz="2000" b="1" i="0">
+                <a:solidFill>
+                  <a:srgbClr val="FF6B35"/>
+                </a:solidFill>
+                <a:latin typeface="Segoe UI"/>
+              </a:rPr>
+              <a:t>▸  </a:t>
+            </a:r>
+            <a:r>
+              <a:rPr sz="2000" b="0" i="0">
+                <a:solidFill>
+                  <a:srgbClr val="243140"/>
+                </a:solidFill>
+                <a:latin typeface="Segoe UI"/>
               </a:rPr>
               <a:t>Order saved with status = Pending.</a:t>
+            </a:r>
+          </a:p>
+        </p:txBody>
+      </p:sp>
+      <p:sp>
+        <p:nvSpPr>
+          <p:cNvPr id="8" name="Rectangle 7"/>
+          <p:cNvSpPr/>
+          <p:nvPr/>
+        </p:nvSpPr>
+        <p:spPr>
+          <a:xfrm>
+            <a:off x="502920" y="6400800"/>
+            <a:ext cx="11201400" cy="17780"/>
+          </a:xfrm>
+          <a:prstGeom prst="rect">
+            <a:avLst/>
+          </a:prstGeom>
+          <a:solidFill>
+            <a:srgbClr val="DDE3E9"/>
+          </a:solidFill>
+          <a:ln>
+            <a:noFill/>
+          </a:ln>
+        </p:spPr>
+        <p:style>
+          <a:lnRef idx="1">
+            <a:schemeClr val="accent1"/>
+          </a:lnRef>
+          <a:fillRef idx="3">
+            <a:schemeClr val="accent1"/>
+          </a:fillRef>
+          <a:effectRef idx="2">
+            <a:schemeClr val="accent1"/>
+          </a:effectRef>
+          <a:fontRef idx="minor">
+            <a:schemeClr val="lt1"/>
+          </a:fontRef>
+        </p:style>
+        <p:txBody>
+          <a:bodyPr rtlCol="0" anchor="ctr"/>
+          <a:lstStyle/>
+          <a:p>
+            <a:pPr algn="ctr"/>
+          </a:p>
+        </p:txBody>
+      </p:sp>
+      <p:sp>
+        <p:nvSpPr>
+          <p:cNvPr id="9" name="TextBox 8"/>
+          <p:cNvSpPr txBox="1"/>
+          <p:nvPr/>
+        </p:nvSpPr>
+        <p:spPr>
+          <a:xfrm>
+            <a:off x="502920" y="6446520"/>
+            <a:ext cx="8229600" cy="320040"/>
+          </a:xfrm>
+          <a:prstGeom prst="rect">
+            <a:avLst/>
+          </a:prstGeom>
+          <a:noFill/>
+        </p:spPr>
+        <p:txBody>
+          <a:bodyPr wrap="none">
+            <a:spAutoFit/>
+          </a:bodyPr>
+          <a:lstStyle/>
+          <a:p>
+            <a:r>
+              <a:rPr sz="1000" b="0" i="0">
+                <a:solidFill>
+                  <a:srgbClr val="8A97A5"/>
+                </a:solidFill>
+                <a:latin typeface="Segoe UI"/>
+              </a:rPr>
+              <a:t>BistroSaaS  |  Restaurant Management System</a:t>
+            </a:r>
+          </a:p>
+        </p:txBody>
+      </p:sp>
+      <p:sp>
+        <p:nvSpPr>
+          <p:cNvPr id="10" name="TextBox 9"/>
+          <p:cNvSpPr txBox="1"/>
+          <p:nvPr/>
+        </p:nvSpPr>
+        <p:spPr>
+          <a:xfrm>
+            <a:off x="10607040" y="6446520"/>
+            <a:ext cx="1097280" cy="320040"/>
+          </a:xfrm>
+          <a:prstGeom prst="rect">
+            <a:avLst/>
+          </a:prstGeom>
+          <a:noFill/>
+        </p:spPr>
+        <p:txBody>
+          <a:bodyPr wrap="none">
+            <a:spAutoFit/>
+          </a:bodyPr>
+          <a:lstStyle/>
+          <a:p>
+            <a:pPr algn="r"/>
+            <a:r>
+              <a:rPr sz="1000" b="1" i="0">
+                <a:solidFill>
+                  <a:srgbClr val="8A97A5"/>
+                </a:solidFill>
+                <a:latin typeface="Segoe UI"/>
+              </a:rPr>
+              <a:t>14</a:t>
             </a:r>
           </a:p>
         </p:txBody>
@@ -4144,6 +5754,14 @@
 <file path=ppt/slides/slide15.xml><?xml version="1.0" encoding="utf-8"?>
 <p:sld xmlns:a="http://schemas.openxmlformats.org/drawingml/2006/main" xmlns:p="http://schemas.openxmlformats.org/presentationml/2006/main" xmlns:r="http://schemas.openxmlformats.org/officeDocument/2006/relationships">
   <p:cSld>
+    <p:bg>
+      <p:bgPr>
+        <a:solidFill>
+          <a:srgbClr val="F5F7FA"/>
+        </a:solidFill>
+        <a:effectLst/>
+      </p:bgPr>
+    </p:bg>
     <p:spTree>
       <p:nvGrpSpPr>
         <p:cNvPr id="1" name=""/>
@@ -4160,13 +5778,13 @@
         <p:spPr>
           <a:xfrm>
             <a:off x="0" y="0"/>
-            <a:ext cx="12191695" cy="1005840"/>
+            <a:ext cx="164592" cy="6858000"/>
           </a:xfrm>
           <a:prstGeom prst="rect">
             <a:avLst/>
           </a:prstGeom>
           <a:solidFill>
-            <a:srgbClr val="2980B9"/>
+            <a:srgbClr val="FF6B35"/>
           </a:solidFill>
           <a:ln>
             <a:noFill/>
@@ -4196,14 +5814,57 @@
       </p:sp>
       <p:sp>
         <p:nvSpPr>
-          <p:cNvPr id="3" name="TextBox 2"/>
+          <p:cNvPr id="3" name="Oval 2"/>
+          <p:cNvSpPr/>
+          <p:nvPr/>
+        </p:nvSpPr>
+        <p:spPr>
+          <a:xfrm>
+            <a:off x="10561320" y="411480"/>
+            <a:ext cx="1143000" cy="1143000"/>
+          </a:xfrm>
+          <a:prstGeom prst="ellipse">
+            <a:avLst/>
+          </a:prstGeom>
+          <a:solidFill>
+            <a:srgbClr val="FDE8DF"/>
+          </a:solidFill>
+          <a:ln>
+            <a:noFill/>
+          </a:ln>
+        </p:spPr>
+        <p:style>
+          <a:lnRef idx="1">
+            <a:schemeClr val="accent1"/>
+          </a:lnRef>
+          <a:fillRef idx="3">
+            <a:schemeClr val="accent1"/>
+          </a:fillRef>
+          <a:effectRef idx="2">
+            <a:schemeClr val="accent1"/>
+          </a:effectRef>
+          <a:fontRef idx="minor">
+            <a:schemeClr val="lt1"/>
+          </a:fontRef>
+        </p:style>
+        <p:txBody>
+          <a:bodyPr rtlCol="0" anchor="ctr"/>
+          <a:lstStyle/>
+          <a:p>
+            <a:pPr algn="ctr"/>
+          </a:p>
+        </p:txBody>
+      </p:sp>
+      <p:sp>
+        <p:nvSpPr>
+          <p:cNvPr id="4" name="TextBox 3"/>
           <p:cNvSpPr txBox="1"/>
           <p:nvPr/>
         </p:nvSpPr>
         <p:spPr>
           <a:xfrm>
-            <a:off x="457200" y="164592"/>
-            <a:ext cx="11247120" cy="731520"/>
+            <a:off x="10561320" y="457200"/>
+            <a:ext cx="1143000" cy="1051560"/>
           </a:xfrm>
           <a:prstGeom prst="rect">
             <a:avLst/>
@@ -4216,11 +5877,47 @@
           </a:bodyPr>
           <a:lstStyle/>
           <a:p>
-            <a:r>
-              <a:rPr sz="3000" b="1">
-                <a:solidFill>
-                  <a:srgbClr val="FFFFFF"/>
-                </a:solidFill>
+            <a:pPr algn="ctr"/>
+            <a:r>
+              <a:rPr sz="3600" b="0" i="0">
+                <a:solidFill>
+                  <a:srgbClr val="243140"/>
+                </a:solidFill>
+                <a:latin typeface="Segoe UI"/>
+              </a:rPr>
+              <a:t>🔔</a:t>
+            </a:r>
+          </a:p>
+        </p:txBody>
+      </p:sp>
+      <p:sp>
+        <p:nvSpPr>
+          <p:cNvPr id="5" name="TextBox 4"/>
+          <p:cNvSpPr txBox="1"/>
+          <p:nvPr/>
+        </p:nvSpPr>
+        <p:spPr>
+          <a:xfrm>
+            <a:off x="502920" y="411480"/>
+            <a:ext cx="9692640" cy="777240"/>
+          </a:xfrm>
+          <a:prstGeom prst="rect">
+            <a:avLst/>
+          </a:prstGeom>
+          <a:noFill/>
+        </p:spPr>
+        <p:txBody>
+          <a:bodyPr wrap="none">
+            <a:spAutoFit/>
+          </a:bodyPr>
+          <a:lstStyle/>
+          <a:p>
+            <a:r>
+              <a:rPr sz="3200" b="1" i="0">
+                <a:solidFill>
+                  <a:srgbClr val="1E2A38"/>
+                </a:solidFill>
+                <a:latin typeface="Segoe UI"/>
               </a:rPr>
               <a:t>Order Confirmation &amp; Notifications</a:t>
             </a:r>
@@ -4229,14 +5926,57 @@
       </p:sp>
       <p:sp>
         <p:nvSpPr>
-          <p:cNvPr id="4" name="TextBox 3"/>
+          <p:cNvPr id="6" name="Rounded Rectangle 5"/>
+          <p:cNvSpPr/>
+          <p:nvPr/>
+        </p:nvSpPr>
+        <p:spPr>
+          <a:xfrm>
+            <a:off x="548640" y="1170432"/>
+            <a:ext cx="2286000" cy="82296"/>
+          </a:xfrm>
+          <a:prstGeom prst="roundRect">
+            <a:avLst/>
+          </a:prstGeom>
+          <a:solidFill>
+            <a:srgbClr val="FF6B35"/>
+          </a:solidFill>
+          <a:ln>
+            <a:noFill/>
+          </a:ln>
+        </p:spPr>
+        <p:style>
+          <a:lnRef idx="1">
+            <a:schemeClr val="accent1"/>
+          </a:lnRef>
+          <a:fillRef idx="3">
+            <a:schemeClr val="accent1"/>
+          </a:fillRef>
+          <a:effectRef idx="2">
+            <a:schemeClr val="accent1"/>
+          </a:effectRef>
+          <a:fontRef idx="minor">
+            <a:schemeClr val="lt1"/>
+          </a:fontRef>
+        </p:style>
+        <p:txBody>
+          <a:bodyPr rtlCol="0" anchor="ctr"/>
+          <a:lstStyle/>
+          <a:p>
+            <a:pPr algn="ctr"/>
+          </a:p>
+        </p:txBody>
+      </p:sp>
+      <p:sp>
+        <p:nvSpPr>
+          <p:cNvPr id="7" name="TextBox 6"/>
           <p:cNvSpPr txBox="1"/>
           <p:nvPr/>
         </p:nvSpPr>
         <p:spPr>
           <a:xfrm>
-            <a:off x="548640" y="1280160"/>
-            <a:ext cx="11247120" cy="5120640"/>
+            <a:off x="640080" y="1554480"/>
+            <a:ext cx="10789920" cy="4572000"/>
           </a:xfrm>
           <a:prstGeom prst="rect">
             <a:avLst/>
@@ -4251,14 +5991,24 @@
           <a:p>
             <a:pPr>
               <a:spcAft>
-                <a:spcPts val="1000"/>
+                <a:spcPts val="1300"/>
               </a:spcAft>
             </a:pPr>
             <a:r>
-              <a:rPr sz="2000">
-                <a:solidFill>
-                  <a:srgbClr val="2C3E50"/>
-                </a:solidFill>
+              <a:rPr sz="2000" b="1" i="0">
+                <a:solidFill>
+                  <a:srgbClr val="FF6B35"/>
+                </a:solidFill>
+                <a:latin typeface="Segoe UI"/>
+              </a:rPr>
+              <a:t>▸  </a:t>
+            </a:r>
+            <a:r>
+              <a:rPr sz="2000" b="0" i="0">
+                <a:solidFill>
+                  <a:srgbClr val="243140"/>
+                </a:solidFill>
+                <a:latin typeface="Segoe UI"/>
               </a:rPr>
               <a:t>Admin updates status: Pending -&gt; Preparing -&gt; Completed / Cancelled.</a:t>
             </a:r>
@@ -4266,14 +6016,24 @@
           <a:p>
             <a:pPr>
               <a:spcAft>
-                <a:spcPts val="1000"/>
+                <a:spcPts val="1300"/>
               </a:spcAft>
             </a:pPr>
             <a:r>
-              <a:rPr sz="2000">
-                <a:solidFill>
-                  <a:srgbClr val="2C3E50"/>
-                </a:solidFill>
+              <a:rPr sz="2000" b="1" i="0">
+                <a:solidFill>
+                  <a:srgbClr val="FF6B35"/>
+                </a:solidFill>
+                <a:latin typeface="Segoe UI"/>
+              </a:rPr>
+              <a:t>▸  </a:t>
+            </a:r>
+            <a:r>
+              <a:rPr sz="2000" b="0" i="0">
+                <a:solidFill>
+                  <a:srgbClr val="243140"/>
+                </a:solidFill>
+                <a:latin typeface="Segoe UI"/>
               </a:rPr>
               <a:t>Customer gets a red notification badge.</a:t>
             </a:r>
@@ -4281,14 +6041,24 @@
           <a:p>
             <a:pPr>
               <a:spcAft>
-                <a:spcPts val="1000"/>
+                <a:spcPts val="1300"/>
               </a:spcAft>
             </a:pPr>
             <a:r>
-              <a:rPr sz="2000">
-                <a:solidFill>
-                  <a:srgbClr val="2C3E50"/>
-                </a:solidFill>
+              <a:rPr sz="2000" b="1" i="0">
+                <a:solidFill>
+                  <a:srgbClr val="FF6B35"/>
+                </a:solidFill>
+                <a:latin typeface="Segoe UI"/>
+              </a:rPr>
+              <a:t>▸  </a:t>
+            </a:r>
+            <a:r>
+              <a:rPr sz="2000" b="0" i="0">
+                <a:solidFill>
+                  <a:srgbClr val="243140"/>
+                </a:solidFill>
+                <a:latin typeface="Segoe UI"/>
               </a:rPr>
               <a:t>Updated orders highlighted on 'My Orders'.</a:t>
             </a:r>
@@ -4296,16 +6066,138 @@
           <a:p>
             <a:pPr>
               <a:spcAft>
-                <a:spcPts val="1000"/>
+                <a:spcPts val="1300"/>
               </a:spcAft>
             </a:pPr>
             <a:r>
-              <a:rPr sz="2000">
-                <a:solidFill>
-                  <a:srgbClr val="2C3E50"/>
-                </a:solidFill>
+              <a:rPr sz="2000" b="1" i="0">
+                <a:solidFill>
+                  <a:srgbClr val="FF6B35"/>
+                </a:solidFill>
+                <a:latin typeface="Segoe UI"/>
+              </a:rPr>
+              <a:t>▸  </a:t>
+            </a:r>
+            <a:r>
+              <a:rPr sz="2000" b="0" i="0">
+                <a:solidFill>
+                  <a:srgbClr val="243140"/>
+                </a:solidFill>
+                <a:latin typeface="Segoe UI"/>
               </a:rPr>
               <a:t>Badge clears when the customer views orders.</a:t>
+            </a:r>
+          </a:p>
+        </p:txBody>
+      </p:sp>
+      <p:sp>
+        <p:nvSpPr>
+          <p:cNvPr id="8" name="Rectangle 7"/>
+          <p:cNvSpPr/>
+          <p:nvPr/>
+        </p:nvSpPr>
+        <p:spPr>
+          <a:xfrm>
+            <a:off x="502920" y="6400800"/>
+            <a:ext cx="11201400" cy="17780"/>
+          </a:xfrm>
+          <a:prstGeom prst="rect">
+            <a:avLst/>
+          </a:prstGeom>
+          <a:solidFill>
+            <a:srgbClr val="DDE3E9"/>
+          </a:solidFill>
+          <a:ln>
+            <a:noFill/>
+          </a:ln>
+        </p:spPr>
+        <p:style>
+          <a:lnRef idx="1">
+            <a:schemeClr val="accent1"/>
+          </a:lnRef>
+          <a:fillRef idx="3">
+            <a:schemeClr val="accent1"/>
+          </a:fillRef>
+          <a:effectRef idx="2">
+            <a:schemeClr val="accent1"/>
+          </a:effectRef>
+          <a:fontRef idx="minor">
+            <a:schemeClr val="lt1"/>
+          </a:fontRef>
+        </p:style>
+        <p:txBody>
+          <a:bodyPr rtlCol="0" anchor="ctr"/>
+          <a:lstStyle/>
+          <a:p>
+            <a:pPr algn="ctr"/>
+          </a:p>
+        </p:txBody>
+      </p:sp>
+      <p:sp>
+        <p:nvSpPr>
+          <p:cNvPr id="9" name="TextBox 8"/>
+          <p:cNvSpPr txBox="1"/>
+          <p:nvPr/>
+        </p:nvSpPr>
+        <p:spPr>
+          <a:xfrm>
+            <a:off x="502920" y="6446520"/>
+            <a:ext cx="8229600" cy="320040"/>
+          </a:xfrm>
+          <a:prstGeom prst="rect">
+            <a:avLst/>
+          </a:prstGeom>
+          <a:noFill/>
+        </p:spPr>
+        <p:txBody>
+          <a:bodyPr wrap="none">
+            <a:spAutoFit/>
+          </a:bodyPr>
+          <a:lstStyle/>
+          <a:p>
+            <a:r>
+              <a:rPr sz="1000" b="0" i="0">
+                <a:solidFill>
+                  <a:srgbClr val="8A97A5"/>
+                </a:solidFill>
+                <a:latin typeface="Segoe UI"/>
+              </a:rPr>
+              <a:t>BistroSaaS  |  Restaurant Management System</a:t>
+            </a:r>
+          </a:p>
+        </p:txBody>
+      </p:sp>
+      <p:sp>
+        <p:nvSpPr>
+          <p:cNvPr id="10" name="TextBox 9"/>
+          <p:cNvSpPr txBox="1"/>
+          <p:nvPr/>
+        </p:nvSpPr>
+        <p:spPr>
+          <a:xfrm>
+            <a:off x="10607040" y="6446520"/>
+            <a:ext cx="1097280" cy="320040"/>
+          </a:xfrm>
+          <a:prstGeom prst="rect">
+            <a:avLst/>
+          </a:prstGeom>
+          <a:noFill/>
+        </p:spPr>
+        <p:txBody>
+          <a:bodyPr wrap="none">
+            <a:spAutoFit/>
+          </a:bodyPr>
+          <a:lstStyle/>
+          <a:p>
+            <a:pPr algn="r"/>
+            <a:r>
+              <a:rPr sz="1000" b="1" i="0">
+                <a:solidFill>
+                  <a:srgbClr val="8A97A5"/>
+                </a:solidFill>
+                <a:latin typeface="Segoe UI"/>
+              </a:rPr>
+              <a:t>15</a:t>
             </a:r>
           </a:p>
         </p:txBody>
@@ -4321,6 +6213,14 @@
 <file path=ppt/slides/slide16.xml><?xml version="1.0" encoding="utf-8"?>
 <p:sld xmlns:a="http://schemas.openxmlformats.org/drawingml/2006/main" xmlns:p="http://schemas.openxmlformats.org/presentationml/2006/main" xmlns:r="http://schemas.openxmlformats.org/officeDocument/2006/relationships">
   <p:cSld>
+    <p:bg>
+      <p:bgPr>
+        <a:solidFill>
+          <a:srgbClr val="F5F7FA"/>
+        </a:solidFill>
+        <a:effectLst/>
+      </p:bgPr>
+    </p:bg>
     <p:spTree>
       <p:nvGrpSpPr>
         <p:cNvPr id="1" name=""/>
@@ -4337,13 +6237,13 @@
         <p:spPr>
           <a:xfrm>
             <a:off x="0" y="0"/>
-            <a:ext cx="12191695" cy="1005840"/>
+            <a:ext cx="164592" cy="6858000"/>
           </a:xfrm>
           <a:prstGeom prst="rect">
             <a:avLst/>
           </a:prstGeom>
           <a:solidFill>
-            <a:srgbClr val="2980B9"/>
+            <a:srgbClr val="FF6B35"/>
           </a:solidFill>
           <a:ln>
             <a:noFill/>
@@ -4373,14 +6273,57 @@
       </p:sp>
       <p:sp>
         <p:nvSpPr>
-          <p:cNvPr id="3" name="TextBox 2"/>
+          <p:cNvPr id="3" name="Oval 2"/>
+          <p:cNvSpPr/>
+          <p:nvPr/>
+        </p:nvSpPr>
+        <p:spPr>
+          <a:xfrm>
+            <a:off x="10561320" y="411480"/>
+            <a:ext cx="1143000" cy="1143000"/>
+          </a:xfrm>
+          <a:prstGeom prst="ellipse">
+            <a:avLst/>
+          </a:prstGeom>
+          <a:solidFill>
+            <a:srgbClr val="FDE8DF"/>
+          </a:solidFill>
+          <a:ln>
+            <a:noFill/>
+          </a:ln>
+        </p:spPr>
+        <p:style>
+          <a:lnRef idx="1">
+            <a:schemeClr val="accent1"/>
+          </a:lnRef>
+          <a:fillRef idx="3">
+            <a:schemeClr val="accent1"/>
+          </a:fillRef>
+          <a:effectRef idx="2">
+            <a:schemeClr val="accent1"/>
+          </a:effectRef>
+          <a:fontRef idx="minor">
+            <a:schemeClr val="lt1"/>
+          </a:fontRef>
+        </p:style>
+        <p:txBody>
+          <a:bodyPr rtlCol="0" anchor="ctr"/>
+          <a:lstStyle/>
+          <a:p>
+            <a:pPr algn="ctr"/>
+          </a:p>
+        </p:txBody>
+      </p:sp>
+      <p:sp>
+        <p:nvSpPr>
+          <p:cNvPr id="4" name="TextBox 3"/>
           <p:cNvSpPr txBox="1"/>
           <p:nvPr/>
         </p:nvSpPr>
         <p:spPr>
           <a:xfrm>
-            <a:off x="457200" y="164592"/>
-            <a:ext cx="11247120" cy="731520"/>
+            <a:off x="10561320" y="457200"/>
+            <a:ext cx="1143000" cy="1051560"/>
           </a:xfrm>
           <a:prstGeom prst="rect">
             <a:avLst/>
@@ -4393,11 +6336,47 @@
           </a:bodyPr>
           <a:lstStyle/>
           <a:p>
-            <a:r>
-              <a:rPr sz="3000" b="1">
-                <a:solidFill>
-                  <a:srgbClr val="FFFFFF"/>
-                </a:solidFill>
+            <a:pPr algn="ctr"/>
+            <a:r>
+              <a:rPr sz="3600" b="0" i="0">
+                <a:solidFill>
+                  <a:srgbClr val="243140"/>
+                </a:solidFill>
+                <a:latin typeface="Segoe UI"/>
+              </a:rPr>
+              <a:t>👤</a:t>
+            </a:r>
+          </a:p>
+        </p:txBody>
+      </p:sp>
+      <p:sp>
+        <p:nvSpPr>
+          <p:cNvPr id="5" name="TextBox 4"/>
+          <p:cNvSpPr txBox="1"/>
+          <p:nvPr/>
+        </p:nvSpPr>
+        <p:spPr>
+          <a:xfrm>
+            <a:off x="502920" y="411480"/>
+            <a:ext cx="9692640" cy="777240"/>
+          </a:xfrm>
+          <a:prstGeom prst="rect">
+            <a:avLst/>
+          </a:prstGeom>
+          <a:noFill/>
+        </p:spPr>
+        <p:txBody>
+          <a:bodyPr wrap="none">
+            <a:spAutoFit/>
+          </a:bodyPr>
+          <a:lstStyle/>
+          <a:p>
+            <a:r>
+              <a:rPr sz="3200" b="1" i="0">
+                <a:solidFill>
+                  <a:srgbClr val="1E2A38"/>
+                </a:solidFill>
+                <a:latin typeface="Segoe UI"/>
               </a:rPr>
               <a:t>User Profile</a:t>
             </a:r>
@@ -4406,14 +6385,57 @@
       </p:sp>
       <p:sp>
         <p:nvSpPr>
-          <p:cNvPr id="4" name="TextBox 3"/>
+          <p:cNvPr id="6" name="Rounded Rectangle 5"/>
+          <p:cNvSpPr/>
+          <p:nvPr/>
+        </p:nvSpPr>
+        <p:spPr>
+          <a:xfrm>
+            <a:off x="548640" y="1170432"/>
+            <a:ext cx="2286000" cy="82296"/>
+          </a:xfrm>
+          <a:prstGeom prst="roundRect">
+            <a:avLst/>
+          </a:prstGeom>
+          <a:solidFill>
+            <a:srgbClr val="FF6B35"/>
+          </a:solidFill>
+          <a:ln>
+            <a:noFill/>
+          </a:ln>
+        </p:spPr>
+        <p:style>
+          <a:lnRef idx="1">
+            <a:schemeClr val="accent1"/>
+          </a:lnRef>
+          <a:fillRef idx="3">
+            <a:schemeClr val="accent1"/>
+          </a:fillRef>
+          <a:effectRef idx="2">
+            <a:schemeClr val="accent1"/>
+          </a:effectRef>
+          <a:fontRef idx="minor">
+            <a:schemeClr val="lt1"/>
+          </a:fontRef>
+        </p:style>
+        <p:txBody>
+          <a:bodyPr rtlCol="0" anchor="ctr"/>
+          <a:lstStyle/>
+          <a:p>
+            <a:pPr algn="ctr"/>
+          </a:p>
+        </p:txBody>
+      </p:sp>
+      <p:sp>
+        <p:nvSpPr>
+          <p:cNvPr id="7" name="TextBox 6"/>
           <p:cNvSpPr txBox="1"/>
           <p:nvPr/>
         </p:nvSpPr>
         <p:spPr>
           <a:xfrm>
-            <a:off x="548640" y="1280160"/>
-            <a:ext cx="11247120" cy="5120640"/>
+            <a:off x="640080" y="1554480"/>
+            <a:ext cx="10789920" cy="4572000"/>
           </a:xfrm>
           <a:prstGeom prst="rect">
             <a:avLst/>
@@ -4428,14 +6450,24 @@
           <a:p>
             <a:pPr>
               <a:spcAft>
-                <a:spcPts val="1000"/>
+                <a:spcPts val="1300"/>
               </a:spcAft>
             </a:pPr>
             <a:r>
-              <a:rPr sz="2000">
-                <a:solidFill>
-                  <a:srgbClr val="2C3E50"/>
-                </a:solidFill>
+              <a:rPr sz="2000" b="1" i="0">
+                <a:solidFill>
+                  <a:srgbClr val="FF6B35"/>
+                </a:solidFill>
+                <a:latin typeface="Segoe UI"/>
+              </a:rPr>
+              <a:t>▸  </a:t>
+            </a:r>
+            <a:r>
+              <a:rPr sz="2000" b="0" i="0">
+                <a:solidFill>
+                  <a:srgbClr val="243140"/>
+                </a:solidFill>
+                <a:latin typeface="Segoe UI"/>
               </a:rPr>
               <a:t>Edit first name, last name, email.</a:t>
             </a:r>
@@ -4443,14 +6475,24 @@
           <a:p>
             <a:pPr>
               <a:spcAft>
-                <a:spcPts val="1000"/>
+                <a:spcPts val="1300"/>
               </a:spcAft>
             </a:pPr>
             <a:r>
-              <a:rPr sz="2000">
-                <a:solidFill>
-                  <a:srgbClr val="2C3E50"/>
-                </a:solidFill>
+              <a:rPr sz="2000" b="1" i="0">
+                <a:solidFill>
+                  <a:srgbClr val="FF6B35"/>
+                </a:solidFill>
+                <a:latin typeface="Segoe UI"/>
+              </a:rPr>
+              <a:t>▸  </a:t>
+            </a:r>
+            <a:r>
+              <a:rPr sz="2000" b="0" i="0">
+                <a:solidFill>
+                  <a:srgbClr val="243140"/>
+                </a:solidFill>
+                <a:latin typeface="Segoe UI"/>
               </a:rPr>
               <a:t>Edit phone, address, profile picture.</a:t>
             </a:r>
@@ -4458,14 +6500,24 @@
           <a:p>
             <a:pPr>
               <a:spcAft>
-                <a:spcPts val="1000"/>
+                <a:spcPts val="1300"/>
               </a:spcAft>
             </a:pPr>
             <a:r>
-              <a:rPr sz="2000">
-                <a:solidFill>
-                  <a:srgbClr val="2C3E50"/>
-                </a:solidFill>
+              <a:rPr sz="2000" b="1" i="0">
+                <a:solidFill>
+                  <a:srgbClr val="FF6B35"/>
+                </a:solidFill>
+                <a:latin typeface="Segoe UI"/>
+              </a:rPr>
+              <a:t>▸  </a:t>
+            </a:r>
+            <a:r>
+              <a:rPr sz="2000" b="0" i="0">
+                <a:solidFill>
+                  <a:srgbClr val="243140"/>
+                </a:solidFill>
+                <a:latin typeface="Segoe UI"/>
               </a:rPr>
               <a:t>Change password (new + confirm).</a:t>
             </a:r>
@@ -4473,16 +6525,138 @@
           <a:p>
             <a:pPr>
               <a:spcAft>
-                <a:spcPts val="1000"/>
+                <a:spcPts val="1300"/>
               </a:spcAft>
             </a:pPr>
             <a:r>
-              <a:rPr sz="2000">
-                <a:solidFill>
-                  <a:srgbClr val="2C3E50"/>
-                </a:solidFill>
+              <a:rPr sz="2000" b="1" i="0">
+                <a:solidFill>
+                  <a:srgbClr val="FF6B35"/>
+                </a:solidFill>
+                <a:latin typeface="Segoe UI"/>
+              </a:rPr>
+              <a:t>▸  </a:t>
+            </a:r>
+            <a:r>
+              <a:rPr sz="2000" b="0" i="0">
+                <a:solidFill>
+                  <a:srgbClr val="243140"/>
+                </a:solidFill>
+                <a:latin typeface="Segoe UI"/>
               </a:rPr>
               <a:t>Accessible from the navbar profile dropdown.</a:t>
+            </a:r>
+          </a:p>
+        </p:txBody>
+      </p:sp>
+      <p:sp>
+        <p:nvSpPr>
+          <p:cNvPr id="8" name="Rectangle 7"/>
+          <p:cNvSpPr/>
+          <p:nvPr/>
+        </p:nvSpPr>
+        <p:spPr>
+          <a:xfrm>
+            <a:off x="502920" y="6400800"/>
+            <a:ext cx="11201400" cy="17780"/>
+          </a:xfrm>
+          <a:prstGeom prst="rect">
+            <a:avLst/>
+          </a:prstGeom>
+          <a:solidFill>
+            <a:srgbClr val="DDE3E9"/>
+          </a:solidFill>
+          <a:ln>
+            <a:noFill/>
+          </a:ln>
+        </p:spPr>
+        <p:style>
+          <a:lnRef idx="1">
+            <a:schemeClr val="accent1"/>
+          </a:lnRef>
+          <a:fillRef idx="3">
+            <a:schemeClr val="accent1"/>
+          </a:fillRef>
+          <a:effectRef idx="2">
+            <a:schemeClr val="accent1"/>
+          </a:effectRef>
+          <a:fontRef idx="minor">
+            <a:schemeClr val="lt1"/>
+          </a:fontRef>
+        </p:style>
+        <p:txBody>
+          <a:bodyPr rtlCol="0" anchor="ctr"/>
+          <a:lstStyle/>
+          <a:p>
+            <a:pPr algn="ctr"/>
+          </a:p>
+        </p:txBody>
+      </p:sp>
+      <p:sp>
+        <p:nvSpPr>
+          <p:cNvPr id="9" name="TextBox 8"/>
+          <p:cNvSpPr txBox="1"/>
+          <p:nvPr/>
+        </p:nvSpPr>
+        <p:spPr>
+          <a:xfrm>
+            <a:off x="502920" y="6446520"/>
+            <a:ext cx="8229600" cy="320040"/>
+          </a:xfrm>
+          <a:prstGeom prst="rect">
+            <a:avLst/>
+          </a:prstGeom>
+          <a:noFill/>
+        </p:spPr>
+        <p:txBody>
+          <a:bodyPr wrap="none">
+            <a:spAutoFit/>
+          </a:bodyPr>
+          <a:lstStyle/>
+          <a:p>
+            <a:r>
+              <a:rPr sz="1000" b="0" i="0">
+                <a:solidFill>
+                  <a:srgbClr val="8A97A5"/>
+                </a:solidFill>
+                <a:latin typeface="Segoe UI"/>
+              </a:rPr>
+              <a:t>BistroSaaS  |  Restaurant Management System</a:t>
+            </a:r>
+          </a:p>
+        </p:txBody>
+      </p:sp>
+      <p:sp>
+        <p:nvSpPr>
+          <p:cNvPr id="10" name="TextBox 9"/>
+          <p:cNvSpPr txBox="1"/>
+          <p:nvPr/>
+        </p:nvSpPr>
+        <p:spPr>
+          <a:xfrm>
+            <a:off x="10607040" y="6446520"/>
+            <a:ext cx="1097280" cy="320040"/>
+          </a:xfrm>
+          <a:prstGeom prst="rect">
+            <a:avLst/>
+          </a:prstGeom>
+          <a:noFill/>
+        </p:spPr>
+        <p:txBody>
+          <a:bodyPr wrap="none">
+            <a:spAutoFit/>
+          </a:bodyPr>
+          <a:lstStyle/>
+          <a:p>
+            <a:pPr algn="r"/>
+            <a:r>
+              <a:rPr sz="1000" b="1" i="0">
+                <a:solidFill>
+                  <a:srgbClr val="8A97A5"/>
+                </a:solidFill>
+                <a:latin typeface="Segoe UI"/>
+              </a:rPr>
+              <a:t>16</a:t>
             </a:r>
           </a:p>
         </p:txBody>
@@ -4498,6 +6672,14 @@
 <file path=ppt/slides/slide17.xml><?xml version="1.0" encoding="utf-8"?>
 <p:sld xmlns:a="http://schemas.openxmlformats.org/drawingml/2006/main" xmlns:p="http://schemas.openxmlformats.org/presentationml/2006/main" xmlns:r="http://schemas.openxmlformats.org/officeDocument/2006/relationships">
   <p:cSld>
+    <p:bg>
+      <p:bgPr>
+        <a:solidFill>
+          <a:srgbClr val="F5F7FA"/>
+        </a:solidFill>
+        <a:effectLst/>
+      </p:bgPr>
+    </p:bg>
     <p:spTree>
       <p:nvGrpSpPr>
         <p:cNvPr id="1" name=""/>
@@ -4514,13 +6696,13 @@
         <p:spPr>
           <a:xfrm>
             <a:off x="0" y="0"/>
-            <a:ext cx="12191695" cy="1005840"/>
+            <a:ext cx="164592" cy="6858000"/>
           </a:xfrm>
           <a:prstGeom prst="rect">
             <a:avLst/>
           </a:prstGeom>
           <a:solidFill>
-            <a:srgbClr val="2980B9"/>
+            <a:srgbClr val="FF6B35"/>
           </a:solidFill>
           <a:ln>
             <a:noFill/>
@@ -4550,14 +6732,57 @@
       </p:sp>
       <p:sp>
         <p:nvSpPr>
-          <p:cNvPr id="3" name="TextBox 2"/>
+          <p:cNvPr id="3" name="Oval 2"/>
+          <p:cNvSpPr/>
+          <p:nvPr/>
+        </p:nvSpPr>
+        <p:spPr>
+          <a:xfrm>
+            <a:off x="10561320" y="411480"/>
+            <a:ext cx="1143000" cy="1143000"/>
+          </a:xfrm>
+          <a:prstGeom prst="ellipse">
+            <a:avLst/>
+          </a:prstGeom>
+          <a:solidFill>
+            <a:srgbClr val="FDE8DF"/>
+          </a:solidFill>
+          <a:ln>
+            <a:noFill/>
+          </a:ln>
+        </p:spPr>
+        <p:style>
+          <a:lnRef idx="1">
+            <a:schemeClr val="accent1"/>
+          </a:lnRef>
+          <a:fillRef idx="3">
+            <a:schemeClr val="accent1"/>
+          </a:fillRef>
+          <a:effectRef idx="2">
+            <a:schemeClr val="accent1"/>
+          </a:effectRef>
+          <a:fontRef idx="minor">
+            <a:schemeClr val="lt1"/>
+          </a:fontRef>
+        </p:style>
+        <p:txBody>
+          <a:bodyPr rtlCol="0" anchor="ctr"/>
+          <a:lstStyle/>
+          <a:p>
+            <a:pPr algn="ctr"/>
+          </a:p>
+        </p:txBody>
+      </p:sp>
+      <p:sp>
+        <p:nvSpPr>
+          <p:cNvPr id="4" name="TextBox 3"/>
           <p:cNvSpPr txBox="1"/>
           <p:nvPr/>
         </p:nvSpPr>
         <p:spPr>
           <a:xfrm>
-            <a:off x="457200" y="164592"/>
-            <a:ext cx="11247120" cy="731520"/>
+            <a:off x="10561320" y="457200"/>
+            <a:ext cx="1143000" cy="1051560"/>
           </a:xfrm>
           <a:prstGeom prst="rect">
             <a:avLst/>
@@ -4570,11 +6795,47 @@
           </a:bodyPr>
           <a:lstStyle/>
           <a:p>
-            <a:r>
-              <a:rPr sz="3000" b="1">
-                <a:solidFill>
-                  <a:srgbClr val="FFFFFF"/>
-                </a:solidFill>
+            <a:pPr algn="ctr"/>
+            <a:r>
+              <a:rPr sz="3600" b="0" i="0">
+                <a:solidFill>
+                  <a:srgbClr val="243140"/>
+                </a:solidFill>
+                <a:latin typeface="Segoe UI"/>
+              </a:rPr>
+              <a:t>🔗</a:t>
+            </a:r>
+          </a:p>
+        </p:txBody>
+      </p:sp>
+      <p:sp>
+        <p:nvSpPr>
+          <p:cNvPr id="5" name="TextBox 4"/>
+          <p:cNvSpPr txBox="1"/>
+          <p:nvPr/>
+        </p:nvSpPr>
+        <p:spPr>
+          <a:xfrm>
+            <a:off x="502920" y="411480"/>
+            <a:ext cx="9692640" cy="777240"/>
+          </a:xfrm>
+          <a:prstGeom prst="rect">
+            <a:avLst/>
+          </a:prstGeom>
+          <a:noFill/>
+        </p:spPr>
+        <p:txBody>
+          <a:bodyPr wrap="none">
+            <a:spAutoFit/>
+          </a:bodyPr>
+          <a:lstStyle/>
+          <a:p>
+            <a:r>
+              <a:rPr sz="3200" b="1" i="0">
+                <a:solidFill>
+                  <a:srgbClr val="1E2A38"/>
+                </a:solidFill>
+                <a:latin typeface="Segoe UI"/>
               </a:rPr>
               <a:t>REST API (Bonus)</a:t>
             </a:r>
@@ -4583,14 +6844,57 @@
       </p:sp>
       <p:sp>
         <p:nvSpPr>
-          <p:cNvPr id="4" name="TextBox 3"/>
+          <p:cNvPr id="6" name="Rounded Rectangle 5"/>
+          <p:cNvSpPr/>
+          <p:nvPr/>
+        </p:nvSpPr>
+        <p:spPr>
+          <a:xfrm>
+            <a:off x="548640" y="1170432"/>
+            <a:ext cx="2286000" cy="82296"/>
+          </a:xfrm>
+          <a:prstGeom prst="roundRect">
+            <a:avLst/>
+          </a:prstGeom>
+          <a:solidFill>
+            <a:srgbClr val="FF6B35"/>
+          </a:solidFill>
+          <a:ln>
+            <a:noFill/>
+          </a:ln>
+        </p:spPr>
+        <p:style>
+          <a:lnRef idx="1">
+            <a:schemeClr val="accent1"/>
+          </a:lnRef>
+          <a:fillRef idx="3">
+            <a:schemeClr val="accent1"/>
+          </a:fillRef>
+          <a:effectRef idx="2">
+            <a:schemeClr val="accent1"/>
+          </a:effectRef>
+          <a:fontRef idx="minor">
+            <a:schemeClr val="lt1"/>
+          </a:fontRef>
+        </p:style>
+        <p:txBody>
+          <a:bodyPr rtlCol="0" anchor="ctr"/>
+          <a:lstStyle/>
+          <a:p>
+            <a:pPr algn="ctr"/>
+          </a:p>
+        </p:txBody>
+      </p:sp>
+      <p:sp>
+        <p:nvSpPr>
+          <p:cNvPr id="7" name="TextBox 6"/>
           <p:cNvSpPr txBox="1"/>
           <p:nvPr/>
         </p:nvSpPr>
         <p:spPr>
           <a:xfrm>
-            <a:off x="548640" y="1280160"/>
-            <a:ext cx="11247120" cy="5120640"/>
+            <a:off x="640080" y="1554480"/>
+            <a:ext cx="10789920" cy="4572000"/>
           </a:xfrm>
           <a:prstGeom prst="rect">
             <a:avLst/>
@@ -4605,14 +6909,24 @@
           <a:p>
             <a:pPr>
               <a:spcAft>
-                <a:spcPts val="1000"/>
+                <a:spcPts val="1300"/>
               </a:spcAft>
             </a:pPr>
             <a:r>
-              <a:rPr sz="2000">
-                <a:solidFill>
-                  <a:srgbClr val="2C3E50"/>
-                </a:solidFill>
+              <a:rPr sz="2000" b="1" i="0">
+                <a:solidFill>
+                  <a:srgbClr val="FF6B35"/>
+                </a:solidFill>
+                <a:latin typeface="Segoe UI"/>
+              </a:rPr>
+              <a:t>▸  </a:t>
+            </a:r>
+            <a:r>
+              <a:rPr sz="2000" b="0" i="0">
+                <a:solidFill>
+                  <a:srgbClr val="243140"/>
+                </a:solidFill>
+                <a:latin typeface="Segoe UI"/>
               </a:rPr>
               <a:t>Built with Django REST Framework.</a:t>
             </a:r>
@@ -4620,44 +6934,74 @@
           <a:p>
             <a:pPr>
               <a:spcAft>
-                <a:spcPts val="1000"/>
+                <a:spcPts val="1300"/>
               </a:spcAft>
             </a:pPr>
             <a:r>
-              <a:rPr sz="2000">
-                <a:solidFill>
-                  <a:srgbClr val="2C3E50"/>
-                </a:solidFill>
-              </a:rPr>
-              <a:t>GET /api/menu/ - list all items as JSON.</a:t>
+              <a:rPr sz="2000" b="1" i="0">
+                <a:solidFill>
+                  <a:srgbClr val="FF6B35"/>
+                </a:solidFill>
+                <a:latin typeface="Segoe UI"/>
+              </a:rPr>
+              <a:t>▸  </a:t>
+            </a:r>
+            <a:r>
+              <a:rPr sz="2000" b="0" i="0">
+                <a:solidFill>
+                  <a:srgbClr val="243140"/>
+                </a:solidFill>
+                <a:latin typeface="Segoe UI"/>
+              </a:rPr>
+              <a:t>GET /api/menu/  -  list all items as JSON.</a:t>
             </a:r>
           </a:p>
           <a:p>
             <a:pPr>
               <a:spcAft>
-                <a:spcPts val="1000"/>
+                <a:spcPts val="1300"/>
               </a:spcAft>
             </a:pPr>
             <a:r>
-              <a:rPr sz="2000">
-                <a:solidFill>
-                  <a:srgbClr val="2C3E50"/>
-                </a:solidFill>
-              </a:rPr>
-              <a:t>GET /api/menu/&lt;id&gt;/ - single item.</a:t>
+              <a:rPr sz="2000" b="1" i="0">
+                <a:solidFill>
+                  <a:srgbClr val="FF6B35"/>
+                </a:solidFill>
+                <a:latin typeface="Segoe UI"/>
+              </a:rPr>
+              <a:t>▸  </a:t>
+            </a:r>
+            <a:r>
+              <a:rPr sz="2000" b="0" i="0">
+                <a:solidFill>
+                  <a:srgbClr val="243140"/>
+                </a:solidFill>
+                <a:latin typeface="Segoe UI"/>
+              </a:rPr>
+              <a:t>GET /api/menu/&lt;id&gt;/  -  single item.</a:t>
             </a:r>
           </a:p>
           <a:p>
             <a:pPr>
               <a:spcAft>
-                <a:spcPts val="1000"/>
+                <a:spcPts val="1300"/>
               </a:spcAft>
             </a:pPr>
             <a:r>
-              <a:rPr sz="2000">
-                <a:solidFill>
-                  <a:srgbClr val="2C3E50"/>
-                </a:solidFill>
+              <a:rPr sz="2000" b="1" i="0">
+                <a:solidFill>
+                  <a:srgbClr val="FF6B35"/>
+                </a:solidFill>
+                <a:latin typeface="Segoe UI"/>
+              </a:rPr>
+              <a:t>▸  </a:t>
+            </a:r>
+            <a:r>
+              <a:rPr sz="2000" b="0" i="0">
+                <a:solidFill>
+                  <a:srgbClr val="243140"/>
+                </a:solidFill>
+                <a:latin typeface="Segoe UI"/>
               </a:rPr>
               <a:t>Browsable API in the browser.</a:t>
             </a:r>
@@ -4665,16 +7009,138 @@
           <a:p>
             <a:pPr>
               <a:spcAft>
-                <a:spcPts val="1000"/>
+                <a:spcPts val="1300"/>
               </a:spcAft>
             </a:pPr>
             <a:r>
-              <a:rPr sz="2000">
-                <a:solidFill>
-                  <a:srgbClr val="2C3E50"/>
-                </a:solidFill>
+              <a:rPr sz="2000" b="1" i="0">
+                <a:solidFill>
+                  <a:srgbClr val="FF6B35"/>
+                </a:solidFill>
+                <a:latin typeface="Segoe UI"/>
+              </a:rPr>
+              <a:t>▸  </a:t>
+            </a:r>
+            <a:r>
+              <a:rPr sz="2000" b="0" i="0">
+                <a:solidFill>
+                  <a:srgbClr val="243140"/>
+                </a:solidFill>
+                <a:latin typeface="Segoe UI"/>
               </a:rPr>
               <a:t>Permission: read for all, write for logged-in users.</a:t>
+            </a:r>
+          </a:p>
+        </p:txBody>
+      </p:sp>
+      <p:sp>
+        <p:nvSpPr>
+          <p:cNvPr id="8" name="Rectangle 7"/>
+          <p:cNvSpPr/>
+          <p:nvPr/>
+        </p:nvSpPr>
+        <p:spPr>
+          <a:xfrm>
+            <a:off x="502920" y="6400800"/>
+            <a:ext cx="11201400" cy="17780"/>
+          </a:xfrm>
+          <a:prstGeom prst="rect">
+            <a:avLst/>
+          </a:prstGeom>
+          <a:solidFill>
+            <a:srgbClr val="DDE3E9"/>
+          </a:solidFill>
+          <a:ln>
+            <a:noFill/>
+          </a:ln>
+        </p:spPr>
+        <p:style>
+          <a:lnRef idx="1">
+            <a:schemeClr val="accent1"/>
+          </a:lnRef>
+          <a:fillRef idx="3">
+            <a:schemeClr val="accent1"/>
+          </a:fillRef>
+          <a:effectRef idx="2">
+            <a:schemeClr val="accent1"/>
+          </a:effectRef>
+          <a:fontRef idx="minor">
+            <a:schemeClr val="lt1"/>
+          </a:fontRef>
+        </p:style>
+        <p:txBody>
+          <a:bodyPr rtlCol="0" anchor="ctr"/>
+          <a:lstStyle/>
+          <a:p>
+            <a:pPr algn="ctr"/>
+          </a:p>
+        </p:txBody>
+      </p:sp>
+      <p:sp>
+        <p:nvSpPr>
+          <p:cNvPr id="9" name="TextBox 8"/>
+          <p:cNvSpPr txBox="1"/>
+          <p:nvPr/>
+        </p:nvSpPr>
+        <p:spPr>
+          <a:xfrm>
+            <a:off x="502920" y="6446520"/>
+            <a:ext cx="8229600" cy="320040"/>
+          </a:xfrm>
+          <a:prstGeom prst="rect">
+            <a:avLst/>
+          </a:prstGeom>
+          <a:noFill/>
+        </p:spPr>
+        <p:txBody>
+          <a:bodyPr wrap="none">
+            <a:spAutoFit/>
+          </a:bodyPr>
+          <a:lstStyle/>
+          <a:p>
+            <a:r>
+              <a:rPr sz="1000" b="0" i="0">
+                <a:solidFill>
+                  <a:srgbClr val="8A97A5"/>
+                </a:solidFill>
+                <a:latin typeface="Segoe UI"/>
+              </a:rPr>
+              <a:t>BistroSaaS  |  Restaurant Management System</a:t>
+            </a:r>
+          </a:p>
+        </p:txBody>
+      </p:sp>
+      <p:sp>
+        <p:nvSpPr>
+          <p:cNvPr id="10" name="TextBox 9"/>
+          <p:cNvSpPr txBox="1"/>
+          <p:nvPr/>
+        </p:nvSpPr>
+        <p:spPr>
+          <a:xfrm>
+            <a:off x="10607040" y="6446520"/>
+            <a:ext cx="1097280" cy="320040"/>
+          </a:xfrm>
+          <a:prstGeom prst="rect">
+            <a:avLst/>
+          </a:prstGeom>
+          <a:noFill/>
+        </p:spPr>
+        <p:txBody>
+          <a:bodyPr wrap="none">
+            <a:spAutoFit/>
+          </a:bodyPr>
+          <a:lstStyle/>
+          <a:p>
+            <a:pPr algn="r"/>
+            <a:r>
+              <a:rPr sz="1000" b="1" i="0">
+                <a:solidFill>
+                  <a:srgbClr val="8A97A5"/>
+                </a:solidFill>
+                <a:latin typeface="Segoe UI"/>
+              </a:rPr>
+              <a:t>17</a:t>
             </a:r>
           </a:p>
         </p:txBody>
@@ -4690,6 +7156,14 @@
 <file path=ppt/slides/slide18.xml><?xml version="1.0" encoding="utf-8"?>
 <p:sld xmlns:a="http://schemas.openxmlformats.org/drawingml/2006/main" xmlns:p="http://schemas.openxmlformats.org/presentationml/2006/main" xmlns:r="http://schemas.openxmlformats.org/officeDocument/2006/relationships">
   <p:cSld>
+    <p:bg>
+      <p:bgPr>
+        <a:solidFill>
+          <a:srgbClr val="F5F7FA"/>
+        </a:solidFill>
+        <a:effectLst/>
+      </p:bgPr>
+    </p:bg>
     <p:spTree>
       <p:nvGrpSpPr>
         <p:cNvPr id="1" name=""/>
@@ -4706,13 +7180,13 @@
         <p:spPr>
           <a:xfrm>
             <a:off x="0" y="0"/>
-            <a:ext cx="12191695" cy="1005840"/>
+            <a:ext cx="164592" cy="6858000"/>
           </a:xfrm>
           <a:prstGeom prst="rect">
             <a:avLst/>
           </a:prstGeom>
           <a:solidFill>
-            <a:srgbClr val="2980B9"/>
+            <a:srgbClr val="FF6B35"/>
           </a:solidFill>
           <a:ln>
             <a:noFill/>
@@ -4742,14 +7216,57 @@
       </p:sp>
       <p:sp>
         <p:nvSpPr>
-          <p:cNvPr id="3" name="TextBox 2"/>
+          <p:cNvPr id="3" name="Oval 2"/>
+          <p:cNvSpPr/>
+          <p:nvPr/>
+        </p:nvSpPr>
+        <p:spPr>
+          <a:xfrm>
+            <a:off x="10561320" y="411480"/>
+            <a:ext cx="1143000" cy="1143000"/>
+          </a:xfrm>
+          <a:prstGeom prst="ellipse">
+            <a:avLst/>
+          </a:prstGeom>
+          <a:solidFill>
+            <a:srgbClr val="FDE8DF"/>
+          </a:solidFill>
+          <a:ln>
+            <a:noFill/>
+          </a:ln>
+        </p:spPr>
+        <p:style>
+          <a:lnRef idx="1">
+            <a:schemeClr val="accent1"/>
+          </a:lnRef>
+          <a:fillRef idx="3">
+            <a:schemeClr val="accent1"/>
+          </a:fillRef>
+          <a:effectRef idx="2">
+            <a:schemeClr val="accent1"/>
+          </a:effectRef>
+          <a:fontRef idx="minor">
+            <a:schemeClr val="lt1"/>
+          </a:fontRef>
+        </p:style>
+        <p:txBody>
+          <a:bodyPr rtlCol="0" anchor="ctr"/>
+          <a:lstStyle/>
+          <a:p>
+            <a:pPr algn="ctr"/>
+          </a:p>
+        </p:txBody>
+      </p:sp>
+      <p:sp>
+        <p:nvSpPr>
+          <p:cNvPr id="4" name="TextBox 3"/>
           <p:cNvSpPr txBox="1"/>
           <p:nvPr/>
         </p:nvSpPr>
         <p:spPr>
           <a:xfrm>
-            <a:off x="457200" y="164592"/>
-            <a:ext cx="11247120" cy="731520"/>
+            <a:off x="10561320" y="457200"/>
+            <a:ext cx="1143000" cy="1051560"/>
           </a:xfrm>
           <a:prstGeom prst="rect">
             <a:avLst/>
@@ -4762,11 +7279,47 @@
           </a:bodyPr>
           <a:lstStyle/>
           <a:p>
-            <a:r>
-              <a:rPr sz="3000" b="1">
-                <a:solidFill>
-                  <a:srgbClr val="FFFFFF"/>
-                </a:solidFill>
+            <a:pPr algn="ctr"/>
+            <a:r>
+              <a:rPr sz="3600" b="0" i="0">
+                <a:solidFill>
+                  <a:srgbClr val="243140"/>
+                </a:solidFill>
+                <a:latin typeface="Segoe UI"/>
+              </a:rPr>
+              <a:t>⚙</a:t>
+            </a:r>
+          </a:p>
+        </p:txBody>
+      </p:sp>
+      <p:sp>
+        <p:nvSpPr>
+          <p:cNvPr id="5" name="TextBox 4"/>
+          <p:cNvSpPr txBox="1"/>
+          <p:nvPr/>
+        </p:nvSpPr>
+        <p:spPr>
+          <a:xfrm>
+            <a:off x="502920" y="411480"/>
+            <a:ext cx="9692640" cy="777240"/>
+          </a:xfrm>
+          <a:prstGeom prst="rect">
+            <a:avLst/>
+          </a:prstGeom>
+          <a:noFill/>
+        </p:spPr>
+        <p:txBody>
+          <a:bodyPr wrap="none">
+            <a:spAutoFit/>
+          </a:bodyPr>
+          <a:lstStyle/>
+          <a:p>
+            <a:r>
+              <a:rPr sz="3200" b="1" i="0">
+                <a:solidFill>
+                  <a:srgbClr val="1E2A38"/>
+                </a:solidFill>
+                <a:latin typeface="Segoe UI"/>
               </a:rPr>
               <a:t>Django Admin Panel</a:t>
             </a:r>
@@ -4775,14 +7328,57 @@
       </p:sp>
       <p:sp>
         <p:nvSpPr>
-          <p:cNvPr id="4" name="TextBox 3"/>
+          <p:cNvPr id="6" name="Rounded Rectangle 5"/>
+          <p:cNvSpPr/>
+          <p:nvPr/>
+        </p:nvSpPr>
+        <p:spPr>
+          <a:xfrm>
+            <a:off x="548640" y="1170432"/>
+            <a:ext cx="2286000" cy="82296"/>
+          </a:xfrm>
+          <a:prstGeom prst="roundRect">
+            <a:avLst/>
+          </a:prstGeom>
+          <a:solidFill>
+            <a:srgbClr val="FF6B35"/>
+          </a:solidFill>
+          <a:ln>
+            <a:noFill/>
+          </a:ln>
+        </p:spPr>
+        <p:style>
+          <a:lnRef idx="1">
+            <a:schemeClr val="accent1"/>
+          </a:lnRef>
+          <a:fillRef idx="3">
+            <a:schemeClr val="accent1"/>
+          </a:fillRef>
+          <a:effectRef idx="2">
+            <a:schemeClr val="accent1"/>
+          </a:effectRef>
+          <a:fontRef idx="minor">
+            <a:schemeClr val="lt1"/>
+          </a:fontRef>
+        </p:style>
+        <p:txBody>
+          <a:bodyPr rtlCol="0" anchor="ctr"/>
+          <a:lstStyle/>
+          <a:p>
+            <a:pPr algn="ctr"/>
+          </a:p>
+        </p:txBody>
+      </p:sp>
+      <p:sp>
+        <p:nvSpPr>
+          <p:cNvPr id="7" name="TextBox 6"/>
           <p:cNvSpPr txBox="1"/>
           <p:nvPr/>
         </p:nvSpPr>
         <p:spPr>
           <a:xfrm>
-            <a:off x="548640" y="1280160"/>
-            <a:ext cx="11247120" cy="5120640"/>
+            <a:off x="640080" y="1554480"/>
+            <a:ext cx="10789920" cy="4572000"/>
           </a:xfrm>
           <a:prstGeom prst="rect">
             <a:avLst/>
@@ -4797,14 +7393,24 @@
           <a:p>
             <a:pPr>
               <a:spcAft>
-                <a:spcPts val="1000"/>
+                <a:spcPts val="1300"/>
               </a:spcAft>
             </a:pPr>
             <a:r>
-              <a:rPr sz="2000">
-                <a:solidFill>
-                  <a:srgbClr val="2C3E50"/>
-                </a:solidFill>
+              <a:rPr sz="2000" b="1" i="0">
+                <a:solidFill>
+                  <a:srgbClr val="FF6B35"/>
+                </a:solidFill>
+                <a:latin typeface="Segoe UI"/>
+              </a:rPr>
+              <a:t>▸  </a:t>
+            </a:r>
+            <a:r>
+              <a:rPr sz="2000" b="0" i="0">
+                <a:solidFill>
+                  <a:srgbClr val="243140"/>
+                </a:solidFill>
+                <a:latin typeface="Segoe UI"/>
               </a:rPr>
               <a:t>Manage Users, Categories, Menu Items, Orders.</a:t>
             </a:r>
@@ -4812,14 +7418,24 @@
           <a:p>
             <a:pPr>
               <a:spcAft>
-                <a:spcPts val="1000"/>
+                <a:spcPts val="1300"/>
               </a:spcAft>
             </a:pPr>
             <a:r>
-              <a:rPr sz="2000">
-                <a:solidFill>
-                  <a:srgbClr val="2C3E50"/>
-                </a:solidFill>
+              <a:rPr sz="2000" b="1" i="0">
+                <a:solidFill>
+                  <a:srgbClr val="FF6B35"/>
+                </a:solidFill>
+                <a:latin typeface="Segoe UI"/>
+              </a:rPr>
+              <a:t>▸  </a:t>
+            </a:r>
+            <a:r>
+              <a:rPr sz="2000" b="0" i="0">
+                <a:solidFill>
+                  <a:srgbClr val="243140"/>
+                </a:solidFill>
+                <a:latin typeface="Segoe UI"/>
               </a:rPr>
               <a:t>Search, filters, and inline editing.</a:t>
             </a:r>
@@ -4827,14 +7443,24 @@
           <a:p>
             <a:pPr>
               <a:spcAft>
-                <a:spcPts val="1000"/>
+                <a:spcPts val="1300"/>
               </a:spcAft>
             </a:pPr>
             <a:r>
-              <a:rPr sz="2000">
-                <a:solidFill>
-                  <a:srgbClr val="2C3E50"/>
-                </a:solidFill>
+              <a:rPr sz="2000" b="1" i="0">
+                <a:solidFill>
+                  <a:srgbClr val="FF6B35"/>
+                </a:solidFill>
+                <a:latin typeface="Segoe UI"/>
+              </a:rPr>
+              <a:t>▸  </a:t>
+            </a:r>
+            <a:r>
+              <a:rPr sz="2000" b="0" i="0">
+                <a:solidFill>
+                  <a:srgbClr val="243140"/>
+                </a:solidFill>
+                <a:latin typeface="Segoe UI"/>
               </a:rPr>
               <a:t>Custom red 'Cancel' button on all forms.</a:t>
             </a:r>
@@ -4842,16 +7468,138 @@
           <a:p>
             <a:pPr>
               <a:spcAft>
-                <a:spcPts val="1000"/>
+                <a:spcPts val="1300"/>
               </a:spcAft>
             </a:pPr>
             <a:r>
-              <a:rPr sz="2000">
-                <a:solidFill>
-                  <a:srgbClr val="2C3E50"/>
-                </a:solidFill>
-              </a:rPr>
-              <a:t>Admins cannot see/delete their own account.</a:t>
+              <a:rPr sz="2000" b="1" i="0">
+                <a:solidFill>
+                  <a:srgbClr val="FF6B35"/>
+                </a:solidFill>
+                <a:latin typeface="Segoe UI"/>
+              </a:rPr>
+              <a:t>▸  </a:t>
+            </a:r>
+            <a:r>
+              <a:rPr sz="2000" b="0" i="0">
+                <a:solidFill>
+                  <a:srgbClr val="243140"/>
+                </a:solidFill>
+                <a:latin typeface="Segoe UI"/>
+              </a:rPr>
+              <a:t>Admins cannot see / delete their own account.</a:t>
+            </a:r>
+          </a:p>
+        </p:txBody>
+      </p:sp>
+      <p:sp>
+        <p:nvSpPr>
+          <p:cNvPr id="8" name="Rectangle 7"/>
+          <p:cNvSpPr/>
+          <p:nvPr/>
+        </p:nvSpPr>
+        <p:spPr>
+          <a:xfrm>
+            <a:off x="502920" y="6400800"/>
+            <a:ext cx="11201400" cy="17780"/>
+          </a:xfrm>
+          <a:prstGeom prst="rect">
+            <a:avLst/>
+          </a:prstGeom>
+          <a:solidFill>
+            <a:srgbClr val="DDE3E9"/>
+          </a:solidFill>
+          <a:ln>
+            <a:noFill/>
+          </a:ln>
+        </p:spPr>
+        <p:style>
+          <a:lnRef idx="1">
+            <a:schemeClr val="accent1"/>
+          </a:lnRef>
+          <a:fillRef idx="3">
+            <a:schemeClr val="accent1"/>
+          </a:fillRef>
+          <a:effectRef idx="2">
+            <a:schemeClr val="accent1"/>
+          </a:effectRef>
+          <a:fontRef idx="minor">
+            <a:schemeClr val="lt1"/>
+          </a:fontRef>
+        </p:style>
+        <p:txBody>
+          <a:bodyPr rtlCol="0" anchor="ctr"/>
+          <a:lstStyle/>
+          <a:p>
+            <a:pPr algn="ctr"/>
+          </a:p>
+        </p:txBody>
+      </p:sp>
+      <p:sp>
+        <p:nvSpPr>
+          <p:cNvPr id="9" name="TextBox 8"/>
+          <p:cNvSpPr txBox="1"/>
+          <p:nvPr/>
+        </p:nvSpPr>
+        <p:spPr>
+          <a:xfrm>
+            <a:off x="502920" y="6446520"/>
+            <a:ext cx="8229600" cy="320040"/>
+          </a:xfrm>
+          <a:prstGeom prst="rect">
+            <a:avLst/>
+          </a:prstGeom>
+          <a:noFill/>
+        </p:spPr>
+        <p:txBody>
+          <a:bodyPr wrap="none">
+            <a:spAutoFit/>
+          </a:bodyPr>
+          <a:lstStyle/>
+          <a:p>
+            <a:r>
+              <a:rPr sz="1000" b="0" i="0">
+                <a:solidFill>
+                  <a:srgbClr val="8A97A5"/>
+                </a:solidFill>
+                <a:latin typeface="Segoe UI"/>
+              </a:rPr>
+              <a:t>BistroSaaS  |  Restaurant Management System</a:t>
+            </a:r>
+          </a:p>
+        </p:txBody>
+      </p:sp>
+      <p:sp>
+        <p:nvSpPr>
+          <p:cNvPr id="10" name="TextBox 9"/>
+          <p:cNvSpPr txBox="1"/>
+          <p:nvPr/>
+        </p:nvSpPr>
+        <p:spPr>
+          <a:xfrm>
+            <a:off x="10607040" y="6446520"/>
+            <a:ext cx="1097280" cy="320040"/>
+          </a:xfrm>
+          <a:prstGeom prst="rect">
+            <a:avLst/>
+          </a:prstGeom>
+          <a:noFill/>
+        </p:spPr>
+        <p:txBody>
+          <a:bodyPr wrap="none">
+            <a:spAutoFit/>
+          </a:bodyPr>
+          <a:lstStyle/>
+          <a:p>
+            <a:pPr algn="r"/>
+            <a:r>
+              <a:rPr sz="1000" b="1" i="0">
+                <a:solidFill>
+                  <a:srgbClr val="8A97A5"/>
+                </a:solidFill>
+                <a:latin typeface="Segoe UI"/>
+              </a:rPr>
+              <a:t>18</a:t>
             </a:r>
           </a:p>
         </p:txBody>
@@ -4867,6 +7615,14 @@
 <file path=ppt/slides/slide19.xml><?xml version="1.0" encoding="utf-8"?>
 <p:sld xmlns:a="http://schemas.openxmlformats.org/drawingml/2006/main" xmlns:p="http://schemas.openxmlformats.org/presentationml/2006/main" xmlns:r="http://schemas.openxmlformats.org/officeDocument/2006/relationships">
   <p:cSld>
+    <p:bg>
+      <p:bgPr>
+        <a:solidFill>
+          <a:srgbClr val="F5F7FA"/>
+        </a:solidFill>
+        <a:effectLst/>
+      </p:bgPr>
+    </p:bg>
     <p:spTree>
       <p:nvGrpSpPr>
         <p:cNvPr id="1" name=""/>
@@ -4883,13 +7639,13 @@
         <p:spPr>
           <a:xfrm>
             <a:off x="0" y="0"/>
-            <a:ext cx="12191695" cy="1005840"/>
+            <a:ext cx="164592" cy="6858000"/>
           </a:xfrm>
           <a:prstGeom prst="rect">
             <a:avLst/>
           </a:prstGeom>
           <a:solidFill>
-            <a:srgbClr val="2980B9"/>
+            <a:srgbClr val="FF6B35"/>
           </a:solidFill>
           <a:ln>
             <a:noFill/>
@@ -4919,14 +7675,57 @@
       </p:sp>
       <p:sp>
         <p:nvSpPr>
-          <p:cNvPr id="3" name="TextBox 2"/>
+          <p:cNvPr id="3" name="Oval 2"/>
+          <p:cNvSpPr/>
+          <p:nvPr/>
+        </p:nvSpPr>
+        <p:spPr>
+          <a:xfrm>
+            <a:off x="10561320" y="411480"/>
+            <a:ext cx="1143000" cy="1143000"/>
+          </a:xfrm>
+          <a:prstGeom prst="ellipse">
+            <a:avLst/>
+          </a:prstGeom>
+          <a:solidFill>
+            <a:srgbClr val="FDE8DF"/>
+          </a:solidFill>
+          <a:ln>
+            <a:noFill/>
+          </a:ln>
+        </p:spPr>
+        <p:style>
+          <a:lnRef idx="1">
+            <a:schemeClr val="accent1"/>
+          </a:lnRef>
+          <a:fillRef idx="3">
+            <a:schemeClr val="accent1"/>
+          </a:fillRef>
+          <a:effectRef idx="2">
+            <a:schemeClr val="accent1"/>
+          </a:effectRef>
+          <a:fontRef idx="minor">
+            <a:schemeClr val="lt1"/>
+          </a:fontRef>
+        </p:style>
+        <p:txBody>
+          <a:bodyPr rtlCol="0" anchor="ctr"/>
+          <a:lstStyle/>
+          <a:p>
+            <a:pPr algn="ctr"/>
+          </a:p>
+        </p:txBody>
+      </p:sp>
+      <p:sp>
+        <p:nvSpPr>
+          <p:cNvPr id="4" name="TextBox 3"/>
           <p:cNvSpPr txBox="1"/>
           <p:nvPr/>
         </p:nvSpPr>
         <p:spPr>
           <a:xfrm>
-            <a:off x="457200" y="164592"/>
-            <a:ext cx="11247120" cy="731520"/>
+            <a:off x="10561320" y="457200"/>
+            <a:ext cx="1143000" cy="1051560"/>
           </a:xfrm>
           <a:prstGeom prst="rect">
             <a:avLst/>
@@ -4939,11 +7738,47 @@
           </a:bodyPr>
           <a:lstStyle/>
           <a:p>
-            <a:r>
-              <a:rPr sz="3000" b="1">
-                <a:solidFill>
-                  <a:srgbClr val="FFFFFF"/>
-                </a:solidFill>
+            <a:pPr algn="ctr"/>
+            <a:r>
+              <a:rPr sz="3600" b="0" i="0">
+                <a:solidFill>
+                  <a:srgbClr val="243140"/>
+                </a:solidFill>
+                <a:latin typeface="Segoe UI"/>
+              </a:rPr>
+              <a:t>🚀</a:t>
+            </a:r>
+          </a:p>
+        </p:txBody>
+      </p:sp>
+      <p:sp>
+        <p:nvSpPr>
+          <p:cNvPr id="5" name="TextBox 4"/>
+          <p:cNvSpPr txBox="1"/>
+          <p:nvPr/>
+        </p:nvSpPr>
+        <p:spPr>
+          <a:xfrm>
+            <a:off x="502920" y="411480"/>
+            <a:ext cx="9692640" cy="777240"/>
+          </a:xfrm>
+          <a:prstGeom prst="rect">
+            <a:avLst/>
+          </a:prstGeom>
+          <a:noFill/>
+        </p:spPr>
+        <p:txBody>
+          <a:bodyPr wrap="none">
+            <a:spAutoFit/>
+          </a:bodyPr>
+          <a:lstStyle/>
+          <a:p>
+            <a:r>
+              <a:rPr sz="3200" b="1" i="0">
+                <a:solidFill>
+                  <a:srgbClr val="1E2A38"/>
+                </a:solidFill>
+                <a:latin typeface="Segoe UI"/>
               </a:rPr>
               <a:t>Version Control &amp; Deployment</a:t>
             </a:r>
@@ -4952,14 +7787,57 @@
       </p:sp>
       <p:sp>
         <p:nvSpPr>
-          <p:cNvPr id="4" name="TextBox 3"/>
+          <p:cNvPr id="6" name="Rounded Rectangle 5"/>
+          <p:cNvSpPr/>
+          <p:nvPr/>
+        </p:nvSpPr>
+        <p:spPr>
+          <a:xfrm>
+            <a:off x="548640" y="1170432"/>
+            <a:ext cx="2286000" cy="82296"/>
+          </a:xfrm>
+          <a:prstGeom prst="roundRect">
+            <a:avLst/>
+          </a:prstGeom>
+          <a:solidFill>
+            <a:srgbClr val="FF6B35"/>
+          </a:solidFill>
+          <a:ln>
+            <a:noFill/>
+          </a:ln>
+        </p:spPr>
+        <p:style>
+          <a:lnRef idx="1">
+            <a:schemeClr val="accent1"/>
+          </a:lnRef>
+          <a:fillRef idx="3">
+            <a:schemeClr val="accent1"/>
+          </a:fillRef>
+          <a:effectRef idx="2">
+            <a:schemeClr val="accent1"/>
+          </a:effectRef>
+          <a:fontRef idx="minor">
+            <a:schemeClr val="lt1"/>
+          </a:fontRef>
+        </p:style>
+        <p:txBody>
+          <a:bodyPr rtlCol="0" anchor="ctr"/>
+          <a:lstStyle/>
+          <a:p>
+            <a:pPr algn="ctr"/>
+          </a:p>
+        </p:txBody>
+      </p:sp>
+      <p:sp>
+        <p:nvSpPr>
+          <p:cNvPr id="7" name="TextBox 6"/>
           <p:cNvSpPr txBox="1"/>
           <p:nvPr/>
         </p:nvSpPr>
         <p:spPr>
           <a:xfrm>
-            <a:off x="548640" y="1280160"/>
-            <a:ext cx="11247120" cy="5120640"/>
+            <a:off x="640080" y="1554480"/>
+            <a:ext cx="10789920" cy="4572000"/>
           </a:xfrm>
           <a:prstGeom prst="rect">
             <a:avLst/>
@@ -4974,14 +7852,24 @@
           <a:p>
             <a:pPr>
               <a:spcAft>
-                <a:spcPts val="1000"/>
+                <a:spcPts val="1300"/>
               </a:spcAft>
             </a:pPr>
             <a:r>
-              <a:rPr sz="2000">
-                <a:solidFill>
-                  <a:srgbClr val="2C3E50"/>
-                </a:solidFill>
+              <a:rPr sz="2000" b="1" i="0">
+                <a:solidFill>
+                  <a:srgbClr val="FF6B35"/>
+                </a:solidFill>
+                <a:latin typeface="Segoe UI"/>
+              </a:rPr>
+              <a:t>▸  </a:t>
+            </a:r>
+            <a:r>
+              <a:rPr sz="2000" b="0" i="0">
+                <a:solidFill>
+                  <a:srgbClr val="243140"/>
+                </a:solidFill>
+                <a:latin typeface="Segoe UI"/>
               </a:rPr>
               <a:t>Source code hosted on GitHub.</a:t>
             </a:r>
@@ -4989,14 +7877,24 @@
           <a:p>
             <a:pPr>
               <a:spcAft>
-                <a:spcPts val="1000"/>
+                <a:spcPts val="1300"/>
               </a:spcAft>
             </a:pPr>
             <a:r>
-              <a:rPr sz="2000">
-                <a:solidFill>
-                  <a:srgbClr val="2C3E50"/>
-                </a:solidFill>
+              <a:rPr sz="2000" b="1" i="0">
+                <a:solidFill>
+                  <a:srgbClr val="FF6B35"/>
+                </a:solidFill>
+                <a:latin typeface="Segoe UI"/>
+              </a:rPr>
+              <a:t>▸  </a:t>
+            </a:r>
+            <a:r>
+              <a:rPr sz="2000" b="0" i="0">
+                <a:solidFill>
+                  <a:srgbClr val="243140"/>
+                </a:solidFill>
+                <a:latin typeface="Segoe UI"/>
               </a:rPr>
               <a:t>Live deployment on PythonAnywhere.</a:t>
             </a:r>
@@ -5004,14 +7902,24 @@
           <a:p>
             <a:pPr>
               <a:spcAft>
-                <a:spcPts val="1000"/>
+                <a:spcPts val="1300"/>
               </a:spcAft>
             </a:pPr>
             <a:r>
-              <a:rPr sz="2000">
-                <a:solidFill>
-                  <a:srgbClr val="2C3E50"/>
-                </a:solidFill>
+              <a:rPr sz="2000" b="1" i="0">
+                <a:solidFill>
+                  <a:srgbClr val="FF6B35"/>
+                </a:solidFill>
+                <a:latin typeface="Segoe UI"/>
+              </a:rPr>
+              <a:t>▸  </a:t>
+            </a:r>
+            <a:r>
+              <a:rPr sz="2000" b="0" i="0">
+                <a:solidFill>
+                  <a:srgbClr val="243140"/>
+                </a:solidFill>
+                <a:latin typeface="Segoe UI"/>
               </a:rPr>
               <a:t>Steps: clone -&gt; venv -&gt; install -&gt; migrate -&gt; configure web app.</a:t>
             </a:r>
@@ -5019,16 +7927,138 @@
           <a:p>
             <a:pPr>
               <a:spcAft>
-                <a:spcPts val="1000"/>
+                <a:spcPts val="1300"/>
               </a:spcAft>
             </a:pPr>
             <a:r>
-              <a:rPr sz="2000">
-                <a:solidFill>
-                  <a:srgbClr val="2C3E50"/>
-                </a:solidFill>
+              <a:rPr sz="2000" b="1" i="0">
+                <a:solidFill>
+                  <a:srgbClr val="FF6B35"/>
+                </a:solidFill>
+                <a:latin typeface="Segoe UI"/>
+              </a:rPr>
+              <a:t>▸  </a:t>
+            </a:r>
+            <a:r>
+              <a:rPr sz="2000" b="0" i="0">
+                <a:solidFill>
+                  <a:srgbClr val="243140"/>
+                </a:solidFill>
+                <a:latin typeface="Segoe UI"/>
               </a:rPr>
               <a:t>Live URL: mussa.pythonanywhere.com</a:t>
+            </a:r>
+          </a:p>
+        </p:txBody>
+      </p:sp>
+      <p:sp>
+        <p:nvSpPr>
+          <p:cNvPr id="8" name="Rectangle 7"/>
+          <p:cNvSpPr/>
+          <p:nvPr/>
+        </p:nvSpPr>
+        <p:spPr>
+          <a:xfrm>
+            <a:off x="502920" y="6400800"/>
+            <a:ext cx="11201400" cy="17780"/>
+          </a:xfrm>
+          <a:prstGeom prst="rect">
+            <a:avLst/>
+          </a:prstGeom>
+          <a:solidFill>
+            <a:srgbClr val="DDE3E9"/>
+          </a:solidFill>
+          <a:ln>
+            <a:noFill/>
+          </a:ln>
+        </p:spPr>
+        <p:style>
+          <a:lnRef idx="1">
+            <a:schemeClr val="accent1"/>
+          </a:lnRef>
+          <a:fillRef idx="3">
+            <a:schemeClr val="accent1"/>
+          </a:fillRef>
+          <a:effectRef idx="2">
+            <a:schemeClr val="accent1"/>
+          </a:effectRef>
+          <a:fontRef idx="minor">
+            <a:schemeClr val="lt1"/>
+          </a:fontRef>
+        </p:style>
+        <p:txBody>
+          <a:bodyPr rtlCol="0" anchor="ctr"/>
+          <a:lstStyle/>
+          <a:p>
+            <a:pPr algn="ctr"/>
+          </a:p>
+        </p:txBody>
+      </p:sp>
+      <p:sp>
+        <p:nvSpPr>
+          <p:cNvPr id="9" name="TextBox 8"/>
+          <p:cNvSpPr txBox="1"/>
+          <p:nvPr/>
+        </p:nvSpPr>
+        <p:spPr>
+          <a:xfrm>
+            <a:off x="502920" y="6446520"/>
+            <a:ext cx="8229600" cy="320040"/>
+          </a:xfrm>
+          <a:prstGeom prst="rect">
+            <a:avLst/>
+          </a:prstGeom>
+          <a:noFill/>
+        </p:spPr>
+        <p:txBody>
+          <a:bodyPr wrap="none">
+            <a:spAutoFit/>
+          </a:bodyPr>
+          <a:lstStyle/>
+          <a:p>
+            <a:r>
+              <a:rPr sz="1000" b="0" i="0">
+                <a:solidFill>
+                  <a:srgbClr val="8A97A5"/>
+                </a:solidFill>
+                <a:latin typeface="Segoe UI"/>
+              </a:rPr>
+              <a:t>BistroSaaS  |  Restaurant Management System</a:t>
+            </a:r>
+          </a:p>
+        </p:txBody>
+      </p:sp>
+      <p:sp>
+        <p:nvSpPr>
+          <p:cNvPr id="10" name="TextBox 9"/>
+          <p:cNvSpPr txBox="1"/>
+          <p:nvPr/>
+        </p:nvSpPr>
+        <p:spPr>
+          <a:xfrm>
+            <a:off x="10607040" y="6446520"/>
+            <a:ext cx="1097280" cy="320040"/>
+          </a:xfrm>
+          <a:prstGeom prst="rect">
+            <a:avLst/>
+          </a:prstGeom>
+          <a:noFill/>
+        </p:spPr>
+        <p:txBody>
+          <a:bodyPr wrap="none">
+            <a:spAutoFit/>
+          </a:bodyPr>
+          <a:lstStyle/>
+          <a:p>
+            <a:pPr algn="r"/>
+            <a:r>
+              <a:rPr sz="1000" b="1" i="0">
+                <a:solidFill>
+                  <a:srgbClr val="8A97A5"/>
+                </a:solidFill>
+                <a:latin typeface="Segoe UI"/>
+              </a:rPr>
+              <a:t>19</a:t>
             </a:r>
           </a:p>
         </p:txBody>
@@ -5044,6 +8074,14 @@
 <file path=ppt/slides/slide2.xml><?xml version="1.0" encoding="utf-8"?>
 <p:sld xmlns:a="http://schemas.openxmlformats.org/drawingml/2006/main" xmlns:p="http://schemas.openxmlformats.org/presentationml/2006/main" xmlns:r="http://schemas.openxmlformats.org/officeDocument/2006/relationships">
   <p:cSld>
+    <p:bg>
+      <p:bgPr>
+        <a:solidFill>
+          <a:srgbClr val="F5F7FA"/>
+        </a:solidFill>
+        <a:effectLst/>
+      </p:bgPr>
+    </p:bg>
     <p:spTree>
       <p:nvGrpSpPr>
         <p:cNvPr id="1" name=""/>
@@ -5060,13 +8098,13 @@
         <p:spPr>
           <a:xfrm>
             <a:off x="0" y="0"/>
-            <a:ext cx="12191695" cy="1005840"/>
+            <a:ext cx="164592" cy="6858000"/>
           </a:xfrm>
           <a:prstGeom prst="rect">
             <a:avLst/>
           </a:prstGeom>
           <a:solidFill>
-            <a:srgbClr val="2980B9"/>
+            <a:srgbClr val="FF6B35"/>
           </a:solidFill>
           <a:ln>
             <a:noFill/>
@@ -5096,14 +8134,57 @@
       </p:sp>
       <p:sp>
         <p:nvSpPr>
-          <p:cNvPr id="3" name="TextBox 2"/>
+          <p:cNvPr id="3" name="Oval 2"/>
+          <p:cNvSpPr/>
+          <p:nvPr/>
+        </p:nvSpPr>
+        <p:spPr>
+          <a:xfrm>
+            <a:off x="10561320" y="411480"/>
+            <a:ext cx="1143000" cy="1143000"/>
+          </a:xfrm>
+          <a:prstGeom prst="ellipse">
+            <a:avLst/>
+          </a:prstGeom>
+          <a:solidFill>
+            <a:srgbClr val="FDE8DF"/>
+          </a:solidFill>
+          <a:ln>
+            <a:noFill/>
+          </a:ln>
+        </p:spPr>
+        <p:style>
+          <a:lnRef idx="1">
+            <a:schemeClr val="accent1"/>
+          </a:lnRef>
+          <a:fillRef idx="3">
+            <a:schemeClr val="accent1"/>
+          </a:fillRef>
+          <a:effectRef idx="2">
+            <a:schemeClr val="accent1"/>
+          </a:effectRef>
+          <a:fontRef idx="minor">
+            <a:schemeClr val="lt1"/>
+          </a:fontRef>
+        </p:style>
+        <p:txBody>
+          <a:bodyPr rtlCol="0" anchor="ctr"/>
+          <a:lstStyle/>
+          <a:p>
+            <a:pPr algn="ctr"/>
+          </a:p>
+        </p:txBody>
+      </p:sp>
+      <p:sp>
+        <p:nvSpPr>
+          <p:cNvPr id="4" name="TextBox 3"/>
           <p:cNvSpPr txBox="1"/>
           <p:nvPr/>
         </p:nvSpPr>
         <p:spPr>
           <a:xfrm>
-            <a:off x="457200" y="164592"/>
-            <a:ext cx="11247120" cy="731520"/>
+            <a:off x="10561320" y="457200"/>
+            <a:ext cx="1143000" cy="1051560"/>
           </a:xfrm>
           <a:prstGeom prst="rect">
             <a:avLst/>
@@ -5116,11 +8197,47 @@
           </a:bodyPr>
           <a:lstStyle/>
           <a:p>
-            <a:r>
-              <a:rPr sz="3000" b="1">
-                <a:solidFill>
-                  <a:srgbClr val="FFFFFF"/>
-                </a:solidFill>
+            <a:pPr algn="ctr"/>
+            <a:r>
+              <a:rPr sz="3600" b="0" i="0">
+                <a:solidFill>
+                  <a:srgbClr val="243140"/>
+                </a:solidFill>
+                <a:latin typeface="Segoe UI"/>
+              </a:rPr>
+              <a:t>👥</a:t>
+            </a:r>
+          </a:p>
+        </p:txBody>
+      </p:sp>
+      <p:sp>
+        <p:nvSpPr>
+          <p:cNvPr id="5" name="TextBox 4"/>
+          <p:cNvSpPr txBox="1"/>
+          <p:nvPr/>
+        </p:nvSpPr>
+        <p:spPr>
+          <a:xfrm>
+            <a:off x="502920" y="411480"/>
+            <a:ext cx="9692640" cy="777240"/>
+          </a:xfrm>
+          <a:prstGeom prst="rect">
+            <a:avLst/>
+          </a:prstGeom>
+          <a:noFill/>
+        </p:spPr>
+        <p:txBody>
+          <a:bodyPr wrap="none">
+            <a:spAutoFit/>
+          </a:bodyPr>
+          <a:lstStyle/>
+          <a:p>
+            <a:r>
+              <a:rPr sz="3200" b="1" i="0">
+                <a:solidFill>
+                  <a:srgbClr val="1E2A38"/>
+                </a:solidFill>
+                <a:latin typeface="Segoe UI"/>
               </a:rPr>
               <a:t>Group Members</a:t>
             </a:r>
@@ -5129,14 +8246,57 @@
       </p:sp>
       <p:sp>
         <p:nvSpPr>
-          <p:cNvPr id="4" name="TextBox 3"/>
+          <p:cNvPr id="6" name="Rounded Rectangle 5"/>
+          <p:cNvSpPr/>
+          <p:nvPr/>
+        </p:nvSpPr>
+        <p:spPr>
+          <a:xfrm>
+            <a:off x="548640" y="1170432"/>
+            <a:ext cx="2286000" cy="82296"/>
+          </a:xfrm>
+          <a:prstGeom prst="roundRect">
+            <a:avLst/>
+          </a:prstGeom>
+          <a:solidFill>
+            <a:srgbClr val="FF6B35"/>
+          </a:solidFill>
+          <a:ln>
+            <a:noFill/>
+          </a:ln>
+        </p:spPr>
+        <p:style>
+          <a:lnRef idx="1">
+            <a:schemeClr val="accent1"/>
+          </a:lnRef>
+          <a:fillRef idx="3">
+            <a:schemeClr val="accent1"/>
+          </a:fillRef>
+          <a:effectRef idx="2">
+            <a:schemeClr val="accent1"/>
+          </a:effectRef>
+          <a:fontRef idx="minor">
+            <a:schemeClr val="lt1"/>
+          </a:fontRef>
+        </p:style>
+        <p:txBody>
+          <a:bodyPr rtlCol="0" anchor="ctr"/>
+          <a:lstStyle/>
+          <a:p>
+            <a:pPr algn="ctr"/>
+          </a:p>
+        </p:txBody>
+      </p:sp>
+      <p:sp>
+        <p:nvSpPr>
+          <p:cNvPr id="7" name="TextBox 6"/>
           <p:cNvSpPr txBox="1"/>
           <p:nvPr/>
         </p:nvSpPr>
         <p:spPr>
           <a:xfrm>
-            <a:off x="548640" y="1280160"/>
-            <a:ext cx="11247120" cy="5120640"/>
+            <a:off x="640080" y="1554480"/>
+            <a:ext cx="10789920" cy="4572000"/>
           </a:xfrm>
           <a:prstGeom prst="rect">
             <a:avLst/>
@@ -5151,91 +8311,254 @@
           <a:p>
             <a:pPr>
               <a:spcAft>
-                <a:spcPts val="1000"/>
+                <a:spcPts val="1300"/>
               </a:spcAft>
             </a:pPr>
             <a:r>
-              <a:rPr sz="2000">
-                <a:solidFill>
-                  <a:srgbClr val="2C3E50"/>
-                </a:solidFill>
-              </a:rPr>
-              <a:t>Mussa Afridi - Backend &amp; Deployment</a:t>
+              <a:rPr sz="2000" b="1" i="0">
+                <a:solidFill>
+                  <a:srgbClr val="FF6B35"/>
+                </a:solidFill>
+                <a:latin typeface="Segoe UI"/>
+              </a:rPr>
+              <a:t>▸  </a:t>
+            </a:r>
+            <a:r>
+              <a:rPr sz="2000" b="0" i="0">
+                <a:solidFill>
+                  <a:srgbClr val="243140"/>
+                </a:solidFill>
+                <a:latin typeface="Segoe UI"/>
+              </a:rPr>
+              <a:t>Mussa Afridi  -  Backend &amp; Deployment</a:t>
             </a:r>
           </a:p>
           <a:p>
             <a:pPr>
               <a:spcAft>
-                <a:spcPts val="1000"/>
+                <a:spcPts val="1300"/>
               </a:spcAft>
             </a:pPr>
             <a:r>
-              <a:rPr sz="2000">
-                <a:solidFill>
-                  <a:srgbClr val="2C3E50"/>
-                </a:solidFill>
-              </a:rPr>
-              <a:t>[ Member 2 - role ]</a:t>
+              <a:rPr sz="2000" b="1" i="0">
+                <a:solidFill>
+                  <a:srgbClr val="FF6B35"/>
+                </a:solidFill>
+                <a:latin typeface="Segoe UI"/>
+              </a:rPr>
+              <a:t>▸  </a:t>
+            </a:r>
+            <a:r>
+              <a:rPr sz="2000" b="0" i="0">
+                <a:solidFill>
+                  <a:srgbClr val="243140"/>
+                </a:solidFill>
+                <a:latin typeface="Segoe UI"/>
+              </a:rPr>
+              <a:t>[ Member 2  -  role ]</a:t>
             </a:r>
           </a:p>
           <a:p>
             <a:pPr>
               <a:spcAft>
-                <a:spcPts val="1000"/>
+                <a:spcPts val="1300"/>
               </a:spcAft>
             </a:pPr>
             <a:r>
-              <a:rPr sz="2000">
-                <a:solidFill>
-                  <a:srgbClr val="2C3E50"/>
-                </a:solidFill>
-              </a:rPr>
-              <a:t>[ Member 3 - role ]</a:t>
+              <a:rPr sz="2000" b="1" i="0">
+                <a:solidFill>
+                  <a:srgbClr val="FF6B35"/>
+                </a:solidFill>
+                <a:latin typeface="Segoe UI"/>
+              </a:rPr>
+              <a:t>▸  </a:t>
+            </a:r>
+            <a:r>
+              <a:rPr sz="2000" b="0" i="0">
+                <a:solidFill>
+                  <a:srgbClr val="243140"/>
+                </a:solidFill>
+                <a:latin typeface="Segoe UI"/>
+              </a:rPr>
+              <a:t>[ Member 3  -  role ]</a:t>
             </a:r>
           </a:p>
           <a:p>
             <a:pPr>
               <a:spcAft>
-                <a:spcPts val="1000"/>
+                <a:spcPts val="1300"/>
               </a:spcAft>
             </a:pPr>
             <a:r>
-              <a:rPr sz="2000">
-                <a:solidFill>
-                  <a:srgbClr val="2C3E50"/>
-                </a:solidFill>
-              </a:rPr>
-              <a:t>[ Member 4 - role ]</a:t>
+              <a:rPr sz="2000" b="1" i="0">
+                <a:solidFill>
+                  <a:srgbClr val="FF6B35"/>
+                </a:solidFill>
+                <a:latin typeface="Segoe UI"/>
+              </a:rPr>
+              <a:t>▸  </a:t>
+            </a:r>
+            <a:r>
+              <a:rPr sz="2000" b="0" i="0">
+                <a:solidFill>
+                  <a:srgbClr val="243140"/>
+                </a:solidFill>
+                <a:latin typeface="Segoe UI"/>
+              </a:rPr>
+              <a:t>[ Member 4  -  role ]</a:t>
             </a:r>
           </a:p>
           <a:p>
             <a:pPr>
               <a:spcAft>
-                <a:spcPts val="1000"/>
+                <a:spcPts val="1300"/>
               </a:spcAft>
             </a:pPr>
             <a:r>
-              <a:rPr sz="2000">
-                <a:solidFill>
-                  <a:srgbClr val="2C3E50"/>
-                </a:solidFill>
-              </a:rPr>
-              <a:t/>
+              <a:rPr sz="1800" b="0" i="0">
+                <a:solidFill>
+                  <a:srgbClr val="243140"/>
+                </a:solidFill>
+                <a:latin typeface="Segoe UI"/>
+              </a:rPr>
+              <a:t> </a:t>
             </a:r>
           </a:p>
           <a:p>
             <a:pPr>
               <a:spcAft>
-                <a:spcPts val="1000"/>
+                <a:spcPts val="1300"/>
               </a:spcAft>
             </a:pPr>
             <a:r>
-              <a:rPr sz="2000">
-                <a:solidFill>
-                  <a:srgbClr val="2C3E50"/>
-                </a:solidFill>
-              </a:rPr>
-              <a:t>Course: ____________    Instructor: ____________</a:t>
+              <a:rPr sz="2000" b="1" i="0">
+                <a:solidFill>
+                  <a:srgbClr val="FF6B35"/>
+                </a:solidFill>
+                <a:latin typeface="Segoe UI"/>
+              </a:rPr>
+              <a:t>▸  </a:t>
+            </a:r>
+            <a:r>
+              <a:rPr sz="2000" b="0" i="0">
+                <a:solidFill>
+                  <a:srgbClr val="243140"/>
+                </a:solidFill>
+                <a:latin typeface="Segoe UI"/>
+              </a:rPr>
+              <a:t>Course: ____________     Instructor: ____________</a:t>
+            </a:r>
+          </a:p>
+        </p:txBody>
+      </p:sp>
+      <p:sp>
+        <p:nvSpPr>
+          <p:cNvPr id="8" name="Rectangle 7"/>
+          <p:cNvSpPr/>
+          <p:nvPr/>
+        </p:nvSpPr>
+        <p:spPr>
+          <a:xfrm>
+            <a:off x="502920" y="6400800"/>
+            <a:ext cx="11201400" cy="17780"/>
+          </a:xfrm>
+          <a:prstGeom prst="rect">
+            <a:avLst/>
+          </a:prstGeom>
+          <a:solidFill>
+            <a:srgbClr val="DDE3E9"/>
+          </a:solidFill>
+          <a:ln>
+            <a:noFill/>
+          </a:ln>
+        </p:spPr>
+        <p:style>
+          <a:lnRef idx="1">
+            <a:schemeClr val="accent1"/>
+          </a:lnRef>
+          <a:fillRef idx="3">
+            <a:schemeClr val="accent1"/>
+          </a:fillRef>
+          <a:effectRef idx="2">
+            <a:schemeClr val="accent1"/>
+          </a:effectRef>
+          <a:fontRef idx="minor">
+            <a:schemeClr val="lt1"/>
+          </a:fontRef>
+        </p:style>
+        <p:txBody>
+          <a:bodyPr rtlCol="0" anchor="ctr"/>
+          <a:lstStyle/>
+          <a:p>
+            <a:pPr algn="ctr"/>
+          </a:p>
+        </p:txBody>
+      </p:sp>
+      <p:sp>
+        <p:nvSpPr>
+          <p:cNvPr id="9" name="TextBox 8"/>
+          <p:cNvSpPr txBox="1"/>
+          <p:nvPr/>
+        </p:nvSpPr>
+        <p:spPr>
+          <a:xfrm>
+            <a:off x="502920" y="6446520"/>
+            <a:ext cx="8229600" cy="320040"/>
+          </a:xfrm>
+          <a:prstGeom prst="rect">
+            <a:avLst/>
+          </a:prstGeom>
+          <a:noFill/>
+        </p:spPr>
+        <p:txBody>
+          <a:bodyPr wrap="none">
+            <a:spAutoFit/>
+          </a:bodyPr>
+          <a:lstStyle/>
+          <a:p>
+            <a:r>
+              <a:rPr sz="1000" b="0" i="0">
+                <a:solidFill>
+                  <a:srgbClr val="8A97A5"/>
+                </a:solidFill>
+                <a:latin typeface="Segoe UI"/>
+              </a:rPr>
+              <a:t>BistroSaaS  |  Restaurant Management System</a:t>
+            </a:r>
+          </a:p>
+        </p:txBody>
+      </p:sp>
+      <p:sp>
+        <p:nvSpPr>
+          <p:cNvPr id="10" name="TextBox 9"/>
+          <p:cNvSpPr txBox="1"/>
+          <p:nvPr/>
+        </p:nvSpPr>
+        <p:spPr>
+          <a:xfrm>
+            <a:off x="10607040" y="6446520"/>
+            <a:ext cx="1097280" cy="320040"/>
+          </a:xfrm>
+          <a:prstGeom prst="rect">
+            <a:avLst/>
+          </a:prstGeom>
+          <a:noFill/>
+        </p:spPr>
+        <p:txBody>
+          <a:bodyPr wrap="none">
+            <a:spAutoFit/>
+          </a:bodyPr>
+          <a:lstStyle/>
+          <a:p>
+            <a:pPr algn="r"/>
+            <a:r>
+              <a:rPr sz="1000" b="1" i="0">
+                <a:solidFill>
+                  <a:srgbClr val="8A97A5"/>
+                </a:solidFill>
+                <a:latin typeface="Segoe UI"/>
+              </a:rPr>
+              <a:t>2</a:t>
             </a:r>
           </a:p>
         </p:txBody>
@@ -5251,6 +8574,14 @@
 <file path=ppt/slides/slide20.xml><?xml version="1.0" encoding="utf-8"?>
 <p:sld xmlns:a="http://schemas.openxmlformats.org/drawingml/2006/main" xmlns:p="http://schemas.openxmlformats.org/presentationml/2006/main" xmlns:r="http://schemas.openxmlformats.org/officeDocument/2006/relationships">
   <p:cSld>
+    <p:bg>
+      <p:bgPr>
+        <a:solidFill>
+          <a:srgbClr val="1E2A38"/>
+        </a:solidFill>
+        <a:effectLst/>
+      </p:bgPr>
+    </p:bg>
     <p:spTree>
       <p:nvGrpSpPr>
         <p:cNvPr id="1" name=""/>
@@ -5267,13 +8598,13 @@
         <p:spPr>
           <a:xfrm>
             <a:off x="0" y="0"/>
-            <a:ext cx="12191695" cy="1005840"/>
+            <a:ext cx="320040" cy="6858000"/>
           </a:xfrm>
           <a:prstGeom prst="rect">
             <a:avLst/>
           </a:prstGeom>
           <a:solidFill>
-            <a:srgbClr val="2980B9"/>
+            <a:srgbClr val="FF6B35"/>
           </a:solidFill>
           <a:ln>
             <a:noFill/>
@@ -5303,14 +8634,57 @@
       </p:sp>
       <p:sp>
         <p:nvSpPr>
-          <p:cNvPr id="3" name="TextBox 2"/>
+          <p:cNvPr id="3" name="Oval 2"/>
+          <p:cNvSpPr/>
+          <p:nvPr/>
+        </p:nvSpPr>
+        <p:spPr>
+          <a:xfrm>
+            <a:off x="9509760" y="3931920"/>
+            <a:ext cx="2926080" cy="2926080"/>
+          </a:xfrm>
+          <a:prstGeom prst="ellipse">
+            <a:avLst/>
+          </a:prstGeom>
+          <a:noFill/>
+          <a:ln w="31750">
+            <a:solidFill>
+              <a:srgbClr val="FF6B35"/>
+            </a:solidFill>
+          </a:ln>
+        </p:spPr>
+        <p:style>
+          <a:lnRef idx="1">
+            <a:schemeClr val="accent1"/>
+          </a:lnRef>
+          <a:fillRef idx="3">
+            <a:schemeClr val="accent1"/>
+          </a:fillRef>
+          <a:effectRef idx="2">
+            <a:schemeClr val="accent1"/>
+          </a:effectRef>
+          <a:fontRef idx="minor">
+            <a:schemeClr val="lt1"/>
+          </a:fontRef>
+        </p:style>
+        <p:txBody>
+          <a:bodyPr rtlCol="0" anchor="ctr"/>
+          <a:lstStyle/>
+          <a:p>
+            <a:pPr algn="ctr"/>
+          </a:p>
+        </p:txBody>
+      </p:sp>
+      <p:sp>
+        <p:nvSpPr>
+          <p:cNvPr id="4" name="TextBox 3"/>
           <p:cNvSpPr txBox="1"/>
           <p:nvPr/>
         </p:nvSpPr>
         <p:spPr>
           <a:xfrm>
-            <a:off x="457200" y="164592"/>
-            <a:ext cx="11247120" cy="731520"/>
+            <a:off x="822960" y="1371600"/>
+            <a:ext cx="2743200" cy="1097280"/>
           </a:xfrm>
           <a:prstGeom prst="rect">
             <a:avLst/>
@@ -5324,95 +8698,13 @@
           <a:lstStyle/>
           <a:p>
             <a:r>
-              <a:rPr sz="3000" b="1">
+              <a:rPr sz="6000" b="0" i="0">
                 <a:solidFill>
                   <a:srgbClr val="FFFFFF"/>
                 </a:solidFill>
-              </a:rPr>
-              <a:t>Conclusion</a:t>
-            </a:r>
-          </a:p>
-        </p:txBody>
-      </p:sp>
-      <p:sp>
-        <p:nvSpPr>
-          <p:cNvPr id="4" name="TextBox 3"/>
-          <p:cNvSpPr txBox="1"/>
-          <p:nvPr/>
-        </p:nvSpPr>
-        <p:spPr>
-          <a:xfrm>
-            <a:off x="548640" y="1280160"/>
-            <a:ext cx="11247120" cy="5120640"/>
-          </a:xfrm>
-          <a:prstGeom prst="rect">
-            <a:avLst/>
-          </a:prstGeom>
-          <a:noFill/>
-        </p:spPr>
-        <p:txBody>
-          <a:bodyPr wrap="square">
-            <a:spAutoFit/>
-          </a:bodyPr>
-          <a:lstStyle/>
-          <a:p>
-            <a:pPr>
-              <a:spcAft>
-                <a:spcPts val="1000"/>
-              </a:spcAft>
-            </a:pPr>
-            <a:r>
-              <a:rPr sz="2000">
-                <a:solidFill>
-                  <a:srgbClr val="2C3E50"/>
-                </a:solidFill>
-              </a:rPr>
-              <a:t>A complete full-stack Django application.</a:t>
-            </a:r>
-          </a:p>
-          <a:p>
-            <a:pPr>
-              <a:spcAft>
-                <a:spcPts val="1000"/>
-              </a:spcAft>
-            </a:pPr>
-            <a:r>
-              <a:rPr sz="2000">
-                <a:solidFill>
-                  <a:srgbClr val="2C3E50"/>
-                </a:solidFill>
-              </a:rPr>
-              <a:t>Covers DB design, auth, CRUD, API, and deployment.</a:t>
-            </a:r>
-          </a:p>
-          <a:p>
-            <a:pPr>
-              <a:spcAft>
-                <a:spcPts val="1000"/>
-              </a:spcAft>
-            </a:pPr>
-            <a:r>
-              <a:rPr sz="2000">
-                <a:solidFill>
-                  <a:srgbClr val="2C3E50"/>
-                </a:solidFill>
-              </a:rPr>
-              <a:t>Hands-on experience with real-world web development.</a:t>
-            </a:r>
-          </a:p>
-          <a:p>
-            <a:pPr>
-              <a:spcAft>
-                <a:spcPts val="1000"/>
-              </a:spcAft>
-            </a:pPr>
-            <a:r>
-              <a:rPr sz="2000">
-                <a:solidFill>
-                  <a:srgbClr val="2C3E50"/>
-                </a:solidFill>
-              </a:rPr>
-              <a:t>Future: online payments, email alerts, reviews.</a:t>
+                <a:latin typeface="Segoe UI"/>
+              </a:rPr>
+              <a:t>🍽</a:t>
             </a:r>
           </a:p>
         </p:txBody>
@@ -5425,8 +8717,8 @@
         </p:nvSpPr>
         <p:spPr>
           <a:xfrm>
-            <a:off x="548640" y="5852160"/>
-            <a:ext cx="10972800" cy="731520"/>
+            <a:off x="822960" y="2468880"/>
+            <a:ext cx="10058400" cy="1828800"/>
           </a:xfrm>
           <a:prstGeom prst="rect">
             <a:avLst/>
@@ -5440,12 +8732,153 @@
           <a:lstStyle/>
           <a:p>
             <a:r>
-              <a:rPr sz="2400" b="1">
-                <a:solidFill>
-                  <a:srgbClr val="2980B9"/>
-                </a:solidFill>
-              </a:rPr>
-              <a:t>Thank You!  (Live demonstration to follow)</a:t>
+              <a:rPr sz="4000" b="1" i="0">
+                <a:solidFill>
+                  <a:srgbClr val="FFFFFF"/>
+                </a:solidFill>
+                <a:latin typeface="Segoe UI"/>
+              </a:rPr>
+              <a:t>Conclusion</a:t>
+            </a:r>
+          </a:p>
+          <a:p>
+            <a:r>
+              <a:rPr sz="3000" b="1" i="0">
+                <a:solidFill>
+                  <a:srgbClr val="FFFFFF"/>
+                </a:solidFill>
+                <a:latin typeface="Segoe UI"/>
+              </a:rPr>
+              <a:t>Thank You!</a:t>
+            </a:r>
+          </a:p>
+        </p:txBody>
+      </p:sp>
+      <p:sp>
+        <p:nvSpPr>
+          <p:cNvPr id="6" name="Rounded Rectangle 5"/>
+          <p:cNvSpPr/>
+          <p:nvPr/>
+        </p:nvSpPr>
+        <p:spPr>
+          <a:xfrm>
+            <a:off x="868680" y="4160520"/>
+            <a:ext cx="2743200" cy="91440"/>
+          </a:xfrm>
+          <a:prstGeom prst="roundRect">
+            <a:avLst/>
+          </a:prstGeom>
+          <a:solidFill>
+            <a:srgbClr val="FF6B35"/>
+          </a:solidFill>
+          <a:ln>
+            <a:noFill/>
+          </a:ln>
+        </p:spPr>
+        <p:style>
+          <a:lnRef idx="1">
+            <a:schemeClr val="accent1"/>
+          </a:lnRef>
+          <a:fillRef idx="3">
+            <a:schemeClr val="accent1"/>
+          </a:fillRef>
+          <a:effectRef idx="2">
+            <a:schemeClr val="accent1"/>
+          </a:effectRef>
+          <a:fontRef idx="minor">
+            <a:schemeClr val="lt1"/>
+          </a:fontRef>
+        </p:style>
+        <p:txBody>
+          <a:bodyPr rtlCol="0" anchor="ctr"/>
+          <a:lstStyle/>
+          <a:p>
+            <a:pPr algn="ctr"/>
+          </a:p>
+        </p:txBody>
+      </p:sp>
+      <p:sp>
+        <p:nvSpPr>
+          <p:cNvPr id="7" name="TextBox 6"/>
+          <p:cNvSpPr txBox="1"/>
+          <p:nvPr/>
+        </p:nvSpPr>
+        <p:spPr>
+          <a:xfrm>
+            <a:off x="822960" y="4389120"/>
+            <a:ext cx="9601200" cy="731520"/>
+          </a:xfrm>
+          <a:prstGeom prst="rect">
+            <a:avLst/>
+          </a:prstGeom>
+          <a:noFill/>
+        </p:spPr>
+        <p:txBody>
+          <a:bodyPr wrap="none">
+            <a:spAutoFit/>
+          </a:bodyPr>
+          <a:lstStyle/>
+          <a:p>
+            <a:r>
+              <a:rPr sz="2200" b="0" i="0">
+                <a:solidFill>
+                  <a:srgbClr val="D7DEE5"/>
+                </a:solidFill>
+                <a:latin typeface="Segoe UI"/>
+              </a:rPr>
+              <a:t>A complete full-stack Django app  -  live demonstration to follow.</a:t>
+            </a:r>
+          </a:p>
+        </p:txBody>
+      </p:sp>
+      <p:sp>
+        <p:nvSpPr>
+          <p:cNvPr id="8" name="Rounded Rectangle 7"/>
+          <p:cNvSpPr/>
+          <p:nvPr/>
+        </p:nvSpPr>
+        <p:spPr>
+          <a:xfrm>
+            <a:off x="868680" y="5212080"/>
+            <a:ext cx="3200400" cy="502920"/>
+          </a:xfrm>
+          <a:prstGeom prst="roundRect">
+            <a:avLst/>
+          </a:prstGeom>
+          <a:solidFill>
+            <a:srgbClr val="FF6B35"/>
+          </a:solidFill>
+          <a:ln>
+            <a:noFill/>
+          </a:ln>
+        </p:spPr>
+        <p:style>
+          <a:lnRef idx="1">
+            <a:schemeClr val="accent1"/>
+          </a:lnRef>
+          <a:fillRef idx="3">
+            <a:schemeClr val="accent1"/>
+          </a:fillRef>
+          <a:effectRef idx="2">
+            <a:schemeClr val="accent1"/>
+          </a:effectRef>
+          <a:fontRef idx="minor">
+            <a:schemeClr val="lt1"/>
+          </a:fontRef>
+        </p:style>
+        <p:txBody>
+          <a:bodyPr rtlCol="0" anchor="ctr" wrap="square"/>
+          <a:lstStyle/>
+          <a:p>
+            <a:pPr algn="ctr"/>
+            <a:r>
+              <a:rPr sz="1600" b="1" i="0">
+                <a:solidFill>
+                  <a:srgbClr val="FFFFFF"/>
+                </a:solidFill>
+                <a:latin typeface="Segoe UI"/>
+              </a:rPr>
+              <a:t>QUESTIONS  &amp;  DEMO</a:t>
             </a:r>
           </a:p>
         </p:txBody>
@@ -5461,6 +8894,14 @@
 <file path=ppt/slides/slide3.xml><?xml version="1.0" encoding="utf-8"?>
 <p:sld xmlns:a="http://schemas.openxmlformats.org/drawingml/2006/main" xmlns:p="http://schemas.openxmlformats.org/presentationml/2006/main" xmlns:r="http://schemas.openxmlformats.org/officeDocument/2006/relationships">
   <p:cSld>
+    <p:bg>
+      <p:bgPr>
+        <a:solidFill>
+          <a:srgbClr val="F5F7FA"/>
+        </a:solidFill>
+        <a:effectLst/>
+      </p:bgPr>
+    </p:bg>
     <p:spTree>
       <p:nvGrpSpPr>
         <p:cNvPr id="1" name=""/>
@@ -5477,13 +8918,13 @@
         <p:spPr>
           <a:xfrm>
             <a:off x="0" y="0"/>
-            <a:ext cx="12191695" cy="1005840"/>
+            <a:ext cx="164592" cy="6858000"/>
           </a:xfrm>
           <a:prstGeom prst="rect">
             <a:avLst/>
           </a:prstGeom>
           <a:solidFill>
-            <a:srgbClr val="2980B9"/>
+            <a:srgbClr val="FF6B35"/>
           </a:solidFill>
           <a:ln>
             <a:noFill/>
@@ -5513,14 +8954,57 @@
       </p:sp>
       <p:sp>
         <p:nvSpPr>
-          <p:cNvPr id="3" name="TextBox 2"/>
+          <p:cNvPr id="3" name="Oval 2"/>
+          <p:cNvSpPr/>
+          <p:nvPr/>
+        </p:nvSpPr>
+        <p:spPr>
+          <a:xfrm>
+            <a:off x="10561320" y="411480"/>
+            <a:ext cx="1143000" cy="1143000"/>
+          </a:xfrm>
+          <a:prstGeom prst="ellipse">
+            <a:avLst/>
+          </a:prstGeom>
+          <a:solidFill>
+            <a:srgbClr val="FDE8DF"/>
+          </a:solidFill>
+          <a:ln>
+            <a:noFill/>
+          </a:ln>
+        </p:spPr>
+        <p:style>
+          <a:lnRef idx="1">
+            <a:schemeClr val="accent1"/>
+          </a:lnRef>
+          <a:fillRef idx="3">
+            <a:schemeClr val="accent1"/>
+          </a:fillRef>
+          <a:effectRef idx="2">
+            <a:schemeClr val="accent1"/>
+          </a:effectRef>
+          <a:fontRef idx="minor">
+            <a:schemeClr val="lt1"/>
+          </a:fontRef>
+        </p:style>
+        <p:txBody>
+          <a:bodyPr rtlCol="0" anchor="ctr"/>
+          <a:lstStyle/>
+          <a:p>
+            <a:pPr algn="ctr"/>
+          </a:p>
+        </p:txBody>
+      </p:sp>
+      <p:sp>
+        <p:nvSpPr>
+          <p:cNvPr id="4" name="TextBox 3"/>
           <p:cNvSpPr txBox="1"/>
           <p:nvPr/>
         </p:nvSpPr>
         <p:spPr>
           <a:xfrm>
-            <a:off x="457200" y="164592"/>
-            <a:ext cx="11247120" cy="731520"/>
+            <a:off x="10561320" y="457200"/>
+            <a:ext cx="1143000" cy="1051560"/>
           </a:xfrm>
           <a:prstGeom prst="rect">
             <a:avLst/>
@@ -5533,11 +9017,47 @@
           </a:bodyPr>
           <a:lstStyle/>
           <a:p>
-            <a:r>
-              <a:rPr sz="3000" b="1">
-                <a:solidFill>
-                  <a:srgbClr val="FFFFFF"/>
-                </a:solidFill>
+            <a:pPr algn="ctr"/>
+            <a:r>
+              <a:rPr sz="3600" b="0" i="0">
+                <a:solidFill>
+                  <a:srgbClr val="243140"/>
+                </a:solidFill>
+                <a:latin typeface="Segoe UI"/>
+              </a:rPr>
+              <a:t>📖</a:t>
+            </a:r>
+          </a:p>
+        </p:txBody>
+      </p:sp>
+      <p:sp>
+        <p:nvSpPr>
+          <p:cNvPr id="5" name="TextBox 4"/>
+          <p:cNvSpPr txBox="1"/>
+          <p:nvPr/>
+        </p:nvSpPr>
+        <p:spPr>
+          <a:xfrm>
+            <a:off x="502920" y="411480"/>
+            <a:ext cx="9692640" cy="777240"/>
+          </a:xfrm>
+          <a:prstGeom prst="rect">
+            <a:avLst/>
+          </a:prstGeom>
+          <a:noFill/>
+        </p:spPr>
+        <p:txBody>
+          <a:bodyPr wrap="none">
+            <a:spAutoFit/>
+          </a:bodyPr>
+          <a:lstStyle/>
+          <a:p>
+            <a:r>
+              <a:rPr sz="3200" b="1" i="0">
+                <a:solidFill>
+                  <a:srgbClr val="1E2A38"/>
+                </a:solidFill>
+                <a:latin typeface="Segoe UI"/>
               </a:rPr>
               <a:t>Introduction</a:t>
             </a:r>
@@ -5546,14 +9066,57 @@
       </p:sp>
       <p:sp>
         <p:nvSpPr>
-          <p:cNvPr id="4" name="TextBox 3"/>
+          <p:cNvPr id="6" name="Rounded Rectangle 5"/>
+          <p:cNvSpPr/>
+          <p:nvPr/>
+        </p:nvSpPr>
+        <p:spPr>
+          <a:xfrm>
+            <a:off x="548640" y="1170432"/>
+            <a:ext cx="2286000" cy="82296"/>
+          </a:xfrm>
+          <a:prstGeom prst="roundRect">
+            <a:avLst/>
+          </a:prstGeom>
+          <a:solidFill>
+            <a:srgbClr val="FF6B35"/>
+          </a:solidFill>
+          <a:ln>
+            <a:noFill/>
+          </a:ln>
+        </p:spPr>
+        <p:style>
+          <a:lnRef idx="1">
+            <a:schemeClr val="accent1"/>
+          </a:lnRef>
+          <a:fillRef idx="3">
+            <a:schemeClr val="accent1"/>
+          </a:fillRef>
+          <a:effectRef idx="2">
+            <a:schemeClr val="accent1"/>
+          </a:effectRef>
+          <a:fontRef idx="minor">
+            <a:schemeClr val="lt1"/>
+          </a:fontRef>
+        </p:style>
+        <p:txBody>
+          <a:bodyPr rtlCol="0" anchor="ctr"/>
+          <a:lstStyle/>
+          <a:p>
+            <a:pPr algn="ctr"/>
+          </a:p>
+        </p:txBody>
+      </p:sp>
+      <p:sp>
+        <p:nvSpPr>
+          <p:cNvPr id="7" name="TextBox 6"/>
           <p:cNvSpPr txBox="1"/>
           <p:nvPr/>
         </p:nvSpPr>
         <p:spPr>
           <a:xfrm>
-            <a:off x="548640" y="1280160"/>
-            <a:ext cx="11247120" cy="5120640"/>
+            <a:off x="640080" y="1554480"/>
+            <a:ext cx="10789920" cy="4572000"/>
           </a:xfrm>
           <a:prstGeom prst="rect">
             <a:avLst/>
@@ -5568,14 +9131,24 @@
           <a:p>
             <a:pPr>
               <a:spcAft>
-                <a:spcPts val="1000"/>
+                <a:spcPts val="1300"/>
               </a:spcAft>
             </a:pPr>
             <a:r>
-              <a:rPr sz="2000">
-                <a:solidFill>
-                  <a:srgbClr val="2C3E50"/>
-                </a:solidFill>
+              <a:rPr sz="2000" b="1" i="0">
+                <a:solidFill>
+                  <a:srgbClr val="FF6B35"/>
+                </a:solidFill>
+                <a:latin typeface="Segoe UI"/>
+              </a:rPr>
+              <a:t>▸  </a:t>
+            </a:r>
+            <a:r>
+              <a:rPr sz="2000" b="0" i="0">
+                <a:solidFill>
+                  <a:srgbClr val="243140"/>
+                </a:solidFill>
+                <a:latin typeface="Segoe UI"/>
               </a:rPr>
               <a:t>A full-stack web application for restaurant ordering &amp; management.</a:t>
             </a:r>
@@ -5583,14 +9156,24 @@
           <a:p>
             <a:pPr>
               <a:spcAft>
-                <a:spcPts val="1000"/>
+                <a:spcPts val="1300"/>
               </a:spcAft>
             </a:pPr>
             <a:r>
-              <a:rPr sz="2000">
-                <a:solidFill>
-                  <a:srgbClr val="2C3E50"/>
-                </a:solidFill>
+              <a:rPr sz="2000" b="1" i="0">
+                <a:solidFill>
+                  <a:srgbClr val="FF6B35"/>
+                </a:solidFill>
+                <a:latin typeface="Segoe UI"/>
+              </a:rPr>
+              <a:t>▸  </a:t>
+            </a:r>
+            <a:r>
+              <a:rPr sz="2000" b="0" i="0">
+                <a:solidFill>
+                  <a:srgbClr val="243140"/>
+                </a:solidFill>
+                <a:latin typeface="Segoe UI"/>
               </a:rPr>
               <a:t>Built with the Django web framework (Python).</a:t>
             </a:r>
@@ -5598,14 +9181,24 @@
           <a:p>
             <a:pPr>
               <a:spcAft>
-                <a:spcPts val="1000"/>
+                <a:spcPts val="1300"/>
               </a:spcAft>
             </a:pPr>
             <a:r>
-              <a:rPr sz="2000">
-                <a:solidFill>
-                  <a:srgbClr val="2C3E50"/>
-                </a:solidFill>
+              <a:rPr sz="2000" b="1" i="0">
+                <a:solidFill>
+                  <a:srgbClr val="FF6B35"/>
+                </a:solidFill>
+                <a:latin typeface="Segoe UI"/>
+              </a:rPr>
+              <a:t>▸  </a:t>
+            </a:r>
+            <a:r>
+              <a:rPr sz="2000" b="0" i="0">
+                <a:solidFill>
+                  <a:srgbClr val="243140"/>
+                </a:solidFill>
+                <a:latin typeface="Segoe UI"/>
               </a:rPr>
               <a:t>Customers browse a menu, place orders, and track status.</a:t>
             </a:r>
@@ -5613,14 +9206,24 @@
           <a:p>
             <a:pPr>
               <a:spcAft>
-                <a:spcPts val="1000"/>
+                <a:spcPts val="1300"/>
               </a:spcAft>
             </a:pPr>
             <a:r>
-              <a:rPr sz="2000">
-                <a:solidFill>
-                  <a:srgbClr val="2C3E50"/>
-                </a:solidFill>
+              <a:rPr sz="2000" b="1" i="0">
+                <a:solidFill>
+                  <a:srgbClr val="FF6B35"/>
+                </a:solidFill>
+                <a:latin typeface="Segoe UI"/>
+              </a:rPr>
+              <a:t>▸  </a:t>
+            </a:r>
+            <a:r>
+              <a:rPr sz="2000" b="0" i="0">
+                <a:solidFill>
+                  <a:srgbClr val="243140"/>
+                </a:solidFill>
+                <a:latin typeface="Segoe UI"/>
               </a:rPr>
               <a:t>Admins manage the menu and confirm orders.</a:t>
             </a:r>
@@ -5628,16 +9231,138 @@
           <a:p>
             <a:pPr>
               <a:spcAft>
-                <a:spcPts val="1000"/>
+                <a:spcPts val="1300"/>
               </a:spcAft>
             </a:pPr>
             <a:r>
-              <a:rPr sz="2000">
-                <a:solidFill>
-                  <a:srgbClr val="2C3E50"/>
-                </a:solidFill>
+              <a:rPr sz="2000" b="1" i="0">
+                <a:solidFill>
+                  <a:srgbClr val="FF6B35"/>
+                </a:solidFill>
+                <a:latin typeface="Segoe UI"/>
+              </a:rPr>
+              <a:t>▸  </a:t>
+            </a:r>
+            <a:r>
+              <a:rPr sz="2000" b="0" i="0">
+                <a:solidFill>
+                  <a:srgbClr val="243140"/>
+                </a:solidFill>
+                <a:latin typeface="Segoe UI"/>
               </a:rPr>
               <a:t>Modern, responsive UI using Bootstrap 5.</a:t>
+            </a:r>
+          </a:p>
+        </p:txBody>
+      </p:sp>
+      <p:sp>
+        <p:nvSpPr>
+          <p:cNvPr id="8" name="Rectangle 7"/>
+          <p:cNvSpPr/>
+          <p:nvPr/>
+        </p:nvSpPr>
+        <p:spPr>
+          <a:xfrm>
+            <a:off x="502920" y="6400800"/>
+            <a:ext cx="11201400" cy="17780"/>
+          </a:xfrm>
+          <a:prstGeom prst="rect">
+            <a:avLst/>
+          </a:prstGeom>
+          <a:solidFill>
+            <a:srgbClr val="DDE3E9"/>
+          </a:solidFill>
+          <a:ln>
+            <a:noFill/>
+          </a:ln>
+        </p:spPr>
+        <p:style>
+          <a:lnRef idx="1">
+            <a:schemeClr val="accent1"/>
+          </a:lnRef>
+          <a:fillRef idx="3">
+            <a:schemeClr val="accent1"/>
+          </a:fillRef>
+          <a:effectRef idx="2">
+            <a:schemeClr val="accent1"/>
+          </a:effectRef>
+          <a:fontRef idx="minor">
+            <a:schemeClr val="lt1"/>
+          </a:fontRef>
+        </p:style>
+        <p:txBody>
+          <a:bodyPr rtlCol="0" anchor="ctr"/>
+          <a:lstStyle/>
+          <a:p>
+            <a:pPr algn="ctr"/>
+          </a:p>
+        </p:txBody>
+      </p:sp>
+      <p:sp>
+        <p:nvSpPr>
+          <p:cNvPr id="9" name="TextBox 8"/>
+          <p:cNvSpPr txBox="1"/>
+          <p:nvPr/>
+        </p:nvSpPr>
+        <p:spPr>
+          <a:xfrm>
+            <a:off x="502920" y="6446520"/>
+            <a:ext cx="8229600" cy="320040"/>
+          </a:xfrm>
+          <a:prstGeom prst="rect">
+            <a:avLst/>
+          </a:prstGeom>
+          <a:noFill/>
+        </p:spPr>
+        <p:txBody>
+          <a:bodyPr wrap="none">
+            <a:spAutoFit/>
+          </a:bodyPr>
+          <a:lstStyle/>
+          <a:p>
+            <a:r>
+              <a:rPr sz="1000" b="0" i="0">
+                <a:solidFill>
+                  <a:srgbClr val="8A97A5"/>
+                </a:solidFill>
+                <a:latin typeface="Segoe UI"/>
+              </a:rPr>
+              <a:t>BistroSaaS  |  Restaurant Management System</a:t>
+            </a:r>
+          </a:p>
+        </p:txBody>
+      </p:sp>
+      <p:sp>
+        <p:nvSpPr>
+          <p:cNvPr id="10" name="TextBox 9"/>
+          <p:cNvSpPr txBox="1"/>
+          <p:nvPr/>
+        </p:nvSpPr>
+        <p:spPr>
+          <a:xfrm>
+            <a:off x="10607040" y="6446520"/>
+            <a:ext cx="1097280" cy="320040"/>
+          </a:xfrm>
+          <a:prstGeom prst="rect">
+            <a:avLst/>
+          </a:prstGeom>
+          <a:noFill/>
+        </p:spPr>
+        <p:txBody>
+          <a:bodyPr wrap="none">
+            <a:spAutoFit/>
+          </a:bodyPr>
+          <a:lstStyle/>
+          <a:p>
+            <a:pPr algn="r"/>
+            <a:r>
+              <a:rPr sz="1000" b="1" i="0">
+                <a:solidFill>
+                  <a:srgbClr val="8A97A5"/>
+                </a:solidFill>
+                <a:latin typeface="Segoe UI"/>
+              </a:rPr>
+              <a:t>3</a:t>
             </a:r>
           </a:p>
         </p:txBody>
@@ -5653,6 +9378,14 @@
 <file path=ppt/slides/slide4.xml><?xml version="1.0" encoding="utf-8"?>
 <p:sld xmlns:a="http://schemas.openxmlformats.org/drawingml/2006/main" xmlns:p="http://schemas.openxmlformats.org/presentationml/2006/main" xmlns:r="http://schemas.openxmlformats.org/officeDocument/2006/relationships">
   <p:cSld>
+    <p:bg>
+      <p:bgPr>
+        <a:solidFill>
+          <a:srgbClr val="F5F7FA"/>
+        </a:solidFill>
+        <a:effectLst/>
+      </p:bgPr>
+    </p:bg>
     <p:spTree>
       <p:nvGrpSpPr>
         <p:cNvPr id="1" name=""/>
@@ -5669,13 +9402,13 @@
         <p:spPr>
           <a:xfrm>
             <a:off x="0" y="0"/>
-            <a:ext cx="12191695" cy="1005840"/>
+            <a:ext cx="164592" cy="6858000"/>
           </a:xfrm>
           <a:prstGeom prst="rect">
             <a:avLst/>
           </a:prstGeom>
           <a:solidFill>
-            <a:srgbClr val="2980B9"/>
+            <a:srgbClr val="FF6B35"/>
           </a:solidFill>
           <a:ln>
             <a:noFill/>
@@ -5705,14 +9438,57 @@
       </p:sp>
       <p:sp>
         <p:nvSpPr>
-          <p:cNvPr id="3" name="TextBox 2"/>
+          <p:cNvPr id="3" name="Oval 2"/>
+          <p:cNvSpPr/>
+          <p:nvPr/>
+        </p:nvSpPr>
+        <p:spPr>
+          <a:xfrm>
+            <a:off x="10561320" y="411480"/>
+            <a:ext cx="1143000" cy="1143000"/>
+          </a:xfrm>
+          <a:prstGeom prst="ellipse">
+            <a:avLst/>
+          </a:prstGeom>
+          <a:solidFill>
+            <a:srgbClr val="FDE8DF"/>
+          </a:solidFill>
+          <a:ln>
+            <a:noFill/>
+          </a:ln>
+        </p:spPr>
+        <p:style>
+          <a:lnRef idx="1">
+            <a:schemeClr val="accent1"/>
+          </a:lnRef>
+          <a:fillRef idx="3">
+            <a:schemeClr val="accent1"/>
+          </a:fillRef>
+          <a:effectRef idx="2">
+            <a:schemeClr val="accent1"/>
+          </a:effectRef>
+          <a:fontRef idx="minor">
+            <a:schemeClr val="lt1"/>
+          </a:fontRef>
+        </p:style>
+        <p:txBody>
+          <a:bodyPr rtlCol="0" anchor="ctr"/>
+          <a:lstStyle/>
+          <a:p>
+            <a:pPr algn="ctr"/>
+          </a:p>
+        </p:txBody>
+      </p:sp>
+      <p:sp>
+        <p:nvSpPr>
+          <p:cNvPr id="4" name="TextBox 3"/>
           <p:cNvSpPr txBox="1"/>
           <p:nvPr/>
         </p:nvSpPr>
         <p:spPr>
           <a:xfrm>
-            <a:off x="457200" y="164592"/>
-            <a:ext cx="11247120" cy="731520"/>
+            <a:off x="10561320" y="457200"/>
+            <a:ext cx="1143000" cy="1051560"/>
           </a:xfrm>
           <a:prstGeom prst="rect">
             <a:avLst/>
@@ -5725,11 +9501,47 @@
           </a:bodyPr>
           <a:lstStyle/>
           <a:p>
-            <a:r>
-              <a:rPr sz="3000" b="1">
-                <a:solidFill>
-                  <a:srgbClr val="FFFFFF"/>
-                </a:solidFill>
+            <a:pPr algn="ctr"/>
+            <a:r>
+              <a:rPr sz="3600" b="0" i="0">
+                <a:solidFill>
+                  <a:srgbClr val="243140"/>
+                </a:solidFill>
+                <a:latin typeface="Segoe UI"/>
+              </a:rPr>
+              <a:t>❓</a:t>
+            </a:r>
+          </a:p>
+        </p:txBody>
+      </p:sp>
+      <p:sp>
+        <p:nvSpPr>
+          <p:cNvPr id="5" name="TextBox 4"/>
+          <p:cNvSpPr txBox="1"/>
+          <p:nvPr/>
+        </p:nvSpPr>
+        <p:spPr>
+          <a:xfrm>
+            <a:off x="502920" y="411480"/>
+            <a:ext cx="9692640" cy="777240"/>
+          </a:xfrm>
+          <a:prstGeom prst="rect">
+            <a:avLst/>
+          </a:prstGeom>
+          <a:noFill/>
+        </p:spPr>
+        <p:txBody>
+          <a:bodyPr wrap="none">
+            <a:spAutoFit/>
+          </a:bodyPr>
+          <a:lstStyle/>
+          <a:p>
+            <a:r>
+              <a:rPr sz="3200" b="1" i="0">
+                <a:solidFill>
+                  <a:srgbClr val="1E2A38"/>
+                </a:solidFill>
+                <a:latin typeface="Segoe UI"/>
               </a:rPr>
               <a:t>Problem Statement</a:t>
             </a:r>
@@ -5738,14 +9550,57 @@
       </p:sp>
       <p:sp>
         <p:nvSpPr>
-          <p:cNvPr id="4" name="TextBox 3"/>
+          <p:cNvPr id="6" name="Rounded Rectangle 5"/>
+          <p:cNvSpPr/>
+          <p:nvPr/>
+        </p:nvSpPr>
+        <p:spPr>
+          <a:xfrm>
+            <a:off x="548640" y="1170432"/>
+            <a:ext cx="2286000" cy="82296"/>
+          </a:xfrm>
+          <a:prstGeom prst="roundRect">
+            <a:avLst/>
+          </a:prstGeom>
+          <a:solidFill>
+            <a:srgbClr val="FF6B35"/>
+          </a:solidFill>
+          <a:ln>
+            <a:noFill/>
+          </a:ln>
+        </p:spPr>
+        <p:style>
+          <a:lnRef idx="1">
+            <a:schemeClr val="accent1"/>
+          </a:lnRef>
+          <a:fillRef idx="3">
+            <a:schemeClr val="accent1"/>
+          </a:fillRef>
+          <a:effectRef idx="2">
+            <a:schemeClr val="accent1"/>
+          </a:effectRef>
+          <a:fontRef idx="minor">
+            <a:schemeClr val="lt1"/>
+          </a:fontRef>
+        </p:style>
+        <p:txBody>
+          <a:bodyPr rtlCol="0" anchor="ctr"/>
+          <a:lstStyle/>
+          <a:p>
+            <a:pPr algn="ctr"/>
+          </a:p>
+        </p:txBody>
+      </p:sp>
+      <p:sp>
+        <p:nvSpPr>
+          <p:cNvPr id="7" name="TextBox 6"/>
           <p:cNvSpPr txBox="1"/>
           <p:nvPr/>
         </p:nvSpPr>
         <p:spPr>
           <a:xfrm>
-            <a:off x="548640" y="1280160"/>
-            <a:ext cx="11247120" cy="5120640"/>
+            <a:off x="640080" y="1554480"/>
+            <a:ext cx="10789920" cy="4572000"/>
           </a:xfrm>
           <a:prstGeom prst="rect">
             <a:avLst/>
@@ -5760,14 +9615,24 @@
           <a:p>
             <a:pPr>
               <a:spcAft>
-                <a:spcPts val="1000"/>
+                <a:spcPts val="1300"/>
               </a:spcAft>
             </a:pPr>
             <a:r>
-              <a:rPr sz="2000">
-                <a:solidFill>
-                  <a:srgbClr val="2C3E50"/>
-                </a:solidFill>
+              <a:rPr sz="2000" b="1" i="0">
+                <a:solidFill>
+                  <a:srgbClr val="FF6B35"/>
+                </a:solidFill>
+                <a:latin typeface="Segoe UI"/>
+              </a:rPr>
+              <a:t>▸  </a:t>
+            </a:r>
+            <a:r>
+              <a:rPr sz="2000" b="0" i="0">
+                <a:solidFill>
+                  <a:srgbClr val="243140"/>
+                </a:solidFill>
+                <a:latin typeface="Segoe UI"/>
               </a:rPr>
               <a:t>Manual, paper-based order taking causes errors.</a:t>
             </a:r>
@@ -5775,14 +9640,24 @@
           <a:p>
             <a:pPr>
               <a:spcAft>
-                <a:spcPts val="1000"/>
+                <a:spcPts val="1300"/>
               </a:spcAft>
             </a:pPr>
             <a:r>
-              <a:rPr sz="2000">
-                <a:solidFill>
-                  <a:srgbClr val="2C3E50"/>
-                </a:solidFill>
+              <a:rPr sz="2000" b="1" i="0">
+                <a:solidFill>
+                  <a:srgbClr val="FF6B35"/>
+                </a:solidFill>
+                <a:latin typeface="Segoe UI"/>
+              </a:rPr>
+              <a:t>▸  </a:t>
+            </a:r>
+            <a:r>
+              <a:rPr sz="2000" b="0" i="0">
+                <a:solidFill>
+                  <a:srgbClr val="243140"/>
+                </a:solidFill>
+                <a:latin typeface="Segoe UI"/>
               </a:rPr>
               <a:t>No central searchable menu or order records.</a:t>
             </a:r>
@@ -5790,14 +9665,24 @@
           <a:p>
             <a:pPr>
               <a:spcAft>
-                <a:spcPts val="1000"/>
+                <a:spcPts val="1300"/>
               </a:spcAft>
             </a:pPr>
             <a:r>
-              <a:rPr sz="2000">
-                <a:solidFill>
-                  <a:srgbClr val="2C3E50"/>
-                </a:solidFill>
+              <a:rPr sz="2000" b="1" i="0">
+                <a:solidFill>
+                  <a:srgbClr val="FF6B35"/>
+                </a:solidFill>
+                <a:latin typeface="Segoe UI"/>
+              </a:rPr>
+              <a:t>▸  </a:t>
+            </a:r>
+            <a:r>
+              <a:rPr sz="2000" b="0" i="0">
+                <a:solidFill>
+                  <a:srgbClr val="243140"/>
+                </a:solidFill>
+                <a:latin typeface="Segoe UI"/>
               </a:rPr>
               <a:t>Customers cannot view the menu or order online.</a:t>
             </a:r>
@@ -5805,14 +9690,24 @@
           <a:p>
             <a:pPr>
               <a:spcAft>
-                <a:spcPts val="1000"/>
+                <a:spcPts val="1300"/>
               </a:spcAft>
             </a:pPr>
             <a:r>
-              <a:rPr sz="2000">
-                <a:solidFill>
-                  <a:srgbClr val="2C3E50"/>
-                </a:solidFill>
+              <a:rPr sz="2000" b="1" i="0">
+                <a:solidFill>
+                  <a:srgbClr val="FF6B35"/>
+                </a:solidFill>
+                <a:latin typeface="Segoe UI"/>
+              </a:rPr>
+              <a:t>▸  </a:t>
+            </a:r>
+            <a:r>
+              <a:rPr sz="2000" b="0" i="0">
+                <a:solidFill>
+                  <a:srgbClr val="243140"/>
+                </a:solidFill>
+                <a:latin typeface="Segoe UI"/>
               </a:rPr>
               <a:t>Hard to track live order status.</a:t>
             </a:r>
@@ -5820,16 +9715,138 @@
           <a:p>
             <a:pPr>
               <a:spcAft>
-                <a:spcPts val="1000"/>
+                <a:spcPts val="1300"/>
               </a:spcAft>
             </a:pPr>
             <a:r>
-              <a:rPr sz="2000">
-                <a:solidFill>
-                  <a:srgbClr val="2C3E50"/>
-                </a:solidFill>
-              </a:rPr>
-              <a:t>Menu/price/availability updates are slow.</a:t>
+              <a:rPr sz="2000" b="1" i="0">
+                <a:solidFill>
+                  <a:srgbClr val="FF6B35"/>
+                </a:solidFill>
+                <a:latin typeface="Segoe UI"/>
+              </a:rPr>
+              <a:t>▸  </a:t>
+            </a:r>
+            <a:r>
+              <a:rPr sz="2000" b="0" i="0">
+                <a:solidFill>
+                  <a:srgbClr val="243140"/>
+                </a:solidFill>
+                <a:latin typeface="Segoe UI"/>
+              </a:rPr>
+              <a:t>Menu / price / availability updates are slow.</a:t>
+            </a:r>
+          </a:p>
+        </p:txBody>
+      </p:sp>
+      <p:sp>
+        <p:nvSpPr>
+          <p:cNvPr id="8" name="Rectangle 7"/>
+          <p:cNvSpPr/>
+          <p:nvPr/>
+        </p:nvSpPr>
+        <p:spPr>
+          <a:xfrm>
+            <a:off x="502920" y="6400800"/>
+            <a:ext cx="11201400" cy="17780"/>
+          </a:xfrm>
+          <a:prstGeom prst="rect">
+            <a:avLst/>
+          </a:prstGeom>
+          <a:solidFill>
+            <a:srgbClr val="DDE3E9"/>
+          </a:solidFill>
+          <a:ln>
+            <a:noFill/>
+          </a:ln>
+        </p:spPr>
+        <p:style>
+          <a:lnRef idx="1">
+            <a:schemeClr val="accent1"/>
+          </a:lnRef>
+          <a:fillRef idx="3">
+            <a:schemeClr val="accent1"/>
+          </a:fillRef>
+          <a:effectRef idx="2">
+            <a:schemeClr val="accent1"/>
+          </a:effectRef>
+          <a:fontRef idx="minor">
+            <a:schemeClr val="lt1"/>
+          </a:fontRef>
+        </p:style>
+        <p:txBody>
+          <a:bodyPr rtlCol="0" anchor="ctr"/>
+          <a:lstStyle/>
+          <a:p>
+            <a:pPr algn="ctr"/>
+          </a:p>
+        </p:txBody>
+      </p:sp>
+      <p:sp>
+        <p:nvSpPr>
+          <p:cNvPr id="9" name="TextBox 8"/>
+          <p:cNvSpPr txBox="1"/>
+          <p:nvPr/>
+        </p:nvSpPr>
+        <p:spPr>
+          <a:xfrm>
+            <a:off x="502920" y="6446520"/>
+            <a:ext cx="8229600" cy="320040"/>
+          </a:xfrm>
+          <a:prstGeom prst="rect">
+            <a:avLst/>
+          </a:prstGeom>
+          <a:noFill/>
+        </p:spPr>
+        <p:txBody>
+          <a:bodyPr wrap="none">
+            <a:spAutoFit/>
+          </a:bodyPr>
+          <a:lstStyle/>
+          <a:p>
+            <a:r>
+              <a:rPr sz="1000" b="0" i="0">
+                <a:solidFill>
+                  <a:srgbClr val="8A97A5"/>
+                </a:solidFill>
+                <a:latin typeface="Segoe UI"/>
+              </a:rPr>
+              <a:t>BistroSaaS  |  Restaurant Management System</a:t>
+            </a:r>
+          </a:p>
+        </p:txBody>
+      </p:sp>
+      <p:sp>
+        <p:nvSpPr>
+          <p:cNvPr id="10" name="TextBox 9"/>
+          <p:cNvSpPr txBox="1"/>
+          <p:nvPr/>
+        </p:nvSpPr>
+        <p:spPr>
+          <a:xfrm>
+            <a:off x="10607040" y="6446520"/>
+            <a:ext cx="1097280" cy="320040"/>
+          </a:xfrm>
+          <a:prstGeom prst="rect">
+            <a:avLst/>
+          </a:prstGeom>
+          <a:noFill/>
+        </p:spPr>
+        <p:txBody>
+          <a:bodyPr wrap="none">
+            <a:spAutoFit/>
+          </a:bodyPr>
+          <a:lstStyle/>
+          <a:p>
+            <a:pPr algn="r"/>
+            <a:r>
+              <a:rPr sz="1000" b="1" i="0">
+                <a:solidFill>
+                  <a:srgbClr val="8A97A5"/>
+                </a:solidFill>
+                <a:latin typeface="Segoe UI"/>
+              </a:rPr>
+              <a:t>4</a:t>
             </a:r>
           </a:p>
         </p:txBody>
@@ -5845,6 +9862,14 @@
 <file path=ppt/slides/slide5.xml><?xml version="1.0" encoding="utf-8"?>
 <p:sld xmlns:a="http://schemas.openxmlformats.org/drawingml/2006/main" xmlns:p="http://schemas.openxmlformats.org/presentationml/2006/main" xmlns:r="http://schemas.openxmlformats.org/officeDocument/2006/relationships">
   <p:cSld>
+    <p:bg>
+      <p:bgPr>
+        <a:solidFill>
+          <a:srgbClr val="F5F7FA"/>
+        </a:solidFill>
+        <a:effectLst/>
+      </p:bgPr>
+    </p:bg>
     <p:spTree>
       <p:nvGrpSpPr>
         <p:cNvPr id="1" name=""/>
@@ -5861,13 +9886,13 @@
         <p:spPr>
           <a:xfrm>
             <a:off x="0" y="0"/>
-            <a:ext cx="12191695" cy="1005840"/>
+            <a:ext cx="164592" cy="6858000"/>
           </a:xfrm>
           <a:prstGeom prst="rect">
             <a:avLst/>
           </a:prstGeom>
           <a:solidFill>
-            <a:srgbClr val="2980B9"/>
+            <a:srgbClr val="FF6B35"/>
           </a:solidFill>
           <a:ln>
             <a:noFill/>
@@ -5897,14 +9922,57 @@
       </p:sp>
       <p:sp>
         <p:nvSpPr>
-          <p:cNvPr id="3" name="TextBox 2"/>
+          <p:cNvPr id="3" name="Oval 2"/>
+          <p:cNvSpPr/>
+          <p:nvPr/>
+        </p:nvSpPr>
+        <p:spPr>
+          <a:xfrm>
+            <a:off x="10561320" y="411480"/>
+            <a:ext cx="1143000" cy="1143000"/>
+          </a:xfrm>
+          <a:prstGeom prst="ellipse">
+            <a:avLst/>
+          </a:prstGeom>
+          <a:solidFill>
+            <a:srgbClr val="FDE8DF"/>
+          </a:solidFill>
+          <a:ln>
+            <a:noFill/>
+          </a:ln>
+        </p:spPr>
+        <p:style>
+          <a:lnRef idx="1">
+            <a:schemeClr val="accent1"/>
+          </a:lnRef>
+          <a:fillRef idx="3">
+            <a:schemeClr val="accent1"/>
+          </a:fillRef>
+          <a:effectRef idx="2">
+            <a:schemeClr val="accent1"/>
+          </a:effectRef>
+          <a:fontRef idx="minor">
+            <a:schemeClr val="lt1"/>
+          </a:fontRef>
+        </p:style>
+        <p:txBody>
+          <a:bodyPr rtlCol="0" anchor="ctr"/>
+          <a:lstStyle/>
+          <a:p>
+            <a:pPr algn="ctr"/>
+          </a:p>
+        </p:txBody>
+      </p:sp>
+      <p:sp>
+        <p:nvSpPr>
+          <p:cNvPr id="4" name="TextBox 3"/>
           <p:cNvSpPr txBox="1"/>
           <p:nvPr/>
         </p:nvSpPr>
         <p:spPr>
           <a:xfrm>
-            <a:off x="457200" y="164592"/>
-            <a:ext cx="11247120" cy="731520"/>
+            <a:off x="10561320" y="457200"/>
+            <a:ext cx="1143000" cy="1051560"/>
           </a:xfrm>
           <a:prstGeom prst="rect">
             <a:avLst/>
@@ -5917,11 +9985,47 @@
           </a:bodyPr>
           <a:lstStyle/>
           <a:p>
-            <a:r>
-              <a:rPr sz="3000" b="1">
-                <a:solidFill>
-                  <a:srgbClr val="FFFFFF"/>
-                </a:solidFill>
+            <a:pPr algn="ctr"/>
+            <a:r>
+              <a:rPr sz="3600" b="0" i="0">
+                <a:solidFill>
+                  <a:srgbClr val="243140"/>
+                </a:solidFill>
+                <a:latin typeface="Segoe UI"/>
+              </a:rPr>
+              <a:t>🎯</a:t>
+            </a:r>
+          </a:p>
+        </p:txBody>
+      </p:sp>
+      <p:sp>
+        <p:nvSpPr>
+          <p:cNvPr id="5" name="TextBox 4"/>
+          <p:cNvSpPr txBox="1"/>
+          <p:nvPr/>
+        </p:nvSpPr>
+        <p:spPr>
+          <a:xfrm>
+            <a:off x="502920" y="411480"/>
+            <a:ext cx="9692640" cy="777240"/>
+          </a:xfrm>
+          <a:prstGeom prst="rect">
+            <a:avLst/>
+          </a:prstGeom>
+          <a:noFill/>
+        </p:spPr>
+        <p:txBody>
+          <a:bodyPr wrap="none">
+            <a:spAutoFit/>
+          </a:bodyPr>
+          <a:lstStyle/>
+          <a:p>
+            <a:r>
+              <a:rPr sz="3200" b="1" i="0">
+                <a:solidFill>
+                  <a:srgbClr val="1E2A38"/>
+                </a:solidFill>
+                <a:latin typeface="Segoe UI"/>
               </a:rPr>
               <a:t>Objectives</a:t>
             </a:r>
@@ -5930,14 +10034,57 @@
       </p:sp>
       <p:sp>
         <p:nvSpPr>
-          <p:cNvPr id="4" name="TextBox 3"/>
+          <p:cNvPr id="6" name="Rounded Rectangle 5"/>
+          <p:cNvSpPr/>
+          <p:nvPr/>
+        </p:nvSpPr>
+        <p:spPr>
+          <a:xfrm>
+            <a:off x="548640" y="1170432"/>
+            <a:ext cx="2286000" cy="82296"/>
+          </a:xfrm>
+          <a:prstGeom prst="roundRect">
+            <a:avLst/>
+          </a:prstGeom>
+          <a:solidFill>
+            <a:srgbClr val="FF6B35"/>
+          </a:solidFill>
+          <a:ln>
+            <a:noFill/>
+          </a:ln>
+        </p:spPr>
+        <p:style>
+          <a:lnRef idx="1">
+            <a:schemeClr val="accent1"/>
+          </a:lnRef>
+          <a:fillRef idx="3">
+            <a:schemeClr val="accent1"/>
+          </a:fillRef>
+          <a:effectRef idx="2">
+            <a:schemeClr val="accent1"/>
+          </a:effectRef>
+          <a:fontRef idx="minor">
+            <a:schemeClr val="lt1"/>
+          </a:fontRef>
+        </p:style>
+        <p:txBody>
+          <a:bodyPr rtlCol="0" anchor="ctr"/>
+          <a:lstStyle/>
+          <a:p>
+            <a:pPr algn="ctr"/>
+          </a:p>
+        </p:txBody>
+      </p:sp>
+      <p:sp>
+        <p:nvSpPr>
+          <p:cNvPr id="7" name="TextBox 6"/>
           <p:cNvSpPr txBox="1"/>
           <p:nvPr/>
         </p:nvSpPr>
         <p:spPr>
           <a:xfrm>
-            <a:off x="548640" y="1280160"/>
-            <a:ext cx="11247120" cy="5120640"/>
+            <a:off x="640080" y="1554480"/>
+            <a:ext cx="10789920" cy="4572000"/>
           </a:xfrm>
           <a:prstGeom prst="rect">
             <a:avLst/>
@@ -5952,14 +10099,24 @@
           <a:p>
             <a:pPr>
               <a:spcAft>
-                <a:spcPts val="1000"/>
+                <a:spcPts val="1300"/>
               </a:spcAft>
             </a:pPr>
             <a:r>
-              <a:rPr sz="2000">
-                <a:solidFill>
-                  <a:srgbClr val="2C3E50"/>
-                </a:solidFill>
+              <a:rPr sz="2000" b="1" i="0">
+                <a:solidFill>
+                  <a:srgbClr val="FF6B35"/>
+                </a:solidFill>
+                <a:latin typeface="Segoe UI"/>
+              </a:rPr>
+              <a:t>▸  </a:t>
+            </a:r>
+            <a:r>
+              <a:rPr sz="2000" b="0" i="0">
+                <a:solidFill>
+                  <a:srgbClr val="243140"/>
+                </a:solidFill>
+                <a:latin typeface="Segoe UI"/>
               </a:rPr>
               <a:t>Secure registration &amp; login (Customer / Admin roles).</a:t>
             </a:r>
@@ -5967,14 +10124,24 @@
           <a:p>
             <a:pPr>
               <a:spcAft>
-                <a:spcPts val="1000"/>
+                <a:spcPts val="1300"/>
               </a:spcAft>
             </a:pPr>
             <a:r>
-              <a:rPr sz="2000">
-                <a:solidFill>
-                  <a:srgbClr val="2C3E50"/>
-                </a:solidFill>
+              <a:rPr sz="2000" b="1" i="0">
+                <a:solidFill>
+                  <a:srgbClr val="FF6B35"/>
+                </a:solidFill>
+                <a:latin typeface="Segoe UI"/>
+              </a:rPr>
+              <a:t>▸  </a:t>
+            </a:r>
+            <a:r>
+              <a:rPr sz="2000" b="0" i="0">
+                <a:solidFill>
+                  <a:srgbClr val="243140"/>
+                </a:solidFill>
+                <a:latin typeface="Segoe UI"/>
               </a:rPr>
               <a:t>Browse menu with search, filter &amp; pagination.</a:t>
             </a:r>
@@ -5982,14 +10149,24 @@
           <a:p>
             <a:pPr>
               <a:spcAft>
-                <a:spcPts val="1000"/>
+                <a:spcPts val="1300"/>
               </a:spcAft>
             </a:pPr>
             <a:r>
-              <a:rPr sz="2000">
-                <a:solidFill>
-                  <a:srgbClr val="2C3E50"/>
-                </a:solidFill>
+              <a:rPr sz="2000" b="1" i="0">
+                <a:solidFill>
+                  <a:srgbClr val="FF6B35"/>
+                </a:solidFill>
+                <a:latin typeface="Segoe UI"/>
+              </a:rPr>
+              <a:t>▸  </a:t>
+            </a:r>
+            <a:r>
+              <a:rPr sz="2000" b="0" i="0">
+                <a:solidFill>
+                  <a:srgbClr val="243140"/>
+                </a:solidFill>
+                <a:latin typeface="Segoe UI"/>
               </a:rPr>
               <a:t>Online order placement + order history.</a:t>
             </a:r>
@@ -5997,14 +10174,24 @@
           <a:p>
             <a:pPr>
               <a:spcAft>
-                <a:spcPts val="1000"/>
+                <a:spcPts val="1300"/>
               </a:spcAft>
             </a:pPr>
             <a:r>
-              <a:rPr sz="2000">
-                <a:solidFill>
-                  <a:srgbClr val="2C3E50"/>
-                </a:solidFill>
+              <a:rPr sz="2000" b="1" i="0">
+                <a:solidFill>
+                  <a:srgbClr val="FF6B35"/>
+                </a:solidFill>
+                <a:latin typeface="Segoe UI"/>
+              </a:rPr>
+              <a:t>▸  </a:t>
+            </a:r>
+            <a:r>
+              <a:rPr sz="2000" b="0" i="0">
+                <a:solidFill>
+                  <a:srgbClr val="243140"/>
+                </a:solidFill>
+                <a:latin typeface="Segoe UI"/>
               </a:rPr>
               <a:t>Admin CRUD on menu items with image uploads.</a:t>
             </a:r>
@@ -6012,14 +10199,24 @@
           <a:p>
             <a:pPr>
               <a:spcAft>
-                <a:spcPts val="1000"/>
+                <a:spcPts val="1300"/>
               </a:spcAft>
             </a:pPr>
             <a:r>
-              <a:rPr sz="2000">
-                <a:solidFill>
-                  <a:srgbClr val="2C3E50"/>
-                </a:solidFill>
+              <a:rPr sz="2000" b="1" i="0">
+                <a:solidFill>
+                  <a:srgbClr val="FF6B35"/>
+                </a:solidFill>
+                <a:latin typeface="Segoe UI"/>
+              </a:rPr>
+              <a:t>▸  </a:t>
+            </a:r>
+            <a:r>
+              <a:rPr sz="2000" b="0" i="0">
+                <a:solidFill>
+                  <a:srgbClr val="243140"/>
+                </a:solidFill>
+                <a:latin typeface="Segoe UI"/>
               </a:rPr>
               <a:t>Order confirmation workflow with notifications.</a:t>
             </a:r>
@@ -6027,16 +10224,138 @@
           <a:p>
             <a:pPr>
               <a:spcAft>
-                <a:spcPts val="1000"/>
+                <a:spcPts val="1300"/>
               </a:spcAft>
             </a:pPr>
             <a:r>
-              <a:rPr sz="2000">
-                <a:solidFill>
-                  <a:srgbClr val="2C3E50"/>
-                </a:solidFill>
+              <a:rPr sz="2000" b="1" i="0">
+                <a:solidFill>
+                  <a:srgbClr val="FF6B35"/>
+                </a:solidFill>
+                <a:latin typeface="Segoe UI"/>
+              </a:rPr>
+              <a:t>▸  </a:t>
+            </a:r>
+            <a:r>
+              <a:rPr sz="2000" b="0" i="0">
+                <a:solidFill>
+                  <a:srgbClr val="243140"/>
+                </a:solidFill>
+                <a:latin typeface="Segoe UI"/>
               </a:rPr>
               <a:t>REST API for menu data + responsive UI.</a:t>
+            </a:r>
+          </a:p>
+        </p:txBody>
+      </p:sp>
+      <p:sp>
+        <p:nvSpPr>
+          <p:cNvPr id="8" name="Rectangle 7"/>
+          <p:cNvSpPr/>
+          <p:nvPr/>
+        </p:nvSpPr>
+        <p:spPr>
+          <a:xfrm>
+            <a:off x="502920" y="6400800"/>
+            <a:ext cx="11201400" cy="17780"/>
+          </a:xfrm>
+          <a:prstGeom prst="rect">
+            <a:avLst/>
+          </a:prstGeom>
+          <a:solidFill>
+            <a:srgbClr val="DDE3E9"/>
+          </a:solidFill>
+          <a:ln>
+            <a:noFill/>
+          </a:ln>
+        </p:spPr>
+        <p:style>
+          <a:lnRef idx="1">
+            <a:schemeClr val="accent1"/>
+          </a:lnRef>
+          <a:fillRef idx="3">
+            <a:schemeClr val="accent1"/>
+          </a:fillRef>
+          <a:effectRef idx="2">
+            <a:schemeClr val="accent1"/>
+          </a:effectRef>
+          <a:fontRef idx="minor">
+            <a:schemeClr val="lt1"/>
+          </a:fontRef>
+        </p:style>
+        <p:txBody>
+          <a:bodyPr rtlCol="0" anchor="ctr"/>
+          <a:lstStyle/>
+          <a:p>
+            <a:pPr algn="ctr"/>
+          </a:p>
+        </p:txBody>
+      </p:sp>
+      <p:sp>
+        <p:nvSpPr>
+          <p:cNvPr id="9" name="TextBox 8"/>
+          <p:cNvSpPr txBox="1"/>
+          <p:nvPr/>
+        </p:nvSpPr>
+        <p:spPr>
+          <a:xfrm>
+            <a:off x="502920" y="6446520"/>
+            <a:ext cx="8229600" cy="320040"/>
+          </a:xfrm>
+          <a:prstGeom prst="rect">
+            <a:avLst/>
+          </a:prstGeom>
+          <a:noFill/>
+        </p:spPr>
+        <p:txBody>
+          <a:bodyPr wrap="none">
+            <a:spAutoFit/>
+          </a:bodyPr>
+          <a:lstStyle/>
+          <a:p>
+            <a:r>
+              <a:rPr sz="1000" b="0" i="0">
+                <a:solidFill>
+                  <a:srgbClr val="8A97A5"/>
+                </a:solidFill>
+                <a:latin typeface="Segoe UI"/>
+              </a:rPr>
+              <a:t>BistroSaaS  |  Restaurant Management System</a:t>
+            </a:r>
+          </a:p>
+        </p:txBody>
+      </p:sp>
+      <p:sp>
+        <p:nvSpPr>
+          <p:cNvPr id="10" name="TextBox 9"/>
+          <p:cNvSpPr txBox="1"/>
+          <p:nvPr/>
+        </p:nvSpPr>
+        <p:spPr>
+          <a:xfrm>
+            <a:off x="10607040" y="6446520"/>
+            <a:ext cx="1097280" cy="320040"/>
+          </a:xfrm>
+          <a:prstGeom prst="rect">
+            <a:avLst/>
+          </a:prstGeom>
+          <a:noFill/>
+        </p:spPr>
+        <p:txBody>
+          <a:bodyPr wrap="none">
+            <a:spAutoFit/>
+          </a:bodyPr>
+          <a:lstStyle/>
+          <a:p>
+            <a:pPr algn="r"/>
+            <a:r>
+              <a:rPr sz="1000" b="1" i="0">
+                <a:solidFill>
+                  <a:srgbClr val="8A97A5"/>
+                </a:solidFill>
+                <a:latin typeface="Segoe UI"/>
+              </a:rPr>
+              <a:t>5</a:t>
             </a:r>
           </a:p>
         </p:txBody>
@@ -6052,6 +10371,14 @@
 <file path=ppt/slides/slide6.xml><?xml version="1.0" encoding="utf-8"?>
 <p:sld xmlns:a="http://schemas.openxmlformats.org/drawingml/2006/main" xmlns:p="http://schemas.openxmlformats.org/presentationml/2006/main" xmlns:r="http://schemas.openxmlformats.org/officeDocument/2006/relationships">
   <p:cSld>
+    <p:bg>
+      <p:bgPr>
+        <a:solidFill>
+          <a:srgbClr val="F5F7FA"/>
+        </a:solidFill>
+        <a:effectLst/>
+      </p:bgPr>
+    </p:bg>
     <p:spTree>
       <p:nvGrpSpPr>
         <p:cNvPr id="1" name=""/>
@@ -6068,13 +10395,13 @@
         <p:spPr>
           <a:xfrm>
             <a:off x="0" y="0"/>
-            <a:ext cx="12191695" cy="1005840"/>
+            <a:ext cx="164592" cy="6858000"/>
           </a:xfrm>
           <a:prstGeom prst="rect">
             <a:avLst/>
           </a:prstGeom>
           <a:solidFill>
-            <a:srgbClr val="2980B9"/>
+            <a:srgbClr val="FF6B35"/>
           </a:solidFill>
           <a:ln>
             <a:noFill/>
@@ -6104,14 +10431,57 @@
       </p:sp>
       <p:sp>
         <p:nvSpPr>
-          <p:cNvPr id="3" name="TextBox 2"/>
+          <p:cNvPr id="3" name="Oval 2"/>
+          <p:cNvSpPr/>
+          <p:nvPr/>
+        </p:nvSpPr>
+        <p:spPr>
+          <a:xfrm>
+            <a:off x="10561320" y="411480"/>
+            <a:ext cx="1143000" cy="1143000"/>
+          </a:xfrm>
+          <a:prstGeom prst="ellipse">
+            <a:avLst/>
+          </a:prstGeom>
+          <a:solidFill>
+            <a:srgbClr val="FDE8DF"/>
+          </a:solidFill>
+          <a:ln>
+            <a:noFill/>
+          </a:ln>
+        </p:spPr>
+        <p:style>
+          <a:lnRef idx="1">
+            <a:schemeClr val="accent1"/>
+          </a:lnRef>
+          <a:fillRef idx="3">
+            <a:schemeClr val="accent1"/>
+          </a:fillRef>
+          <a:effectRef idx="2">
+            <a:schemeClr val="accent1"/>
+          </a:effectRef>
+          <a:fontRef idx="minor">
+            <a:schemeClr val="lt1"/>
+          </a:fontRef>
+        </p:style>
+        <p:txBody>
+          <a:bodyPr rtlCol="0" anchor="ctr"/>
+          <a:lstStyle/>
+          <a:p>
+            <a:pPr algn="ctr"/>
+          </a:p>
+        </p:txBody>
+      </p:sp>
+      <p:sp>
+        <p:nvSpPr>
+          <p:cNvPr id="4" name="TextBox 3"/>
           <p:cNvSpPr txBox="1"/>
           <p:nvPr/>
         </p:nvSpPr>
         <p:spPr>
           <a:xfrm>
-            <a:off x="457200" y="164592"/>
-            <a:ext cx="11247120" cy="731520"/>
+            <a:off x="10561320" y="457200"/>
+            <a:ext cx="1143000" cy="1051560"/>
           </a:xfrm>
           <a:prstGeom prst="rect">
             <a:avLst/>
@@ -6124,11 +10494,47 @@
           </a:bodyPr>
           <a:lstStyle/>
           <a:p>
-            <a:r>
-              <a:rPr sz="3000" b="1">
-                <a:solidFill>
-                  <a:srgbClr val="FFFFFF"/>
-                </a:solidFill>
+            <a:pPr algn="ctr"/>
+            <a:r>
+              <a:rPr sz="3600" b="0" i="0">
+                <a:solidFill>
+                  <a:srgbClr val="243140"/>
+                </a:solidFill>
+                <a:latin typeface="Segoe UI"/>
+              </a:rPr>
+              <a:t>🛠</a:t>
+            </a:r>
+          </a:p>
+        </p:txBody>
+      </p:sp>
+      <p:sp>
+        <p:nvSpPr>
+          <p:cNvPr id="5" name="TextBox 4"/>
+          <p:cNvSpPr txBox="1"/>
+          <p:nvPr/>
+        </p:nvSpPr>
+        <p:spPr>
+          <a:xfrm>
+            <a:off x="502920" y="411480"/>
+            <a:ext cx="9692640" cy="777240"/>
+          </a:xfrm>
+          <a:prstGeom prst="rect">
+            <a:avLst/>
+          </a:prstGeom>
+          <a:noFill/>
+        </p:spPr>
+        <p:txBody>
+          <a:bodyPr wrap="none">
+            <a:spAutoFit/>
+          </a:bodyPr>
+          <a:lstStyle/>
+          <a:p>
+            <a:r>
+              <a:rPr sz="3200" b="1" i="0">
+                <a:solidFill>
+                  <a:srgbClr val="1E2A38"/>
+                </a:solidFill>
+                <a:latin typeface="Segoe UI"/>
               </a:rPr>
               <a:t>Tools &amp; Technologies</a:t>
             </a:r>
@@ -6137,14 +10543,57 @@
       </p:sp>
       <p:sp>
         <p:nvSpPr>
-          <p:cNvPr id="4" name="TextBox 3"/>
+          <p:cNvPr id="6" name="Rounded Rectangle 5"/>
+          <p:cNvSpPr/>
+          <p:nvPr/>
+        </p:nvSpPr>
+        <p:spPr>
+          <a:xfrm>
+            <a:off x="548640" y="1170432"/>
+            <a:ext cx="2286000" cy="82296"/>
+          </a:xfrm>
+          <a:prstGeom prst="roundRect">
+            <a:avLst/>
+          </a:prstGeom>
+          <a:solidFill>
+            <a:srgbClr val="FF6B35"/>
+          </a:solidFill>
+          <a:ln>
+            <a:noFill/>
+          </a:ln>
+        </p:spPr>
+        <p:style>
+          <a:lnRef idx="1">
+            <a:schemeClr val="accent1"/>
+          </a:lnRef>
+          <a:fillRef idx="3">
+            <a:schemeClr val="accent1"/>
+          </a:fillRef>
+          <a:effectRef idx="2">
+            <a:schemeClr val="accent1"/>
+          </a:effectRef>
+          <a:fontRef idx="minor">
+            <a:schemeClr val="lt1"/>
+          </a:fontRef>
+        </p:style>
+        <p:txBody>
+          <a:bodyPr rtlCol="0" anchor="ctr"/>
+          <a:lstStyle/>
+          <a:p>
+            <a:pPr algn="ctr"/>
+          </a:p>
+        </p:txBody>
+      </p:sp>
+      <p:sp>
+        <p:nvSpPr>
+          <p:cNvPr id="7" name="TextBox 6"/>
           <p:cNvSpPr txBox="1"/>
           <p:nvPr/>
         </p:nvSpPr>
         <p:spPr>
           <a:xfrm>
-            <a:off x="548640" y="1280160"/>
-            <a:ext cx="11247120" cy="5120640"/>
+            <a:off x="640080" y="1554480"/>
+            <a:ext cx="10789920" cy="4572000"/>
           </a:xfrm>
           <a:prstGeom prst="rect">
             <a:avLst/>
@@ -6159,14 +10608,24 @@
           <a:p>
             <a:pPr>
               <a:spcAft>
-                <a:spcPts val="1000"/>
+                <a:spcPts val="1300"/>
               </a:spcAft>
             </a:pPr>
             <a:r>
-              <a:rPr sz="2000">
-                <a:solidFill>
-                  <a:srgbClr val="2C3E50"/>
-                </a:solidFill>
+              <a:rPr sz="2000" b="1" i="0">
+                <a:solidFill>
+                  <a:srgbClr val="FF6B35"/>
+                </a:solidFill>
+                <a:latin typeface="Segoe UI"/>
+              </a:rPr>
+              <a:t>▸  </a:t>
+            </a:r>
+            <a:r>
+              <a:rPr sz="2000" b="0" i="0">
+                <a:solidFill>
+                  <a:srgbClr val="243140"/>
+                </a:solidFill>
+                <a:latin typeface="Segoe UI"/>
               </a:rPr>
               <a:t>Python 3 + Django 6.0.5 (MVT framework).</a:t>
             </a:r>
@@ -6174,14 +10633,24 @@
           <a:p>
             <a:pPr>
               <a:spcAft>
-                <a:spcPts val="1000"/>
+                <a:spcPts val="1300"/>
               </a:spcAft>
             </a:pPr>
             <a:r>
-              <a:rPr sz="2000">
-                <a:solidFill>
-                  <a:srgbClr val="2C3E50"/>
-                </a:solidFill>
+              <a:rPr sz="2000" b="1" i="0">
+                <a:solidFill>
+                  <a:srgbClr val="FF6B35"/>
+                </a:solidFill>
+                <a:latin typeface="Segoe UI"/>
+              </a:rPr>
+              <a:t>▸  </a:t>
+            </a:r>
+            <a:r>
+              <a:rPr sz="2000" b="0" i="0">
+                <a:solidFill>
+                  <a:srgbClr val="243140"/>
+                </a:solidFill>
+                <a:latin typeface="Segoe UI"/>
               </a:rPr>
               <a:t>Django REST Framework (JSON API).</a:t>
             </a:r>
@@ -6189,14 +10658,24 @@
           <a:p>
             <a:pPr>
               <a:spcAft>
-                <a:spcPts val="1000"/>
+                <a:spcPts val="1300"/>
               </a:spcAft>
             </a:pPr>
             <a:r>
-              <a:rPr sz="2000">
-                <a:solidFill>
-                  <a:srgbClr val="2C3E50"/>
-                </a:solidFill>
+              <a:rPr sz="2000" b="1" i="0">
+                <a:solidFill>
+                  <a:srgbClr val="FF6B35"/>
+                </a:solidFill>
+                <a:latin typeface="Segoe UI"/>
+              </a:rPr>
+              <a:t>▸  </a:t>
+            </a:r>
+            <a:r>
+              <a:rPr sz="2000" b="0" i="0">
+                <a:solidFill>
+                  <a:srgbClr val="243140"/>
+                </a:solidFill>
+                <a:latin typeface="Segoe UI"/>
               </a:rPr>
               <a:t>SQLite database.</a:t>
             </a:r>
@@ -6204,14 +10683,24 @@
           <a:p>
             <a:pPr>
               <a:spcAft>
-                <a:spcPts val="1000"/>
+                <a:spcPts val="1300"/>
               </a:spcAft>
             </a:pPr>
             <a:r>
-              <a:rPr sz="2000">
-                <a:solidFill>
-                  <a:srgbClr val="2C3E50"/>
-                </a:solidFill>
+              <a:rPr sz="2000" b="1" i="0">
+                <a:solidFill>
+                  <a:srgbClr val="FF6B35"/>
+                </a:solidFill>
+                <a:latin typeface="Segoe UI"/>
+              </a:rPr>
+              <a:t>▸  </a:t>
+            </a:r>
+            <a:r>
+              <a:rPr sz="2000" b="0" i="0">
+                <a:solidFill>
+                  <a:srgbClr val="243140"/>
+                </a:solidFill>
+                <a:latin typeface="Segoe UI"/>
               </a:rPr>
               <a:t>Bootstrap 5 + HTML (frontend).</a:t>
             </a:r>
@@ -6219,14 +10708,24 @@
           <a:p>
             <a:pPr>
               <a:spcAft>
-                <a:spcPts val="1000"/>
+                <a:spcPts val="1300"/>
               </a:spcAft>
             </a:pPr>
             <a:r>
-              <a:rPr sz="2000">
-                <a:solidFill>
-                  <a:srgbClr val="2C3E50"/>
-                </a:solidFill>
+              <a:rPr sz="2000" b="1" i="0">
+                <a:solidFill>
+                  <a:srgbClr val="FF6B35"/>
+                </a:solidFill>
+                <a:latin typeface="Segoe UI"/>
+              </a:rPr>
+              <a:t>▸  </a:t>
+            </a:r>
+            <a:r>
+              <a:rPr sz="2000" b="0" i="0">
+                <a:solidFill>
+                  <a:srgbClr val="243140"/>
+                </a:solidFill>
+                <a:latin typeface="Segoe UI"/>
               </a:rPr>
               <a:t>Pillow (image uploads).</a:t>
             </a:r>
@@ -6234,16 +10733,138 @@
           <a:p>
             <a:pPr>
               <a:spcAft>
-                <a:spcPts val="1000"/>
+                <a:spcPts val="1300"/>
               </a:spcAft>
             </a:pPr>
             <a:r>
-              <a:rPr sz="2000">
-                <a:solidFill>
-                  <a:srgbClr val="2C3E50"/>
-                </a:solidFill>
+              <a:rPr sz="2000" b="1" i="0">
+                <a:solidFill>
+                  <a:srgbClr val="FF6B35"/>
+                </a:solidFill>
+                <a:latin typeface="Segoe UI"/>
+              </a:rPr>
+              <a:t>▸  </a:t>
+            </a:r>
+            <a:r>
+              <a:rPr sz="2000" b="0" i="0">
+                <a:solidFill>
+                  <a:srgbClr val="243140"/>
+                </a:solidFill>
+                <a:latin typeface="Segoe UI"/>
               </a:rPr>
               <a:t>Git &amp; GitHub, deployed on PythonAnywhere.</a:t>
+            </a:r>
+          </a:p>
+        </p:txBody>
+      </p:sp>
+      <p:sp>
+        <p:nvSpPr>
+          <p:cNvPr id="8" name="Rectangle 7"/>
+          <p:cNvSpPr/>
+          <p:nvPr/>
+        </p:nvSpPr>
+        <p:spPr>
+          <a:xfrm>
+            <a:off x="502920" y="6400800"/>
+            <a:ext cx="11201400" cy="17780"/>
+          </a:xfrm>
+          <a:prstGeom prst="rect">
+            <a:avLst/>
+          </a:prstGeom>
+          <a:solidFill>
+            <a:srgbClr val="DDE3E9"/>
+          </a:solidFill>
+          <a:ln>
+            <a:noFill/>
+          </a:ln>
+        </p:spPr>
+        <p:style>
+          <a:lnRef idx="1">
+            <a:schemeClr val="accent1"/>
+          </a:lnRef>
+          <a:fillRef idx="3">
+            <a:schemeClr val="accent1"/>
+          </a:fillRef>
+          <a:effectRef idx="2">
+            <a:schemeClr val="accent1"/>
+          </a:effectRef>
+          <a:fontRef idx="minor">
+            <a:schemeClr val="lt1"/>
+          </a:fontRef>
+        </p:style>
+        <p:txBody>
+          <a:bodyPr rtlCol="0" anchor="ctr"/>
+          <a:lstStyle/>
+          <a:p>
+            <a:pPr algn="ctr"/>
+          </a:p>
+        </p:txBody>
+      </p:sp>
+      <p:sp>
+        <p:nvSpPr>
+          <p:cNvPr id="9" name="TextBox 8"/>
+          <p:cNvSpPr txBox="1"/>
+          <p:nvPr/>
+        </p:nvSpPr>
+        <p:spPr>
+          <a:xfrm>
+            <a:off x="502920" y="6446520"/>
+            <a:ext cx="8229600" cy="320040"/>
+          </a:xfrm>
+          <a:prstGeom prst="rect">
+            <a:avLst/>
+          </a:prstGeom>
+          <a:noFill/>
+        </p:spPr>
+        <p:txBody>
+          <a:bodyPr wrap="none">
+            <a:spAutoFit/>
+          </a:bodyPr>
+          <a:lstStyle/>
+          <a:p>
+            <a:r>
+              <a:rPr sz="1000" b="0" i="0">
+                <a:solidFill>
+                  <a:srgbClr val="8A97A5"/>
+                </a:solidFill>
+                <a:latin typeface="Segoe UI"/>
+              </a:rPr>
+              <a:t>BistroSaaS  |  Restaurant Management System</a:t>
+            </a:r>
+          </a:p>
+        </p:txBody>
+      </p:sp>
+      <p:sp>
+        <p:nvSpPr>
+          <p:cNvPr id="10" name="TextBox 9"/>
+          <p:cNvSpPr txBox="1"/>
+          <p:nvPr/>
+        </p:nvSpPr>
+        <p:spPr>
+          <a:xfrm>
+            <a:off x="10607040" y="6446520"/>
+            <a:ext cx="1097280" cy="320040"/>
+          </a:xfrm>
+          <a:prstGeom prst="rect">
+            <a:avLst/>
+          </a:prstGeom>
+          <a:noFill/>
+        </p:spPr>
+        <p:txBody>
+          <a:bodyPr wrap="none">
+            <a:spAutoFit/>
+          </a:bodyPr>
+          <a:lstStyle/>
+          <a:p>
+            <a:pPr algn="r"/>
+            <a:r>
+              <a:rPr sz="1000" b="1" i="0">
+                <a:solidFill>
+                  <a:srgbClr val="8A97A5"/>
+                </a:solidFill>
+                <a:latin typeface="Segoe UI"/>
+              </a:rPr>
+              <a:t>6</a:t>
             </a:r>
           </a:p>
         </p:txBody>
@@ -6259,6 +10880,14 @@
 <file path=ppt/slides/slide7.xml><?xml version="1.0" encoding="utf-8"?>
 <p:sld xmlns:a="http://schemas.openxmlformats.org/drawingml/2006/main" xmlns:p="http://schemas.openxmlformats.org/presentationml/2006/main" xmlns:r="http://schemas.openxmlformats.org/officeDocument/2006/relationships">
   <p:cSld>
+    <p:bg>
+      <p:bgPr>
+        <a:solidFill>
+          <a:srgbClr val="F5F7FA"/>
+        </a:solidFill>
+        <a:effectLst/>
+      </p:bgPr>
+    </p:bg>
     <p:spTree>
       <p:nvGrpSpPr>
         <p:cNvPr id="1" name=""/>
@@ -6275,13 +10904,13 @@
         <p:spPr>
           <a:xfrm>
             <a:off x="0" y="0"/>
-            <a:ext cx="12191695" cy="1005840"/>
+            <a:ext cx="164592" cy="6858000"/>
           </a:xfrm>
           <a:prstGeom prst="rect">
             <a:avLst/>
           </a:prstGeom>
           <a:solidFill>
-            <a:srgbClr val="2980B9"/>
+            <a:srgbClr val="FF6B35"/>
           </a:solidFill>
           <a:ln>
             <a:noFill/>
@@ -6311,14 +10940,57 @@
       </p:sp>
       <p:sp>
         <p:nvSpPr>
-          <p:cNvPr id="3" name="TextBox 2"/>
+          <p:cNvPr id="3" name="Oval 2"/>
+          <p:cNvSpPr/>
+          <p:nvPr/>
+        </p:nvSpPr>
+        <p:spPr>
+          <a:xfrm>
+            <a:off x="10561320" y="411480"/>
+            <a:ext cx="1143000" cy="1143000"/>
+          </a:xfrm>
+          <a:prstGeom prst="ellipse">
+            <a:avLst/>
+          </a:prstGeom>
+          <a:solidFill>
+            <a:srgbClr val="FDE8DF"/>
+          </a:solidFill>
+          <a:ln>
+            <a:noFill/>
+          </a:ln>
+        </p:spPr>
+        <p:style>
+          <a:lnRef idx="1">
+            <a:schemeClr val="accent1"/>
+          </a:lnRef>
+          <a:fillRef idx="3">
+            <a:schemeClr val="accent1"/>
+          </a:fillRef>
+          <a:effectRef idx="2">
+            <a:schemeClr val="accent1"/>
+          </a:effectRef>
+          <a:fontRef idx="minor">
+            <a:schemeClr val="lt1"/>
+          </a:fontRef>
+        </p:style>
+        <p:txBody>
+          <a:bodyPr rtlCol="0" anchor="ctr"/>
+          <a:lstStyle/>
+          <a:p>
+            <a:pPr algn="ctr"/>
+          </a:p>
+        </p:txBody>
+      </p:sp>
+      <p:sp>
+        <p:nvSpPr>
+          <p:cNvPr id="4" name="TextBox 3"/>
           <p:cNvSpPr txBox="1"/>
           <p:nvPr/>
         </p:nvSpPr>
         <p:spPr>
           <a:xfrm>
-            <a:off x="457200" y="164592"/>
-            <a:ext cx="11247120" cy="731520"/>
+            <a:off x="10561320" y="457200"/>
+            <a:ext cx="1143000" cy="1051560"/>
           </a:xfrm>
           <a:prstGeom prst="rect">
             <a:avLst/>
@@ -6331,11 +11003,47 @@
           </a:bodyPr>
           <a:lstStyle/>
           <a:p>
-            <a:r>
-              <a:rPr sz="3000" b="1">
-                <a:solidFill>
-                  <a:srgbClr val="FFFFFF"/>
-                </a:solidFill>
+            <a:pPr algn="ctr"/>
+            <a:r>
+              <a:rPr sz="3600" b="0" i="0">
+                <a:solidFill>
+                  <a:srgbClr val="243140"/>
+                </a:solidFill>
+                <a:latin typeface="Segoe UI"/>
+              </a:rPr>
+              <a:t>🏗</a:t>
+            </a:r>
+          </a:p>
+        </p:txBody>
+      </p:sp>
+      <p:sp>
+        <p:nvSpPr>
+          <p:cNvPr id="5" name="TextBox 4"/>
+          <p:cNvSpPr txBox="1"/>
+          <p:nvPr/>
+        </p:nvSpPr>
+        <p:spPr>
+          <a:xfrm>
+            <a:off x="502920" y="411480"/>
+            <a:ext cx="9692640" cy="777240"/>
+          </a:xfrm>
+          <a:prstGeom prst="rect">
+            <a:avLst/>
+          </a:prstGeom>
+          <a:noFill/>
+        </p:spPr>
+        <p:txBody>
+          <a:bodyPr wrap="none">
+            <a:spAutoFit/>
+          </a:bodyPr>
+          <a:lstStyle/>
+          <a:p>
+            <a:r>
+              <a:rPr sz="3200" b="1" i="0">
+                <a:solidFill>
+                  <a:srgbClr val="1E2A38"/>
+                </a:solidFill>
+                <a:latin typeface="Segoe UI"/>
               </a:rPr>
               <a:t>System Architecture (MVT)</a:t>
             </a:r>
@@ -6344,14 +11052,57 @@
       </p:sp>
       <p:sp>
         <p:nvSpPr>
-          <p:cNvPr id="4" name="TextBox 3"/>
+          <p:cNvPr id="6" name="Rounded Rectangle 5"/>
+          <p:cNvSpPr/>
+          <p:nvPr/>
+        </p:nvSpPr>
+        <p:spPr>
+          <a:xfrm>
+            <a:off x="548640" y="1170432"/>
+            <a:ext cx="2286000" cy="82296"/>
+          </a:xfrm>
+          <a:prstGeom prst="roundRect">
+            <a:avLst/>
+          </a:prstGeom>
+          <a:solidFill>
+            <a:srgbClr val="FF6B35"/>
+          </a:solidFill>
+          <a:ln>
+            <a:noFill/>
+          </a:ln>
+        </p:spPr>
+        <p:style>
+          <a:lnRef idx="1">
+            <a:schemeClr val="accent1"/>
+          </a:lnRef>
+          <a:fillRef idx="3">
+            <a:schemeClr val="accent1"/>
+          </a:fillRef>
+          <a:effectRef idx="2">
+            <a:schemeClr val="accent1"/>
+          </a:effectRef>
+          <a:fontRef idx="minor">
+            <a:schemeClr val="lt1"/>
+          </a:fontRef>
+        </p:style>
+        <p:txBody>
+          <a:bodyPr rtlCol="0" anchor="ctr"/>
+          <a:lstStyle/>
+          <a:p>
+            <a:pPr algn="ctr"/>
+          </a:p>
+        </p:txBody>
+      </p:sp>
+      <p:sp>
+        <p:nvSpPr>
+          <p:cNvPr id="7" name="TextBox 6"/>
           <p:cNvSpPr txBox="1"/>
           <p:nvPr/>
         </p:nvSpPr>
         <p:spPr>
           <a:xfrm>
-            <a:off x="548640" y="1280160"/>
-            <a:ext cx="11247120" cy="5120640"/>
+            <a:off x="640080" y="1554480"/>
+            <a:ext cx="10789920" cy="4572000"/>
           </a:xfrm>
           <a:prstGeom prst="rect">
             <a:avLst/>
@@ -6366,76 +11117,238 @@
           <a:p>
             <a:pPr>
               <a:spcAft>
-                <a:spcPts val="1000"/>
+                <a:spcPts val="1300"/>
               </a:spcAft>
             </a:pPr>
             <a:r>
-              <a:rPr sz="2000">
-                <a:solidFill>
-                  <a:srgbClr val="2C3E50"/>
-                </a:solidFill>
-              </a:rPr>
-              <a:t>Model (models.py) - database tables.</a:t>
+              <a:rPr sz="2000" b="1" i="0">
+                <a:solidFill>
+                  <a:srgbClr val="FF6B35"/>
+                </a:solidFill>
+                <a:latin typeface="Segoe UI"/>
+              </a:rPr>
+              <a:t>▸  </a:t>
+            </a:r>
+            <a:r>
+              <a:rPr sz="2000" b="0" i="0">
+                <a:solidFill>
+                  <a:srgbClr val="243140"/>
+                </a:solidFill>
+                <a:latin typeface="Segoe UI"/>
+              </a:rPr>
+              <a:t>Model (models.py)  -  database tables.</a:t>
             </a:r>
           </a:p>
           <a:p>
             <a:pPr>
               <a:spcAft>
-                <a:spcPts val="1000"/>
+                <a:spcPts val="1300"/>
               </a:spcAft>
             </a:pPr>
             <a:r>
-              <a:rPr sz="2000">
-                <a:solidFill>
-                  <a:srgbClr val="2C3E50"/>
-                </a:solidFill>
-              </a:rPr>
-              <a:t>View (views.py) - page logic (FBV + CBV).</a:t>
+              <a:rPr sz="2000" b="1" i="0">
+                <a:solidFill>
+                  <a:srgbClr val="FF6B35"/>
+                </a:solidFill>
+                <a:latin typeface="Segoe UI"/>
+              </a:rPr>
+              <a:t>▸  </a:t>
+            </a:r>
+            <a:r>
+              <a:rPr sz="2000" b="0" i="0">
+                <a:solidFill>
+                  <a:srgbClr val="243140"/>
+                </a:solidFill>
+                <a:latin typeface="Segoe UI"/>
+              </a:rPr>
+              <a:t>View (views.py)  -  page logic (FBV + CBV).</a:t>
             </a:r>
           </a:p>
           <a:p>
             <a:pPr>
               <a:spcAft>
-                <a:spcPts val="1000"/>
+                <a:spcPts val="1300"/>
               </a:spcAft>
             </a:pPr>
             <a:r>
-              <a:rPr sz="2000">
-                <a:solidFill>
-                  <a:srgbClr val="2C3E50"/>
-                </a:solidFill>
-              </a:rPr>
-              <a:t>Template (HTML) - Bootstrap pages shown to user.</a:t>
+              <a:rPr sz="2000" b="1" i="0">
+                <a:solidFill>
+                  <a:srgbClr val="FF6B35"/>
+                </a:solidFill>
+                <a:latin typeface="Segoe UI"/>
+              </a:rPr>
+              <a:t>▸  </a:t>
+            </a:r>
+            <a:r>
+              <a:rPr sz="2000" b="0" i="0">
+                <a:solidFill>
+                  <a:srgbClr val="243140"/>
+                </a:solidFill>
+                <a:latin typeface="Segoe UI"/>
+              </a:rPr>
+              <a:t>Template (HTML)  -  Bootstrap pages shown to user.</a:t>
             </a:r>
           </a:p>
           <a:p>
             <a:pPr>
               <a:spcAft>
-                <a:spcPts val="1000"/>
+                <a:spcPts val="1300"/>
               </a:spcAft>
             </a:pPr>
             <a:r>
-              <a:rPr sz="2000">
-                <a:solidFill>
-                  <a:srgbClr val="2C3E50"/>
-                </a:solidFill>
-              </a:rPr>
-              <a:t>URLs (urls.py) - map addresses to views.</a:t>
+              <a:rPr sz="2000" b="1" i="0">
+                <a:solidFill>
+                  <a:srgbClr val="FF6B35"/>
+                </a:solidFill>
+                <a:latin typeface="Segoe UI"/>
+              </a:rPr>
+              <a:t>▸  </a:t>
+            </a:r>
+            <a:r>
+              <a:rPr sz="2000" b="0" i="0">
+                <a:solidFill>
+                  <a:srgbClr val="243140"/>
+                </a:solidFill>
+                <a:latin typeface="Segoe UI"/>
+              </a:rPr>
+              <a:t>URLs (urls.py)  -  map addresses to views.</a:t>
             </a:r>
           </a:p>
           <a:p>
             <a:pPr>
               <a:spcAft>
-                <a:spcPts val="1000"/>
+                <a:spcPts val="1300"/>
               </a:spcAft>
             </a:pPr>
             <a:r>
-              <a:rPr sz="2000">
-                <a:solidFill>
-                  <a:srgbClr val="2C3E50"/>
-                </a:solidFill>
-              </a:rPr>
-              <a:t>Flow: URL -&gt; View -&gt; Model (data) -&gt; Template -&gt; Browser.</a:t>
+              <a:rPr sz="2000" b="1" i="0">
+                <a:solidFill>
+                  <a:srgbClr val="FF6B35"/>
+                </a:solidFill>
+                <a:latin typeface="Segoe UI"/>
+              </a:rPr>
+              <a:t>▸  </a:t>
+            </a:r>
+            <a:r>
+              <a:rPr sz="2000" b="0" i="0">
+                <a:solidFill>
+                  <a:srgbClr val="243140"/>
+                </a:solidFill>
+                <a:latin typeface="Segoe UI"/>
+              </a:rPr>
+              <a:t>Flow:  URL  -&gt;  View  -&gt;  Model (data)  -&gt;  Template  -&gt;  Browser.</a:t>
+            </a:r>
+          </a:p>
+        </p:txBody>
+      </p:sp>
+      <p:sp>
+        <p:nvSpPr>
+          <p:cNvPr id="8" name="Rectangle 7"/>
+          <p:cNvSpPr/>
+          <p:nvPr/>
+        </p:nvSpPr>
+        <p:spPr>
+          <a:xfrm>
+            <a:off x="502920" y="6400800"/>
+            <a:ext cx="11201400" cy="17780"/>
+          </a:xfrm>
+          <a:prstGeom prst="rect">
+            <a:avLst/>
+          </a:prstGeom>
+          <a:solidFill>
+            <a:srgbClr val="DDE3E9"/>
+          </a:solidFill>
+          <a:ln>
+            <a:noFill/>
+          </a:ln>
+        </p:spPr>
+        <p:style>
+          <a:lnRef idx="1">
+            <a:schemeClr val="accent1"/>
+          </a:lnRef>
+          <a:fillRef idx="3">
+            <a:schemeClr val="accent1"/>
+          </a:fillRef>
+          <a:effectRef idx="2">
+            <a:schemeClr val="accent1"/>
+          </a:effectRef>
+          <a:fontRef idx="minor">
+            <a:schemeClr val="lt1"/>
+          </a:fontRef>
+        </p:style>
+        <p:txBody>
+          <a:bodyPr rtlCol="0" anchor="ctr"/>
+          <a:lstStyle/>
+          <a:p>
+            <a:pPr algn="ctr"/>
+          </a:p>
+        </p:txBody>
+      </p:sp>
+      <p:sp>
+        <p:nvSpPr>
+          <p:cNvPr id="9" name="TextBox 8"/>
+          <p:cNvSpPr txBox="1"/>
+          <p:nvPr/>
+        </p:nvSpPr>
+        <p:spPr>
+          <a:xfrm>
+            <a:off x="502920" y="6446520"/>
+            <a:ext cx="8229600" cy="320040"/>
+          </a:xfrm>
+          <a:prstGeom prst="rect">
+            <a:avLst/>
+          </a:prstGeom>
+          <a:noFill/>
+        </p:spPr>
+        <p:txBody>
+          <a:bodyPr wrap="none">
+            <a:spAutoFit/>
+          </a:bodyPr>
+          <a:lstStyle/>
+          <a:p>
+            <a:r>
+              <a:rPr sz="1000" b="0" i="0">
+                <a:solidFill>
+                  <a:srgbClr val="8A97A5"/>
+                </a:solidFill>
+                <a:latin typeface="Segoe UI"/>
+              </a:rPr>
+              <a:t>BistroSaaS  |  Restaurant Management System</a:t>
+            </a:r>
+          </a:p>
+        </p:txBody>
+      </p:sp>
+      <p:sp>
+        <p:nvSpPr>
+          <p:cNvPr id="10" name="TextBox 9"/>
+          <p:cNvSpPr txBox="1"/>
+          <p:nvPr/>
+        </p:nvSpPr>
+        <p:spPr>
+          <a:xfrm>
+            <a:off x="10607040" y="6446520"/>
+            <a:ext cx="1097280" cy="320040"/>
+          </a:xfrm>
+          <a:prstGeom prst="rect">
+            <a:avLst/>
+          </a:prstGeom>
+          <a:noFill/>
+        </p:spPr>
+        <p:txBody>
+          <a:bodyPr wrap="none">
+            <a:spAutoFit/>
+          </a:bodyPr>
+          <a:lstStyle/>
+          <a:p>
+            <a:pPr algn="r"/>
+            <a:r>
+              <a:rPr sz="1000" b="1" i="0">
+                <a:solidFill>
+                  <a:srgbClr val="8A97A5"/>
+                </a:solidFill>
+                <a:latin typeface="Segoe UI"/>
+              </a:rPr>
+              <a:t>7</a:t>
             </a:r>
           </a:p>
         </p:txBody>
@@ -6451,6 +11364,14 @@
 <file path=ppt/slides/slide8.xml><?xml version="1.0" encoding="utf-8"?>
 <p:sld xmlns:a="http://schemas.openxmlformats.org/drawingml/2006/main" xmlns:p="http://schemas.openxmlformats.org/presentationml/2006/main" xmlns:r="http://schemas.openxmlformats.org/officeDocument/2006/relationships">
   <p:cSld>
+    <p:bg>
+      <p:bgPr>
+        <a:solidFill>
+          <a:srgbClr val="F5F7FA"/>
+        </a:solidFill>
+        <a:effectLst/>
+      </p:bgPr>
+    </p:bg>
     <p:spTree>
       <p:nvGrpSpPr>
         <p:cNvPr id="1" name=""/>
@@ -6467,13 +11388,13 @@
         <p:spPr>
           <a:xfrm>
             <a:off x="0" y="0"/>
-            <a:ext cx="12191695" cy="1005840"/>
+            <a:ext cx="164592" cy="6858000"/>
           </a:xfrm>
           <a:prstGeom prst="rect">
             <a:avLst/>
           </a:prstGeom>
           <a:solidFill>
-            <a:srgbClr val="2980B9"/>
+            <a:srgbClr val="FF6B35"/>
           </a:solidFill>
           <a:ln>
             <a:noFill/>
@@ -6503,14 +11424,57 @@
       </p:sp>
       <p:sp>
         <p:nvSpPr>
-          <p:cNvPr id="3" name="TextBox 2"/>
+          <p:cNvPr id="3" name="Oval 2"/>
+          <p:cNvSpPr/>
+          <p:nvPr/>
+        </p:nvSpPr>
+        <p:spPr>
+          <a:xfrm>
+            <a:off x="10561320" y="411480"/>
+            <a:ext cx="1143000" cy="1143000"/>
+          </a:xfrm>
+          <a:prstGeom prst="ellipse">
+            <a:avLst/>
+          </a:prstGeom>
+          <a:solidFill>
+            <a:srgbClr val="FDE8DF"/>
+          </a:solidFill>
+          <a:ln>
+            <a:noFill/>
+          </a:ln>
+        </p:spPr>
+        <p:style>
+          <a:lnRef idx="1">
+            <a:schemeClr val="accent1"/>
+          </a:lnRef>
+          <a:fillRef idx="3">
+            <a:schemeClr val="accent1"/>
+          </a:fillRef>
+          <a:effectRef idx="2">
+            <a:schemeClr val="accent1"/>
+          </a:effectRef>
+          <a:fontRef idx="minor">
+            <a:schemeClr val="lt1"/>
+          </a:fontRef>
+        </p:style>
+        <p:txBody>
+          <a:bodyPr rtlCol="0" anchor="ctr"/>
+          <a:lstStyle/>
+          <a:p>
+            <a:pPr algn="ctr"/>
+          </a:p>
+        </p:txBody>
+      </p:sp>
+      <p:sp>
+        <p:nvSpPr>
+          <p:cNvPr id="4" name="TextBox 3"/>
           <p:cNvSpPr txBox="1"/>
           <p:nvPr/>
         </p:nvSpPr>
         <p:spPr>
           <a:xfrm>
-            <a:off x="457200" y="164592"/>
-            <a:ext cx="11247120" cy="731520"/>
+            <a:off x="10561320" y="457200"/>
+            <a:ext cx="1143000" cy="1051560"/>
           </a:xfrm>
           <a:prstGeom prst="rect">
             <a:avLst/>
@@ -6523,11 +11487,47 @@
           </a:bodyPr>
           <a:lstStyle/>
           <a:p>
-            <a:r>
-              <a:rPr sz="3000" b="1">
-                <a:solidFill>
-                  <a:srgbClr val="FFFFFF"/>
-                </a:solidFill>
+            <a:pPr algn="ctr"/>
+            <a:r>
+              <a:rPr sz="3600" b="0" i="0">
+                <a:solidFill>
+                  <a:srgbClr val="243140"/>
+                </a:solidFill>
+                <a:latin typeface="Segoe UI"/>
+              </a:rPr>
+              <a:t>🔑</a:t>
+            </a:r>
+          </a:p>
+        </p:txBody>
+      </p:sp>
+      <p:sp>
+        <p:nvSpPr>
+          <p:cNvPr id="5" name="TextBox 4"/>
+          <p:cNvSpPr txBox="1"/>
+          <p:nvPr/>
+        </p:nvSpPr>
+        <p:spPr>
+          <a:xfrm>
+            <a:off x="502920" y="411480"/>
+            <a:ext cx="9692640" cy="777240"/>
+          </a:xfrm>
+          <a:prstGeom prst="rect">
+            <a:avLst/>
+          </a:prstGeom>
+          <a:noFill/>
+        </p:spPr>
+        <p:txBody>
+          <a:bodyPr wrap="none">
+            <a:spAutoFit/>
+          </a:bodyPr>
+          <a:lstStyle/>
+          <a:p>
+            <a:r>
+              <a:rPr sz="3200" b="1" i="0">
+                <a:solidFill>
+                  <a:srgbClr val="1E2A38"/>
+                </a:solidFill>
+                <a:latin typeface="Segoe UI"/>
               </a:rPr>
               <a:t>User Roles</a:t>
             </a:r>
@@ -6536,14 +11536,57 @@
       </p:sp>
       <p:sp>
         <p:nvSpPr>
-          <p:cNvPr id="4" name="TextBox 3"/>
+          <p:cNvPr id="6" name="Rounded Rectangle 5"/>
+          <p:cNvSpPr/>
+          <p:nvPr/>
+        </p:nvSpPr>
+        <p:spPr>
+          <a:xfrm>
+            <a:off x="548640" y="1170432"/>
+            <a:ext cx="2286000" cy="82296"/>
+          </a:xfrm>
+          <a:prstGeom prst="roundRect">
+            <a:avLst/>
+          </a:prstGeom>
+          <a:solidFill>
+            <a:srgbClr val="FF6B35"/>
+          </a:solidFill>
+          <a:ln>
+            <a:noFill/>
+          </a:ln>
+        </p:spPr>
+        <p:style>
+          <a:lnRef idx="1">
+            <a:schemeClr val="accent1"/>
+          </a:lnRef>
+          <a:fillRef idx="3">
+            <a:schemeClr val="accent1"/>
+          </a:fillRef>
+          <a:effectRef idx="2">
+            <a:schemeClr val="accent1"/>
+          </a:effectRef>
+          <a:fontRef idx="minor">
+            <a:schemeClr val="lt1"/>
+          </a:fontRef>
+        </p:style>
+        <p:txBody>
+          <a:bodyPr rtlCol="0" anchor="ctr"/>
+          <a:lstStyle/>
+          <a:p>
+            <a:pPr algn="ctr"/>
+          </a:p>
+        </p:txBody>
+      </p:sp>
+      <p:sp>
+        <p:nvSpPr>
+          <p:cNvPr id="7" name="TextBox 6"/>
           <p:cNvSpPr txBox="1"/>
           <p:nvPr/>
         </p:nvSpPr>
         <p:spPr>
           <a:xfrm>
-            <a:off x="548640" y="1280160"/>
-            <a:ext cx="11247120" cy="5120640"/>
+            <a:off x="640080" y="1554480"/>
+            <a:ext cx="10789920" cy="4572000"/>
           </a:xfrm>
           <a:prstGeom prst="rect">
             <a:avLst/>
@@ -6558,61 +11601,213 @@
           <a:p>
             <a:pPr>
               <a:spcAft>
-                <a:spcPts val="1000"/>
+                <a:spcPts val="1300"/>
               </a:spcAft>
             </a:pPr>
             <a:r>
-              <a:rPr sz="2000">
-                <a:solidFill>
-                  <a:srgbClr val="2C3E50"/>
-                </a:solidFill>
-              </a:rPr>
-              <a:t>Guest - browse menu &amp; read API only.</a:t>
+              <a:rPr sz="2000" b="1" i="0">
+                <a:solidFill>
+                  <a:srgbClr val="FF6B35"/>
+                </a:solidFill>
+                <a:latin typeface="Segoe UI"/>
+              </a:rPr>
+              <a:t>▸  </a:t>
+            </a:r>
+            <a:r>
+              <a:rPr sz="2000" b="0" i="0">
+                <a:solidFill>
+                  <a:srgbClr val="243140"/>
+                </a:solidFill>
+                <a:latin typeface="Segoe UI"/>
+              </a:rPr>
+              <a:t>Guest  -  browse menu &amp; read API only.</a:t>
             </a:r>
           </a:p>
           <a:p>
             <a:pPr>
               <a:spcAft>
-                <a:spcPts val="1000"/>
+                <a:spcPts val="1300"/>
               </a:spcAft>
             </a:pPr>
             <a:r>
-              <a:rPr sz="2000">
-                <a:solidFill>
-                  <a:srgbClr val="2C3E50"/>
-                </a:solidFill>
-              </a:rPr>
-              <a:t>Customer - place orders, view history, edit profile.</a:t>
+              <a:rPr sz="2000" b="1" i="0">
+                <a:solidFill>
+                  <a:srgbClr val="FF6B35"/>
+                </a:solidFill>
+                <a:latin typeface="Segoe UI"/>
+              </a:rPr>
+              <a:t>▸  </a:t>
+            </a:r>
+            <a:r>
+              <a:rPr sz="2000" b="0" i="0">
+                <a:solidFill>
+                  <a:srgbClr val="243140"/>
+                </a:solidFill>
+                <a:latin typeface="Segoe UI"/>
+              </a:rPr>
+              <a:t>Customer  -  place orders, view history, edit profile.</a:t>
             </a:r>
           </a:p>
           <a:p>
             <a:pPr>
               <a:spcAft>
-                <a:spcPts val="1000"/>
+                <a:spcPts val="1300"/>
               </a:spcAft>
             </a:pPr>
             <a:r>
-              <a:rPr sz="2000">
-                <a:solidFill>
-                  <a:srgbClr val="2C3E50"/>
-                </a:solidFill>
-              </a:rPr>
-              <a:t>Admin (superuser) - full menu &amp; order management + Django admin.</a:t>
+              <a:rPr sz="2000" b="1" i="0">
+                <a:solidFill>
+                  <a:srgbClr val="FF6B35"/>
+                </a:solidFill>
+                <a:latin typeface="Segoe UI"/>
+              </a:rPr>
+              <a:t>▸  </a:t>
+            </a:r>
+            <a:r>
+              <a:rPr sz="2000" b="0" i="0">
+                <a:solidFill>
+                  <a:srgbClr val="243140"/>
+                </a:solidFill>
+                <a:latin typeface="Segoe UI"/>
+              </a:rPr>
+              <a:t>Admin (superuser)  -  full menu &amp; order management + Django admin.</a:t>
             </a:r>
           </a:p>
           <a:p>
             <a:pPr>
               <a:spcAft>
-                <a:spcPts val="1000"/>
+                <a:spcPts val="1300"/>
               </a:spcAft>
             </a:pPr>
             <a:r>
-              <a:rPr sz="2000">
-                <a:solidFill>
-                  <a:srgbClr val="2C3E50"/>
-                </a:solidFill>
+              <a:rPr sz="2000" b="1" i="0">
+                <a:solidFill>
+                  <a:srgbClr val="FF6B35"/>
+                </a:solidFill>
+                <a:latin typeface="Segoe UI"/>
+              </a:rPr>
+              <a:t>▸  </a:t>
+            </a:r>
+            <a:r>
+              <a:rPr sz="2000" b="0" i="0">
+                <a:solidFill>
+                  <a:srgbClr val="243140"/>
+                </a:solidFill>
+                <a:latin typeface="Segoe UI"/>
               </a:rPr>
               <a:t>Admin sign-up is protected by a secret key.</a:t>
+            </a:r>
+          </a:p>
+        </p:txBody>
+      </p:sp>
+      <p:sp>
+        <p:nvSpPr>
+          <p:cNvPr id="8" name="Rectangle 7"/>
+          <p:cNvSpPr/>
+          <p:nvPr/>
+        </p:nvSpPr>
+        <p:spPr>
+          <a:xfrm>
+            <a:off x="502920" y="6400800"/>
+            <a:ext cx="11201400" cy="17780"/>
+          </a:xfrm>
+          <a:prstGeom prst="rect">
+            <a:avLst/>
+          </a:prstGeom>
+          <a:solidFill>
+            <a:srgbClr val="DDE3E9"/>
+          </a:solidFill>
+          <a:ln>
+            <a:noFill/>
+          </a:ln>
+        </p:spPr>
+        <p:style>
+          <a:lnRef idx="1">
+            <a:schemeClr val="accent1"/>
+          </a:lnRef>
+          <a:fillRef idx="3">
+            <a:schemeClr val="accent1"/>
+          </a:fillRef>
+          <a:effectRef idx="2">
+            <a:schemeClr val="accent1"/>
+          </a:effectRef>
+          <a:fontRef idx="minor">
+            <a:schemeClr val="lt1"/>
+          </a:fontRef>
+        </p:style>
+        <p:txBody>
+          <a:bodyPr rtlCol="0" anchor="ctr"/>
+          <a:lstStyle/>
+          <a:p>
+            <a:pPr algn="ctr"/>
+          </a:p>
+        </p:txBody>
+      </p:sp>
+      <p:sp>
+        <p:nvSpPr>
+          <p:cNvPr id="9" name="TextBox 8"/>
+          <p:cNvSpPr txBox="1"/>
+          <p:nvPr/>
+        </p:nvSpPr>
+        <p:spPr>
+          <a:xfrm>
+            <a:off x="502920" y="6446520"/>
+            <a:ext cx="8229600" cy="320040"/>
+          </a:xfrm>
+          <a:prstGeom prst="rect">
+            <a:avLst/>
+          </a:prstGeom>
+          <a:noFill/>
+        </p:spPr>
+        <p:txBody>
+          <a:bodyPr wrap="none">
+            <a:spAutoFit/>
+          </a:bodyPr>
+          <a:lstStyle/>
+          <a:p>
+            <a:r>
+              <a:rPr sz="1000" b="0" i="0">
+                <a:solidFill>
+                  <a:srgbClr val="8A97A5"/>
+                </a:solidFill>
+                <a:latin typeface="Segoe UI"/>
+              </a:rPr>
+              <a:t>BistroSaaS  |  Restaurant Management System</a:t>
+            </a:r>
+          </a:p>
+        </p:txBody>
+      </p:sp>
+      <p:sp>
+        <p:nvSpPr>
+          <p:cNvPr id="10" name="TextBox 9"/>
+          <p:cNvSpPr txBox="1"/>
+          <p:nvPr/>
+        </p:nvSpPr>
+        <p:spPr>
+          <a:xfrm>
+            <a:off x="10607040" y="6446520"/>
+            <a:ext cx="1097280" cy="320040"/>
+          </a:xfrm>
+          <a:prstGeom prst="rect">
+            <a:avLst/>
+          </a:prstGeom>
+          <a:noFill/>
+        </p:spPr>
+        <p:txBody>
+          <a:bodyPr wrap="none">
+            <a:spAutoFit/>
+          </a:bodyPr>
+          <a:lstStyle/>
+          <a:p>
+            <a:pPr algn="r"/>
+            <a:r>
+              <a:rPr sz="1000" b="1" i="0">
+                <a:solidFill>
+                  <a:srgbClr val="8A97A5"/>
+                </a:solidFill>
+                <a:latin typeface="Segoe UI"/>
+              </a:rPr>
+              <a:t>8</a:t>
             </a:r>
           </a:p>
         </p:txBody>
@@ -6628,6 +11823,14 @@
 <file path=ppt/slides/slide9.xml><?xml version="1.0" encoding="utf-8"?>
 <p:sld xmlns:a="http://schemas.openxmlformats.org/drawingml/2006/main" xmlns:p="http://schemas.openxmlformats.org/presentationml/2006/main" xmlns:r="http://schemas.openxmlformats.org/officeDocument/2006/relationships">
   <p:cSld>
+    <p:bg>
+      <p:bgPr>
+        <a:solidFill>
+          <a:srgbClr val="F5F7FA"/>
+        </a:solidFill>
+        <a:effectLst/>
+      </p:bgPr>
+    </p:bg>
     <p:spTree>
       <p:nvGrpSpPr>
         <p:cNvPr id="1" name=""/>
@@ -6644,13 +11847,13 @@
         <p:spPr>
           <a:xfrm>
             <a:off x="0" y="0"/>
-            <a:ext cx="12191695" cy="1005840"/>
+            <a:ext cx="164592" cy="6858000"/>
           </a:xfrm>
           <a:prstGeom prst="rect">
             <a:avLst/>
           </a:prstGeom>
           <a:solidFill>
-            <a:srgbClr val="2980B9"/>
+            <a:srgbClr val="FF6B35"/>
           </a:solidFill>
           <a:ln>
             <a:noFill/>
@@ -6680,14 +11883,57 @@
       </p:sp>
       <p:sp>
         <p:nvSpPr>
-          <p:cNvPr id="3" name="TextBox 2"/>
+          <p:cNvPr id="3" name="Oval 2"/>
+          <p:cNvSpPr/>
+          <p:nvPr/>
+        </p:nvSpPr>
+        <p:spPr>
+          <a:xfrm>
+            <a:off x="10561320" y="411480"/>
+            <a:ext cx="1143000" cy="1143000"/>
+          </a:xfrm>
+          <a:prstGeom prst="ellipse">
+            <a:avLst/>
+          </a:prstGeom>
+          <a:solidFill>
+            <a:srgbClr val="FDE8DF"/>
+          </a:solidFill>
+          <a:ln>
+            <a:noFill/>
+          </a:ln>
+        </p:spPr>
+        <p:style>
+          <a:lnRef idx="1">
+            <a:schemeClr val="accent1"/>
+          </a:lnRef>
+          <a:fillRef idx="3">
+            <a:schemeClr val="accent1"/>
+          </a:fillRef>
+          <a:effectRef idx="2">
+            <a:schemeClr val="accent1"/>
+          </a:effectRef>
+          <a:fontRef idx="minor">
+            <a:schemeClr val="lt1"/>
+          </a:fontRef>
+        </p:style>
+        <p:txBody>
+          <a:bodyPr rtlCol="0" anchor="ctr"/>
+          <a:lstStyle/>
+          <a:p>
+            <a:pPr algn="ctr"/>
+          </a:p>
+        </p:txBody>
+      </p:sp>
+      <p:sp>
+        <p:nvSpPr>
+          <p:cNvPr id="4" name="TextBox 3"/>
           <p:cNvSpPr txBox="1"/>
           <p:nvPr/>
         </p:nvSpPr>
         <p:spPr>
           <a:xfrm>
-            <a:off x="457200" y="164592"/>
-            <a:ext cx="11247120" cy="731520"/>
+            <a:off x="10561320" y="457200"/>
+            <a:ext cx="1143000" cy="1051560"/>
           </a:xfrm>
           <a:prstGeom prst="rect">
             <a:avLst/>
@@ -6700,11 +11946,47 @@
           </a:bodyPr>
           <a:lstStyle/>
           <a:p>
-            <a:r>
-              <a:rPr sz="3000" b="1">
-                <a:solidFill>
-                  <a:srgbClr val="FFFFFF"/>
-                </a:solidFill>
+            <a:pPr algn="ctr"/>
+            <a:r>
+              <a:rPr sz="3600" b="0" i="0">
+                <a:solidFill>
+                  <a:srgbClr val="243140"/>
+                </a:solidFill>
+                <a:latin typeface="Segoe UI"/>
+              </a:rPr>
+              <a:t>🗄</a:t>
+            </a:r>
+          </a:p>
+        </p:txBody>
+      </p:sp>
+      <p:sp>
+        <p:nvSpPr>
+          <p:cNvPr id="5" name="TextBox 4"/>
+          <p:cNvSpPr txBox="1"/>
+          <p:nvPr/>
+        </p:nvSpPr>
+        <p:spPr>
+          <a:xfrm>
+            <a:off x="502920" y="411480"/>
+            <a:ext cx="9692640" cy="777240"/>
+          </a:xfrm>
+          <a:prstGeom prst="rect">
+            <a:avLst/>
+          </a:prstGeom>
+          <a:noFill/>
+        </p:spPr>
+        <p:txBody>
+          <a:bodyPr wrap="none">
+            <a:spAutoFit/>
+          </a:bodyPr>
+          <a:lstStyle/>
+          <a:p>
+            <a:r>
+              <a:rPr sz="3200" b="1" i="0">
+                <a:solidFill>
+                  <a:srgbClr val="1E2A38"/>
+                </a:solidFill>
+                <a:latin typeface="Segoe UI"/>
               </a:rPr>
               <a:t>Database Design</a:t>
             </a:r>
@@ -6713,14 +11995,57 @@
       </p:sp>
       <p:sp>
         <p:nvSpPr>
-          <p:cNvPr id="4" name="TextBox 3"/>
+          <p:cNvPr id="6" name="Rounded Rectangle 5"/>
+          <p:cNvSpPr/>
+          <p:nvPr/>
+        </p:nvSpPr>
+        <p:spPr>
+          <a:xfrm>
+            <a:off x="548640" y="1170432"/>
+            <a:ext cx="2286000" cy="82296"/>
+          </a:xfrm>
+          <a:prstGeom prst="roundRect">
+            <a:avLst/>
+          </a:prstGeom>
+          <a:solidFill>
+            <a:srgbClr val="FF6B35"/>
+          </a:solidFill>
+          <a:ln>
+            <a:noFill/>
+          </a:ln>
+        </p:spPr>
+        <p:style>
+          <a:lnRef idx="1">
+            <a:schemeClr val="accent1"/>
+          </a:lnRef>
+          <a:fillRef idx="3">
+            <a:schemeClr val="accent1"/>
+          </a:fillRef>
+          <a:effectRef idx="2">
+            <a:schemeClr val="accent1"/>
+          </a:effectRef>
+          <a:fontRef idx="minor">
+            <a:schemeClr val="lt1"/>
+          </a:fontRef>
+        </p:style>
+        <p:txBody>
+          <a:bodyPr rtlCol="0" anchor="ctr"/>
+          <a:lstStyle/>
+          <a:p>
+            <a:pPr algn="ctr"/>
+          </a:p>
+        </p:txBody>
+      </p:sp>
+      <p:sp>
+        <p:nvSpPr>
+          <p:cNvPr id="7" name="TextBox 6"/>
           <p:cNvSpPr txBox="1"/>
           <p:nvPr/>
         </p:nvSpPr>
         <p:spPr>
           <a:xfrm>
-            <a:off x="548640" y="1280160"/>
-            <a:ext cx="6583680" cy="5120640"/>
+            <a:off x="640080" y="1554480"/>
+            <a:ext cx="6126480" cy="4572000"/>
           </a:xfrm>
           <a:prstGeom prst="rect">
             <a:avLst/>
@@ -6735,14 +12060,24 @@
           <a:p>
             <a:pPr>
               <a:spcAft>
-                <a:spcPts val="1000"/>
+                <a:spcPts val="1300"/>
               </a:spcAft>
             </a:pPr>
             <a:r>
-              <a:rPr sz="2000">
-                <a:solidFill>
-                  <a:srgbClr val="2C3E50"/>
-                </a:solidFill>
+              <a:rPr sz="2000" b="1" i="0">
+                <a:solidFill>
+                  <a:srgbClr val="FF6B35"/>
+                </a:solidFill>
+                <a:latin typeface="Segoe UI"/>
+              </a:rPr>
+              <a:t>▸  </a:t>
+            </a:r>
+            <a:r>
+              <a:rPr sz="2000" b="0" i="0">
+                <a:solidFill>
+                  <a:srgbClr val="243140"/>
+                </a:solidFill>
+                <a:latin typeface="Segoe UI"/>
               </a:rPr>
               <a:t>4 main tables + Django User.</a:t>
             </a:r>
@@ -6750,68 +12085,151 @@
           <a:p>
             <a:pPr>
               <a:spcAft>
-                <a:spcPts val="1000"/>
+                <a:spcPts val="1300"/>
               </a:spcAft>
             </a:pPr>
             <a:r>
-              <a:rPr sz="2000">
-                <a:solidFill>
-                  <a:srgbClr val="2C3E50"/>
-                </a:solidFill>
-              </a:rPr>
-              <a:t>User 1-1 CustomerProfile.</a:t>
+              <a:rPr sz="2000" b="1" i="0">
+                <a:solidFill>
+                  <a:srgbClr val="FF6B35"/>
+                </a:solidFill>
+                <a:latin typeface="Segoe UI"/>
+              </a:rPr>
+              <a:t>▸  </a:t>
+            </a:r>
+            <a:r>
+              <a:rPr sz="2000" b="0" i="0">
+                <a:solidFill>
+                  <a:srgbClr val="243140"/>
+                </a:solidFill>
+                <a:latin typeface="Segoe UI"/>
+              </a:rPr>
+              <a:t>User  1-1  CustomerProfile.</a:t>
             </a:r>
           </a:p>
           <a:p>
             <a:pPr>
               <a:spcAft>
-                <a:spcPts val="1000"/>
+                <a:spcPts val="1300"/>
               </a:spcAft>
             </a:pPr>
             <a:r>
-              <a:rPr sz="2000">
-                <a:solidFill>
-                  <a:srgbClr val="2C3E50"/>
-                </a:solidFill>
-              </a:rPr>
-              <a:t>User 1-M Order.</a:t>
+              <a:rPr sz="2000" b="1" i="0">
+                <a:solidFill>
+                  <a:srgbClr val="FF6B35"/>
+                </a:solidFill>
+                <a:latin typeface="Segoe UI"/>
+              </a:rPr>
+              <a:t>▸  </a:t>
+            </a:r>
+            <a:r>
+              <a:rPr sz="2000" b="0" i="0">
+                <a:solidFill>
+                  <a:srgbClr val="243140"/>
+                </a:solidFill>
+                <a:latin typeface="Segoe UI"/>
+              </a:rPr>
+              <a:t>User  1-M  Order.</a:t>
             </a:r>
           </a:p>
           <a:p>
             <a:pPr>
               <a:spcAft>
-                <a:spcPts val="1000"/>
+                <a:spcPts val="1300"/>
               </a:spcAft>
             </a:pPr>
             <a:r>
-              <a:rPr sz="2000">
-                <a:solidFill>
-                  <a:srgbClr val="2C3E50"/>
-                </a:solidFill>
-              </a:rPr>
-              <a:t>Category 1-M MenuItem.</a:t>
+              <a:rPr sz="2000" b="1" i="0">
+                <a:solidFill>
+                  <a:srgbClr val="FF6B35"/>
+                </a:solidFill>
+                <a:latin typeface="Segoe UI"/>
+              </a:rPr>
+              <a:t>▸  </a:t>
+            </a:r>
+            <a:r>
+              <a:rPr sz="2000" b="0" i="0">
+                <a:solidFill>
+                  <a:srgbClr val="243140"/>
+                </a:solidFill>
+                <a:latin typeface="Segoe UI"/>
+              </a:rPr>
+              <a:t>Category  1-M  MenuItem.</a:t>
             </a:r>
           </a:p>
           <a:p>
             <a:pPr>
               <a:spcAft>
-                <a:spcPts val="1000"/>
+                <a:spcPts val="1300"/>
               </a:spcAft>
             </a:pPr>
             <a:r>
-              <a:rPr sz="2000">
-                <a:solidFill>
-                  <a:srgbClr val="2C3E50"/>
-                </a:solidFill>
-              </a:rPr>
-              <a:t>Order M-N MenuItem.</a:t>
-            </a:r>
+              <a:rPr sz="2000" b="1" i="0">
+                <a:solidFill>
+                  <a:srgbClr val="FF6B35"/>
+                </a:solidFill>
+                <a:latin typeface="Segoe UI"/>
+              </a:rPr>
+              <a:t>▸  </a:t>
+            </a:r>
+            <a:r>
+              <a:rPr sz="2000" b="0" i="0">
+                <a:solidFill>
+                  <a:srgbClr val="243140"/>
+                </a:solidFill>
+                <a:latin typeface="Segoe UI"/>
+              </a:rPr>
+              <a:t>Order  M-N  MenuItem.</a:t>
+            </a:r>
+          </a:p>
+        </p:txBody>
+      </p:sp>
+      <p:sp>
+        <p:nvSpPr>
+          <p:cNvPr id="8" name="Rounded Rectangle 7"/>
+          <p:cNvSpPr/>
+          <p:nvPr/>
+        </p:nvSpPr>
+        <p:spPr>
+          <a:xfrm>
+            <a:off x="6812280" y="1508760"/>
+            <a:ext cx="4937760" cy="4480560"/>
+          </a:xfrm>
+          <a:prstGeom prst="roundRect">
+            <a:avLst/>
+          </a:prstGeom>
+          <a:solidFill>
+            <a:srgbClr val="FFFFFF"/>
+          </a:solidFill>
+          <a:ln>
+            <a:noFill/>
+          </a:ln>
+        </p:spPr>
+        <p:style>
+          <a:lnRef idx="1">
+            <a:schemeClr val="accent1"/>
+          </a:lnRef>
+          <a:fillRef idx="3">
+            <a:schemeClr val="accent1"/>
+          </a:fillRef>
+          <a:effectRef idx="2">
+            <a:schemeClr val="accent1"/>
+          </a:effectRef>
+          <a:fontRef idx="minor">
+            <a:schemeClr val="lt1"/>
+          </a:fontRef>
+        </p:style>
+        <p:txBody>
+          <a:bodyPr rtlCol="0" anchor="ctr"/>
+          <a:lstStyle/>
+          <a:p>
+            <a:pPr algn="ctr"/>
           </a:p>
         </p:txBody>
       </p:sp>
       <p:pic>
         <p:nvPicPr>
-          <p:cNvPr id="5" name="Picture 4" descr="er_diagram.png"/>
+          <p:cNvPr id="9" name="Picture 8" descr="er_diagram.png"/>
           <p:cNvPicPr>
             <a:picLocks noChangeAspect="1"/>
           </p:cNvPicPr>
@@ -6825,14 +12243,126 @@
         </p:blipFill>
         <p:spPr>
           <a:xfrm>
-            <a:off x="7315200" y="1371600"/>
-            <a:ext cx="4480560" cy="3035218"/>
+            <a:off x="6949440" y="2377440"/>
+            <a:ext cx="4663440" cy="3159105"/>
           </a:xfrm>
           <a:prstGeom prst="rect">
             <a:avLst/>
           </a:prstGeom>
         </p:spPr>
       </p:pic>
+      <p:sp>
+        <p:nvSpPr>
+          <p:cNvPr id="10" name="Rectangle 9"/>
+          <p:cNvSpPr/>
+          <p:nvPr/>
+        </p:nvSpPr>
+        <p:spPr>
+          <a:xfrm>
+            <a:off x="502920" y="6400800"/>
+            <a:ext cx="11201400" cy="17780"/>
+          </a:xfrm>
+          <a:prstGeom prst="rect">
+            <a:avLst/>
+          </a:prstGeom>
+          <a:solidFill>
+            <a:srgbClr val="DDE3E9"/>
+          </a:solidFill>
+          <a:ln>
+            <a:noFill/>
+          </a:ln>
+        </p:spPr>
+        <p:style>
+          <a:lnRef idx="1">
+            <a:schemeClr val="accent1"/>
+          </a:lnRef>
+          <a:fillRef idx="3">
+            <a:schemeClr val="accent1"/>
+          </a:fillRef>
+          <a:effectRef idx="2">
+            <a:schemeClr val="accent1"/>
+          </a:effectRef>
+          <a:fontRef idx="minor">
+            <a:schemeClr val="lt1"/>
+          </a:fontRef>
+        </p:style>
+        <p:txBody>
+          <a:bodyPr rtlCol="0" anchor="ctr"/>
+          <a:lstStyle/>
+          <a:p>
+            <a:pPr algn="ctr"/>
+          </a:p>
+        </p:txBody>
+      </p:sp>
+      <p:sp>
+        <p:nvSpPr>
+          <p:cNvPr id="11" name="TextBox 10"/>
+          <p:cNvSpPr txBox="1"/>
+          <p:nvPr/>
+        </p:nvSpPr>
+        <p:spPr>
+          <a:xfrm>
+            <a:off x="502920" y="6446520"/>
+            <a:ext cx="8229600" cy="320040"/>
+          </a:xfrm>
+          <a:prstGeom prst="rect">
+            <a:avLst/>
+          </a:prstGeom>
+          <a:noFill/>
+        </p:spPr>
+        <p:txBody>
+          <a:bodyPr wrap="none">
+            <a:spAutoFit/>
+          </a:bodyPr>
+          <a:lstStyle/>
+          <a:p>
+            <a:r>
+              <a:rPr sz="1000" b="0" i="0">
+                <a:solidFill>
+                  <a:srgbClr val="8A97A5"/>
+                </a:solidFill>
+                <a:latin typeface="Segoe UI"/>
+              </a:rPr>
+              <a:t>BistroSaaS  |  Restaurant Management System</a:t>
+            </a:r>
+          </a:p>
+        </p:txBody>
+      </p:sp>
+      <p:sp>
+        <p:nvSpPr>
+          <p:cNvPr id="12" name="TextBox 11"/>
+          <p:cNvSpPr txBox="1"/>
+          <p:nvPr/>
+        </p:nvSpPr>
+        <p:spPr>
+          <a:xfrm>
+            <a:off x="10607040" y="6446520"/>
+            <a:ext cx="1097280" cy="320040"/>
+          </a:xfrm>
+          <a:prstGeom prst="rect">
+            <a:avLst/>
+          </a:prstGeom>
+          <a:noFill/>
+        </p:spPr>
+        <p:txBody>
+          <a:bodyPr wrap="none">
+            <a:spAutoFit/>
+          </a:bodyPr>
+          <a:lstStyle/>
+          <a:p>
+            <a:pPr algn="r"/>
+            <a:r>
+              <a:rPr sz="1000" b="1" i="0">
+                <a:solidFill>
+                  <a:srgbClr val="8A97A5"/>
+                </a:solidFill>
+                <a:latin typeface="Segoe UI"/>
+              </a:rPr>
+              <a:t>9</a:t>
+            </a:r>
+          </a:p>
+        </p:txBody>
+      </p:sp>
     </p:spTree>
   </p:cSld>
   <p:clrMapOvr>

--- a/docs/Project_Presentation.pptx
+++ b/docs/Project_Presentation.pptx
@@ -25,6 +25,18 @@
     <p:sldId id="273" r:id="rId24"/>
     <p:sldId id="274" r:id="rId25"/>
     <p:sldId id="275" r:id="rId26"/>
+    <p:sldId id="276" r:id="rId27"/>
+    <p:sldId id="277" r:id="rId28"/>
+    <p:sldId id="278" r:id="rId29"/>
+    <p:sldId id="279" r:id="rId30"/>
+    <p:sldId id="280" r:id="rId31"/>
+    <p:sldId id="281" r:id="rId32"/>
+    <p:sldId id="282" r:id="rId33"/>
+    <p:sldId id="283" r:id="rId34"/>
+    <p:sldId id="284" r:id="rId35"/>
+    <p:sldId id="285" r:id="rId36"/>
+    <p:sldId id="286" r:id="rId37"/>
+    <p:sldId id="287" r:id="rId38"/>
   </p:sldIdLst>
   <p:sldSz cx="12191695" cy="6858000" type="screen4x3"/>
   <p:notesSz cx="6858000" cy="9144000"/>
@@ -8577,7 +8589,7 @@
     <p:bg>
       <p:bgPr>
         <a:solidFill>
-          <a:srgbClr val="1E2A38"/>
+          <a:srgbClr val="F5F7FA"/>
         </a:solidFill>
         <a:effectLst/>
       </p:bgPr>
@@ -8598,7 +8610,7 @@
         <p:spPr>
           <a:xfrm>
             <a:off x="0" y="0"/>
-            <a:ext cx="320040" cy="6858000"/>
+            <a:ext cx="164592" cy="6858000"/>
           </a:xfrm>
           <a:prstGeom prst="rect">
             <a:avLst/>
@@ -8640,17 +8652,17 @@
         </p:nvSpPr>
         <p:spPr>
           <a:xfrm>
-            <a:off x="9509760" y="3931920"/>
-            <a:ext cx="2926080" cy="2926080"/>
+            <a:off x="10561320" y="411480"/>
+            <a:ext cx="1143000" cy="1143000"/>
           </a:xfrm>
           <a:prstGeom prst="ellipse">
             <a:avLst/>
           </a:prstGeom>
-          <a:noFill/>
-          <a:ln w="31750">
-            <a:solidFill>
-              <a:srgbClr val="FF6B35"/>
-            </a:solidFill>
+          <a:solidFill>
+            <a:srgbClr val="FDE8DF"/>
+          </a:solidFill>
+          <a:ln>
+            <a:noFill/>
           </a:ln>
         </p:spPr>
         <p:style>
@@ -8683,8 +8695,8 @@
         </p:nvSpPr>
         <p:spPr>
           <a:xfrm>
-            <a:off x="822960" y="1371600"/>
-            <a:ext cx="2743200" cy="1097280"/>
+            <a:off x="10561320" y="457200"/>
+            <a:ext cx="1143000" cy="1051560"/>
           </a:xfrm>
           <a:prstGeom prst="rect">
             <a:avLst/>
@@ -8697,14 +8709,15 @@
           </a:bodyPr>
           <a:lstStyle/>
           <a:p>
-            <a:r>
-              <a:rPr sz="6000" b="0" i="0">
-                <a:solidFill>
-                  <a:srgbClr val="FFFFFF"/>
-                </a:solidFill>
-                <a:latin typeface="Segoe UI"/>
-              </a:rPr>
-              <a:t>🍽</a:t>
+            <a:pPr algn="ctr"/>
+            <a:r>
+              <a:rPr sz="3600" b="0" i="0">
+                <a:solidFill>
+                  <a:srgbClr val="243140"/>
+                </a:solidFill>
+                <a:latin typeface="Segoe UI"/>
+              </a:rPr>
+              <a:t>📸</a:t>
             </a:r>
           </a:p>
         </p:txBody>
@@ -8717,8 +8730,8 @@
         </p:nvSpPr>
         <p:spPr>
           <a:xfrm>
-            <a:off x="822960" y="2468880"/>
-            <a:ext cx="10058400" cy="1828800"/>
+            <a:off x="502920" y="411480"/>
+            <a:ext cx="9692640" cy="777240"/>
           </a:xfrm>
           <a:prstGeom prst="rect">
             <a:avLst/>
@@ -8732,24 +8745,13 @@
           <a:lstStyle/>
           <a:p>
             <a:r>
-              <a:rPr sz="4000" b="1" i="0">
-                <a:solidFill>
-                  <a:srgbClr val="FFFFFF"/>
-                </a:solidFill>
-                <a:latin typeface="Segoe UI"/>
-              </a:rPr>
-              <a:t>Conclusion</a:t>
-            </a:r>
-          </a:p>
-          <a:p>
-            <a:r>
-              <a:rPr sz="3000" b="1" i="0">
-                <a:solidFill>
-                  <a:srgbClr val="FFFFFF"/>
-                </a:solidFill>
-                <a:latin typeface="Segoe UI"/>
-              </a:rPr>
-              <a:t>Thank You!</a:t>
+              <a:rPr sz="3200" b="1" i="0">
+                <a:solidFill>
+                  <a:srgbClr val="1E2A38"/>
+                </a:solidFill>
+                <a:latin typeface="Segoe UI"/>
+              </a:rPr>
+              <a:t>Project Demonstration</a:t>
             </a:r>
           </a:p>
         </p:txBody>
@@ -8762,8 +8764,8 @@
         </p:nvSpPr>
         <p:spPr>
           <a:xfrm>
-            <a:off x="868680" y="4160520"/>
-            <a:ext cx="2743200" cy="91440"/>
+            <a:off x="548640" y="1170432"/>
+            <a:ext cx="2286000" cy="82296"/>
           </a:xfrm>
           <a:prstGeom prst="roundRect">
             <a:avLst/>
@@ -8805,8 +8807,149 @@
         </p:nvSpPr>
         <p:spPr>
           <a:xfrm>
-            <a:off x="822960" y="4389120"/>
-            <a:ext cx="9601200" cy="731520"/>
+            <a:off x="640080" y="1554480"/>
+            <a:ext cx="10789920" cy="4572000"/>
+          </a:xfrm>
+          <a:prstGeom prst="rect">
+            <a:avLst/>
+          </a:prstGeom>
+          <a:noFill/>
+        </p:spPr>
+        <p:txBody>
+          <a:bodyPr wrap="square">
+            <a:spAutoFit/>
+          </a:bodyPr>
+          <a:lstStyle/>
+          <a:p>
+            <a:pPr>
+              <a:spcAft>
+                <a:spcPts val="1300"/>
+              </a:spcAft>
+            </a:pPr>
+            <a:r>
+              <a:rPr sz="2000" b="1" i="0">
+                <a:solidFill>
+                  <a:srgbClr val="FF6B35"/>
+                </a:solidFill>
+                <a:latin typeface="Segoe UI"/>
+              </a:rPr>
+              <a:t>▸  </a:t>
+            </a:r>
+            <a:r>
+              <a:rPr sz="2000" b="0" i="0">
+                <a:solidFill>
+                  <a:srgbClr val="243140"/>
+                </a:solidFill>
+                <a:latin typeface="Segoe UI"/>
+              </a:rPr>
+              <a:t>Live screenshots from the running application.</a:t>
+            </a:r>
+          </a:p>
+          <a:p>
+            <a:pPr>
+              <a:spcAft>
+                <a:spcPts val="1300"/>
+              </a:spcAft>
+            </a:pPr>
+            <a:r>
+              <a:rPr sz="2000" b="1" i="0">
+                <a:solidFill>
+                  <a:srgbClr val="FF6B35"/>
+                </a:solidFill>
+                <a:latin typeface="Segoe UI"/>
+              </a:rPr>
+              <a:t>▸  </a:t>
+            </a:r>
+            <a:r>
+              <a:rPr sz="2000" b="0" i="0">
+                <a:solidFill>
+                  <a:srgbClr val="243140"/>
+                </a:solidFill>
+                <a:latin typeface="Segoe UI"/>
+              </a:rPr>
+              <a:t>Walking through the main pages and features.</a:t>
+            </a:r>
+          </a:p>
+          <a:p>
+            <a:pPr>
+              <a:spcAft>
+                <a:spcPts val="1300"/>
+              </a:spcAft>
+            </a:pPr>
+            <a:r>
+              <a:rPr sz="2000" b="1" i="0">
+                <a:solidFill>
+                  <a:srgbClr val="FF6B35"/>
+                </a:solidFill>
+                <a:latin typeface="Segoe UI"/>
+              </a:rPr>
+              <a:t>▸  </a:t>
+            </a:r>
+            <a:r>
+              <a:rPr sz="2000" b="0" i="0">
+                <a:solidFill>
+                  <a:srgbClr val="243140"/>
+                </a:solidFill>
+                <a:latin typeface="Segoe UI"/>
+              </a:rPr>
+              <a:t>Customer journey + Admin management.</a:t>
+            </a:r>
+          </a:p>
+        </p:txBody>
+      </p:sp>
+      <p:sp>
+        <p:nvSpPr>
+          <p:cNvPr id="8" name="Rectangle 7"/>
+          <p:cNvSpPr/>
+          <p:nvPr/>
+        </p:nvSpPr>
+        <p:spPr>
+          <a:xfrm>
+            <a:off x="502920" y="6400800"/>
+            <a:ext cx="11201400" cy="17780"/>
+          </a:xfrm>
+          <a:prstGeom prst="rect">
+            <a:avLst/>
+          </a:prstGeom>
+          <a:solidFill>
+            <a:srgbClr val="DDE3E9"/>
+          </a:solidFill>
+          <a:ln>
+            <a:noFill/>
+          </a:ln>
+        </p:spPr>
+        <p:style>
+          <a:lnRef idx="1">
+            <a:schemeClr val="accent1"/>
+          </a:lnRef>
+          <a:fillRef idx="3">
+            <a:schemeClr val="accent1"/>
+          </a:fillRef>
+          <a:effectRef idx="2">
+            <a:schemeClr val="accent1"/>
+          </a:effectRef>
+          <a:fontRef idx="minor">
+            <a:schemeClr val="lt1"/>
+          </a:fontRef>
+        </p:style>
+        <p:txBody>
+          <a:bodyPr rtlCol="0" anchor="ctr"/>
+          <a:lstStyle/>
+          <a:p>
+            <a:pPr algn="ctr"/>
+          </a:p>
+        </p:txBody>
+      </p:sp>
+      <p:sp>
+        <p:nvSpPr>
+          <p:cNvPr id="9" name="TextBox 8"/>
+          <p:cNvSpPr txBox="1"/>
+          <p:nvPr/>
+        </p:nvSpPr>
+        <p:spPr>
+          <a:xfrm>
+            <a:off x="502920" y="6446520"/>
+            <a:ext cx="8229600" cy="320040"/>
           </a:xfrm>
           <a:prstGeom prst="rect">
             <a:avLst/>
@@ -8820,29 +8963,90 @@
           <a:lstStyle/>
           <a:p>
             <a:r>
-              <a:rPr sz="2200" b="0" i="0">
-                <a:solidFill>
-                  <a:srgbClr val="D7DEE5"/>
-                </a:solidFill>
-                <a:latin typeface="Segoe UI"/>
-              </a:rPr>
-              <a:t>A complete full-stack Django app  -  live demonstration to follow.</a:t>
-            </a:r>
-          </a:p>
-        </p:txBody>
-      </p:sp>
-      <p:sp>
-        <p:nvSpPr>
-          <p:cNvPr id="8" name="Rounded Rectangle 7"/>
+              <a:rPr sz="1000" b="0" i="0">
+                <a:solidFill>
+                  <a:srgbClr val="8A97A5"/>
+                </a:solidFill>
+                <a:latin typeface="Segoe UI"/>
+              </a:rPr>
+              <a:t>BistroSaaS  |  Restaurant Management System</a:t>
+            </a:r>
+          </a:p>
+        </p:txBody>
+      </p:sp>
+      <p:sp>
+        <p:nvSpPr>
+          <p:cNvPr id="10" name="TextBox 9"/>
+          <p:cNvSpPr txBox="1"/>
+          <p:nvPr/>
+        </p:nvSpPr>
+        <p:spPr>
+          <a:xfrm>
+            <a:off x="10607040" y="6446520"/>
+            <a:ext cx="1097280" cy="320040"/>
+          </a:xfrm>
+          <a:prstGeom prst="rect">
+            <a:avLst/>
+          </a:prstGeom>
+          <a:noFill/>
+        </p:spPr>
+        <p:txBody>
+          <a:bodyPr wrap="none">
+            <a:spAutoFit/>
+          </a:bodyPr>
+          <a:lstStyle/>
+          <a:p>
+            <a:pPr algn="r"/>
+            <a:r>
+              <a:rPr sz="1000" b="1" i="0">
+                <a:solidFill>
+                  <a:srgbClr val="8A97A5"/>
+                </a:solidFill>
+                <a:latin typeface="Segoe UI"/>
+              </a:rPr>
+              <a:t>20</a:t>
+            </a:r>
+          </a:p>
+        </p:txBody>
+      </p:sp>
+    </p:spTree>
+  </p:cSld>
+  <p:clrMapOvr>
+    <a:masterClrMapping/>
+  </p:clrMapOvr>
+</p:sld>
+</file>
+
+<file path=ppt/slides/slide21.xml><?xml version="1.0" encoding="utf-8"?>
+<p:sld xmlns:a="http://schemas.openxmlformats.org/drawingml/2006/main" xmlns:p="http://schemas.openxmlformats.org/presentationml/2006/main" xmlns:r="http://schemas.openxmlformats.org/officeDocument/2006/relationships">
+  <p:cSld>
+    <p:bg>
+      <p:bgPr>
+        <a:solidFill>
+          <a:srgbClr val="F5F7FA"/>
+        </a:solidFill>
+        <a:effectLst/>
+      </p:bgPr>
+    </p:bg>
+    <p:spTree>
+      <p:nvGrpSpPr>
+        <p:cNvPr id="1" name=""/>
+        <p:cNvGrpSpPr/>
+        <p:nvPr/>
+      </p:nvGrpSpPr>
+      <p:grpSpPr/>
+      <p:sp>
+        <p:nvSpPr>
+          <p:cNvPr id="2" name="Rectangle 1"/>
           <p:cNvSpPr/>
           <p:nvPr/>
         </p:nvSpPr>
         <p:spPr>
           <a:xfrm>
-            <a:off x="868680" y="5212080"/>
-            <a:ext cx="3200400" cy="502920"/>
-          </a:xfrm>
-          <a:prstGeom prst="roundRect">
+            <a:off x="0" y="0"/>
+            <a:ext cx="164592" cy="6858000"/>
+          </a:xfrm>
+          <a:prstGeom prst="rect">
             <a:avLst/>
           </a:prstGeom>
           <a:solidFill>
@@ -8867,18 +9071,3567 @@
           </a:fontRef>
         </p:style>
         <p:txBody>
-          <a:bodyPr rtlCol="0" anchor="ctr" wrap="square"/>
+          <a:bodyPr rtlCol="0" anchor="ctr"/>
           <a:lstStyle/>
           <a:p>
             <a:pPr algn="ctr"/>
-            <a:r>
-              <a:rPr sz="1600" b="1" i="0">
-                <a:solidFill>
-                  <a:srgbClr val="FFFFFF"/>
-                </a:solidFill>
-                <a:latin typeface="Segoe UI"/>
-              </a:rPr>
-              <a:t>QUESTIONS  &amp;  DEMO</a:t>
+          </a:p>
+        </p:txBody>
+      </p:sp>
+      <p:sp>
+        <p:nvSpPr>
+          <p:cNvPr id="3" name="Oval 2"/>
+          <p:cNvSpPr/>
+          <p:nvPr/>
+        </p:nvSpPr>
+        <p:spPr>
+          <a:xfrm>
+            <a:off x="10561320" y="411480"/>
+            <a:ext cx="1143000" cy="1143000"/>
+          </a:xfrm>
+          <a:prstGeom prst="ellipse">
+            <a:avLst/>
+          </a:prstGeom>
+          <a:solidFill>
+            <a:srgbClr val="FDE8DF"/>
+          </a:solidFill>
+          <a:ln>
+            <a:noFill/>
+          </a:ln>
+        </p:spPr>
+        <p:style>
+          <a:lnRef idx="1">
+            <a:schemeClr val="accent1"/>
+          </a:lnRef>
+          <a:fillRef idx="3">
+            <a:schemeClr val="accent1"/>
+          </a:fillRef>
+          <a:effectRef idx="2">
+            <a:schemeClr val="accent1"/>
+          </a:effectRef>
+          <a:fontRef idx="minor">
+            <a:schemeClr val="lt1"/>
+          </a:fontRef>
+        </p:style>
+        <p:txBody>
+          <a:bodyPr rtlCol="0" anchor="ctr"/>
+          <a:lstStyle/>
+          <a:p>
+            <a:pPr algn="ctr"/>
+          </a:p>
+        </p:txBody>
+      </p:sp>
+      <p:sp>
+        <p:nvSpPr>
+          <p:cNvPr id="4" name="TextBox 3"/>
+          <p:cNvSpPr txBox="1"/>
+          <p:nvPr/>
+        </p:nvSpPr>
+        <p:spPr>
+          <a:xfrm>
+            <a:off x="10561320" y="457200"/>
+            <a:ext cx="1143000" cy="1051560"/>
+          </a:xfrm>
+          <a:prstGeom prst="rect">
+            <a:avLst/>
+          </a:prstGeom>
+          <a:noFill/>
+        </p:spPr>
+        <p:txBody>
+          <a:bodyPr wrap="none">
+            <a:spAutoFit/>
+          </a:bodyPr>
+          <a:lstStyle/>
+          <a:p>
+            <a:pPr algn="ctr"/>
+            <a:r>
+              <a:rPr sz="3600" b="0" i="0">
+                <a:solidFill>
+                  <a:srgbClr val="243140"/>
+                </a:solidFill>
+                <a:latin typeface="Segoe UI"/>
+              </a:rPr>
+              <a:t>📸</a:t>
+            </a:r>
+          </a:p>
+        </p:txBody>
+      </p:sp>
+      <p:sp>
+        <p:nvSpPr>
+          <p:cNvPr id="5" name="TextBox 4"/>
+          <p:cNvSpPr txBox="1"/>
+          <p:nvPr/>
+        </p:nvSpPr>
+        <p:spPr>
+          <a:xfrm>
+            <a:off x="502920" y="411480"/>
+            <a:ext cx="9692640" cy="777240"/>
+          </a:xfrm>
+          <a:prstGeom prst="rect">
+            <a:avLst/>
+          </a:prstGeom>
+          <a:noFill/>
+        </p:spPr>
+        <p:txBody>
+          <a:bodyPr wrap="none">
+            <a:spAutoFit/>
+          </a:bodyPr>
+          <a:lstStyle/>
+          <a:p>
+            <a:r>
+              <a:rPr sz="3200" b="1" i="0">
+                <a:solidFill>
+                  <a:srgbClr val="1E2A38"/>
+                </a:solidFill>
+                <a:latin typeface="Segoe UI"/>
+              </a:rPr>
+              <a:t>Home / Menu Page</a:t>
+            </a:r>
+          </a:p>
+        </p:txBody>
+      </p:sp>
+      <p:sp>
+        <p:nvSpPr>
+          <p:cNvPr id="6" name="Rounded Rectangle 5"/>
+          <p:cNvSpPr/>
+          <p:nvPr/>
+        </p:nvSpPr>
+        <p:spPr>
+          <a:xfrm>
+            <a:off x="548640" y="1170432"/>
+            <a:ext cx="2286000" cy="82296"/>
+          </a:xfrm>
+          <a:prstGeom prst="roundRect">
+            <a:avLst/>
+          </a:prstGeom>
+          <a:solidFill>
+            <a:srgbClr val="FF6B35"/>
+          </a:solidFill>
+          <a:ln>
+            <a:noFill/>
+          </a:ln>
+        </p:spPr>
+        <p:style>
+          <a:lnRef idx="1">
+            <a:schemeClr val="accent1"/>
+          </a:lnRef>
+          <a:fillRef idx="3">
+            <a:schemeClr val="accent1"/>
+          </a:fillRef>
+          <a:effectRef idx="2">
+            <a:schemeClr val="accent1"/>
+          </a:effectRef>
+          <a:fontRef idx="minor">
+            <a:schemeClr val="lt1"/>
+          </a:fontRef>
+        </p:style>
+        <p:txBody>
+          <a:bodyPr rtlCol="0" anchor="ctr"/>
+          <a:lstStyle/>
+          <a:p>
+            <a:pPr algn="ctr"/>
+          </a:p>
+        </p:txBody>
+      </p:sp>
+      <p:sp>
+        <p:nvSpPr>
+          <p:cNvPr id="7" name="Rounded Rectangle 6"/>
+          <p:cNvSpPr/>
+          <p:nvPr/>
+        </p:nvSpPr>
+        <p:spPr>
+          <a:xfrm>
+            <a:off x="2551176" y="1490472"/>
+            <a:ext cx="7089343" cy="4745736"/>
+          </a:xfrm>
+          <a:prstGeom prst="roundRect">
+            <a:avLst/>
+          </a:prstGeom>
+          <a:solidFill>
+            <a:srgbClr val="FFFFFF"/>
+          </a:solidFill>
+          <a:ln>
+            <a:noFill/>
+          </a:ln>
+        </p:spPr>
+        <p:style>
+          <a:lnRef idx="1">
+            <a:schemeClr val="accent1"/>
+          </a:lnRef>
+          <a:fillRef idx="3">
+            <a:schemeClr val="accent1"/>
+          </a:fillRef>
+          <a:effectRef idx="2">
+            <a:schemeClr val="accent1"/>
+          </a:effectRef>
+          <a:fontRef idx="minor">
+            <a:schemeClr val="lt1"/>
+          </a:fontRef>
+        </p:style>
+        <p:txBody>
+          <a:bodyPr rtlCol="0" anchor="ctr"/>
+          <a:lstStyle/>
+          <a:p>
+            <a:pPr algn="ctr"/>
+          </a:p>
+        </p:txBody>
+      </p:sp>
+      <p:pic>
+        <p:nvPicPr>
+          <p:cNvPr id="8" name="Picture 7" descr="01_menu_page.png"/>
+          <p:cNvPicPr>
+            <a:picLocks noChangeAspect="1"/>
+          </p:cNvPicPr>
+          <p:nvPr/>
+        </p:nvPicPr>
+        <p:blipFill>
+          <a:blip r:embed="rId2"/>
+          <a:stretch>
+            <a:fillRect/>
+          </a:stretch>
+        </p:blipFill>
+        <p:spPr>
+          <a:xfrm>
+            <a:off x="2660904" y="1600200"/>
+            <a:ext cx="6869887" cy="4526280"/>
+          </a:xfrm>
+          <a:prstGeom prst="rect">
+            <a:avLst/>
+          </a:prstGeom>
+        </p:spPr>
+      </p:pic>
+      <p:sp>
+        <p:nvSpPr>
+          <p:cNvPr id="9" name="Rectangle 8"/>
+          <p:cNvSpPr/>
+          <p:nvPr/>
+        </p:nvSpPr>
+        <p:spPr>
+          <a:xfrm>
+            <a:off x="502920" y="6400800"/>
+            <a:ext cx="11201400" cy="17780"/>
+          </a:xfrm>
+          <a:prstGeom prst="rect">
+            <a:avLst/>
+          </a:prstGeom>
+          <a:solidFill>
+            <a:srgbClr val="DDE3E9"/>
+          </a:solidFill>
+          <a:ln>
+            <a:noFill/>
+          </a:ln>
+        </p:spPr>
+        <p:style>
+          <a:lnRef idx="1">
+            <a:schemeClr val="accent1"/>
+          </a:lnRef>
+          <a:fillRef idx="3">
+            <a:schemeClr val="accent1"/>
+          </a:fillRef>
+          <a:effectRef idx="2">
+            <a:schemeClr val="accent1"/>
+          </a:effectRef>
+          <a:fontRef idx="minor">
+            <a:schemeClr val="lt1"/>
+          </a:fontRef>
+        </p:style>
+        <p:txBody>
+          <a:bodyPr rtlCol="0" anchor="ctr"/>
+          <a:lstStyle/>
+          <a:p>
+            <a:pPr algn="ctr"/>
+          </a:p>
+        </p:txBody>
+      </p:sp>
+      <p:sp>
+        <p:nvSpPr>
+          <p:cNvPr id="10" name="TextBox 9"/>
+          <p:cNvSpPr txBox="1"/>
+          <p:nvPr/>
+        </p:nvSpPr>
+        <p:spPr>
+          <a:xfrm>
+            <a:off x="502920" y="6446520"/>
+            <a:ext cx="8229600" cy="320040"/>
+          </a:xfrm>
+          <a:prstGeom prst="rect">
+            <a:avLst/>
+          </a:prstGeom>
+          <a:noFill/>
+        </p:spPr>
+        <p:txBody>
+          <a:bodyPr wrap="none">
+            <a:spAutoFit/>
+          </a:bodyPr>
+          <a:lstStyle/>
+          <a:p>
+            <a:r>
+              <a:rPr sz="1000" b="0" i="0">
+                <a:solidFill>
+                  <a:srgbClr val="8A97A5"/>
+                </a:solidFill>
+                <a:latin typeface="Segoe UI"/>
+              </a:rPr>
+              <a:t>BistroSaaS  |  Restaurant Management System</a:t>
+            </a:r>
+          </a:p>
+        </p:txBody>
+      </p:sp>
+      <p:sp>
+        <p:nvSpPr>
+          <p:cNvPr id="11" name="TextBox 10"/>
+          <p:cNvSpPr txBox="1"/>
+          <p:nvPr/>
+        </p:nvSpPr>
+        <p:spPr>
+          <a:xfrm>
+            <a:off x="10607040" y="6446520"/>
+            <a:ext cx="1097280" cy="320040"/>
+          </a:xfrm>
+          <a:prstGeom prst="rect">
+            <a:avLst/>
+          </a:prstGeom>
+          <a:noFill/>
+        </p:spPr>
+        <p:txBody>
+          <a:bodyPr wrap="none">
+            <a:spAutoFit/>
+          </a:bodyPr>
+          <a:lstStyle/>
+          <a:p>
+            <a:pPr algn="r"/>
+            <a:r>
+              <a:rPr sz="1000" b="1" i="0">
+                <a:solidFill>
+                  <a:srgbClr val="8A97A5"/>
+                </a:solidFill>
+                <a:latin typeface="Segoe UI"/>
+              </a:rPr>
+              <a:t>21</a:t>
+            </a:r>
+          </a:p>
+        </p:txBody>
+      </p:sp>
+    </p:spTree>
+  </p:cSld>
+  <p:clrMapOvr>
+    <a:masterClrMapping/>
+  </p:clrMapOvr>
+</p:sld>
+</file>
+
+<file path=ppt/slides/slide22.xml><?xml version="1.0" encoding="utf-8"?>
+<p:sld xmlns:a="http://schemas.openxmlformats.org/drawingml/2006/main" xmlns:p="http://schemas.openxmlformats.org/presentationml/2006/main" xmlns:r="http://schemas.openxmlformats.org/officeDocument/2006/relationships">
+  <p:cSld>
+    <p:bg>
+      <p:bgPr>
+        <a:solidFill>
+          <a:srgbClr val="F5F7FA"/>
+        </a:solidFill>
+        <a:effectLst/>
+      </p:bgPr>
+    </p:bg>
+    <p:spTree>
+      <p:nvGrpSpPr>
+        <p:cNvPr id="1" name=""/>
+        <p:cNvGrpSpPr/>
+        <p:nvPr/>
+      </p:nvGrpSpPr>
+      <p:grpSpPr/>
+      <p:sp>
+        <p:nvSpPr>
+          <p:cNvPr id="2" name="Rectangle 1"/>
+          <p:cNvSpPr/>
+          <p:nvPr/>
+        </p:nvSpPr>
+        <p:spPr>
+          <a:xfrm>
+            <a:off x="0" y="0"/>
+            <a:ext cx="164592" cy="6858000"/>
+          </a:xfrm>
+          <a:prstGeom prst="rect">
+            <a:avLst/>
+          </a:prstGeom>
+          <a:solidFill>
+            <a:srgbClr val="FF6B35"/>
+          </a:solidFill>
+          <a:ln>
+            <a:noFill/>
+          </a:ln>
+        </p:spPr>
+        <p:style>
+          <a:lnRef idx="1">
+            <a:schemeClr val="accent1"/>
+          </a:lnRef>
+          <a:fillRef idx="3">
+            <a:schemeClr val="accent1"/>
+          </a:fillRef>
+          <a:effectRef idx="2">
+            <a:schemeClr val="accent1"/>
+          </a:effectRef>
+          <a:fontRef idx="minor">
+            <a:schemeClr val="lt1"/>
+          </a:fontRef>
+        </p:style>
+        <p:txBody>
+          <a:bodyPr rtlCol="0" anchor="ctr"/>
+          <a:lstStyle/>
+          <a:p>
+            <a:pPr algn="ctr"/>
+          </a:p>
+        </p:txBody>
+      </p:sp>
+      <p:sp>
+        <p:nvSpPr>
+          <p:cNvPr id="3" name="Oval 2"/>
+          <p:cNvSpPr/>
+          <p:nvPr/>
+        </p:nvSpPr>
+        <p:spPr>
+          <a:xfrm>
+            <a:off x="10561320" y="411480"/>
+            <a:ext cx="1143000" cy="1143000"/>
+          </a:xfrm>
+          <a:prstGeom prst="ellipse">
+            <a:avLst/>
+          </a:prstGeom>
+          <a:solidFill>
+            <a:srgbClr val="FDE8DF"/>
+          </a:solidFill>
+          <a:ln>
+            <a:noFill/>
+          </a:ln>
+        </p:spPr>
+        <p:style>
+          <a:lnRef idx="1">
+            <a:schemeClr val="accent1"/>
+          </a:lnRef>
+          <a:fillRef idx="3">
+            <a:schemeClr val="accent1"/>
+          </a:fillRef>
+          <a:effectRef idx="2">
+            <a:schemeClr val="accent1"/>
+          </a:effectRef>
+          <a:fontRef idx="minor">
+            <a:schemeClr val="lt1"/>
+          </a:fontRef>
+        </p:style>
+        <p:txBody>
+          <a:bodyPr rtlCol="0" anchor="ctr"/>
+          <a:lstStyle/>
+          <a:p>
+            <a:pPr algn="ctr"/>
+          </a:p>
+        </p:txBody>
+      </p:sp>
+      <p:sp>
+        <p:nvSpPr>
+          <p:cNvPr id="4" name="TextBox 3"/>
+          <p:cNvSpPr txBox="1"/>
+          <p:nvPr/>
+        </p:nvSpPr>
+        <p:spPr>
+          <a:xfrm>
+            <a:off x="10561320" y="457200"/>
+            <a:ext cx="1143000" cy="1051560"/>
+          </a:xfrm>
+          <a:prstGeom prst="rect">
+            <a:avLst/>
+          </a:prstGeom>
+          <a:noFill/>
+        </p:spPr>
+        <p:txBody>
+          <a:bodyPr wrap="none">
+            <a:spAutoFit/>
+          </a:bodyPr>
+          <a:lstStyle/>
+          <a:p>
+            <a:pPr algn="ctr"/>
+            <a:r>
+              <a:rPr sz="3600" b="0" i="0">
+                <a:solidFill>
+                  <a:srgbClr val="243140"/>
+                </a:solidFill>
+                <a:latin typeface="Segoe UI"/>
+              </a:rPr>
+              <a:t>📸</a:t>
+            </a:r>
+          </a:p>
+        </p:txBody>
+      </p:sp>
+      <p:sp>
+        <p:nvSpPr>
+          <p:cNvPr id="5" name="TextBox 4"/>
+          <p:cNvSpPr txBox="1"/>
+          <p:nvPr/>
+        </p:nvSpPr>
+        <p:spPr>
+          <a:xfrm>
+            <a:off x="502920" y="411480"/>
+            <a:ext cx="9692640" cy="777240"/>
+          </a:xfrm>
+          <a:prstGeom prst="rect">
+            <a:avLst/>
+          </a:prstGeom>
+          <a:noFill/>
+        </p:spPr>
+        <p:txBody>
+          <a:bodyPr wrap="none">
+            <a:spAutoFit/>
+          </a:bodyPr>
+          <a:lstStyle/>
+          <a:p>
+            <a:r>
+              <a:rPr sz="3200" b="1" i="0">
+                <a:solidFill>
+                  <a:srgbClr val="1E2A38"/>
+                </a:solidFill>
+                <a:latin typeface="Segoe UI"/>
+              </a:rPr>
+              <a:t>Registration</a:t>
+            </a:r>
+          </a:p>
+        </p:txBody>
+      </p:sp>
+      <p:sp>
+        <p:nvSpPr>
+          <p:cNvPr id="6" name="Rounded Rectangle 5"/>
+          <p:cNvSpPr/>
+          <p:nvPr/>
+        </p:nvSpPr>
+        <p:spPr>
+          <a:xfrm>
+            <a:off x="548640" y="1170432"/>
+            <a:ext cx="2286000" cy="82296"/>
+          </a:xfrm>
+          <a:prstGeom prst="roundRect">
+            <a:avLst/>
+          </a:prstGeom>
+          <a:solidFill>
+            <a:srgbClr val="FF6B35"/>
+          </a:solidFill>
+          <a:ln>
+            <a:noFill/>
+          </a:ln>
+        </p:spPr>
+        <p:style>
+          <a:lnRef idx="1">
+            <a:schemeClr val="accent1"/>
+          </a:lnRef>
+          <a:fillRef idx="3">
+            <a:schemeClr val="accent1"/>
+          </a:fillRef>
+          <a:effectRef idx="2">
+            <a:schemeClr val="accent1"/>
+          </a:effectRef>
+          <a:fontRef idx="minor">
+            <a:schemeClr val="lt1"/>
+          </a:fontRef>
+        </p:style>
+        <p:txBody>
+          <a:bodyPr rtlCol="0" anchor="ctr"/>
+          <a:lstStyle/>
+          <a:p>
+            <a:pPr algn="ctr"/>
+          </a:p>
+        </p:txBody>
+      </p:sp>
+      <p:sp>
+        <p:nvSpPr>
+          <p:cNvPr id="7" name="Rounded Rectangle 6"/>
+          <p:cNvSpPr/>
+          <p:nvPr/>
+        </p:nvSpPr>
+        <p:spPr>
+          <a:xfrm>
+            <a:off x="2665551" y="1490472"/>
+            <a:ext cx="6860592" cy="4745736"/>
+          </a:xfrm>
+          <a:prstGeom prst="roundRect">
+            <a:avLst/>
+          </a:prstGeom>
+          <a:solidFill>
+            <a:srgbClr val="FFFFFF"/>
+          </a:solidFill>
+          <a:ln>
+            <a:noFill/>
+          </a:ln>
+        </p:spPr>
+        <p:style>
+          <a:lnRef idx="1">
+            <a:schemeClr val="accent1"/>
+          </a:lnRef>
+          <a:fillRef idx="3">
+            <a:schemeClr val="accent1"/>
+          </a:fillRef>
+          <a:effectRef idx="2">
+            <a:schemeClr val="accent1"/>
+          </a:effectRef>
+          <a:fontRef idx="minor">
+            <a:schemeClr val="lt1"/>
+          </a:fontRef>
+        </p:style>
+        <p:txBody>
+          <a:bodyPr rtlCol="0" anchor="ctr"/>
+          <a:lstStyle/>
+          <a:p>
+            <a:pPr algn="ctr"/>
+          </a:p>
+        </p:txBody>
+      </p:sp>
+      <p:pic>
+        <p:nvPicPr>
+          <p:cNvPr id="8" name="Picture 7" descr="02_register.png"/>
+          <p:cNvPicPr>
+            <a:picLocks noChangeAspect="1"/>
+          </p:cNvPicPr>
+          <p:nvPr/>
+        </p:nvPicPr>
+        <p:blipFill>
+          <a:blip r:embed="rId2"/>
+          <a:stretch>
+            <a:fillRect/>
+          </a:stretch>
+        </p:blipFill>
+        <p:spPr>
+          <a:xfrm>
+            <a:off x="2775279" y="1600200"/>
+            <a:ext cx="6641136" cy="4526280"/>
+          </a:xfrm>
+          <a:prstGeom prst="rect">
+            <a:avLst/>
+          </a:prstGeom>
+        </p:spPr>
+      </p:pic>
+      <p:sp>
+        <p:nvSpPr>
+          <p:cNvPr id="9" name="Rectangle 8"/>
+          <p:cNvSpPr/>
+          <p:nvPr/>
+        </p:nvSpPr>
+        <p:spPr>
+          <a:xfrm>
+            <a:off x="502920" y="6400800"/>
+            <a:ext cx="11201400" cy="17780"/>
+          </a:xfrm>
+          <a:prstGeom prst="rect">
+            <a:avLst/>
+          </a:prstGeom>
+          <a:solidFill>
+            <a:srgbClr val="DDE3E9"/>
+          </a:solidFill>
+          <a:ln>
+            <a:noFill/>
+          </a:ln>
+        </p:spPr>
+        <p:style>
+          <a:lnRef idx="1">
+            <a:schemeClr val="accent1"/>
+          </a:lnRef>
+          <a:fillRef idx="3">
+            <a:schemeClr val="accent1"/>
+          </a:fillRef>
+          <a:effectRef idx="2">
+            <a:schemeClr val="accent1"/>
+          </a:effectRef>
+          <a:fontRef idx="minor">
+            <a:schemeClr val="lt1"/>
+          </a:fontRef>
+        </p:style>
+        <p:txBody>
+          <a:bodyPr rtlCol="0" anchor="ctr"/>
+          <a:lstStyle/>
+          <a:p>
+            <a:pPr algn="ctr"/>
+          </a:p>
+        </p:txBody>
+      </p:sp>
+      <p:sp>
+        <p:nvSpPr>
+          <p:cNvPr id="10" name="TextBox 9"/>
+          <p:cNvSpPr txBox="1"/>
+          <p:nvPr/>
+        </p:nvSpPr>
+        <p:spPr>
+          <a:xfrm>
+            <a:off x="502920" y="6446520"/>
+            <a:ext cx="8229600" cy="320040"/>
+          </a:xfrm>
+          <a:prstGeom prst="rect">
+            <a:avLst/>
+          </a:prstGeom>
+          <a:noFill/>
+        </p:spPr>
+        <p:txBody>
+          <a:bodyPr wrap="none">
+            <a:spAutoFit/>
+          </a:bodyPr>
+          <a:lstStyle/>
+          <a:p>
+            <a:r>
+              <a:rPr sz="1000" b="0" i="0">
+                <a:solidFill>
+                  <a:srgbClr val="8A97A5"/>
+                </a:solidFill>
+                <a:latin typeface="Segoe UI"/>
+              </a:rPr>
+              <a:t>BistroSaaS  |  Restaurant Management System</a:t>
+            </a:r>
+          </a:p>
+        </p:txBody>
+      </p:sp>
+      <p:sp>
+        <p:nvSpPr>
+          <p:cNvPr id="11" name="TextBox 10"/>
+          <p:cNvSpPr txBox="1"/>
+          <p:nvPr/>
+        </p:nvSpPr>
+        <p:spPr>
+          <a:xfrm>
+            <a:off x="10607040" y="6446520"/>
+            <a:ext cx="1097280" cy="320040"/>
+          </a:xfrm>
+          <a:prstGeom prst="rect">
+            <a:avLst/>
+          </a:prstGeom>
+          <a:noFill/>
+        </p:spPr>
+        <p:txBody>
+          <a:bodyPr wrap="none">
+            <a:spAutoFit/>
+          </a:bodyPr>
+          <a:lstStyle/>
+          <a:p>
+            <a:pPr algn="r"/>
+            <a:r>
+              <a:rPr sz="1000" b="1" i="0">
+                <a:solidFill>
+                  <a:srgbClr val="8A97A5"/>
+                </a:solidFill>
+                <a:latin typeface="Segoe UI"/>
+              </a:rPr>
+              <a:t>22</a:t>
+            </a:r>
+          </a:p>
+        </p:txBody>
+      </p:sp>
+    </p:spTree>
+  </p:cSld>
+  <p:clrMapOvr>
+    <a:masterClrMapping/>
+  </p:clrMapOvr>
+</p:sld>
+</file>
+
+<file path=ppt/slides/slide23.xml><?xml version="1.0" encoding="utf-8"?>
+<p:sld xmlns:a="http://schemas.openxmlformats.org/drawingml/2006/main" xmlns:p="http://schemas.openxmlformats.org/presentationml/2006/main" xmlns:r="http://schemas.openxmlformats.org/officeDocument/2006/relationships">
+  <p:cSld>
+    <p:bg>
+      <p:bgPr>
+        <a:solidFill>
+          <a:srgbClr val="F5F7FA"/>
+        </a:solidFill>
+        <a:effectLst/>
+      </p:bgPr>
+    </p:bg>
+    <p:spTree>
+      <p:nvGrpSpPr>
+        <p:cNvPr id="1" name=""/>
+        <p:cNvGrpSpPr/>
+        <p:nvPr/>
+      </p:nvGrpSpPr>
+      <p:grpSpPr/>
+      <p:sp>
+        <p:nvSpPr>
+          <p:cNvPr id="2" name="Rectangle 1"/>
+          <p:cNvSpPr/>
+          <p:nvPr/>
+        </p:nvSpPr>
+        <p:spPr>
+          <a:xfrm>
+            <a:off x="0" y="0"/>
+            <a:ext cx="164592" cy="6858000"/>
+          </a:xfrm>
+          <a:prstGeom prst="rect">
+            <a:avLst/>
+          </a:prstGeom>
+          <a:solidFill>
+            <a:srgbClr val="FF6B35"/>
+          </a:solidFill>
+          <a:ln>
+            <a:noFill/>
+          </a:ln>
+        </p:spPr>
+        <p:style>
+          <a:lnRef idx="1">
+            <a:schemeClr val="accent1"/>
+          </a:lnRef>
+          <a:fillRef idx="3">
+            <a:schemeClr val="accent1"/>
+          </a:fillRef>
+          <a:effectRef idx="2">
+            <a:schemeClr val="accent1"/>
+          </a:effectRef>
+          <a:fontRef idx="minor">
+            <a:schemeClr val="lt1"/>
+          </a:fontRef>
+        </p:style>
+        <p:txBody>
+          <a:bodyPr rtlCol="0" anchor="ctr"/>
+          <a:lstStyle/>
+          <a:p>
+            <a:pPr algn="ctr"/>
+          </a:p>
+        </p:txBody>
+      </p:sp>
+      <p:sp>
+        <p:nvSpPr>
+          <p:cNvPr id="3" name="Oval 2"/>
+          <p:cNvSpPr/>
+          <p:nvPr/>
+        </p:nvSpPr>
+        <p:spPr>
+          <a:xfrm>
+            <a:off x="10561320" y="411480"/>
+            <a:ext cx="1143000" cy="1143000"/>
+          </a:xfrm>
+          <a:prstGeom prst="ellipse">
+            <a:avLst/>
+          </a:prstGeom>
+          <a:solidFill>
+            <a:srgbClr val="FDE8DF"/>
+          </a:solidFill>
+          <a:ln>
+            <a:noFill/>
+          </a:ln>
+        </p:spPr>
+        <p:style>
+          <a:lnRef idx="1">
+            <a:schemeClr val="accent1"/>
+          </a:lnRef>
+          <a:fillRef idx="3">
+            <a:schemeClr val="accent1"/>
+          </a:fillRef>
+          <a:effectRef idx="2">
+            <a:schemeClr val="accent1"/>
+          </a:effectRef>
+          <a:fontRef idx="minor">
+            <a:schemeClr val="lt1"/>
+          </a:fontRef>
+        </p:style>
+        <p:txBody>
+          <a:bodyPr rtlCol="0" anchor="ctr"/>
+          <a:lstStyle/>
+          <a:p>
+            <a:pPr algn="ctr"/>
+          </a:p>
+        </p:txBody>
+      </p:sp>
+      <p:sp>
+        <p:nvSpPr>
+          <p:cNvPr id="4" name="TextBox 3"/>
+          <p:cNvSpPr txBox="1"/>
+          <p:nvPr/>
+        </p:nvSpPr>
+        <p:spPr>
+          <a:xfrm>
+            <a:off x="10561320" y="457200"/>
+            <a:ext cx="1143000" cy="1051560"/>
+          </a:xfrm>
+          <a:prstGeom prst="rect">
+            <a:avLst/>
+          </a:prstGeom>
+          <a:noFill/>
+        </p:spPr>
+        <p:txBody>
+          <a:bodyPr wrap="none">
+            <a:spAutoFit/>
+          </a:bodyPr>
+          <a:lstStyle/>
+          <a:p>
+            <a:pPr algn="ctr"/>
+            <a:r>
+              <a:rPr sz="3600" b="0" i="0">
+                <a:solidFill>
+                  <a:srgbClr val="243140"/>
+                </a:solidFill>
+                <a:latin typeface="Segoe UI"/>
+              </a:rPr>
+              <a:t>📸</a:t>
+            </a:r>
+          </a:p>
+        </p:txBody>
+      </p:sp>
+      <p:sp>
+        <p:nvSpPr>
+          <p:cNvPr id="5" name="TextBox 4"/>
+          <p:cNvSpPr txBox="1"/>
+          <p:nvPr/>
+        </p:nvSpPr>
+        <p:spPr>
+          <a:xfrm>
+            <a:off x="502920" y="411480"/>
+            <a:ext cx="9692640" cy="777240"/>
+          </a:xfrm>
+          <a:prstGeom prst="rect">
+            <a:avLst/>
+          </a:prstGeom>
+          <a:noFill/>
+        </p:spPr>
+        <p:txBody>
+          <a:bodyPr wrap="none">
+            <a:spAutoFit/>
+          </a:bodyPr>
+          <a:lstStyle/>
+          <a:p>
+            <a:r>
+              <a:rPr sz="3200" b="1" i="0">
+                <a:solidFill>
+                  <a:srgbClr val="1E2A38"/>
+                </a:solidFill>
+                <a:latin typeface="Segoe UI"/>
+              </a:rPr>
+              <a:t>Login</a:t>
+            </a:r>
+          </a:p>
+        </p:txBody>
+      </p:sp>
+      <p:sp>
+        <p:nvSpPr>
+          <p:cNvPr id="6" name="Rounded Rectangle 5"/>
+          <p:cNvSpPr/>
+          <p:nvPr/>
+        </p:nvSpPr>
+        <p:spPr>
+          <a:xfrm>
+            <a:off x="548640" y="1170432"/>
+            <a:ext cx="2286000" cy="82296"/>
+          </a:xfrm>
+          <a:prstGeom prst="roundRect">
+            <a:avLst/>
+          </a:prstGeom>
+          <a:solidFill>
+            <a:srgbClr val="FF6B35"/>
+          </a:solidFill>
+          <a:ln>
+            <a:noFill/>
+          </a:ln>
+        </p:spPr>
+        <p:style>
+          <a:lnRef idx="1">
+            <a:schemeClr val="accent1"/>
+          </a:lnRef>
+          <a:fillRef idx="3">
+            <a:schemeClr val="accent1"/>
+          </a:fillRef>
+          <a:effectRef idx="2">
+            <a:schemeClr val="accent1"/>
+          </a:effectRef>
+          <a:fontRef idx="minor">
+            <a:schemeClr val="lt1"/>
+          </a:fontRef>
+        </p:style>
+        <p:txBody>
+          <a:bodyPr rtlCol="0" anchor="ctr"/>
+          <a:lstStyle/>
+          <a:p>
+            <a:pPr algn="ctr"/>
+          </a:p>
+        </p:txBody>
+      </p:sp>
+      <p:sp>
+        <p:nvSpPr>
+          <p:cNvPr id="7" name="Rounded Rectangle 6"/>
+          <p:cNvSpPr/>
+          <p:nvPr/>
+        </p:nvSpPr>
+        <p:spPr>
+          <a:xfrm>
+            <a:off x="2551176" y="1490472"/>
+            <a:ext cx="7089343" cy="4745736"/>
+          </a:xfrm>
+          <a:prstGeom prst="roundRect">
+            <a:avLst/>
+          </a:prstGeom>
+          <a:solidFill>
+            <a:srgbClr val="FFFFFF"/>
+          </a:solidFill>
+          <a:ln>
+            <a:noFill/>
+          </a:ln>
+        </p:spPr>
+        <p:style>
+          <a:lnRef idx="1">
+            <a:schemeClr val="accent1"/>
+          </a:lnRef>
+          <a:fillRef idx="3">
+            <a:schemeClr val="accent1"/>
+          </a:fillRef>
+          <a:effectRef idx="2">
+            <a:schemeClr val="accent1"/>
+          </a:effectRef>
+          <a:fontRef idx="minor">
+            <a:schemeClr val="lt1"/>
+          </a:fontRef>
+        </p:style>
+        <p:txBody>
+          <a:bodyPr rtlCol="0" anchor="ctr"/>
+          <a:lstStyle/>
+          <a:p>
+            <a:pPr algn="ctr"/>
+          </a:p>
+        </p:txBody>
+      </p:sp>
+      <p:pic>
+        <p:nvPicPr>
+          <p:cNvPr id="8" name="Picture 7" descr="03_login.png"/>
+          <p:cNvPicPr>
+            <a:picLocks noChangeAspect="1"/>
+          </p:cNvPicPr>
+          <p:nvPr/>
+        </p:nvPicPr>
+        <p:blipFill>
+          <a:blip r:embed="rId2"/>
+          <a:stretch>
+            <a:fillRect/>
+          </a:stretch>
+        </p:blipFill>
+        <p:spPr>
+          <a:xfrm>
+            <a:off x="2660904" y="1600200"/>
+            <a:ext cx="6869887" cy="4526280"/>
+          </a:xfrm>
+          <a:prstGeom prst="rect">
+            <a:avLst/>
+          </a:prstGeom>
+        </p:spPr>
+      </p:pic>
+      <p:sp>
+        <p:nvSpPr>
+          <p:cNvPr id="9" name="Rectangle 8"/>
+          <p:cNvSpPr/>
+          <p:nvPr/>
+        </p:nvSpPr>
+        <p:spPr>
+          <a:xfrm>
+            <a:off x="502920" y="6400800"/>
+            <a:ext cx="11201400" cy="17780"/>
+          </a:xfrm>
+          <a:prstGeom prst="rect">
+            <a:avLst/>
+          </a:prstGeom>
+          <a:solidFill>
+            <a:srgbClr val="DDE3E9"/>
+          </a:solidFill>
+          <a:ln>
+            <a:noFill/>
+          </a:ln>
+        </p:spPr>
+        <p:style>
+          <a:lnRef idx="1">
+            <a:schemeClr val="accent1"/>
+          </a:lnRef>
+          <a:fillRef idx="3">
+            <a:schemeClr val="accent1"/>
+          </a:fillRef>
+          <a:effectRef idx="2">
+            <a:schemeClr val="accent1"/>
+          </a:effectRef>
+          <a:fontRef idx="minor">
+            <a:schemeClr val="lt1"/>
+          </a:fontRef>
+        </p:style>
+        <p:txBody>
+          <a:bodyPr rtlCol="0" anchor="ctr"/>
+          <a:lstStyle/>
+          <a:p>
+            <a:pPr algn="ctr"/>
+          </a:p>
+        </p:txBody>
+      </p:sp>
+      <p:sp>
+        <p:nvSpPr>
+          <p:cNvPr id="10" name="TextBox 9"/>
+          <p:cNvSpPr txBox="1"/>
+          <p:nvPr/>
+        </p:nvSpPr>
+        <p:spPr>
+          <a:xfrm>
+            <a:off x="502920" y="6446520"/>
+            <a:ext cx="8229600" cy="320040"/>
+          </a:xfrm>
+          <a:prstGeom prst="rect">
+            <a:avLst/>
+          </a:prstGeom>
+          <a:noFill/>
+        </p:spPr>
+        <p:txBody>
+          <a:bodyPr wrap="none">
+            <a:spAutoFit/>
+          </a:bodyPr>
+          <a:lstStyle/>
+          <a:p>
+            <a:r>
+              <a:rPr sz="1000" b="0" i="0">
+                <a:solidFill>
+                  <a:srgbClr val="8A97A5"/>
+                </a:solidFill>
+                <a:latin typeface="Segoe UI"/>
+              </a:rPr>
+              <a:t>BistroSaaS  |  Restaurant Management System</a:t>
+            </a:r>
+          </a:p>
+        </p:txBody>
+      </p:sp>
+      <p:sp>
+        <p:nvSpPr>
+          <p:cNvPr id="11" name="TextBox 10"/>
+          <p:cNvSpPr txBox="1"/>
+          <p:nvPr/>
+        </p:nvSpPr>
+        <p:spPr>
+          <a:xfrm>
+            <a:off x="10607040" y="6446520"/>
+            <a:ext cx="1097280" cy="320040"/>
+          </a:xfrm>
+          <a:prstGeom prst="rect">
+            <a:avLst/>
+          </a:prstGeom>
+          <a:noFill/>
+        </p:spPr>
+        <p:txBody>
+          <a:bodyPr wrap="none">
+            <a:spAutoFit/>
+          </a:bodyPr>
+          <a:lstStyle/>
+          <a:p>
+            <a:pPr algn="r"/>
+            <a:r>
+              <a:rPr sz="1000" b="1" i="0">
+                <a:solidFill>
+                  <a:srgbClr val="8A97A5"/>
+                </a:solidFill>
+                <a:latin typeface="Segoe UI"/>
+              </a:rPr>
+              <a:t>23</a:t>
+            </a:r>
+          </a:p>
+        </p:txBody>
+      </p:sp>
+    </p:spTree>
+  </p:cSld>
+  <p:clrMapOvr>
+    <a:masterClrMapping/>
+  </p:clrMapOvr>
+</p:sld>
+</file>
+
+<file path=ppt/slides/slide24.xml><?xml version="1.0" encoding="utf-8"?>
+<p:sld xmlns:a="http://schemas.openxmlformats.org/drawingml/2006/main" xmlns:p="http://schemas.openxmlformats.org/presentationml/2006/main" xmlns:r="http://schemas.openxmlformats.org/officeDocument/2006/relationships">
+  <p:cSld>
+    <p:bg>
+      <p:bgPr>
+        <a:solidFill>
+          <a:srgbClr val="F5F7FA"/>
+        </a:solidFill>
+        <a:effectLst/>
+      </p:bgPr>
+    </p:bg>
+    <p:spTree>
+      <p:nvGrpSpPr>
+        <p:cNvPr id="1" name=""/>
+        <p:cNvGrpSpPr/>
+        <p:nvPr/>
+      </p:nvGrpSpPr>
+      <p:grpSpPr/>
+      <p:sp>
+        <p:nvSpPr>
+          <p:cNvPr id="2" name="Rectangle 1"/>
+          <p:cNvSpPr/>
+          <p:nvPr/>
+        </p:nvSpPr>
+        <p:spPr>
+          <a:xfrm>
+            <a:off x="0" y="0"/>
+            <a:ext cx="164592" cy="6858000"/>
+          </a:xfrm>
+          <a:prstGeom prst="rect">
+            <a:avLst/>
+          </a:prstGeom>
+          <a:solidFill>
+            <a:srgbClr val="FF6B35"/>
+          </a:solidFill>
+          <a:ln>
+            <a:noFill/>
+          </a:ln>
+        </p:spPr>
+        <p:style>
+          <a:lnRef idx="1">
+            <a:schemeClr val="accent1"/>
+          </a:lnRef>
+          <a:fillRef idx="3">
+            <a:schemeClr val="accent1"/>
+          </a:fillRef>
+          <a:effectRef idx="2">
+            <a:schemeClr val="accent1"/>
+          </a:effectRef>
+          <a:fontRef idx="minor">
+            <a:schemeClr val="lt1"/>
+          </a:fontRef>
+        </p:style>
+        <p:txBody>
+          <a:bodyPr rtlCol="0" anchor="ctr"/>
+          <a:lstStyle/>
+          <a:p>
+            <a:pPr algn="ctr"/>
+          </a:p>
+        </p:txBody>
+      </p:sp>
+      <p:sp>
+        <p:nvSpPr>
+          <p:cNvPr id="3" name="Oval 2"/>
+          <p:cNvSpPr/>
+          <p:nvPr/>
+        </p:nvSpPr>
+        <p:spPr>
+          <a:xfrm>
+            <a:off x="10561320" y="411480"/>
+            <a:ext cx="1143000" cy="1143000"/>
+          </a:xfrm>
+          <a:prstGeom prst="ellipse">
+            <a:avLst/>
+          </a:prstGeom>
+          <a:solidFill>
+            <a:srgbClr val="FDE8DF"/>
+          </a:solidFill>
+          <a:ln>
+            <a:noFill/>
+          </a:ln>
+        </p:spPr>
+        <p:style>
+          <a:lnRef idx="1">
+            <a:schemeClr val="accent1"/>
+          </a:lnRef>
+          <a:fillRef idx="3">
+            <a:schemeClr val="accent1"/>
+          </a:fillRef>
+          <a:effectRef idx="2">
+            <a:schemeClr val="accent1"/>
+          </a:effectRef>
+          <a:fontRef idx="minor">
+            <a:schemeClr val="lt1"/>
+          </a:fontRef>
+        </p:style>
+        <p:txBody>
+          <a:bodyPr rtlCol="0" anchor="ctr"/>
+          <a:lstStyle/>
+          <a:p>
+            <a:pPr algn="ctr"/>
+          </a:p>
+        </p:txBody>
+      </p:sp>
+      <p:sp>
+        <p:nvSpPr>
+          <p:cNvPr id="4" name="TextBox 3"/>
+          <p:cNvSpPr txBox="1"/>
+          <p:nvPr/>
+        </p:nvSpPr>
+        <p:spPr>
+          <a:xfrm>
+            <a:off x="10561320" y="457200"/>
+            <a:ext cx="1143000" cy="1051560"/>
+          </a:xfrm>
+          <a:prstGeom prst="rect">
+            <a:avLst/>
+          </a:prstGeom>
+          <a:noFill/>
+        </p:spPr>
+        <p:txBody>
+          <a:bodyPr wrap="none">
+            <a:spAutoFit/>
+          </a:bodyPr>
+          <a:lstStyle/>
+          <a:p>
+            <a:pPr algn="ctr"/>
+            <a:r>
+              <a:rPr sz="3600" b="0" i="0">
+                <a:solidFill>
+                  <a:srgbClr val="243140"/>
+                </a:solidFill>
+                <a:latin typeface="Segoe UI"/>
+              </a:rPr>
+              <a:t>📸</a:t>
+            </a:r>
+          </a:p>
+        </p:txBody>
+      </p:sp>
+      <p:sp>
+        <p:nvSpPr>
+          <p:cNvPr id="5" name="TextBox 4"/>
+          <p:cNvSpPr txBox="1"/>
+          <p:nvPr/>
+        </p:nvSpPr>
+        <p:spPr>
+          <a:xfrm>
+            <a:off x="502920" y="411480"/>
+            <a:ext cx="9692640" cy="777240"/>
+          </a:xfrm>
+          <a:prstGeom prst="rect">
+            <a:avLst/>
+          </a:prstGeom>
+          <a:noFill/>
+        </p:spPr>
+        <p:txBody>
+          <a:bodyPr wrap="none">
+            <a:spAutoFit/>
+          </a:bodyPr>
+          <a:lstStyle/>
+          <a:p>
+            <a:r>
+              <a:rPr sz="3200" b="1" i="0">
+                <a:solidFill>
+                  <a:srgbClr val="1E2A38"/>
+                </a:solidFill>
+                <a:latin typeface="Segoe UI"/>
+              </a:rPr>
+              <a:t>Menu Item Detail</a:t>
+            </a:r>
+          </a:p>
+        </p:txBody>
+      </p:sp>
+      <p:sp>
+        <p:nvSpPr>
+          <p:cNvPr id="6" name="Rounded Rectangle 5"/>
+          <p:cNvSpPr/>
+          <p:nvPr/>
+        </p:nvSpPr>
+        <p:spPr>
+          <a:xfrm>
+            <a:off x="548640" y="1170432"/>
+            <a:ext cx="2286000" cy="82296"/>
+          </a:xfrm>
+          <a:prstGeom prst="roundRect">
+            <a:avLst/>
+          </a:prstGeom>
+          <a:solidFill>
+            <a:srgbClr val="FF6B35"/>
+          </a:solidFill>
+          <a:ln>
+            <a:noFill/>
+          </a:ln>
+        </p:spPr>
+        <p:style>
+          <a:lnRef idx="1">
+            <a:schemeClr val="accent1"/>
+          </a:lnRef>
+          <a:fillRef idx="3">
+            <a:schemeClr val="accent1"/>
+          </a:fillRef>
+          <a:effectRef idx="2">
+            <a:schemeClr val="accent1"/>
+          </a:effectRef>
+          <a:fontRef idx="minor">
+            <a:schemeClr val="lt1"/>
+          </a:fontRef>
+        </p:style>
+        <p:txBody>
+          <a:bodyPr rtlCol="0" anchor="ctr"/>
+          <a:lstStyle/>
+          <a:p>
+            <a:pPr algn="ctr"/>
+          </a:p>
+        </p:txBody>
+      </p:sp>
+      <p:sp>
+        <p:nvSpPr>
+          <p:cNvPr id="7" name="Rounded Rectangle 6"/>
+          <p:cNvSpPr/>
+          <p:nvPr/>
+        </p:nvSpPr>
+        <p:spPr>
+          <a:xfrm>
+            <a:off x="2551176" y="1490472"/>
+            <a:ext cx="7089343" cy="4745736"/>
+          </a:xfrm>
+          <a:prstGeom prst="roundRect">
+            <a:avLst/>
+          </a:prstGeom>
+          <a:solidFill>
+            <a:srgbClr val="FFFFFF"/>
+          </a:solidFill>
+          <a:ln>
+            <a:noFill/>
+          </a:ln>
+        </p:spPr>
+        <p:style>
+          <a:lnRef idx="1">
+            <a:schemeClr val="accent1"/>
+          </a:lnRef>
+          <a:fillRef idx="3">
+            <a:schemeClr val="accent1"/>
+          </a:fillRef>
+          <a:effectRef idx="2">
+            <a:schemeClr val="accent1"/>
+          </a:effectRef>
+          <a:fontRef idx="minor">
+            <a:schemeClr val="lt1"/>
+          </a:fontRef>
+        </p:style>
+        <p:txBody>
+          <a:bodyPr rtlCol="0" anchor="ctr"/>
+          <a:lstStyle/>
+          <a:p>
+            <a:pPr algn="ctr"/>
+          </a:p>
+        </p:txBody>
+      </p:sp>
+      <p:pic>
+        <p:nvPicPr>
+          <p:cNvPr id="8" name="Picture 7" descr="04_item_detail.png"/>
+          <p:cNvPicPr>
+            <a:picLocks noChangeAspect="1"/>
+          </p:cNvPicPr>
+          <p:nvPr/>
+        </p:nvPicPr>
+        <p:blipFill>
+          <a:blip r:embed="rId2"/>
+          <a:stretch>
+            <a:fillRect/>
+          </a:stretch>
+        </p:blipFill>
+        <p:spPr>
+          <a:xfrm>
+            <a:off x="2660904" y="1600200"/>
+            <a:ext cx="6869887" cy="4526280"/>
+          </a:xfrm>
+          <a:prstGeom prst="rect">
+            <a:avLst/>
+          </a:prstGeom>
+        </p:spPr>
+      </p:pic>
+      <p:sp>
+        <p:nvSpPr>
+          <p:cNvPr id="9" name="Rectangle 8"/>
+          <p:cNvSpPr/>
+          <p:nvPr/>
+        </p:nvSpPr>
+        <p:spPr>
+          <a:xfrm>
+            <a:off x="502920" y="6400800"/>
+            <a:ext cx="11201400" cy="17780"/>
+          </a:xfrm>
+          <a:prstGeom prst="rect">
+            <a:avLst/>
+          </a:prstGeom>
+          <a:solidFill>
+            <a:srgbClr val="DDE3E9"/>
+          </a:solidFill>
+          <a:ln>
+            <a:noFill/>
+          </a:ln>
+        </p:spPr>
+        <p:style>
+          <a:lnRef idx="1">
+            <a:schemeClr val="accent1"/>
+          </a:lnRef>
+          <a:fillRef idx="3">
+            <a:schemeClr val="accent1"/>
+          </a:fillRef>
+          <a:effectRef idx="2">
+            <a:schemeClr val="accent1"/>
+          </a:effectRef>
+          <a:fontRef idx="minor">
+            <a:schemeClr val="lt1"/>
+          </a:fontRef>
+        </p:style>
+        <p:txBody>
+          <a:bodyPr rtlCol="0" anchor="ctr"/>
+          <a:lstStyle/>
+          <a:p>
+            <a:pPr algn="ctr"/>
+          </a:p>
+        </p:txBody>
+      </p:sp>
+      <p:sp>
+        <p:nvSpPr>
+          <p:cNvPr id="10" name="TextBox 9"/>
+          <p:cNvSpPr txBox="1"/>
+          <p:nvPr/>
+        </p:nvSpPr>
+        <p:spPr>
+          <a:xfrm>
+            <a:off x="502920" y="6446520"/>
+            <a:ext cx="8229600" cy="320040"/>
+          </a:xfrm>
+          <a:prstGeom prst="rect">
+            <a:avLst/>
+          </a:prstGeom>
+          <a:noFill/>
+        </p:spPr>
+        <p:txBody>
+          <a:bodyPr wrap="none">
+            <a:spAutoFit/>
+          </a:bodyPr>
+          <a:lstStyle/>
+          <a:p>
+            <a:r>
+              <a:rPr sz="1000" b="0" i="0">
+                <a:solidFill>
+                  <a:srgbClr val="8A97A5"/>
+                </a:solidFill>
+                <a:latin typeface="Segoe UI"/>
+              </a:rPr>
+              <a:t>BistroSaaS  |  Restaurant Management System</a:t>
+            </a:r>
+          </a:p>
+        </p:txBody>
+      </p:sp>
+      <p:sp>
+        <p:nvSpPr>
+          <p:cNvPr id="11" name="TextBox 10"/>
+          <p:cNvSpPr txBox="1"/>
+          <p:nvPr/>
+        </p:nvSpPr>
+        <p:spPr>
+          <a:xfrm>
+            <a:off x="10607040" y="6446520"/>
+            <a:ext cx="1097280" cy="320040"/>
+          </a:xfrm>
+          <a:prstGeom prst="rect">
+            <a:avLst/>
+          </a:prstGeom>
+          <a:noFill/>
+        </p:spPr>
+        <p:txBody>
+          <a:bodyPr wrap="none">
+            <a:spAutoFit/>
+          </a:bodyPr>
+          <a:lstStyle/>
+          <a:p>
+            <a:pPr algn="r"/>
+            <a:r>
+              <a:rPr sz="1000" b="1" i="0">
+                <a:solidFill>
+                  <a:srgbClr val="8A97A5"/>
+                </a:solidFill>
+                <a:latin typeface="Segoe UI"/>
+              </a:rPr>
+              <a:t>24</a:t>
+            </a:r>
+          </a:p>
+        </p:txBody>
+      </p:sp>
+    </p:spTree>
+  </p:cSld>
+  <p:clrMapOvr>
+    <a:masterClrMapping/>
+  </p:clrMapOvr>
+</p:sld>
+</file>
+
+<file path=ppt/slides/slide25.xml><?xml version="1.0" encoding="utf-8"?>
+<p:sld xmlns:a="http://schemas.openxmlformats.org/drawingml/2006/main" xmlns:p="http://schemas.openxmlformats.org/presentationml/2006/main" xmlns:r="http://schemas.openxmlformats.org/officeDocument/2006/relationships">
+  <p:cSld>
+    <p:bg>
+      <p:bgPr>
+        <a:solidFill>
+          <a:srgbClr val="F5F7FA"/>
+        </a:solidFill>
+        <a:effectLst/>
+      </p:bgPr>
+    </p:bg>
+    <p:spTree>
+      <p:nvGrpSpPr>
+        <p:cNvPr id="1" name=""/>
+        <p:cNvGrpSpPr/>
+        <p:nvPr/>
+      </p:nvGrpSpPr>
+      <p:grpSpPr/>
+      <p:sp>
+        <p:nvSpPr>
+          <p:cNvPr id="2" name="Rectangle 1"/>
+          <p:cNvSpPr/>
+          <p:nvPr/>
+        </p:nvSpPr>
+        <p:spPr>
+          <a:xfrm>
+            <a:off x="0" y="0"/>
+            <a:ext cx="164592" cy="6858000"/>
+          </a:xfrm>
+          <a:prstGeom prst="rect">
+            <a:avLst/>
+          </a:prstGeom>
+          <a:solidFill>
+            <a:srgbClr val="FF6B35"/>
+          </a:solidFill>
+          <a:ln>
+            <a:noFill/>
+          </a:ln>
+        </p:spPr>
+        <p:style>
+          <a:lnRef idx="1">
+            <a:schemeClr val="accent1"/>
+          </a:lnRef>
+          <a:fillRef idx="3">
+            <a:schemeClr val="accent1"/>
+          </a:fillRef>
+          <a:effectRef idx="2">
+            <a:schemeClr val="accent1"/>
+          </a:effectRef>
+          <a:fontRef idx="minor">
+            <a:schemeClr val="lt1"/>
+          </a:fontRef>
+        </p:style>
+        <p:txBody>
+          <a:bodyPr rtlCol="0" anchor="ctr"/>
+          <a:lstStyle/>
+          <a:p>
+            <a:pPr algn="ctr"/>
+          </a:p>
+        </p:txBody>
+      </p:sp>
+      <p:sp>
+        <p:nvSpPr>
+          <p:cNvPr id="3" name="Oval 2"/>
+          <p:cNvSpPr/>
+          <p:nvPr/>
+        </p:nvSpPr>
+        <p:spPr>
+          <a:xfrm>
+            <a:off x="10561320" y="411480"/>
+            <a:ext cx="1143000" cy="1143000"/>
+          </a:xfrm>
+          <a:prstGeom prst="ellipse">
+            <a:avLst/>
+          </a:prstGeom>
+          <a:solidFill>
+            <a:srgbClr val="FDE8DF"/>
+          </a:solidFill>
+          <a:ln>
+            <a:noFill/>
+          </a:ln>
+        </p:spPr>
+        <p:style>
+          <a:lnRef idx="1">
+            <a:schemeClr val="accent1"/>
+          </a:lnRef>
+          <a:fillRef idx="3">
+            <a:schemeClr val="accent1"/>
+          </a:fillRef>
+          <a:effectRef idx="2">
+            <a:schemeClr val="accent1"/>
+          </a:effectRef>
+          <a:fontRef idx="minor">
+            <a:schemeClr val="lt1"/>
+          </a:fontRef>
+        </p:style>
+        <p:txBody>
+          <a:bodyPr rtlCol="0" anchor="ctr"/>
+          <a:lstStyle/>
+          <a:p>
+            <a:pPr algn="ctr"/>
+          </a:p>
+        </p:txBody>
+      </p:sp>
+      <p:sp>
+        <p:nvSpPr>
+          <p:cNvPr id="4" name="TextBox 3"/>
+          <p:cNvSpPr txBox="1"/>
+          <p:nvPr/>
+        </p:nvSpPr>
+        <p:spPr>
+          <a:xfrm>
+            <a:off x="10561320" y="457200"/>
+            <a:ext cx="1143000" cy="1051560"/>
+          </a:xfrm>
+          <a:prstGeom prst="rect">
+            <a:avLst/>
+          </a:prstGeom>
+          <a:noFill/>
+        </p:spPr>
+        <p:txBody>
+          <a:bodyPr wrap="none">
+            <a:spAutoFit/>
+          </a:bodyPr>
+          <a:lstStyle/>
+          <a:p>
+            <a:pPr algn="ctr"/>
+            <a:r>
+              <a:rPr sz="3600" b="0" i="0">
+                <a:solidFill>
+                  <a:srgbClr val="243140"/>
+                </a:solidFill>
+                <a:latin typeface="Segoe UI"/>
+              </a:rPr>
+              <a:t>📸</a:t>
+            </a:r>
+          </a:p>
+        </p:txBody>
+      </p:sp>
+      <p:sp>
+        <p:nvSpPr>
+          <p:cNvPr id="5" name="TextBox 4"/>
+          <p:cNvSpPr txBox="1"/>
+          <p:nvPr/>
+        </p:nvSpPr>
+        <p:spPr>
+          <a:xfrm>
+            <a:off x="502920" y="411480"/>
+            <a:ext cx="9692640" cy="777240"/>
+          </a:xfrm>
+          <a:prstGeom prst="rect">
+            <a:avLst/>
+          </a:prstGeom>
+          <a:noFill/>
+        </p:spPr>
+        <p:txBody>
+          <a:bodyPr wrap="none">
+            <a:spAutoFit/>
+          </a:bodyPr>
+          <a:lstStyle/>
+          <a:p>
+            <a:r>
+              <a:rPr sz="3200" b="1" i="0">
+                <a:solidFill>
+                  <a:srgbClr val="1E2A38"/>
+                </a:solidFill>
+                <a:latin typeface="Segoe UI"/>
+              </a:rPr>
+              <a:t>Add Menu Item (Admin)</a:t>
+            </a:r>
+          </a:p>
+        </p:txBody>
+      </p:sp>
+      <p:sp>
+        <p:nvSpPr>
+          <p:cNvPr id="6" name="Rounded Rectangle 5"/>
+          <p:cNvSpPr/>
+          <p:nvPr/>
+        </p:nvSpPr>
+        <p:spPr>
+          <a:xfrm>
+            <a:off x="548640" y="1170432"/>
+            <a:ext cx="2286000" cy="82296"/>
+          </a:xfrm>
+          <a:prstGeom prst="roundRect">
+            <a:avLst/>
+          </a:prstGeom>
+          <a:solidFill>
+            <a:srgbClr val="FF6B35"/>
+          </a:solidFill>
+          <a:ln>
+            <a:noFill/>
+          </a:ln>
+        </p:spPr>
+        <p:style>
+          <a:lnRef idx="1">
+            <a:schemeClr val="accent1"/>
+          </a:lnRef>
+          <a:fillRef idx="3">
+            <a:schemeClr val="accent1"/>
+          </a:fillRef>
+          <a:effectRef idx="2">
+            <a:schemeClr val="accent1"/>
+          </a:effectRef>
+          <a:fontRef idx="minor">
+            <a:schemeClr val="lt1"/>
+          </a:fontRef>
+        </p:style>
+        <p:txBody>
+          <a:bodyPr rtlCol="0" anchor="ctr"/>
+          <a:lstStyle/>
+          <a:p>
+            <a:pPr algn="ctr"/>
+          </a:p>
+        </p:txBody>
+      </p:sp>
+      <p:sp>
+        <p:nvSpPr>
+          <p:cNvPr id="7" name="Rounded Rectangle 6"/>
+          <p:cNvSpPr/>
+          <p:nvPr/>
+        </p:nvSpPr>
+        <p:spPr>
+          <a:xfrm>
+            <a:off x="2551176" y="1490472"/>
+            <a:ext cx="7089343" cy="4745736"/>
+          </a:xfrm>
+          <a:prstGeom prst="roundRect">
+            <a:avLst/>
+          </a:prstGeom>
+          <a:solidFill>
+            <a:srgbClr val="FFFFFF"/>
+          </a:solidFill>
+          <a:ln>
+            <a:noFill/>
+          </a:ln>
+        </p:spPr>
+        <p:style>
+          <a:lnRef idx="1">
+            <a:schemeClr val="accent1"/>
+          </a:lnRef>
+          <a:fillRef idx="3">
+            <a:schemeClr val="accent1"/>
+          </a:fillRef>
+          <a:effectRef idx="2">
+            <a:schemeClr val="accent1"/>
+          </a:effectRef>
+          <a:fontRef idx="minor">
+            <a:schemeClr val="lt1"/>
+          </a:fontRef>
+        </p:style>
+        <p:txBody>
+          <a:bodyPr rtlCol="0" anchor="ctr"/>
+          <a:lstStyle/>
+          <a:p>
+            <a:pPr algn="ctr"/>
+          </a:p>
+        </p:txBody>
+      </p:sp>
+      <p:pic>
+        <p:nvPicPr>
+          <p:cNvPr id="8" name="Picture 7" descr="05_add_item.png"/>
+          <p:cNvPicPr>
+            <a:picLocks noChangeAspect="1"/>
+          </p:cNvPicPr>
+          <p:nvPr/>
+        </p:nvPicPr>
+        <p:blipFill>
+          <a:blip r:embed="rId2"/>
+          <a:stretch>
+            <a:fillRect/>
+          </a:stretch>
+        </p:blipFill>
+        <p:spPr>
+          <a:xfrm>
+            <a:off x="2660904" y="1600200"/>
+            <a:ext cx="6869887" cy="4526280"/>
+          </a:xfrm>
+          <a:prstGeom prst="rect">
+            <a:avLst/>
+          </a:prstGeom>
+        </p:spPr>
+      </p:pic>
+      <p:sp>
+        <p:nvSpPr>
+          <p:cNvPr id="9" name="Rectangle 8"/>
+          <p:cNvSpPr/>
+          <p:nvPr/>
+        </p:nvSpPr>
+        <p:spPr>
+          <a:xfrm>
+            <a:off x="502920" y="6400800"/>
+            <a:ext cx="11201400" cy="17780"/>
+          </a:xfrm>
+          <a:prstGeom prst="rect">
+            <a:avLst/>
+          </a:prstGeom>
+          <a:solidFill>
+            <a:srgbClr val="DDE3E9"/>
+          </a:solidFill>
+          <a:ln>
+            <a:noFill/>
+          </a:ln>
+        </p:spPr>
+        <p:style>
+          <a:lnRef idx="1">
+            <a:schemeClr val="accent1"/>
+          </a:lnRef>
+          <a:fillRef idx="3">
+            <a:schemeClr val="accent1"/>
+          </a:fillRef>
+          <a:effectRef idx="2">
+            <a:schemeClr val="accent1"/>
+          </a:effectRef>
+          <a:fontRef idx="minor">
+            <a:schemeClr val="lt1"/>
+          </a:fontRef>
+        </p:style>
+        <p:txBody>
+          <a:bodyPr rtlCol="0" anchor="ctr"/>
+          <a:lstStyle/>
+          <a:p>
+            <a:pPr algn="ctr"/>
+          </a:p>
+        </p:txBody>
+      </p:sp>
+      <p:sp>
+        <p:nvSpPr>
+          <p:cNvPr id="10" name="TextBox 9"/>
+          <p:cNvSpPr txBox="1"/>
+          <p:nvPr/>
+        </p:nvSpPr>
+        <p:spPr>
+          <a:xfrm>
+            <a:off x="502920" y="6446520"/>
+            <a:ext cx="8229600" cy="320040"/>
+          </a:xfrm>
+          <a:prstGeom prst="rect">
+            <a:avLst/>
+          </a:prstGeom>
+          <a:noFill/>
+        </p:spPr>
+        <p:txBody>
+          <a:bodyPr wrap="none">
+            <a:spAutoFit/>
+          </a:bodyPr>
+          <a:lstStyle/>
+          <a:p>
+            <a:r>
+              <a:rPr sz="1000" b="0" i="0">
+                <a:solidFill>
+                  <a:srgbClr val="8A97A5"/>
+                </a:solidFill>
+                <a:latin typeface="Segoe UI"/>
+              </a:rPr>
+              <a:t>BistroSaaS  |  Restaurant Management System</a:t>
+            </a:r>
+          </a:p>
+        </p:txBody>
+      </p:sp>
+      <p:sp>
+        <p:nvSpPr>
+          <p:cNvPr id="11" name="TextBox 10"/>
+          <p:cNvSpPr txBox="1"/>
+          <p:nvPr/>
+        </p:nvSpPr>
+        <p:spPr>
+          <a:xfrm>
+            <a:off x="10607040" y="6446520"/>
+            <a:ext cx="1097280" cy="320040"/>
+          </a:xfrm>
+          <a:prstGeom prst="rect">
+            <a:avLst/>
+          </a:prstGeom>
+          <a:noFill/>
+        </p:spPr>
+        <p:txBody>
+          <a:bodyPr wrap="none">
+            <a:spAutoFit/>
+          </a:bodyPr>
+          <a:lstStyle/>
+          <a:p>
+            <a:pPr algn="r"/>
+            <a:r>
+              <a:rPr sz="1000" b="1" i="0">
+                <a:solidFill>
+                  <a:srgbClr val="8A97A5"/>
+                </a:solidFill>
+                <a:latin typeface="Segoe UI"/>
+              </a:rPr>
+              <a:t>25</a:t>
+            </a:r>
+          </a:p>
+        </p:txBody>
+      </p:sp>
+    </p:spTree>
+  </p:cSld>
+  <p:clrMapOvr>
+    <a:masterClrMapping/>
+  </p:clrMapOvr>
+</p:sld>
+</file>
+
+<file path=ppt/slides/slide26.xml><?xml version="1.0" encoding="utf-8"?>
+<p:sld xmlns:a="http://schemas.openxmlformats.org/drawingml/2006/main" xmlns:p="http://schemas.openxmlformats.org/presentationml/2006/main" xmlns:r="http://schemas.openxmlformats.org/officeDocument/2006/relationships">
+  <p:cSld>
+    <p:bg>
+      <p:bgPr>
+        <a:solidFill>
+          <a:srgbClr val="F5F7FA"/>
+        </a:solidFill>
+        <a:effectLst/>
+      </p:bgPr>
+    </p:bg>
+    <p:spTree>
+      <p:nvGrpSpPr>
+        <p:cNvPr id="1" name=""/>
+        <p:cNvGrpSpPr/>
+        <p:nvPr/>
+      </p:nvGrpSpPr>
+      <p:grpSpPr/>
+      <p:sp>
+        <p:nvSpPr>
+          <p:cNvPr id="2" name="Rectangle 1"/>
+          <p:cNvSpPr/>
+          <p:nvPr/>
+        </p:nvSpPr>
+        <p:spPr>
+          <a:xfrm>
+            <a:off x="0" y="0"/>
+            <a:ext cx="164592" cy="6858000"/>
+          </a:xfrm>
+          <a:prstGeom prst="rect">
+            <a:avLst/>
+          </a:prstGeom>
+          <a:solidFill>
+            <a:srgbClr val="FF6B35"/>
+          </a:solidFill>
+          <a:ln>
+            <a:noFill/>
+          </a:ln>
+        </p:spPr>
+        <p:style>
+          <a:lnRef idx="1">
+            <a:schemeClr val="accent1"/>
+          </a:lnRef>
+          <a:fillRef idx="3">
+            <a:schemeClr val="accent1"/>
+          </a:fillRef>
+          <a:effectRef idx="2">
+            <a:schemeClr val="accent1"/>
+          </a:effectRef>
+          <a:fontRef idx="minor">
+            <a:schemeClr val="lt1"/>
+          </a:fontRef>
+        </p:style>
+        <p:txBody>
+          <a:bodyPr rtlCol="0" anchor="ctr"/>
+          <a:lstStyle/>
+          <a:p>
+            <a:pPr algn="ctr"/>
+          </a:p>
+        </p:txBody>
+      </p:sp>
+      <p:sp>
+        <p:nvSpPr>
+          <p:cNvPr id="3" name="Oval 2"/>
+          <p:cNvSpPr/>
+          <p:nvPr/>
+        </p:nvSpPr>
+        <p:spPr>
+          <a:xfrm>
+            <a:off x="10561320" y="411480"/>
+            <a:ext cx="1143000" cy="1143000"/>
+          </a:xfrm>
+          <a:prstGeom prst="ellipse">
+            <a:avLst/>
+          </a:prstGeom>
+          <a:solidFill>
+            <a:srgbClr val="FDE8DF"/>
+          </a:solidFill>
+          <a:ln>
+            <a:noFill/>
+          </a:ln>
+        </p:spPr>
+        <p:style>
+          <a:lnRef idx="1">
+            <a:schemeClr val="accent1"/>
+          </a:lnRef>
+          <a:fillRef idx="3">
+            <a:schemeClr val="accent1"/>
+          </a:fillRef>
+          <a:effectRef idx="2">
+            <a:schemeClr val="accent1"/>
+          </a:effectRef>
+          <a:fontRef idx="minor">
+            <a:schemeClr val="lt1"/>
+          </a:fontRef>
+        </p:style>
+        <p:txBody>
+          <a:bodyPr rtlCol="0" anchor="ctr"/>
+          <a:lstStyle/>
+          <a:p>
+            <a:pPr algn="ctr"/>
+          </a:p>
+        </p:txBody>
+      </p:sp>
+      <p:sp>
+        <p:nvSpPr>
+          <p:cNvPr id="4" name="TextBox 3"/>
+          <p:cNvSpPr txBox="1"/>
+          <p:nvPr/>
+        </p:nvSpPr>
+        <p:spPr>
+          <a:xfrm>
+            <a:off x="10561320" y="457200"/>
+            <a:ext cx="1143000" cy="1051560"/>
+          </a:xfrm>
+          <a:prstGeom prst="rect">
+            <a:avLst/>
+          </a:prstGeom>
+          <a:noFill/>
+        </p:spPr>
+        <p:txBody>
+          <a:bodyPr wrap="none">
+            <a:spAutoFit/>
+          </a:bodyPr>
+          <a:lstStyle/>
+          <a:p>
+            <a:pPr algn="ctr"/>
+            <a:r>
+              <a:rPr sz="3600" b="0" i="0">
+                <a:solidFill>
+                  <a:srgbClr val="243140"/>
+                </a:solidFill>
+                <a:latin typeface="Segoe UI"/>
+              </a:rPr>
+              <a:t>📸</a:t>
+            </a:r>
+          </a:p>
+        </p:txBody>
+      </p:sp>
+      <p:sp>
+        <p:nvSpPr>
+          <p:cNvPr id="5" name="TextBox 4"/>
+          <p:cNvSpPr txBox="1"/>
+          <p:nvPr/>
+        </p:nvSpPr>
+        <p:spPr>
+          <a:xfrm>
+            <a:off x="502920" y="411480"/>
+            <a:ext cx="9692640" cy="777240"/>
+          </a:xfrm>
+          <a:prstGeom prst="rect">
+            <a:avLst/>
+          </a:prstGeom>
+          <a:noFill/>
+        </p:spPr>
+        <p:txBody>
+          <a:bodyPr wrap="none">
+            <a:spAutoFit/>
+          </a:bodyPr>
+          <a:lstStyle/>
+          <a:p>
+            <a:r>
+              <a:rPr sz="3200" b="1" i="0">
+                <a:solidFill>
+                  <a:srgbClr val="1E2A38"/>
+                </a:solidFill>
+                <a:latin typeface="Segoe UI"/>
+              </a:rPr>
+              <a:t>Place Order</a:t>
+            </a:r>
+          </a:p>
+        </p:txBody>
+      </p:sp>
+      <p:sp>
+        <p:nvSpPr>
+          <p:cNvPr id="6" name="Rounded Rectangle 5"/>
+          <p:cNvSpPr/>
+          <p:nvPr/>
+        </p:nvSpPr>
+        <p:spPr>
+          <a:xfrm>
+            <a:off x="548640" y="1170432"/>
+            <a:ext cx="2286000" cy="82296"/>
+          </a:xfrm>
+          <a:prstGeom prst="roundRect">
+            <a:avLst/>
+          </a:prstGeom>
+          <a:solidFill>
+            <a:srgbClr val="FF6B35"/>
+          </a:solidFill>
+          <a:ln>
+            <a:noFill/>
+          </a:ln>
+        </p:spPr>
+        <p:style>
+          <a:lnRef idx="1">
+            <a:schemeClr val="accent1"/>
+          </a:lnRef>
+          <a:fillRef idx="3">
+            <a:schemeClr val="accent1"/>
+          </a:fillRef>
+          <a:effectRef idx="2">
+            <a:schemeClr val="accent1"/>
+          </a:effectRef>
+          <a:fontRef idx="minor">
+            <a:schemeClr val="lt1"/>
+          </a:fontRef>
+        </p:style>
+        <p:txBody>
+          <a:bodyPr rtlCol="0" anchor="ctr"/>
+          <a:lstStyle/>
+          <a:p>
+            <a:pPr algn="ctr"/>
+          </a:p>
+        </p:txBody>
+      </p:sp>
+      <p:sp>
+        <p:nvSpPr>
+          <p:cNvPr id="7" name="Rounded Rectangle 6"/>
+          <p:cNvSpPr/>
+          <p:nvPr/>
+        </p:nvSpPr>
+        <p:spPr>
+          <a:xfrm>
+            <a:off x="2551176" y="1490472"/>
+            <a:ext cx="7089343" cy="4745736"/>
+          </a:xfrm>
+          <a:prstGeom prst="roundRect">
+            <a:avLst/>
+          </a:prstGeom>
+          <a:solidFill>
+            <a:srgbClr val="FFFFFF"/>
+          </a:solidFill>
+          <a:ln>
+            <a:noFill/>
+          </a:ln>
+        </p:spPr>
+        <p:style>
+          <a:lnRef idx="1">
+            <a:schemeClr val="accent1"/>
+          </a:lnRef>
+          <a:fillRef idx="3">
+            <a:schemeClr val="accent1"/>
+          </a:fillRef>
+          <a:effectRef idx="2">
+            <a:schemeClr val="accent1"/>
+          </a:effectRef>
+          <a:fontRef idx="minor">
+            <a:schemeClr val="lt1"/>
+          </a:fontRef>
+        </p:style>
+        <p:txBody>
+          <a:bodyPr rtlCol="0" anchor="ctr"/>
+          <a:lstStyle/>
+          <a:p>
+            <a:pPr algn="ctr"/>
+          </a:p>
+        </p:txBody>
+      </p:sp>
+      <p:pic>
+        <p:nvPicPr>
+          <p:cNvPr id="8" name="Picture 7" descr="06_place_order.png"/>
+          <p:cNvPicPr>
+            <a:picLocks noChangeAspect="1"/>
+          </p:cNvPicPr>
+          <p:nvPr/>
+        </p:nvPicPr>
+        <p:blipFill>
+          <a:blip r:embed="rId2"/>
+          <a:stretch>
+            <a:fillRect/>
+          </a:stretch>
+        </p:blipFill>
+        <p:spPr>
+          <a:xfrm>
+            <a:off x="2660904" y="1600200"/>
+            <a:ext cx="6869887" cy="4526280"/>
+          </a:xfrm>
+          <a:prstGeom prst="rect">
+            <a:avLst/>
+          </a:prstGeom>
+        </p:spPr>
+      </p:pic>
+      <p:sp>
+        <p:nvSpPr>
+          <p:cNvPr id="9" name="Rectangle 8"/>
+          <p:cNvSpPr/>
+          <p:nvPr/>
+        </p:nvSpPr>
+        <p:spPr>
+          <a:xfrm>
+            <a:off x="502920" y="6400800"/>
+            <a:ext cx="11201400" cy="17780"/>
+          </a:xfrm>
+          <a:prstGeom prst="rect">
+            <a:avLst/>
+          </a:prstGeom>
+          <a:solidFill>
+            <a:srgbClr val="DDE3E9"/>
+          </a:solidFill>
+          <a:ln>
+            <a:noFill/>
+          </a:ln>
+        </p:spPr>
+        <p:style>
+          <a:lnRef idx="1">
+            <a:schemeClr val="accent1"/>
+          </a:lnRef>
+          <a:fillRef idx="3">
+            <a:schemeClr val="accent1"/>
+          </a:fillRef>
+          <a:effectRef idx="2">
+            <a:schemeClr val="accent1"/>
+          </a:effectRef>
+          <a:fontRef idx="minor">
+            <a:schemeClr val="lt1"/>
+          </a:fontRef>
+        </p:style>
+        <p:txBody>
+          <a:bodyPr rtlCol="0" anchor="ctr"/>
+          <a:lstStyle/>
+          <a:p>
+            <a:pPr algn="ctr"/>
+          </a:p>
+        </p:txBody>
+      </p:sp>
+      <p:sp>
+        <p:nvSpPr>
+          <p:cNvPr id="10" name="TextBox 9"/>
+          <p:cNvSpPr txBox="1"/>
+          <p:nvPr/>
+        </p:nvSpPr>
+        <p:spPr>
+          <a:xfrm>
+            <a:off x="502920" y="6446520"/>
+            <a:ext cx="8229600" cy="320040"/>
+          </a:xfrm>
+          <a:prstGeom prst="rect">
+            <a:avLst/>
+          </a:prstGeom>
+          <a:noFill/>
+        </p:spPr>
+        <p:txBody>
+          <a:bodyPr wrap="none">
+            <a:spAutoFit/>
+          </a:bodyPr>
+          <a:lstStyle/>
+          <a:p>
+            <a:r>
+              <a:rPr sz="1000" b="0" i="0">
+                <a:solidFill>
+                  <a:srgbClr val="8A97A5"/>
+                </a:solidFill>
+                <a:latin typeface="Segoe UI"/>
+              </a:rPr>
+              <a:t>BistroSaaS  |  Restaurant Management System</a:t>
+            </a:r>
+          </a:p>
+        </p:txBody>
+      </p:sp>
+      <p:sp>
+        <p:nvSpPr>
+          <p:cNvPr id="11" name="TextBox 10"/>
+          <p:cNvSpPr txBox="1"/>
+          <p:nvPr/>
+        </p:nvSpPr>
+        <p:spPr>
+          <a:xfrm>
+            <a:off x="10607040" y="6446520"/>
+            <a:ext cx="1097280" cy="320040"/>
+          </a:xfrm>
+          <a:prstGeom prst="rect">
+            <a:avLst/>
+          </a:prstGeom>
+          <a:noFill/>
+        </p:spPr>
+        <p:txBody>
+          <a:bodyPr wrap="none">
+            <a:spAutoFit/>
+          </a:bodyPr>
+          <a:lstStyle/>
+          <a:p>
+            <a:pPr algn="r"/>
+            <a:r>
+              <a:rPr sz="1000" b="1" i="0">
+                <a:solidFill>
+                  <a:srgbClr val="8A97A5"/>
+                </a:solidFill>
+                <a:latin typeface="Segoe UI"/>
+              </a:rPr>
+              <a:t>26</a:t>
+            </a:r>
+          </a:p>
+        </p:txBody>
+      </p:sp>
+    </p:spTree>
+  </p:cSld>
+  <p:clrMapOvr>
+    <a:masterClrMapping/>
+  </p:clrMapOvr>
+</p:sld>
+</file>
+
+<file path=ppt/slides/slide27.xml><?xml version="1.0" encoding="utf-8"?>
+<p:sld xmlns:a="http://schemas.openxmlformats.org/drawingml/2006/main" xmlns:p="http://schemas.openxmlformats.org/presentationml/2006/main" xmlns:r="http://schemas.openxmlformats.org/officeDocument/2006/relationships">
+  <p:cSld>
+    <p:bg>
+      <p:bgPr>
+        <a:solidFill>
+          <a:srgbClr val="F5F7FA"/>
+        </a:solidFill>
+        <a:effectLst/>
+      </p:bgPr>
+    </p:bg>
+    <p:spTree>
+      <p:nvGrpSpPr>
+        <p:cNvPr id="1" name=""/>
+        <p:cNvGrpSpPr/>
+        <p:nvPr/>
+      </p:nvGrpSpPr>
+      <p:grpSpPr/>
+      <p:sp>
+        <p:nvSpPr>
+          <p:cNvPr id="2" name="Rectangle 1"/>
+          <p:cNvSpPr/>
+          <p:nvPr/>
+        </p:nvSpPr>
+        <p:spPr>
+          <a:xfrm>
+            <a:off x="0" y="0"/>
+            <a:ext cx="164592" cy="6858000"/>
+          </a:xfrm>
+          <a:prstGeom prst="rect">
+            <a:avLst/>
+          </a:prstGeom>
+          <a:solidFill>
+            <a:srgbClr val="FF6B35"/>
+          </a:solidFill>
+          <a:ln>
+            <a:noFill/>
+          </a:ln>
+        </p:spPr>
+        <p:style>
+          <a:lnRef idx="1">
+            <a:schemeClr val="accent1"/>
+          </a:lnRef>
+          <a:fillRef idx="3">
+            <a:schemeClr val="accent1"/>
+          </a:fillRef>
+          <a:effectRef idx="2">
+            <a:schemeClr val="accent1"/>
+          </a:effectRef>
+          <a:fontRef idx="minor">
+            <a:schemeClr val="lt1"/>
+          </a:fontRef>
+        </p:style>
+        <p:txBody>
+          <a:bodyPr rtlCol="0" anchor="ctr"/>
+          <a:lstStyle/>
+          <a:p>
+            <a:pPr algn="ctr"/>
+          </a:p>
+        </p:txBody>
+      </p:sp>
+      <p:sp>
+        <p:nvSpPr>
+          <p:cNvPr id="3" name="Oval 2"/>
+          <p:cNvSpPr/>
+          <p:nvPr/>
+        </p:nvSpPr>
+        <p:spPr>
+          <a:xfrm>
+            <a:off x="10561320" y="411480"/>
+            <a:ext cx="1143000" cy="1143000"/>
+          </a:xfrm>
+          <a:prstGeom prst="ellipse">
+            <a:avLst/>
+          </a:prstGeom>
+          <a:solidFill>
+            <a:srgbClr val="FDE8DF"/>
+          </a:solidFill>
+          <a:ln>
+            <a:noFill/>
+          </a:ln>
+        </p:spPr>
+        <p:style>
+          <a:lnRef idx="1">
+            <a:schemeClr val="accent1"/>
+          </a:lnRef>
+          <a:fillRef idx="3">
+            <a:schemeClr val="accent1"/>
+          </a:fillRef>
+          <a:effectRef idx="2">
+            <a:schemeClr val="accent1"/>
+          </a:effectRef>
+          <a:fontRef idx="minor">
+            <a:schemeClr val="lt1"/>
+          </a:fontRef>
+        </p:style>
+        <p:txBody>
+          <a:bodyPr rtlCol="0" anchor="ctr"/>
+          <a:lstStyle/>
+          <a:p>
+            <a:pPr algn="ctr"/>
+          </a:p>
+        </p:txBody>
+      </p:sp>
+      <p:sp>
+        <p:nvSpPr>
+          <p:cNvPr id="4" name="TextBox 3"/>
+          <p:cNvSpPr txBox="1"/>
+          <p:nvPr/>
+        </p:nvSpPr>
+        <p:spPr>
+          <a:xfrm>
+            <a:off x="10561320" y="457200"/>
+            <a:ext cx="1143000" cy="1051560"/>
+          </a:xfrm>
+          <a:prstGeom prst="rect">
+            <a:avLst/>
+          </a:prstGeom>
+          <a:noFill/>
+        </p:spPr>
+        <p:txBody>
+          <a:bodyPr wrap="none">
+            <a:spAutoFit/>
+          </a:bodyPr>
+          <a:lstStyle/>
+          <a:p>
+            <a:pPr algn="ctr"/>
+            <a:r>
+              <a:rPr sz="3600" b="0" i="0">
+                <a:solidFill>
+                  <a:srgbClr val="243140"/>
+                </a:solidFill>
+                <a:latin typeface="Segoe UI"/>
+              </a:rPr>
+              <a:t>📸</a:t>
+            </a:r>
+          </a:p>
+        </p:txBody>
+      </p:sp>
+      <p:sp>
+        <p:nvSpPr>
+          <p:cNvPr id="5" name="TextBox 4"/>
+          <p:cNvSpPr txBox="1"/>
+          <p:nvPr/>
+        </p:nvSpPr>
+        <p:spPr>
+          <a:xfrm>
+            <a:off x="502920" y="411480"/>
+            <a:ext cx="9692640" cy="777240"/>
+          </a:xfrm>
+          <a:prstGeom prst="rect">
+            <a:avLst/>
+          </a:prstGeom>
+          <a:noFill/>
+        </p:spPr>
+        <p:txBody>
+          <a:bodyPr wrap="none">
+            <a:spAutoFit/>
+          </a:bodyPr>
+          <a:lstStyle/>
+          <a:p>
+            <a:r>
+              <a:rPr sz="3200" b="1" i="0">
+                <a:solidFill>
+                  <a:srgbClr val="1E2A38"/>
+                </a:solidFill>
+                <a:latin typeface="Segoe UI"/>
+              </a:rPr>
+              <a:t>My Orders</a:t>
+            </a:r>
+          </a:p>
+        </p:txBody>
+      </p:sp>
+      <p:sp>
+        <p:nvSpPr>
+          <p:cNvPr id="6" name="Rounded Rectangle 5"/>
+          <p:cNvSpPr/>
+          <p:nvPr/>
+        </p:nvSpPr>
+        <p:spPr>
+          <a:xfrm>
+            <a:off x="548640" y="1170432"/>
+            <a:ext cx="2286000" cy="82296"/>
+          </a:xfrm>
+          <a:prstGeom prst="roundRect">
+            <a:avLst/>
+          </a:prstGeom>
+          <a:solidFill>
+            <a:srgbClr val="FF6B35"/>
+          </a:solidFill>
+          <a:ln>
+            <a:noFill/>
+          </a:ln>
+        </p:spPr>
+        <p:style>
+          <a:lnRef idx="1">
+            <a:schemeClr val="accent1"/>
+          </a:lnRef>
+          <a:fillRef idx="3">
+            <a:schemeClr val="accent1"/>
+          </a:fillRef>
+          <a:effectRef idx="2">
+            <a:schemeClr val="accent1"/>
+          </a:effectRef>
+          <a:fontRef idx="minor">
+            <a:schemeClr val="lt1"/>
+          </a:fontRef>
+        </p:style>
+        <p:txBody>
+          <a:bodyPr rtlCol="0" anchor="ctr"/>
+          <a:lstStyle/>
+          <a:p>
+            <a:pPr algn="ctr"/>
+          </a:p>
+        </p:txBody>
+      </p:sp>
+      <p:sp>
+        <p:nvSpPr>
+          <p:cNvPr id="7" name="Rounded Rectangle 6"/>
+          <p:cNvSpPr/>
+          <p:nvPr/>
+        </p:nvSpPr>
+        <p:spPr>
+          <a:xfrm>
+            <a:off x="2551176" y="1490472"/>
+            <a:ext cx="7089343" cy="4745736"/>
+          </a:xfrm>
+          <a:prstGeom prst="roundRect">
+            <a:avLst/>
+          </a:prstGeom>
+          <a:solidFill>
+            <a:srgbClr val="FFFFFF"/>
+          </a:solidFill>
+          <a:ln>
+            <a:noFill/>
+          </a:ln>
+        </p:spPr>
+        <p:style>
+          <a:lnRef idx="1">
+            <a:schemeClr val="accent1"/>
+          </a:lnRef>
+          <a:fillRef idx="3">
+            <a:schemeClr val="accent1"/>
+          </a:fillRef>
+          <a:effectRef idx="2">
+            <a:schemeClr val="accent1"/>
+          </a:effectRef>
+          <a:fontRef idx="minor">
+            <a:schemeClr val="lt1"/>
+          </a:fontRef>
+        </p:style>
+        <p:txBody>
+          <a:bodyPr rtlCol="0" anchor="ctr"/>
+          <a:lstStyle/>
+          <a:p>
+            <a:pPr algn="ctr"/>
+          </a:p>
+        </p:txBody>
+      </p:sp>
+      <p:pic>
+        <p:nvPicPr>
+          <p:cNvPr id="8" name="Picture 7" descr="07_my_orders.png"/>
+          <p:cNvPicPr>
+            <a:picLocks noChangeAspect="1"/>
+          </p:cNvPicPr>
+          <p:nvPr/>
+        </p:nvPicPr>
+        <p:blipFill>
+          <a:blip r:embed="rId2"/>
+          <a:stretch>
+            <a:fillRect/>
+          </a:stretch>
+        </p:blipFill>
+        <p:spPr>
+          <a:xfrm>
+            <a:off x="2660904" y="1600200"/>
+            <a:ext cx="6869887" cy="4526280"/>
+          </a:xfrm>
+          <a:prstGeom prst="rect">
+            <a:avLst/>
+          </a:prstGeom>
+        </p:spPr>
+      </p:pic>
+      <p:sp>
+        <p:nvSpPr>
+          <p:cNvPr id="9" name="Rectangle 8"/>
+          <p:cNvSpPr/>
+          <p:nvPr/>
+        </p:nvSpPr>
+        <p:spPr>
+          <a:xfrm>
+            <a:off x="502920" y="6400800"/>
+            <a:ext cx="11201400" cy="17780"/>
+          </a:xfrm>
+          <a:prstGeom prst="rect">
+            <a:avLst/>
+          </a:prstGeom>
+          <a:solidFill>
+            <a:srgbClr val="DDE3E9"/>
+          </a:solidFill>
+          <a:ln>
+            <a:noFill/>
+          </a:ln>
+        </p:spPr>
+        <p:style>
+          <a:lnRef idx="1">
+            <a:schemeClr val="accent1"/>
+          </a:lnRef>
+          <a:fillRef idx="3">
+            <a:schemeClr val="accent1"/>
+          </a:fillRef>
+          <a:effectRef idx="2">
+            <a:schemeClr val="accent1"/>
+          </a:effectRef>
+          <a:fontRef idx="minor">
+            <a:schemeClr val="lt1"/>
+          </a:fontRef>
+        </p:style>
+        <p:txBody>
+          <a:bodyPr rtlCol="0" anchor="ctr"/>
+          <a:lstStyle/>
+          <a:p>
+            <a:pPr algn="ctr"/>
+          </a:p>
+        </p:txBody>
+      </p:sp>
+      <p:sp>
+        <p:nvSpPr>
+          <p:cNvPr id="10" name="TextBox 9"/>
+          <p:cNvSpPr txBox="1"/>
+          <p:nvPr/>
+        </p:nvSpPr>
+        <p:spPr>
+          <a:xfrm>
+            <a:off x="502920" y="6446520"/>
+            <a:ext cx="8229600" cy="320040"/>
+          </a:xfrm>
+          <a:prstGeom prst="rect">
+            <a:avLst/>
+          </a:prstGeom>
+          <a:noFill/>
+        </p:spPr>
+        <p:txBody>
+          <a:bodyPr wrap="none">
+            <a:spAutoFit/>
+          </a:bodyPr>
+          <a:lstStyle/>
+          <a:p>
+            <a:r>
+              <a:rPr sz="1000" b="0" i="0">
+                <a:solidFill>
+                  <a:srgbClr val="8A97A5"/>
+                </a:solidFill>
+                <a:latin typeface="Segoe UI"/>
+              </a:rPr>
+              <a:t>BistroSaaS  |  Restaurant Management System</a:t>
+            </a:r>
+          </a:p>
+        </p:txBody>
+      </p:sp>
+      <p:sp>
+        <p:nvSpPr>
+          <p:cNvPr id="11" name="TextBox 10"/>
+          <p:cNvSpPr txBox="1"/>
+          <p:nvPr/>
+        </p:nvSpPr>
+        <p:spPr>
+          <a:xfrm>
+            <a:off x="10607040" y="6446520"/>
+            <a:ext cx="1097280" cy="320040"/>
+          </a:xfrm>
+          <a:prstGeom prst="rect">
+            <a:avLst/>
+          </a:prstGeom>
+          <a:noFill/>
+        </p:spPr>
+        <p:txBody>
+          <a:bodyPr wrap="none">
+            <a:spAutoFit/>
+          </a:bodyPr>
+          <a:lstStyle/>
+          <a:p>
+            <a:pPr algn="r"/>
+            <a:r>
+              <a:rPr sz="1000" b="1" i="0">
+                <a:solidFill>
+                  <a:srgbClr val="8A97A5"/>
+                </a:solidFill>
+                <a:latin typeface="Segoe UI"/>
+              </a:rPr>
+              <a:t>27</a:t>
+            </a:r>
+          </a:p>
+        </p:txBody>
+      </p:sp>
+    </p:spTree>
+  </p:cSld>
+  <p:clrMapOvr>
+    <a:masterClrMapping/>
+  </p:clrMapOvr>
+</p:sld>
+</file>
+
+<file path=ppt/slides/slide28.xml><?xml version="1.0" encoding="utf-8"?>
+<p:sld xmlns:a="http://schemas.openxmlformats.org/drawingml/2006/main" xmlns:p="http://schemas.openxmlformats.org/presentationml/2006/main" xmlns:r="http://schemas.openxmlformats.org/officeDocument/2006/relationships">
+  <p:cSld>
+    <p:bg>
+      <p:bgPr>
+        <a:solidFill>
+          <a:srgbClr val="F5F7FA"/>
+        </a:solidFill>
+        <a:effectLst/>
+      </p:bgPr>
+    </p:bg>
+    <p:spTree>
+      <p:nvGrpSpPr>
+        <p:cNvPr id="1" name=""/>
+        <p:cNvGrpSpPr/>
+        <p:nvPr/>
+      </p:nvGrpSpPr>
+      <p:grpSpPr/>
+      <p:sp>
+        <p:nvSpPr>
+          <p:cNvPr id="2" name="Rectangle 1"/>
+          <p:cNvSpPr/>
+          <p:nvPr/>
+        </p:nvSpPr>
+        <p:spPr>
+          <a:xfrm>
+            <a:off x="0" y="0"/>
+            <a:ext cx="164592" cy="6858000"/>
+          </a:xfrm>
+          <a:prstGeom prst="rect">
+            <a:avLst/>
+          </a:prstGeom>
+          <a:solidFill>
+            <a:srgbClr val="FF6B35"/>
+          </a:solidFill>
+          <a:ln>
+            <a:noFill/>
+          </a:ln>
+        </p:spPr>
+        <p:style>
+          <a:lnRef idx="1">
+            <a:schemeClr val="accent1"/>
+          </a:lnRef>
+          <a:fillRef idx="3">
+            <a:schemeClr val="accent1"/>
+          </a:fillRef>
+          <a:effectRef idx="2">
+            <a:schemeClr val="accent1"/>
+          </a:effectRef>
+          <a:fontRef idx="minor">
+            <a:schemeClr val="lt1"/>
+          </a:fontRef>
+        </p:style>
+        <p:txBody>
+          <a:bodyPr rtlCol="0" anchor="ctr"/>
+          <a:lstStyle/>
+          <a:p>
+            <a:pPr algn="ctr"/>
+          </a:p>
+        </p:txBody>
+      </p:sp>
+      <p:sp>
+        <p:nvSpPr>
+          <p:cNvPr id="3" name="Oval 2"/>
+          <p:cNvSpPr/>
+          <p:nvPr/>
+        </p:nvSpPr>
+        <p:spPr>
+          <a:xfrm>
+            <a:off x="10561320" y="411480"/>
+            <a:ext cx="1143000" cy="1143000"/>
+          </a:xfrm>
+          <a:prstGeom prst="ellipse">
+            <a:avLst/>
+          </a:prstGeom>
+          <a:solidFill>
+            <a:srgbClr val="FDE8DF"/>
+          </a:solidFill>
+          <a:ln>
+            <a:noFill/>
+          </a:ln>
+        </p:spPr>
+        <p:style>
+          <a:lnRef idx="1">
+            <a:schemeClr val="accent1"/>
+          </a:lnRef>
+          <a:fillRef idx="3">
+            <a:schemeClr val="accent1"/>
+          </a:fillRef>
+          <a:effectRef idx="2">
+            <a:schemeClr val="accent1"/>
+          </a:effectRef>
+          <a:fontRef idx="minor">
+            <a:schemeClr val="lt1"/>
+          </a:fontRef>
+        </p:style>
+        <p:txBody>
+          <a:bodyPr rtlCol="0" anchor="ctr"/>
+          <a:lstStyle/>
+          <a:p>
+            <a:pPr algn="ctr"/>
+          </a:p>
+        </p:txBody>
+      </p:sp>
+      <p:sp>
+        <p:nvSpPr>
+          <p:cNvPr id="4" name="TextBox 3"/>
+          <p:cNvSpPr txBox="1"/>
+          <p:nvPr/>
+        </p:nvSpPr>
+        <p:spPr>
+          <a:xfrm>
+            <a:off x="10561320" y="457200"/>
+            <a:ext cx="1143000" cy="1051560"/>
+          </a:xfrm>
+          <a:prstGeom prst="rect">
+            <a:avLst/>
+          </a:prstGeom>
+          <a:noFill/>
+        </p:spPr>
+        <p:txBody>
+          <a:bodyPr wrap="none">
+            <a:spAutoFit/>
+          </a:bodyPr>
+          <a:lstStyle/>
+          <a:p>
+            <a:pPr algn="ctr"/>
+            <a:r>
+              <a:rPr sz="3600" b="0" i="0">
+                <a:solidFill>
+                  <a:srgbClr val="243140"/>
+                </a:solidFill>
+                <a:latin typeface="Segoe UI"/>
+              </a:rPr>
+              <a:t>📸</a:t>
+            </a:r>
+          </a:p>
+        </p:txBody>
+      </p:sp>
+      <p:sp>
+        <p:nvSpPr>
+          <p:cNvPr id="5" name="TextBox 4"/>
+          <p:cNvSpPr txBox="1"/>
+          <p:nvPr/>
+        </p:nvSpPr>
+        <p:spPr>
+          <a:xfrm>
+            <a:off x="502920" y="411480"/>
+            <a:ext cx="9692640" cy="777240"/>
+          </a:xfrm>
+          <a:prstGeom prst="rect">
+            <a:avLst/>
+          </a:prstGeom>
+          <a:noFill/>
+        </p:spPr>
+        <p:txBody>
+          <a:bodyPr wrap="none">
+            <a:spAutoFit/>
+          </a:bodyPr>
+          <a:lstStyle/>
+          <a:p>
+            <a:r>
+              <a:rPr sz="3200" b="1" i="0">
+                <a:solidFill>
+                  <a:srgbClr val="1E2A38"/>
+                </a:solidFill>
+                <a:latin typeface="Segoe UI"/>
+              </a:rPr>
+              <a:t>Manage Orders (Admin)</a:t>
+            </a:r>
+          </a:p>
+        </p:txBody>
+      </p:sp>
+      <p:sp>
+        <p:nvSpPr>
+          <p:cNvPr id="6" name="Rounded Rectangle 5"/>
+          <p:cNvSpPr/>
+          <p:nvPr/>
+        </p:nvSpPr>
+        <p:spPr>
+          <a:xfrm>
+            <a:off x="548640" y="1170432"/>
+            <a:ext cx="2286000" cy="82296"/>
+          </a:xfrm>
+          <a:prstGeom prst="roundRect">
+            <a:avLst/>
+          </a:prstGeom>
+          <a:solidFill>
+            <a:srgbClr val="FF6B35"/>
+          </a:solidFill>
+          <a:ln>
+            <a:noFill/>
+          </a:ln>
+        </p:spPr>
+        <p:style>
+          <a:lnRef idx="1">
+            <a:schemeClr val="accent1"/>
+          </a:lnRef>
+          <a:fillRef idx="3">
+            <a:schemeClr val="accent1"/>
+          </a:fillRef>
+          <a:effectRef idx="2">
+            <a:schemeClr val="accent1"/>
+          </a:effectRef>
+          <a:fontRef idx="minor">
+            <a:schemeClr val="lt1"/>
+          </a:fontRef>
+        </p:style>
+        <p:txBody>
+          <a:bodyPr rtlCol="0" anchor="ctr"/>
+          <a:lstStyle/>
+          <a:p>
+            <a:pPr algn="ctr"/>
+          </a:p>
+        </p:txBody>
+      </p:sp>
+      <p:sp>
+        <p:nvSpPr>
+          <p:cNvPr id="7" name="Rounded Rectangle 6"/>
+          <p:cNvSpPr/>
+          <p:nvPr/>
+        </p:nvSpPr>
+        <p:spPr>
+          <a:xfrm>
+            <a:off x="2551176" y="1490472"/>
+            <a:ext cx="7089343" cy="4745736"/>
+          </a:xfrm>
+          <a:prstGeom prst="roundRect">
+            <a:avLst/>
+          </a:prstGeom>
+          <a:solidFill>
+            <a:srgbClr val="FFFFFF"/>
+          </a:solidFill>
+          <a:ln>
+            <a:noFill/>
+          </a:ln>
+        </p:spPr>
+        <p:style>
+          <a:lnRef idx="1">
+            <a:schemeClr val="accent1"/>
+          </a:lnRef>
+          <a:fillRef idx="3">
+            <a:schemeClr val="accent1"/>
+          </a:fillRef>
+          <a:effectRef idx="2">
+            <a:schemeClr val="accent1"/>
+          </a:effectRef>
+          <a:fontRef idx="minor">
+            <a:schemeClr val="lt1"/>
+          </a:fontRef>
+        </p:style>
+        <p:txBody>
+          <a:bodyPr rtlCol="0" anchor="ctr"/>
+          <a:lstStyle/>
+          <a:p>
+            <a:pPr algn="ctr"/>
+          </a:p>
+        </p:txBody>
+      </p:sp>
+      <p:pic>
+        <p:nvPicPr>
+          <p:cNvPr id="8" name="Picture 7" descr="08_manage_orders.png"/>
+          <p:cNvPicPr>
+            <a:picLocks noChangeAspect="1"/>
+          </p:cNvPicPr>
+          <p:nvPr/>
+        </p:nvPicPr>
+        <p:blipFill>
+          <a:blip r:embed="rId2"/>
+          <a:stretch>
+            <a:fillRect/>
+          </a:stretch>
+        </p:blipFill>
+        <p:spPr>
+          <a:xfrm>
+            <a:off x="2660904" y="1600200"/>
+            <a:ext cx="6869887" cy="4526280"/>
+          </a:xfrm>
+          <a:prstGeom prst="rect">
+            <a:avLst/>
+          </a:prstGeom>
+        </p:spPr>
+      </p:pic>
+      <p:sp>
+        <p:nvSpPr>
+          <p:cNvPr id="9" name="Rectangle 8"/>
+          <p:cNvSpPr/>
+          <p:nvPr/>
+        </p:nvSpPr>
+        <p:spPr>
+          <a:xfrm>
+            <a:off x="502920" y="6400800"/>
+            <a:ext cx="11201400" cy="17780"/>
+          </a:xfrm>
+          <a:prstGeom prst="rect">
+            <a:avLst/>
+          </a:prstGeom>
+          <a:solidFill>
+            <a:srgbClr val="DDE3E9"/>
+          </a:solidFill>
+          <a:ln>
+            <a:noFill/>
+          </a:ln>
+        </p:spPr>
+        <p:style>
+          <a:lnRef idx="1">
+            <a:schemeClr val="accent1"/>
+          </a:lnRef>
+          <a:fillRef idx="3">
+            <a:schemeClr val="accent1"/>
+          </a:fillRef>
+          <a:effectRef idx="2">
+            <a:schemeClr val="accent1"/>
+          </a:effectRef>
+          <a:fontRef idx="minor">
+            <a:schemeClr val="lt1"/>
+          </a:fontRef>
+        </p:style>
+        <p:txBody>
+          <a:bodyPr rtlCol="0" anchor="ctr"/>
+          <a:lstStyle/>
+          <a:p>
+            <a:pPr algn="ctr"/>
+          </a:p>
+        </p:txBody>
+      </p:sp>
+      <p:sp>
+        <p:nvSpPr>
+          <p:cNvPr id="10" name="TextBox 9"/>
+          <p:cNvSpPr txBox="1"/>
+          <p:nvPr/>
+        </p:nvSpPr>
+        <p:spPr>
+          <a:xfrm>
+            <a:off x="502920" y="6446520"/>
+            <a:ext cx="8229600" cy="320040"/>
+          </a:xfrm>
+          <a:prstGeom prst="rect">
+            <a:avLst/>
+          </a:prstGeom>
+          <a:noFill/>
+        </p:spPr>
+        <p:txBody>
+          <a:bodyPr wrap="none">
+            <a:spAutoFit/>
+          </a:bodyPr>
+          <a:lstStyle/>
+          <a:p>
+            <a:r>
+              <a:rPr sz="1000" b="0" i="0">
+                <a:solidFill>
+                  <a:srgbClr val="8A97A5"/>
+                </a:solidFill>
+                <a:latin typeface="Segoe UI"/>
+              </a:rPr>
+              <a:t>BistroSaaS  |  Restaurant Management System</a:t>
+            </a:r>
+          </a:p>
+        </p:txBody>
+      </p:sp>
+      <p:sp>
+        <p:nvSpPr>
+          <p:cNvPr id="11" name="TextBox 10"/>
+          <p:cNvSpPr txBox="1"/>
+          <p:nvPr/>
+        </p:nvSpPr>
+        <p:spPr>
+          <a:xfrm>
+            <a:off x="10607040" y="6446520"/>
+            <a:ext cx="1097280" cy="320040"/>
+          </a:xfrm>
+          <a:prstGeom prst="rect">
+            <a:avLst/>
+          </a:prstGeom>
+          <a:noFill/>
+        </p:spPr>
+        <p:txBody>
+          <a:bodyPr wrap="none">
+            <a:spAutoFit/>
+          </a:bodyPr>
+          <a:lstStyle/>
+          <a:p>
+            <a:pPr algn="r"/>
+            <a:r>
+              <a:rPr sz="1000" b="1" i="0">
+                <a:solidFill>
+                  <a:srgbClr val="8A97A5"/>
+                </a:solidFill>
+                <a:latin typeface="Segoe UI"/>
+              </a:rPr>
+              <a:t>28</a:t>
+            </a:r>
+          </a:p>
+        </p:txBody>
+      </p:sp>
+    </p:spTree>
+  </p:cSld>
+  <p:clrMapOvr>
+    <a:masterClrMapping/>
+  </p:clrMapOvr>
+</p:sld>
+</file>
+
+<file path=ppt/slides/slide29.xml><?xml version="1.0" encoding="utf-8"?>
+<p:sld xmlns:a="http://schemas.openxmlformats.org/drawingml/2006/main" xmlns:p="http://schemas.openxmlformats.org/presentationml/2006/main" xmlns:r="http://schemas.openxmlformats.org/officeDocument/2006/relationships">
+  <p:cSld>
+    <p:bg>
+      <p:bgPr>
+        <a:solidFill>
+          <a:srgbClr val="F5F7FA"/>
+        </a:solidFill>
+        <a:effectLst/>
+      </p:bgPr>
+    </p:bg>
+    <p:spTree>
+      <p:nvGrpSpPr>
+        <p:cNvPr id="1" name=""/>
+        <p:cNvGrpSpPr/>
+        <p:nvPr/>
+      </p:nvGrpSpPr>
+      <p:grpSpPr/>
+      <p:sp>
+        <p:nvSpPr>
+          <p:cNvPr id="2" name="Rectangle 1"/>
+          <p:cNvSpPr/>
+          <p:nvPr/>
+        </p:nvSpPr>
+        <p:spPr>
+          <a:xfrm>
+            <a:off x="0" y="0"/>
+            <a:ext cx="164592" cy="6858000"/>
+          </a:xfrm>
+          <a:prstGeom prst="rect">
+            <a:avLst/>
+          </a:prstGeom>
+          <a:solidFill>
+            <a:srgbClr val="FF6B35"/>
+          </a:solidFill>
+          <a:ln>
+            <a:noFill/>
+          </a:ln>
+        </p:spPr>
+        <p:style>
+          <a:lnRef idx="1">
+            <a:schemeClr val="accent1"/>
+          </a:lnRef>
+          <a:fillRef idx="3">
+            <a:schemeClr val="accent1"/>
+          </a:fillRef>
+          <a:effectRef idx="2">
+            <a:schemeClr val="accent1"/>
+          </a:effectRef>
+          <a:fontRef idx="minor">
+            <a:schemeClr val="lt1"/>
+          </a:fontRef>
+        </p:style>
+        <p:txBody>
+          <a:bodyPr rtlCol="0" anchor="ctr"/>
+          <a:lstStyle/>
+          <a:p>
+            <a:pPr algn="ctr"/>
+          </a:p>
+        </p:txBody>
+      </p:sp>
+      <p:sp>
+        <p:nvSpPr>
+          <p:cNvPr id="3" name="Oval 2"/>
+          <p:cNvSpPr/>
+          <p:nvPr/>
+        </p:nvSpPr>
+        <p:spPr>
+          <a:xfrm>
+            <a:off x="10561320" y="411480"/>
+            <a:ext cx="1143000" cy="1143000"/>
+          </a:xfrm>
+          <a:prstGeom prst="ellipse">
+            <a:avLst/>
+          </a:prstGeom>
+          <a:solidFill>
+            <a:srgbClr val="FDE8DF"/>
+          </a:solidFill>
+          <a:ln>
+            <a:noFill/>
+          </a:ln>
+        </p:spPr>
+        <p:style>
+          <a:lnRef idx="1">
+            <a:schemeClr val="accent1"/>
+          </a:lnRef>
+          <a:fillRef idx="3">
+            <a:schemeClr val="accent1"/>
+          </a:fillRef>
+          <a:effectRef idx="2">
+            <a:schemeClr val="accent1"/>
+          </a:effectRef>
+          <a:fontRef idx="minor">
+            <a:schemeClr val="lt1"/>
+          </a:fontRef>
+        </p:style>
+        <p:txBody>
+          <a:bodyPr rtlCol="0" anchor="ctr"/>
+          <a:lstStyle/>
+          <a:p>
+            <a:pPr algn="ctr"/>
+          </a:p>
+        </p:txBody>
+      </p:sp>
+      <p:sp>
+        <p:nvSpPr>
+          <p:cNvPr id="4" name="TextBox 3"/>
+          <p:cNvSpPr txBox="1"/>
+          <p:nvPr/>
+        </p:nvSpPr>
+        <p:spPr>
+          <a:xfrm>
+            <a:off x="10561320" y="457200"/>
+            <a:ext cx="1143000" cy="1051560"/>
+          </a:xfrm>
+          <a:prstGeom prst="rect">
+            <a:avLst/>
+          </a:prstGeom>
+          <a:noFill/>
+        </p:spPr>
+        <p:txBody>
+          <a:bodyPr wrap="none">
+            <a:spAutoFit/>
+          </a:bodyPr>
+          <a:lstStyle/>
+          <a:p>
+            <a:pPr algn="ctr"/>
+            <a:r>
+              <a:rPr sz="3600" b="0" i="0">
+                <a:solidFill>
+                  <a:srgbClr val="243140"/>
+                </a:solidFill>
+                <a:latin typeface="Segoe UI"/>
+              </a:rPr>
+              <a:t>📸</a:t>
+            </a:r>
+          </a:p>
+        </p:txBody>
+      </p:sp>
+      <p:sp>
+        <p:nvSpPr>
+          <p:cNvPr id="5" name="TextBox 4"/>
+          <p:cNvSpPr txBox="1"/>
+          <p:nvPr/>
+        </p:nvSpPr>
+        <p:spPr>
+          <a:xfrm>
+            <a:off x="502920" y="411480"/>
+            <a:ext cx="9692640" cy="777240"/>
+          </a:xfrm>
+          <a:prstGeom prst="rect">
+            <a:avLst/>
+          </a:prstGeom>
+          <a:noFill/>
+        </p:spPr>
+        <p:txBody>
+          <a:bodyPr wrap="none">
+            <a:spAutoFit/>
+          </a:bodyPr>
+          <a:lstStyle/>
+          <a:p>
+            <a:r>
+              <a:rPr sz="3200" b="1" i="0">
+                <a:solidFill>
+                  <a:srgbClr val="1E2A38"/>
+                </a:solidFill>
+                <a:latin typeface="Segoe UI"/>
+              </a:rPr>
+              <a:t>User Profile</a:t>
+            </a:r>
+          </a:p>
+        </p:txBody>
+      </p:sp>
+      <p:sp>
+        <p:nvSpPr>
+          <p:cNvPr id="6" name="Rounded Rectangle 5"/>
+          <p:cNvSpPr/>
+          <p:nvPr/>
+        </p:nvSpPr>
+        <p:spPr>
+          <a:xfrm>
+            <a:off x="548640" y="1170432"/>
+            <a:ext cx="2286000" cy="82296"/>
+          </a:xfrm>
+          <a:prstGeom prst="roundRect">
+            <a:avLst/>
+          </a:prstGeom>
+          <a:solidFill>
+            <a:srgbClr val="FF6B35"/>
+          </a:solidFill>
+          <a:ln>
+            <a:noFill/>
+          </a:ln>
+        </p:spPr>
+        <p:style>
+          <a:lnRef idx="1">
+            <a:schemeClr val="accent1"/>
+          </a:lnRef>
+          <a:fillRef idx="3">
+            <a:schemeClr val="accent1"/>
+          </a:fillRef>
+          <a:effectRef idx="2">
+            <a:schemeClr val="accent1"/>
+          </a:effectRef>
+          <a:fontRef idx="minor">
+            <a:schemeClr val="lt1"/>
+          </a:fontRef>
+        </p:style>
+        <p:txBody>
+          <a:bodyPr rtlCol="0" anchor="ctr"/>
+          <a:lstStyle/>
+          <a:p>
+            <a:pPr algn="ctr"/>
+          </a:p>
+        </p:txBody>
+      </p:sp>
+      <p:sp>
+        <p:nvSpPr>
+          <p:cNvPr id="7" name="Rounded Rectangle 6"/>
+          <p:cNvSpPr/>
+          <p:nvPr/>
+        </p:nvSpPr>
+        <p:spPr>
+          <a:xfrm>
+            <a:off x="2828357" y="1490472"/>
+            <a:ext cx="6534980" cy="4745736"/>
+          </a:xfrm>
+          <a:prstGeom prst="roundRect">
+            <a:avLst/>
+          </a:prstGeom>
+          <a:solidFill>
+            <a:srgbClr val="FFFFFF"/>
+          </a:solidFill>
+          <a:ln>
+            <a:noFill/>
+          </a:ln>
+        </p:spPr>
+        <p:style>
+          <a:lnRef idx="1">
+            <a:schemeClr val="accent1"/>
+          </a:lnRef>
+          <a:fillRef idx="3">
+            <a:schemeClr val="accent1"/>
+          </a:fillRef>
+          <a:effectRef idx="2">
+            <a:schemeClr val="accent1"/>
+          </a:effectRef>
+          <a:fontRef idx="minor">
+            <a:schemeClr val="lt1"/>
+          </a:fontRef>
+        </p:style>
+        <p:txBody>
+          <a:bodyPr rtlCol="0" anchor="ctr"/>
+          <a:lstStyle/>
+          <a:p>
+            <a:pPr algn="ctr"/>
+          </a:p>
+        </p:txBody>
+      </p:sp>
+      <p:pic>
+        <p:nvPicPr>
+          <p:cNvPr id="8" name="Picture 7" descr="09_profile.png"/>
+          <p:cNvPicPr>
+            <a:picLocks noChangeAspect="1"/>
+          </p:cNvPicPr>
+          <p:nvPr/>
+        </p:nvPicPr>
+        <p:blipFill>
+          <a:blip r:embed="rId2"/>
+          <a:stretch>
+            <a:fillRect/>
+          </a:stretch>
+        </p:blipFill>
+        <p:spPr>
+          <a:xfrm>
+            <a:off x="2938085" y="1600200"/>
+            <a:ext cx="6315524" cy="4526280"/>
+          </a:xfrm>
+          <a:prstGeom prst="rect">
+            <a:avLst/>
+          </a:prstGeom>
+        </p:spPr>
+      </p:pic>
+      <p:sp>
+        <p:nvSpPr>
+          <p:cNvPr id="9" name="Rectangle 8"/>
+          <p:cNvSpPr/>
+          <p:nvPr/>
+        </p:nvSpPr>
+        <p:spPr>
+          <a:xfrm>
+            <a:off x="502920" y="6400800"/>
+            <a:ext cx="11201400" cy="17780"/>
+          </a:xfrm>
+          <a:prstGeom prst="rect">
+            <a:avLst/>
+          </a:prstGeom>
+          <a:solidFill>
+            <a:srgbClr val="DDE3E9"/>
+          </a:solidFill>
+          <a:ln>
+            <a:noFill/>
+          </a:ln>
+        </p:spPr>
+        <p:style>
+          <a:lnRef idx="1">
+            <a:schemeClr val="accent1"/>
+          </a:lnRef>
+          <a:fillRef idx="3">
+            <a:schemeClr val="accent1"/>
+          </a:fillRef>
+          <a:effectRef idx="2">
+            <a:schemeClr val="accent1"/>
+          </a:effectRef>
+          <a:fontRef idx="minor">
+            <a:schemeClr val="lt1"/>
+          </a:fontRef>
+        </p:style>
+        <p:txBody>
+          <a:bodyPr rtlCol="0" anchor="ctr"/>
+          <a:lstStyle/>
+          <a:p>
+            <a:pPr algn="ctr"/>
+          </a:p>
+        </p:txBody>
+      </p:sp>
+      <p:sp>
+        <p:nvSpPr>
+          <p:cNvPr id="10" name="TextBox 9"/>
+          <p:cNvSpPr txBox="1"/>
+          <p:nvPr/>
+        </p:nvSpPr>
+        <p:spPr>
+          <a:xfrm>
+            <a:off x="502920" y="6446520"/>
+            <a:ext cx="8229600" cy="320040"/>
+          </a:xfrm>
+          <a:prstGeom prst="rect">
+            <a:avLst/>
+          </a:prstGeom>
+          <a:noFill/>
+        </p:spPr>
+        <p:txBody>
+          <a:bodyPr wrap="none">
+            <a:spAutoFit/>
+          </a:bodyPr>
+          <a:lstStyle/>
+          <a:p>
+            <a:r>
+              <a:rPr sz="1000" b="0" i="0">
+                <a:solidFill>
+                  <a:srgbClr val="8A97A5"/>
+                </a:solidFill>
+                <a:latin typeface="Segoe UI"/>
+              </a:rPr>
+              <a:t>BistroSaaS  |  Restaurant Management System</a:t>
+            </a:r>
+          </a:p>
+        </p:txBody>
+      </p:sp>
+      <p:sp>
+        <p:nvSpPr>
+          <p:cNvPr id="11" name="TextBox 10"/>
+          <p:cNvSpPr txBox="1"/>
+          <p:nvPr/>
+        </p:nvSpPr>
+        <p:spPr>
+          <a:xfrm>
+            <a:off x="10607040" y="6446520"/>
+            <a:ext cx="1097280" cy="320040"/>
+          </a:xfrm>
+          <a:prstGeom prst="rect">
+            <a:avLst/>
+          </a:prstGeom>
+          <a:noFill/>
+        </p:spPr>
+        <p:txBody>
+          <a:bodyPr wrap="none">
+            <a:spAutoFit/>
+          </a:bodyPr>
+          <a:lstStyle/>
+          <a:p>
+            <a:pPr algn="r"/>
+            <a:r>
+              <a:rPr sz="1000" b="1" i="0">
+                <a:solidFill>
+                  <a:srgbClr val="8A97A5"/>
+                </a:solidFill>
+                <a:latin typeface="Segoe UI"/>
+              </a:rPr>
+              <a:t>29</a:t>
             </a:r>
           </a:p>
         </p:txBody>
@@ -9363,6 +13116,1132 @@
                 <a:latin typeface="Segoe UI"/>
               </a:rPr>
               <a:t>3</a:t>
+            </a:r>
+          </a:p>
+        </p:txBody>
+      </p:sp>
+    </p:spTree>
+  </p:cSld>
+  <p:clrMapOvr>
+    <a:masterClrMapping/>
+  </p:clrMapOvr>
+</p:sld>
+</file>
+
+<file path=ppt/slides/slide30.xml><?xml version="1.0" encoding="utf-8"?>
+<p:sld xmlns:a="http://schemas.openxmlformats.org/drawingml/2006/main" xmlns:p="http://schemas.openxmlformats.org/presentationml/2006/main" xmlns:r="http://schemas.openxmlformats.org/officeDocument/2006/relationships">
+  <p:cSld>
+    <p:bg>
+      <p:bgPr>
+        <a:solidFill>
+          <a:srgbClr val="F5F7FA"/>
+        </a:solidFill>
+        <a:effectLst/>
+      </p:bgPr>
+    </p:bg>
+    <p:spTree>
+      <p:nvGrpSpPr>
+        <p:cNvPr id="1" name=""/>
+        <p:cNvGrpSpPr/>
+        <p:nvPr/>
+      </p:nvGrpSpPr>
+      <p:grpSpPr/>
+      <p:sp>
+        <p:nvSpPr>
+          <p:cNvPr id="2" name="Rectangle 1"/>
+          <p:cNvSpPr/>
+          <p:nvPr/>
+        </p:nvSpPr>
+        <p:spPr>
+          <a:xfrm>
+            <a:off x="0" y="0"/>
+            <a:ext cx="164592" cy="6858000"/>
+          </a:xfrm>
+          <a:prstGeom prst="rect">
+            <a:avLst/>
+          </a:prstGeom>
+          <a:solidFill>
+            <a:srgbClr val="FF6B35"/>
+          </a:solidFill>
+          <a:ln>
+            <a:noFill/>
+          </a:ln>
+        </p:spPr>
+        <p:style>
+          <a:lnRef idx="1">
+            <a:schemeClr val="accent1"/>
+          </a:lnRef>
+          <a:fillRef idx="3">
+            <a:schemeClr val="accent1"/>
+          </a:fillRef>
+          <a:effectRef idx="2">
+            <a:schemeClr val="accent1"/>
+          </a:effectRef>
+          <a:fontRef idx="minor">
+            <a:schemeClr val="lt1"/>
+          </a:fontRef>
+        </p:style>
+        <p:txBody>
+          <a:bodyPr rtlCol="0" anchor="ctr"/>
+          <a:lstStyle/>
+          <a:p>
+            <a:pPr algn="ctr"/>
+          </a:p>
+        </p:txBody>
+      </p:sp>
+      <p:sp>
+        <p:nvSpPr>
+          <p:cNvPr id="3" name="Oval 2"/>
+          <p:cNvSpPr/>
+          <p:nvPr/>
+        </p:nvSpPr>
+        <p:spPr>
+          <a:xfrm>
+            <a:off x="10561320" y="411480"/>
+            <a:ext cx="1143000" cy="1143000"/>
+          </a:xfrm>
+          <a:prstGeom prst="ellipse">
+            <a:avLst/>
+          </a:prstGeom>
+          <a:solidFill>
+            <a:srgbClr val="FDE8DF"/>
+          </a:solidFill>
+          <a:ln>
+            <a:noFill/>
+          </a:ln>
+        </p:spPr>
+        <p:style>
+          <a:lnRef idx="1">
+            <a:schemeClr val="accent1"/>
+          </a:lnRef>
+          <a:fillRef idx="3">
+            <a:schemeClr val="accent1"/>
+          </a:fillRef>
+          <a:effectRef idx="2">
+            <a:schemeClr val="accent1"/>
+          </a:effectRef>
+          <a:fontRef idx="minor">
+            <a:schemeClr val="lt1"/>
+          </a:fontRef>
+        </p:style>
+        <p:txBody>
+          <a:bodyPr rtlCol="0" anchor="ctr"/>
+          <a:lstStyle/>
+          <a:p>
+            <a:pPr algn="ctr"/>
+          </a:p>
+        </p:txBody>
+      </p:sp>
+      <p:sp>
+        <p:nvSpPr>
+          <p:cNvPr id="4" name="TextBox 3"/>
+          <p:cNvSpPr txBox="1"/>
+          <p:nvPr/>
+        </p:nvSpPr>
+        <p:spPr>
+          <a:xfrm>
+            <a:off x="10561320" y="457200"/>
+            <a:ext cx="1143000" cy="1051560"/>
+          </a:xfrm>
+          <a:prstGeom prst="rect">
+            <a:avLst/>
+          </a:prstGeom>
+          <a:noFill/>
+        </p:spPr>
+        <p:txBody>
+          <a:bodyPr wrap="none">
+            <a:spAutoFit/>
+          </a:bodyPr>
+          <a:lstStyle/>
+          <a:p>
+            <a:pPr algn="ctr"/>
+            <a:r>
+              <a:rPr sz="3600" b="0" i="0">
+                <a:solidFill>
+                  <a:srgbClr val="243140"/>
+                </a:solidFill>
+                <a:latin typeface="Segoe UI"/>
+              </a:rPr>
+              <a:t>📸</a:t>
+            </a:r>
+          </a:p>
+        </p:txBody>
+      </p:sp>
+      <p:sp>
+        <p:nvSpPr>
+          <p:cNvPr id="5" name="TextBox 4"/>
+          <p:cNvSpPr txBox="1"/>
+          <p:nvPr/>
+        </p:nvSpPr>
+        <p:spPr>
+          <a:xfrm>
+            <a:off x="502920" y="411480"/>
+            <a:ext cx="9692640" cy="777240"/>
+          </a:xfrm>
+          <a:prstGeom prst="rect">
+            <a:avLst/>
+          </a:prstGeom>
+          <a:noFill/>
+        </p:spPr>
+        <p:txBody>
+          <a:bodyPr wrap="none">
+            <a:spAutoFit/>
+          </a:bodyPr>
+          <a:lstStyle/>
+          <a:p>
+            <a:r>
+              <a:rPr sz="3200" b="1" i="0">
+                <a:solidFill>
+                  <a:srgbClr val="1E2A38"/>
+                </a:solidFill>
+                <a:latin typeface="Segoe UI"/>
+              </a:rPr>
+              <a:t>Django Admin Panel</a:t>
+            </a:r>
+          </a:p>
+        </p:txBody>
+      </p:sp>
+      <p:sp>
+        <p:nvSpPr>
+          <p:cNvPr id="6" name="Rounded Rectangle 5"/>
+          <p:cNvSpPr/>
+          <p:nvPr/>
+        </p:nvSpPr>
+        <p:spPr>
+          <a:xfrm>
+            <a:off x="548640" y="1170432"/>
+            <a:ext cx="2286000" cy="82296"/>
+          </a:xfrm>
+          <a:prstGeom prst="roundRect">
+            <a:avLst/>
+          </a:prstGeom>
+          <a:solidFill>
+            <a:srgbClr val="FF6B35"/>
+          </a:solidFill>
+          <a:ln>
+            <a:noFill/>
+          </a:ln>
+        </p:spPr>
+        <p:style>
+          <a:lnRef idx="1">
+            <a:schemeClr val="accent1"/>
+          </a:lnRef>
+          <a:fillRef idx="3">
+            <a:schemeClr val="accent1"/>
+          </a:fillRef>
+          <a:effectRef idx="2">
+            <a:schemeClr val="accent1"/>
+          </a:effectRef>
+          <a:fontRef idx="minor">
+            <a:schemeClr val="lt1"/>
+          </a:fontRef>
+        </p:style>
+        <p:txBody>
+          <a:bodyPr rtlCol="0" anchor="ctr"/>
+          <a:lstStyle/>
+          <a:p>
+            <a:pPr algn="ctr"/>
+          </a:p>
+        </p:txBody>
+      </p:sp>
+      <p:sp>
+        <p:nvSpPr>
+          <p:cNvPr id="7" name="Rounded Rectangle 6"/>
+          <p:cNvSpPr/>
+          <p:nvPr/>
+        </p:nvSpPr>
+        <p:spPr>
+          <a:xfrm>
+            <a:off x="2551176" y="1490472"/>
+            <a:ext cx="7089343" cy="4745736"/>
+          </a:xfrm>
+          <a:prstGeom prst="roundRect">
+            <a:avLst/>
+          </a:prstGeom>
+          <a:solidFill>
+            <a:srgbClr val="FFFFFF"/>
+          </a:solidFill>
+          <a:ln>
+            <a:noFill/>
+          </a:ln>
+        </p:spPr>
+        <p:style>
+          <a:lnRef idx="1">
+            <a:schemeClr val="accent1"/>
+          </a:lnRef>
+          <a:fillRef idx="3">
+            <a:schemeClr val="accent1"/>
+          </a:fillRef>
+          <a:effectRef idx="2">
+            <a:schemeClr val="accent1"/>
+          </a:effectRef>
+          <a:fontRef idx="minor">
+            <a:schemeClr val="lt1"/>
+          </a:fontRef>
+        </p:style>
+        <p:txBody>
+          <a:bodyPr rtlCol="0" anchor="ctr"/>
+          <a:lstStyle/>
+          <a:p>
+            <a:pPr algn="ctr"/>
+          </a:p>
+        </p:txBody>
+      </p:sp>
+      <p:pic>
+        <p:nvPicPr>
+          <p:cNvPr id="8" name="Picture 7" descr="10_admin.png"/>
+          <p:cNvPicPr>
+            <a:picLocks noChangeAspect="1"/>
+          </p:cNvPicPr>
+          <p:nvPr/>
+        </p:nvPicPr>
+        <p:blipFill>
+          <a:blip r:embed="rId2"/>
+          <a:stretch>
+            <a:fillRect/>
+          </a:stretch>
+        </p:blipFill>
+        <p:spPr>
+          <a:xfrm>
+            <a:off x="2660904" y="1600200"/>
+            <a:ext cx="6869887" cy="4526280"/>
+          </a:xfrm>
+          <a:prstGeom prst="rect">
+            <a:avLst/>
+          </a:prstGeom>
+        </p:spPr>
+      </p:pic>
+      <p:sp>
+        <p:nvSpPr>
+          <p:cNvPr id="9" name="Rectangle 8"/>
+          <p:cNvSpPr/>
+          <p:nvPr/>
+        </p:nvSpPr>
+        <p:spPr>
+          <a:xfrm>
+            <a:off x="502920" y="6400800"/>
+            <a:ext cx="11201400" cy="17780"/>
+          </a:xfrm>
+          <a:prstGeom prst="rect">
+            <a:avLst/>
+          </a:prstGeom>
+          <a:solidFill>
+            <a:srgbClr val="DDE3E9"/>
+          </a:solidFill>
+          <a:ln>
+            <a:noFill/>
+          </a:ln>
+        </p:spPr>
+        <p:style>
+          <a:lnRef idx="1">
+            <a:schemeClr val="accent1"/>
+          </a:lnRef>
+          <a:fillRef idx="3">
+            <a:schemeClr val="accent1"/>
+          </a:fillRef>
+          <a:effectRef idx="2">
+            <a:schemeClr val="accent1"/>
+          </a:effectRef>
+          <a:fontRef idx="minor">
+            <a:schemeClr val="lt1"/>
+          </a:fontRef>
+        </p:style>
+        <p:txBody>
+          <a:bodyPr rtlCol="0" anchor="ctr"/>
+          <a:lstStyle/>
+          <a:p>
+            <a:pPr algn="ctr"/>
+          </a:p>
+        </p:txBody>
+      </p:sp>
+      <p:sp>
+        <p:nvSpPr>
+          <p:cNvPr id="10" name="TextBox 9"/>
+          <p:cNvSpPr txBox="1"/>
+          <p:nvPr/>
+        </p:nvSpPr>
+        <p:spPr>
+          <a:xfrm>
+            <a:off x="502920" y="6446520"/>
+            <a:ext cx="8229600" cy="320040"/>
+          </a:xfrm>
+          <a:prstGeom prst="rect">
+            <a:avLst/>
+          </a:prstGeom>
+          <a:noFill/>
+        </p:spPr>
+        <p:txBody>
+          <a:bodyPr wrap="none">
+            <a:spAutoFit/>
+          </a:bodyPr>
+          <a:lstStyle/>
+          <a:p>
+            <a:r>
+              <a:rPr sz="1000" b="0" i="0">
+                <a:solidFill>
+                  <a:srgbClr val="8A97A5"/>
+                </a:solidFill>
+                <a:latin typeface="Segoe UI"/>
+              </a:rPr>
+              <a:t>BistroSaaS  |  Restaurant Management System</a:t>
+            </a:r>
+          </a:p>
+        </p:txBody>
+      </p:sp>
+      <p:sp>
+        <p:nvSpPr>
+          <p:cNvPr id="11" name="TextBox 10"/>
+          <p:cNvSpPr txBox="1"/>
+          <p:nvPr/>
+        </p:nvSpPr>
+        <p:spPr>
+          <a:xfrm>
+            <a:off x="10607040" y="6446520"/>
+            <a:ext cx="1097280" cy="320040"/>
+          </a:xfrm>
+          <a:prstGeom prst="rect">
+            <a:avLst/>
+          </a:prstGeom>
+          <a:noFill/>
+        </p:spPr>
+        <p:txBody>
+          <a:bodyPr wrap="none">
+            <a:spAutoFit/>
+          </a:bodyPr>
+          <a:lstStyle/>
+          <a:p>
+            <a:pPr algn="r"/>
+            <a:r>
+              <a:rPr sz="1000" b="1" i="0">
+                <a:solidFill>
+                  <a:srgbClr val="8A97A5"/>
+                </a:solidFill>
+                <a:latin typeface="Segoe UI"/>
+              </a:rPr>
+              <a:t>30</a:t>
+            </a:r>
+          </a:p>
+        </p:txBody>
+      </p:sp>
+    </p:spTree>
+  </p:cSld>
+  <p:clrMapOvr>
+    <a:masterClrMapping/>
+  </p:clrMapOvr>
+</p:sld>
+</file>
+
+<file path=ppt/slides/slide31.xml><?xml version="1.0" encoding="utf-8"?>
+<p:sld xmlns:a="http://schemas.openxmlformats.org/drawingml/2006/main" xmlns:p="http://schemas.openxmlformats.org/presentationml/2006/main" xmlns:r="http://schemas.openxmlformats.org/officeDocument/2006/relationships">
+  <p:cSld>
+    <p:bg>
+      <p:bgPr>
+        <a:solidFill>
+          <a:srgbClr val="F5F7FA"/>
+        </a:solidFill>
+        <a:effectLst/>
+      </p:bgPr>
+    </p:bg>
+    <p:spTree>
+      <p:nvGrpSpPr>
+        <p:cNvPr id="1" name=""/>
+        <p:cNvGrpSpPr/>
+        <p:nvPr/>
+      </p:nvGrpSpPr>
+      <p:grpSpPr/>
+      <p:sp>
+        <p:nvSpPr>
+          <p:cNvPr id="2" name="Rectangle 1"/>
+          <p:cNvSpPr/>
+          <p:nvPr/>
+        </p:nvSpPr>
+        <p:spPr>
+          <a:xfrm>
+            <a:off x="0" y="0"/>
+            <a:ext cx="164592" cy="6858000"/>
+          </a:xfrm>
+          <a:prstGeom prst="rect">
+            <a:avLst/>
+          </a:prstGeom>
+          <a:solidFill>
+            <a:srgbClr val="FF6B35"/>
+          </a:solidFill>
+          <a:ln>
+            <a:noFill/>
+          </a:ln>
+        </p:spPr>
+        <p:style>
+          <a:lnRef idx="1">
+            <a:schemeClr val="accent1"/>
+          </a:lnRef>
+          <a:fillRef idx="3">
+            <a:schemeClr val="accent1"/>
+          </a:fillRef>
+          <a:effectRef idx="2">
+            <a:schemeClr val="accent1"/>
+          </a:effectRef>
+          <a:fontRef idx="minor">
+            <a:schemeClr val="lt1"/>
+          </a:fontRef>
+        </p:style>
+        <p:txBody>
+          <a:bodyPr rtlCol="0" anchor="ctr"/>
+          <a:lstStyle/>
+          <a:p>
+            <a:pPr algn="ctr"/>
+          </a:p>
+        </p:txBody>
+      </p:sp>
+      <p:sp>
+        <p:nvSpPr>
+          <p:cNvPr id="3" name="Oval 2"/>
+          <p:cNvSpPr/>
+          <p:nvPr/>
+        </p:nvSpPr>
+        <p:spPr>
+          <a:xfrm>
+            <a:off x="10561320" y="411480"/>
+            <a:ext cx="1143000" cy="1143000"/>
+          </a:xfrm>
+          <a:prstGeom prst="ellipse">
+            <a:avLst/>
+          </a:prstGeom>
+          <a:solidFill>
+            <a:srgbClr val="FDE8DF"/>
+          </a:solidFill>
+          <a:ln>
+            <a:noFill/>
+          </a:ln>
+        </p:spPr>
+        <p:style>
+          <a:lnRef idx="1">
+            <a:schemeClr val="accent1"/>
+          </a:lnRef>
+          <a:fillRef idx="3">
+            <a:schemeClr val="accent1"/>
+          </a:fillRef>
+          <a:effectRef idx="2">
+            <a:schemeClr val="accent1"/>
+          </a:effectRef>
+          <a:fontRef idx="minor">
+            <a:schemeClr val="lt1"/>
+          </a:fontRef>
+        </p:style>
+        <p:txBody>
+          <a:bodyPr rtlCol="0" anchor="ctr"/>
+          <a:lstStyle/>
+          <a:p>
+            <a:pPr algn="ctr"/>
+          </a:p>
+        </p:txBody>
+      </p:sp>
+      <p:sp>
+        <p:nvSpPr>
+          <p:cNvPr id="4" name="TextBox 3"/>
+          <p:cNvSpPr txBox="1"/>
+          <p:nvPr/>
+        </p:nvSpPr>
+        <p:spPr>
+          <a:xfrm>
+            <a:off x="10561320" y="457200"/>
+            <a:ext cx="1143000" cy="1051560"/>
+          </a:xfrm>
+          <a:prstGeom prst="rect">
+            <a:avLst/>
+          </a:prstGeom>
+          <a:noFill/>
+        </p:spPr>
+        <p:txBody>
+          <a:bodyPr wrap="none">
+            <a:spAutoFit/>
+          </a:bodyPr>
+          <a:lstStyle/>
+          <a:p>
+            <a:pPr algn="ctr"/>
+            <a:r>
+              <a:rPr sz="3600" b="0" i="0">
+                <a:solidFill>
+                  <a:srgbClr val="243140"/>
+                </a:solidFill>
+                <a:latin typeface="Segoe UI"/>
+              </a:rPr>
+              <a:t>📸</a:t>
+            </a:r>
+          </a:p>
+        </p:txBody>
+      </p:sp>
+      <p:sp>
+        <p:nvSpPr>
+          <p:cNvPr id="5" name="TextBox 4"/>
+          <p:cNvSpPr txBox="1"/>
+          <p:nvPr/>
+        </p:nvSpPr>
+        <p:spPr>
+          <a:xfrm>
+            <a:off x="502920" y="411480"/>
+            <a:ext cx="9692640" cy="777240"/>
+          </a:xfrm>
+          <a:prstGeom prst="rect">
+            <a:avLst/>
+          </a:prstGeom>
+          <a:noFill/>
+        </p:spPr>
+        <p:txBody>
+          <a:bodyPr wrap="none">
+            <a:spAutoFit/>
+          </a:bodyPr>
+          <a:lstStyle/>
+          <a:p>
+            <a:r>
+              <a:rPr sz="3200" b="1" i="0">
+                <a:solidFill>
+                  <a:srgbClr val="1E2A38"/>
+                </a:solidFill>
+                <a:latin typeface="Segoe UI"/>
+              </a:rPr>
+              <a:t>REST API (/api/menu/)</a:t>
+            </a:r>
+          </a:p>
+        </p:txBody>
+      </p:sp>
+      <p:sp>
+        <p:nvSpPr>
+          <p:cNvPr id="6" name="Rounded Rectangle 5"/>
+          <p:cNvSpPr/>
+          <p:nvPr/>
+        </p:nvSpPr>
+        <p:spPr>
+          <a:xfrm>
+            <a:off x="548640" y="1170432"/>
+            <a:ext cx="2286000" cy="82296"/>
+          </a:xfrm>
+          <a:prstGeom prst="roundRect">
+            <a:avLst/>
+          </a:prstGeom>
+          <a:solidFill>
+            <a:srgbClr val="FF6B35"/>
+          </a:solidFill>
+          <a:ln>
+            <a:noFill/>
+          </a:ln>
+        </p:spPr>
+        <p:style>
+          <a:lnRef idx="1">
+            <a:schemeClr val="accent1"/>
+          </a:lnRef>
+          <a:fillRef idx="3">
+            <a:schemeClr val="accent1"/>
+          </a:fillRef>
+          <a:effectRef idx="2">
+            <a:schemeClr val="accent1"/>
+          </a:effectRef>
+          <a:fontRef idx="minor">
+            <a:schemeClr val="lt1"/>
+          </a:fontRef>
+        </p:style>
+        <p:txBody>
+          <a:bodyPr rtlCol="0" anchor="ctr"/>
+          <a:lstStyle/>
+          <a:p>
+            <a:pPr algn="ctr"/>
+          </a:p>
+        </p:txBody>
+      </p:sp>
+      <p:sp>
+        <p:nvSpPr>
+          <p:cNvPr id="7" name="Rounded Rectangle 6"/>
+          <p:cNvSpPr/>
+          <p:nvPr/>
+        </p:nvSpPr>
+        <p:spPr>
+          <a:xfrm>
+            <a:off x="3203537" y="1490472"/>
+            <a:ext cx="5784621" cy="4745736"/>
+          </a:xfrm>
+          <a:prstGeom prst="roundRect">
+            <a:avLst/>
+          </a:prstGeom>
+          <a:solidFill>
+            <a:srgbClr val="FFFFFF"/>
+          </a:solidFill>
+          <a:ln>
+            <a:noFill/>
+          </a:ln>
+        </p:spPr>
+        <p:style>
+          <a:lnRef idx="1">
+            <a:schemeClr val="accent1"/>
+          </a:lnRef>
+          <a:fillRef idx="3">
+            <a:schemeClr val="accent1"/>
+          </a:fillRef>
+          <a:effectRef idx="2">
+            <a:schemeClr val="accent1"/>
+          </a:effectRef>
+          <a:fontRef idx="minor">
+            <a:schemeClr val="lt1"/>
+          </a:fontRef>
+        </p:style>
+        <p:txBody>
+          <a:bodyPr rtlCol="0" anchor="ctr"/>
+          <a:lstStyle/>
+          <a:p>
+            <a:pPr algn="ctr"/>
+          </a:p>
+        </p:txBody>
+      </p:sp>
+      <p:pic>
+        <p:nvPicPr>
+          <p:cNvPr id="8" name="Picture 7" descr="11_api.png"/>
+          <p:cNvPicPr>
+            <a:picLocks noChangeAspect="1"/>
+          </p:cNvPicPr>
+          <p:nvPr/>
+        </p:nvPicPr>
+        <p:blipFill>
+          <a:blip r:embed="rId2"/>
+          <a:stretch>
+            <a:fillRect/>
+          </a:stretch>
+        </p:blipFill>
+        <p:spPr>
+          <a:xfrm>
+            <a:off x="3313265" y="1600200"/>
+            <a:ext cx="5565165" cy="4526280"/>
+          </a:xfrm>
+          <a:prstGeom prst="rect">
+            <a:avLst/>
+          </a:prstGeom>
+        </p:spPr>
+      </p:pic>
+      <p:sp>
+        <p:nvSpPr>
+          <p:cNvPr id="9" name="Rectangle 8"/>
+          <p:cNvSpPr/>
+          <p:nvPr/>
+        </p:nvSpPr>
+        <p:spPr>
+          <a:xfrm>
+            <a:off x="502920" y="6400800"/>
+            <a:ext cx="11201400" cy="17780"/>
+          </a:xfrm>
+          <a:prstGeom prst="rect">
+            <a:avLst/>
+          </a:prstGeom>
+          <a:solidFill>
+            <a:srgbClr val="DDE3E9"/>
+          </a:solidFill>
+          <a:ln>
+            <a:noFill/>
+          </a:ln>
+        </p:spPr>
+        <p:style>
+          <a:lnRef idx="1">
+            <a:schemeClr val="accent1"/>
+          </a:lnRef>
+          <a:fillRef idx="3">
+            <a:schemeClr val="accent1"/>
+          </a:fillRef>
+          <a:effectRef idx="2">
+            <a:schemeClr val="accent1"/>
+          </a:effectRef>
+          <a:fontRef idx="minor">
+            <a:schemeClr val="lt1"/>
+          </a:fontRef>
+        </p:style>
+        <p:txBody>
+          <a:bodyPr rtlCol="0" anchor="ctr"/>
+          <a:lstStyle/>
+          <a:p>
+            <a:pPr algn="ctr"/>
+          </a:p>
+        </p:txBody>
+      </p:sp>
+      <p:sp>
+        <p:nvSpPr>
+          <p:cNvPr id="10" name="TextBox 9"/>
+          <p:cNvSpPr txBox="1"/>
+          <p:nvPr/>
+        </p:nvSpPr>
+        <p:spPr>
+          <a:xfrm>
+            <a:off x="502920" y="6446520"/>
+            <a:ext cx="8229600" cy="320040"/>
+          </a:xfrm>
+          <a:prstGeom prst="rect">
+            <a:avLst/>
+          </a:prstGeom>
+          <a:noFill/>
+        </p:spPr>
+        <p:txBody>
+          <a:bodyPr wrap="none">
+            <a:spAutoFit/>
+          </a:bodyPr>
+          <a:lstStyle/>
+          <a:p>
+            <a:r>
+              <a:rPr sz="1000" b="0" i="0">
+                <a:solidFill>
+                  <a:srgbClr val="8A97A5"/>
+                </a:solidFill>
+                <a:latin typeface="Segoe UI"/>
+              </a:rPr>
+              <a:t>BistroSaaS  |  Restaurant Management System</a:t>
+            </a:r>
+          </a:p>
+        </p:txBody>
+      </p:sp>
+      <p:sp>
+        <p:nvSpPr>
+          <p:cNvPr id="11" name="TextBox 10"/>
+          <p:cNvSpPr txBox="1"/>
+          <p:nvPr/>
+        </p:nvSpPr>
+        <p:spPr>
+          <a:xfrm>
+            <a:off x="10607040" y="6446520"/>
+            <a:ext cx="1097280" cy="320040"/>
+          </a:xfrm>
+          <a:prstGeom prst="rect">
+            <a:avLst/>
+          </a:prstGeom>
+          <a:noFill/>
+        </p:spPr>
+        <p:txBody>
+          <a:bodyPr wrap="none">
+            <a:spAutoFit/>
+          </a:bodyPr>
+          <a:lstStyle/>
+          <a:p>
+            <a:pPr algn="r"/>
+            <a:r>
+              <a:rPr sz="1000" b="1" i="0">
+                <a:solidFill>
+                  <a:srgbClr val="8A97A5"/>
+                </a:solidFill>
+                <a:latin typeface="Segoe UI"/>
+              </a:rPr>
+              <a:t>31</a:t>
+            </a:r>
+          </a:p>
+        </p:txBody>
+      </p:sp>
+    </p:spTree>
+  </p:cSld>
+  <p:clrMapOvr>
+    <a:masterClrMapping/>
+  </p:clrMapOvr>
+</p:sld>
+</file>
+
+<file path=ppt/slides/slide32.xml><?xml version="1.0" encoding="utf-8"?>
+<p:sld xmlns:a="http://schemas.openxmlformats.org/drawingml/2006/main" xmlns:p="http://schemas.openxmlformats.org/presentationml/2006/main" xmlns:r="http://schemas.openxmlformats.org/officeDocument/2006/relationships">
+  <p:cSld>
+    <p:bg>
+      <p:bgPr>
+        <a:solidFill>
+          <a:srgbClr val="1E2A38"/>
+        </a:solidFill>
+        <a:effectLst/>
+      </p:bgPr>
+    </p:bg>
+    <p:spTree>
+      <p:nvGrpSpPr>
+        <p:cNvPr id="1" name=""/>
+        <p:cNvGrpSpPr/>
+        <p:nvPr/>
+      </p:nvGrpSpPr>
+      <p:grpSpPr/>
+      <p:sp>
+        <p:nvSpPr>
+          <p:cNvPr id="2" name="Rectangle 1"/>
+          <p:cNvSpPr/>
+          <p:nvPr/>
+        </p:nvSpPr>
+        <p:spPr>
+          <a:xfrm>
+            <a:off x="0" y="0"/>
+            <a:ext cx="320040" cy="6858000"/>
+          </a:xfrm>
+          <a:prstGeom prst="rect">
+            <a:avLst/>
+          </a:prstGeom>
+          <a:solidFill>
+            <a:srgbClr val="FF6B35"/>
+          </a:solidFill>
+          <a:ln>
+            <a:noFill/>
+          </a:ln>
+        </p:spPr>
+        <p:style>
+          <a:lnRef idx="1">
+            <a:schemeClr val="accent1"/>
+          </a:lnRef>
+          <a:fillRef idx="3">
+            <a:schemeClr val="accent1"/>
+          </a:fillRef>
+          <a:effectRef idx="2">
+            <a:schemeClr val="accent1"/>
+          </a:effectRef>
+          <a:fontRef idx="minor">
+            <a:schemeClr val="lt1"/>
+          </a:fontRef>
+        </p:style>
+        <p:txBody>
+          <a:bodyPr rtlCol="0" anchor="ctr"/>
+          <a:lstStyle/>
+          <a:p>
+            <a:pPr algn="ctr"/>
+          </a:p>
+        </p:txBody>
+      </p:sp>
+      <p:sp>
+        <p:nvSpPr>
+          <p:cNvPr id="3" name="Oval 2"/>
+          <p:cNvSpPr/>
+          <p:nvPr/>
+        </p:nvSpPr>
+        <p:spPr>
+          <a:xfrm>
+            <a:off x="9509760" y="3931920"/>
+            <a:ext cx="2926080" cy="2926080"/>
+          </a:xfrm>
+          <a:prstGeom prst="ellipse">
+            <a:avLst/>
+          </a:prstGeom>
+          <a:noFill/>
+          <a:ln w="31750">
+            <a:solidFill>
+              <a:srgbClr val="FF6B35"/>
+            </a:solidFill>
+          </a:ln>
+        </p:spPr>
+        <p:style>
+          <a:lnRef idx="1">
+            <a:schemeClr val="accent1"/>
+          </a:lnRef>
+          <a:fillRef idx="3">
+            <a:schemeClr val="accent1"/>
+          </a:fillRef>
+          <a:effectRef idx="2">
+            <a:schemeClr val="accent1"/>
+          </a:effectRef>
+          <a:fontRef idx="minor">
+            <a:schemeClr val="lt1"/>
+          </a:fontRef>
+        </p:style>
+        <p:txBody>
+          <a:bodyPr rtlCol="0" anchor="ctr"/>
+          <a:lstStyle/>
+          <a:p>
+            <a:pPr algn="ctr"/>
+          </a:p>
+        </p:txBody>
+      </p:sp>
+      <p:sp>
+        <p:nvSpPr>
+          <p:cNvPr id="4" name="TextBox 3"/>
+          <p:cNvSpPr txBox="1"/>
+          <p:nvPr/>
+        </p:nvSpPr>
+        <p:spPr>
+          <a:xfrm>
+            <a:off x="822960" y="1371600"/>
+            <a:ext cx="2743200" cy="1097280"/>
+          </a:xfrm>
+          <a:prstGeom prst="rect">
+            <a:avLst/>
+          </a:prstGeom>
+          <a:noFill/>
+        </p:spPr>
+        <p:txBody>
+          <a:bodyPr wrap="none">
+            <a:spAutoFit/>
+          </a:bodyPr>
+          <a:lstStyle/>
+          <a:p>
+            <a:r>
+              <a:rPr sz="6000" b="0" i="0">
+                <a:solidFill>
+                  <a:srgbClr val="FFFFFF"/>
+                </a:solidFill>
+                <a:latin typeface="Segoe UI"/>
+              </a:rPr>
+              <a:t>🍽</a:t>
+            </a:r>
+          </a:p>
+        </p:txBody>
+      </p:sp>
+      <p:sp>
+        <p:nvSpPr>
+          <p:cNvPr id="5" name="TextBox 4"/>
+          <p:cNvSpPr txBox="1"/>
+          <p:nvPr/>
+        </p:nvSpPr>
+        <p:spPr>
+          <a:xfrm>
+            <a:off x="822960" y="2468880"/>
+            <a:ext cx="10058400" cy="1828800"/>
+          </a:xfrm>
+          <a:prstGeom prst="rect">
+            <a:avLst/>
+          </a:prstGeom>
+          <a:noFill/>
+        </p:spPr>
+        <p:txBody>
+          <a:bodyPr wrap="none">
+            <a:spAutoFit/>
+          </a:bodyPr>
+          <a:lstStyle/>
+          <a:p>
+            <a:r>
+              <a:rPr sz="4000" b="1" i="0">
+                <a:solidFill>
+                  <a:srgbClr val="FFFFFF"/>
+                </a:solidFill>
+                <a:latin typeface="Segoe UI"/>
+              </a:rPr>
+              <a:t>Conclusion</a:t>
+            </a:r>
+          </a:p>
+          <a:p>
+            <a:r>
+              <a:rPr sz="3000" b="1" i="0">
+                <a:solidFill>
+                  <a:srgbClr val="FFFFFF"/>
+                </a:solidFill>
+                <a:latin typeface="Segoe UI"/>
+              </a:rPr>
+              <a:t>Thank You!</a:t>
+            </a:r>
+          </a:p>
+        </p:txBody>
+      </p:sp>
+      <p:sp>
+        <p:nvSpPr>
+          <p:cNvPr id="6" name="Rounded Rectangle 5"/>
+          <p:cNvSpPr/>
+          <p:nvPr/>
+        </p:nvSpPr>
+        <p:spPr>
+          <a:xfrm>
+            <a:off x="868680" y="4160520"/>
+            <a:ext cx="2743200" cy="91440"/>
+          </a:xfrm>
+          <a:prstGeom prst="roundRect">
+            <a:avLst/>
+          </a:prstGeom>
+          <a:solidFill>
+            <a:srgbClr val="FF6B35"/>
+          </a:solidFill>
+          <a:ln>
+            <a:noFill/>
+          </a:ln>
+        </p:spPr>
+        <p:style>
+          <a:lnRef idx="1">
+            <a:schemeClr val="accent1"/>
+          </a:lnRef>
+          <a:fillRef idx="3">
+            <a:schemeClr val="accent1"/>
+          </a:fillRef>
+          <a:effectRef idx="2">
+            <a:schemeClr val="accent1"/>
+          </a:effectRef>
+          <a:fontRef idx="minor">
+            <a:schemeClr val="lt1"/>
+          </a:fontRef>
+        </p:style>
+        <p:txBody>
+          <a:bodyPr rtlCol="0" anchor="ctr"/>
+          <a:lstStyle/>
+          <a:p>
+            <a:pPr algn="ctr"/>
+          </a:p>
+        </p:txBody>
+      </p:sp>
+      <p:sp>
+        <p:nvSpPr>
+          <p:cNvPr id="7" name="TextBox 6"/>
+          <p:cNvSpPr txBox="1"/>
+          <p:nvPr/>
+        </p:nvSpPr>
+        <p:spPr>
+          <a:xfrm>
+            <a:off x="822960" y="4389120"/>
+            <a:ext cx="9601200" cy="731520"/>
+          </a:xfrm>
+          <a:prstGeom prst="rect">
+            <a:avLst/>
+          </a:prstGeom>
+          <a:noFill/>
+        </p:spPr>
+        <p:txBody>
+          <a:bodyPr wrap="none">
+            <a:spAutoFit/>
+          </a:bodyPr>
+          <a:lstStyle/>
+          <a:p>
+            <a:r>
+              <a:rPr sz="2200" b="0" i="0">
+                <a:solidFill>
+                  <a:srgbClr val="D7DEE5"/>
+                </a:solidFill>
+                <a:latin typeface="Segoe UI"/>
+              </a:rPr>
+              <a:t>A complete full-stack Django app  -  live demonstration to follow.</a:t>
+            </a:r>
+          </a:p>
+        </p:txBody>
+      </p:sp>
+      <p:sp>
+        <p:nvSpPr>
+          <p:cNvPr id="8" name="Rounded Rectangle 7"/>
+          <p:cNvSpPr/>
+          <p:nvPr/>
+        </p:nvSpPr>
+        <p:spPr>
+          <a:xfrm>
+            <a:off x="868680" y="5212080"/>
+            <a:ext cx="3200400" cy="502920"/>
+          </a:xfrm>
+          <a:prstGeom prst="roundRect">
+            <a:avLst/>
+          </a:prstGeom>
+          <a:solidFill>
+            <a:srgbClr val="FF6B35"/>
+          </a:solidFill>
+          <a:ln>
+            <a:noFill/>
+          </a:ln>
+        </p:spPr>
+        <p:style>
+          <a:lnRef idx="1">
+            <a:schemeClr val="accent1"/>
+          </a:lnRef>
+          <a:fillRef idx="3">
+            <a:schemeClr val="accent1"/>
+          </a:fillRef>
+          <a:effectRef idx="2">
+            <a:schemeClr val="accent1"/>
+          </a:effectRef>
+          <a:fontRef idx="minor">
+            <a:schemeClr val="lt1"/>
+          </a:fontRef>
+        </p:style>
+        <p:txBody>
+          <a:bodyPr rtlCol="0" anchor="ctr" wrap="square"/>
+          <a:lstStyle/>
+          <a:p>
+            <a:pPr algn="ctr"/>
+            <a:r>
+              <a:rPr sz="1600" b="1" i="0">
+                <a:solidFill>
+                  <a:srgbClr val="FFFFFF"/>
+                </a:solidFill>
+                <a:latin typeface="Segoe UI"/>
+              </a:rPr>
+              <a:t>QUESTIONS  &amp;  DEMO</a:t>
             </a:r>
           </a:p>
         </p:txBody>
